--- a/deck/ForesightAI.pptx
+++ b/deck/ForesightAI.pptx
@@ -1734,7 +1734,7 @@
         <p:spPr>
           <a:xfrm>
             <a:off x="822960" y="2788920"/>
-            <a:ext cx="7040880" cy="1097280"/>
+            <a:ext cx="7223760" cy="1097280"/>
           </a:xfrm>
           <a:prstGeom prst="rect">
             <a:avLst/>
@@ -1761,7 +1761,7 @@
                 <a:ea typeface="Calibri" pitchFamily="34" charset="-122"/>
                 <a:cs typeface="Calibri" pitchFamily="34" charset="-120"/>
               </a:rPr>
-              <a:t>Point it at any listed Indian company. Get a live, explainable</a:t>
+              <a:t>Point it at any listed Indian company. Get one explainable 0-100 score</a:t>
             </a:r>
             <a:endParaRPr lang="en-US" sz="1800" dirty="0"/>
           </a:p>
@@ -1781,7 +1781,7 @@
                 <a:ea typeface="Calibri" pitchFamily="34" charset="-122"/>
                 <a:cs typeface="Calibri" pitchFamily="34" charset="-120"/>
               </a:rPr>
-              <a:t>risk read in seconds - the Altman Z-Score fused with market signals:</a:t>
+              <a:t>that fuses the Altman Z-Score with the market signals others read separately:</a:t>
             </a:r>
             <a:endParaRPr lang="en-US" sz="1800" dirty="0"/>
           </a:p>
@@ -1801,7 +1801,7 @@
                 <a:ea typeface="Calibri" pitchFamily="34" charset="-122"/>
                 <a:cs typeface="Calibri" pitchFamily="34" charset="-120"/>
               </a:rPr>
-              <a:t>credit ratings, leadership changes and live news.</a:t>
+              <a:t>credit ratings, leadership, news, hiring and employee sentiment.</a:t>
             </a:r>
             <a:endParaRPr lang="en-US" sz="1800" dirty="0"/>
           </a:p>
@@ -2777,7 +2777,7 @@
                 <a:ea typeface="Calibri" pitchFamily="34" charset="-122"/>
                 <a:cs typeface="Calibri" pitchFamily="34" charset="-120"/>
               </a:rPr>
-              <a:t>SEEN IN HINDSIGHT</a:t>
+              <a:t>THE FORESIGHT FIX</a:t>
             </a:r>
             <a:endParaRPr lang="en-US" sz="1150" dirty="0"/>
           </a:p>
@@ -2816,7 +2816,7 @@
                 <a:ea typeface="Calibri" pitchFamily="34" charset="-122"/>
                 <a:cs typeface="Calibri" pitchFamily="34" charset="-120"/>
               </a:rPr>
-              <a:t>Reliance Communications</a:t>
+              <a:t>Everything public, in one score</a:t>
             </a:r>
             <a:endParaRPr lang="en-US" sz="1900" dirty="0"/>
           </a:p>
@@ -2830,8 +2830,8 @@
         </p:nvSpPr>
         <p:spPr>
           <a:xfrm>
-            <a:off x="7360920" y="3063240"/>
-            <a:ext cx="1463040" cy="1005840"/>
+            <a:off x="7360920" y="3035808"/>
+            <a:ext cx="1280160" cy="1005840"/>
           </a:xfrm>
           <a:prstGeom prst="rect">
             <a:avLst/>
@@ -2855,7 +2855,7 @@
                 <a:ea typeface="Calibri" pitchFamily="34" charset="-122"/>
                 <a:cs typeface="Calibri" pitchFamily="34" charset="-120"/>
               </a:rPr>
-              <a:t>3</a:t>
+              <a:t>6</a:t>
             </a:r>
             <a:endParaRPr lang="en-US" sz="7400" dirty="0"/>
           </a:p>
@@ -2869,8 +2869,8 @@
         </p:nvSpPr>
         <p:spPr>
           <a:xfrm>
-            <a:off x="8778240" y="3200400"/>
-            <a:ext cx="2423160" cy="914400"/>
+            <a:off x="8641080" y="3200400"/>
+            <a:ext cx="2560320" cy="914400"/>
           </a:xfrm>
           <a:prstGeom prst="rect">
             <a:avLst/>
@@ -2897,7 +2897,7 @@
                 <a:ea typeface="Calibri" pitchFamily="34" charset="-122"/>
                 <a:cs typeface="Calibri" pitchFamily="34" charset="-120"/>
               </a:rPr>
-              <a:t>years</a:t>
+              <a:t>signals</a:t>
             </a:r>
             <a:pPr indent="0" marL="0">
               <a:lnSpc>
@@ -2923,7 +2923,7 @@
                 <a:ea typeface="Calibri" pitchFamily="34" charset="-122"/>
                 <a:cs typeface="Calibri" pitchFamily="34" charset="-120"/>
               </a:rPr>
-              <a:t>of warning before</a:t>
+              <a:t>fused into one</a:t>
             </a:r>
             <a:endParaRPr lang="en-US" sz="2000" dirty="0"/>
           </a:p>
@@ -2943,7 +2943,7 @@
                 <a:ea typeface="Calibri" pitchFamily="34" charset="-122"/>
                 <a:cs typeface="Calibri" pitchFamily="34" charset="-120"/>
               </a:rPr>
-              <a:t>insolvency</a:t>
+              <a:t>0-100 read</a:t>
             </a:r>
             <a:endParaRPr lang="en-US" sz="2000" dirty="0"/>
           </a:p>
@@ -2951,206 +2951,14 @@
       </p:sp>
       <p:sp>
         <p:nvSpPr>
-          <p:cNvPr id="24" name="Shape 19"/>
-          <p:cNvSpPr/>
-          <p:nvPr/>
-        </p:nvSpPr>
-        <p:spPr>
-          <a:xfrm>
-            <a:off x="7452360" y="4526280"/>
-            <a:ext cx="777240" cy="182880"/>
-          </a:xfrm>
-          <a:prstGeom prst="line">
-            <a:avLst/>
-          </a:prstGeom>
-          <a:noFill/>
-          <a:ln w="31750">
-            <a:solidFill>
-              <a:srgbClr val="EF4444"/>
-            </a:solidFill>
-            <a:prstDash val="solid"/>
-          </a:ln>
-        </p:spPr>
-      </p:sp>
-      <p:sp>
-        <p:nvSpPr>
-          <p:cNvPr id="25" name="Shape 20"/>
-          <p:cNvSpPr/>
-          <p:nvPr/>
-        </p:nvSpPr>
-        <p:spPr>
-          <a:xfrm>
-            <a:off x="8229600" y="4709160"/>
-            <a:ext cx="777240" cy="182880"/>
-          </a:xfrm>
-          <a:prstGeom prst="line">
-            <a:avLst/>
-          </a:prstGeom>
-          <a:noFill/>
-          <a:ln w="31750">
-            <a:solidFill>
-              <a:srgbClr val="EF4444"/>
-            </a:solidFill>
-            <a:prstDash val="solid"/>
-          </a:ln>
-        </p:spPr>
-      </p:sp>
-      <p:sp>
-        <p:nvSpPr>
-          <p:cNvPr id="26" name="Shape 21"/>
-          <p:cNvSpPr/>
-          <p:nvPr/>
-        </p:nvSpPr>
-        <p:spPr>
-          <a:xfrm>
-            <a:off x="9006840" y="4892040"/>
-            <a:ext cx="777240" cy="320040"/>
-          </a:xfrm>
-          <a:prstGeom prst="line">
-            <a:avLst/>
-          </a:prstGeom>
-          <a:noFill/>
-          <a:ln w="31750">
-            <a:solidFill>
-              <a:srgbClr val="EF4444"/>
-            </a:solidFill>
-            <a:prstDash val="solid"/>
-          </a:ln>
-        </p:spPr>
-      </p:sp>
-      <p:sp>
-        <p:nvSpPr>
-          <p:cNvPr id="27" name="Shape 22"/>
-          <p:cNvSpPr/>
-          <p:nvPr/>
-        </p:nvSpPr>
-        <p:spPr>
-          <a:xfrm>
-            <a:off x="9784080" y="5212080"/>
-            <a:ext cx="868680" cy="91440"/>
-          </a:xfrm>
-          <a:prstGeom prst="line">
-            <a:avLst/>
-          </a:prstGeom>
-          <a:noFill/>
-          <a:ln w="31750">
-            <a:solidFill>
-              <a:srgbClr val="EF4444"/>
-            </a:solidFill>
-            <a:prstDash val="solid"/>
-          </a:ln>
-        </p:spPr>
-      </p:sp>
-      <p:sp>
-        <p:nvSpPr>
-          <p:cNvPr id="28" name="Shape 23"/>
-          <p:cNvSpPr/>
-          <p:nvPr/>
-        </p:nvSpPr>
-        <p:spPr>
-          <a:xfrm>
-            <a:off x="7402068" y="4475988"/>
-            <a:ext cx="100584" cy="100584"/>
-          </a:xfrm>
-          <a:prstGeom prst="ellipse">
-            <a:avLst/>
-          </a:prstGeom>
-          <a:solidFill>
-            <a:srgbClr val="EF4444"/>
-          </a:solidFill>
-          <a:ln/>
-        </p:spPr>
-      </p:sp>
-      <p:sp>
-        <p:nvSpPr>
-          <p:cNvPr id="29" name="Shape 24"/>
-          <p:cNvSpPr/>
-          <p:nvPr/>
-        </p:nvSpPr>
-        <p:spPr>
-          <a:xfrm>
-            <a:off x="8179308" y="4658868"/>
-            <a:ext cx="100584" cy="100584"/>
-          </a:xfrm>
-          <a:prstGeom prst="ellipse">
-            <a:avLst/>
-          </a:prstGeom>
-          <a:solidFill>
-            <a:srgbClr val="F59E0B"/>
-          </a:solidFill>
-          <a:ln/>
-        </p:spPr>
-      </p:sp>
-      <p:sp>
-        <p:nvSpPr>
-          <p:cNvPr id="30" name="Shape 25"/>
-          <p:cNvSpPr/>
-          <p:nvPr/>
-        </p:nvSpPr>
-        <p:spPr>
-          <a:xfrm>
-            <a:off x="8956548" y="4841748"/>
-            <a:ext cx="100584" cy="100584"/>
-          </a:xfrm>
-          <a:prstGeom prst="ellipse">
-            <a:avLst/>
-          </a:prstGeom>
-          <a:solidFill>
-            <a:srgbClr val="EF4444"/>
-          </a:solidFill>
-          <a:ln/>
-        </p:spPr>
-      </p:sp>
-      <p:sp>
-        <p:nvSpPr>
-          <p:cNvPr id="31" name="Shape 26"/>
-          <p:cNvSpPr/>
-          <p:nvPr/>
-        </p:nvSpPr>
-        <p:spPr>
-          <a:xfrm>
-            <a:off x="9733788" y="5161788"/>
-            <a:ext cx="100584" cy="100584"/>
-          </a:xfrm>
-          <a:prstGeom prst="ellipse">
-            <a:avLst/>
-          </a:prstGeom>
-          <a:solidFill>
-            <a:srgbClr val="EF4444"/>
-          </a:solidFill>
-          <a:ln/>
-        </p:spPr>
-      </p:sp>
-      <p:sp>
-        <p:nvSpPr>
-          <p:cNvPr id="32" name="Shape 27"/>
-          <p:cNvSpPr/>
-          <p:nvPr/>
-        </p:nvSpPr>
-        <p:spPr>
-          <a:xfrm>
-            <a:off x="10602468" y="5253228"/>
-            <a:ext cx="100584" cy="100584"/>
-          </a:xfrm>
-          <a:prstGeom prst="ellipse">
-            <a:avLst/>
-          </a:prstGeom>
-          <a:solidFill>
-            <a:srgbClr val="EF4444"/>
-          </a:solidFill>
-          <a:ln/>
-        </p:spPr>
-      </p:sp>
-      <p:sp>
-        <p:nvSpPr>
-          <p:cNvPr id="33" name="Text 28"/>
-          <p:cNvSpPr/>
-          <p:nvPr/>
-        </p:nvSpPr>
-        <p:spPr>
-          <a:xfrm>
-            <a:off x="7406640" y="5504688"/>
-            <a:ext cx="3703320" cy="320040"/>
+          <p:cNvPr id="24" name="Text 19"/>
+          <p:cNvSpPr/>
+          <p:nvPr/>
+        </p:nvSpPr>
+        <p:spPr>
+          <a:xfrm>
+            <a:off x="7406640" y="4526280"/>
+            <a:ext cx="3703320" cy="640080"/>
           </a:xfrm>
           <a:prstGeom prst="rect">
             <a:avLst/>
@@ -3163,6 +2971,48 @@
           <a:lstStyle/>
           <a:p>
             <a:pPr indent="0" marL="0">
+              <a:lnSpc>
+                <a:spcPct val="110000"/>
+              </a:lnSpc>
+              <a:buNone/>
+            </a:pPr>
+            <a:r>
+              <a:rPr lang="en-US" sz="1250" dirty="0">
+                <a:solidFill>
+                  <a:srgbClr val="FFFFFF"/>
+                </a:solidFill>
+                <a:latin typeface="Calibri" pitchFamily="34" charset="0"/>
+                <a:ea typeface="Calibri" pitchFamily="34" charset="-122"/>
+                <a:cs typeface="Calibri" pitchFamily="34" charset="-120"/>
+              </a:rPr>
+              <a:t>Financials  .  credit ratings  .  leadership  .  news  .  hiring  .  employee sentiment</a:t>
+            </a:r>
+            <a:endParaRPr lang="en-US" sz="1250" dirty="0"/>
+          </a:p>
+        </p:txBody>
+      </p:sp>
+      <p:sp>
+        <p:nvSpPr>
+          <p:cNvPr id="25" name="Text 20"/>
+          <p:cNvSpPr/>
+          <p:nvPr/>
+        </p:nvSpPr>
+        <p:spPr>
+          <a:xfrm>
+            <a:off x="7406640" y="5440680"/>
+            <a:ext cx="3703320" cy="365760"/>
+          </a:xfrm>
+          <a:prstGeom prst="rect">
+            <a:avLst/>
+          </a:prstGeom>
+          <a:noFill/>
+          <a:ln/>
+        </p:spPr>
+        <p:txBody>
+          <a:bodyPr wrap="square" rtlCol="0" anchor="ctr"/>
+          <a:lstStyle/>
+          <a:p>
+            <a:pPr indent="0" marL="0">
               <a:buNone/>
             </a:pPr>
             <a:r>
@@ -3174,7 +3024,7 @@
                 <a:ea typeface="Calibri" pitchFamily="34" charset="-122"/>
                 <a:cs typeface="Calibri" pitchFamily="34" charset="-120"/>
               </a:rPr>
-              <a:t>Altman Z entered distress in FY2016. Filed for insolvency in 2019.</a:t>
+              <a:t>Read together and explained - not scattered across ten browser tabs.</a:t>
             </a:r>
             <a:endParaRPr lang="en-US" sz="1150" dirty="0"/>
           </a:p>
@@ -4500,7 +4350,7 @@
                 <a:ea typeface="Calibri" pitchFamily="34" charset="-122"/>
                 <a:cs typeface="Calibri" pitchFamily="34" charset="-120"/>
               </a:rPr>
-              <a:t>Would it have warned you? </a:t>
+              <a:t>One </a:t>
             </a:r>
             <a:pPr indent="0" marL="0">
               <a:buNone/>
@@ -4514,7 +4364,21 @@
                 <a:ea typeface="Calibri" pitchFamily="34" charset="-122"/>
                 <a:cs typeface="Calibri" pitchFamily="34" charset="-120"/>
               </a:rPr>
-              <a:t>Years early.</a:t>
+              <a:t>comprehensive</a:t>
+            </a:r>
+            <a:pPr indent="0" marL="0">
+              <a:buNone/>
+            </a:pPr>
+            <a:r>
+              <a:rPr lang="en-US" sz="3300" b="1" dirty="0">
+                <a:solidFill>
+                  <a:srgbClr val="FFFFFF"/>
+                </a:solidFill>
+                <a:latin typeface="Calibri" pitchFamily="34" charset="0"/>
+                <a:ea typeface="Calibri" pitchFamily="34" charset="-122"/>
+                <a:cs typeface="Calibri" pitchFamily="34" charset="-120"/>
+              </a:rPr>
+              <a:t> score, on real history</a:t>
             </a:r>
             <a:endParaRPr lang="en-US" sz="3300" dirty="0"/>
           </a:p>
@@ -4553,7 +4417,7 @@
                 <a:ea typeface="Calibri" pitchFamily="34" charset="-122"/>
                 <a:cs typeface="Calibri" pitchFamily="34" charset="-120"/>
               </a:rPr>
-              <a:t>Five real collapses, replayed - the Altman Z merged with the signals that led the accounts.</a:t>
+              <a:t>Altman reads the annual filings. ForesightAI reads the same financials plus the credit ratings, leadership, news and the market.</a:t>
             </a:r>
             <a:endParaRPr lang="en-US" sz="1550" dirty="0"/>
           </a:p>
@@ -4568,7 +4432,7 @@
         <p:spPr>
           <a:xfrm>
             <a:off x="777240" y="1874520"/>
-            <a:ext cx="4023360" cy="731520"/>
+            <a:ext cx="4023360" cy="685800"/>
           </a:xfrm>
           <a:prstGeom prst="rect">
             <a:avLst/>
@@ -4584,7 +4448,7 @@
               <a:buNone/>
             </a:pPr>
             <a:r>
-              <a:rPr lang="en-US" sz="4400" b="1" dirty="0">
+              <a:rPr lang="en-US" sz="4000" b="1" dirty="0">
                 <a:solidFill>
                   <a:srgbClr val="F59E0B"/>
                 </a:solidFill>
@@ -4592,9 +4456,9 @@
                 <a:ea typeface="Calibri" pitchFamily="34" charset="-122"/>
                 <a:cs typeface="Calibri" pitchFamily="34" charset="-120"/>
               </a:rPr>
-              <a:t>3 years</a:t>
-            </a:r>
-            <a:endParaRPr lang="en-US" sz="4400" dirty="0"/>
+              <a:t>6 inputs</a:t>
+            </a:r>
+            <a:endParaRPr lang="en-US" sz="4000" dirty="0"/>
           </a:p>
         </p:txBody>
       </p:sp>
@@ -4606,8 +4470,8 @@
         </p:nvSpPr>
         <p:spPr>
           <a:xfrm>
-            <a:off x="795528" y="2606040"/>
-            <a:ext cx="3931920" cy="502920"/>
+            <a:off x="795528" y="2578608"/>
+            <a:ext cx="3977640" cy="822960"/>
           </a:xfrm>
           <a:prstGeom prst="rect">
             <a:avLst/>
@@ -4620,10 +4484,13 @@
           <a:lstStyle/>
           <a:p>
             <a:pPr indent="0" marL="0">
-              <a:buNone/>
-            </a:pPr>
-            <a:r>
-              <a:rPr lang="en-US" sz="1550" b="1" dirty="0">
+              <a:lnSpc>
+                <a:spcPct val="110000"/>
+              </a:lnSpc>
+              <a:buNone/>
+            </a:pPr>
+            <a:r>
+              <a:rPr lang="en-US" sz="1300" dirty="0">
                 <a:solidFill>
                   <a:srgbClr val="FFFFFF"/>
                 </a:solidFill>
@@ -4631,9 +4498,9 @@
                 <a:ea typeface="Calibri" pitchFamily="34" charset="-122"/>
                 <a:cs typeface="Calibri" pitchFamily="34" charset="-120"/>
               </a:rPr>
-              <a:t>of early warning on Reliance Communications.</a:t>
-            </a:r>
-            <a:endParaRPr lang="en-US" sz="1550" dirty="0"/>
+              <a:t>financials, credit ratings, leadership, news, hiring and employee sentiment - fused into one 0-100 score.</a:t>
+            </a:r>
+            <a:endParaRPr lang="en-US" sz="1300" dirty="0"/>
           </a:p>
         </p:txBody>
       </p:sp>
@@ -4645,8 +4512,8 @@
         </p:nvSpPr>
         <p:spPr>
           <a:xfrm>
-            <a:off x="795528" y="3108960"/>
-            <a:ext cx="3977640" cy="1234440"/>
+            <a:off x="795528" y="3401568"/>
+            <a:ext cx="3977640" cy="1051560"/>
           </a:xfrm>
           <a:prstGeom prst="rect">
             <a:avLst/>
@@ -4665,7 +4532,7 @@
               <a:buNone/>
             </a:pPr>
             <a:r>
-              <a:rPr lang="en-US" sz="1250" dirty="0">
+              <a:rPr lang="en-US" sz="1200" dirty="0">
                 <a:solidFill>
                   <a:srgbClr val="94A3B8"/>
                 </a:solidFill>
@@ -4673,9 +4540,9 @@
                 <a:ea typeface="Calibri" pitchFamily="34" charset="-122"/>
                 <a:cs typeface="Calibri" pitchFamily="34" charset="-120"/>
               </a:rPr>
-              <a:t>Altman Z slid into distress by FY2016 - and the rating cut, the Ericsson insolvency plea and the news cascade all pointed the same way, three years before the 2019 filing.</a:t>
-            </a:r>
-            <a:endParaRPr lang="en-US" sz="1250" dirty="0"/>
+              <a:t>Altman is the financial leg. ForesightAI adds the market signals, so the score reflects the full public picture - and moves the day any of them do.</a:t>
+            </a:r>
+            <a:endParaRPr lang="en-US" sz="1200" dirty="0"/>
           </a:p>
         </p:txBody>
       </p:sp>
@@ -4687,12 +4554,12 @@
         </p:nvSpPr>
         <p:spPr>
           <a:xfrm>
-            <a:off x="777240" y="4526280"/>
-            <a:ext cx="3977640" cy="1572768"/>
+            <a:off x="777240" y="4553712"/>
+            <a:ext cx="3977640" cy="1554480"/>
           </a:xfrm>
           <a:prstGeom prst="roundRect">
             <a:avLst>
-              <a:gd name="adj" fmla="val 5233"/>
+              <a:gd name="adj" fmla="val 5294"/>
             </a:avLst>
           </a:prstGeom>
           <a:solidFill>
@@ -4714,7 +4581,7 @@
         </p:nvSpPr>
         <p:spPr>
           <a:xfrm>
-            <a:off x="987552" y="4645152"/>
+            <a:off x="987552" y="4663440"/>
             <a:ext cx="3566160" cy="256032"/>
           </a:xfrm>
           <a:prstGeom prst="rect">
@@ -4739,7 +4606,7 @@
                 <a:ea typeface="Calibri" pitchFamily="34" charset="-122"/>
                 <a:cs typeface="Calibri" pitchFamily="34" charset="-120"/>
               </a:rPr>
-              <a:t>FIVE CASES, FIVE DYNAMICS</a:t>
+              <a:t>FIVE CASES, FIVE SECTORS</a:t>
             </a:r>
             <a:endParaRPr lang="en-US" sz="1050" dirty="0"/>
           </a:p>
@@ -4753,7 +4620,7 @@
         </p:nvSpPr>
         <p:spPr>
           <a:xfrm>
-            <a:off x="987552" y="4901184"/>
+            <a:off x="987552" y="4919472"/>
             <a:ext cx="3566160" cy="1133856"/>
           </a:xfrm>
           <a:prstGeom prst="rect">
@@ -4781,7 +4648,7 @@
                 <a:ea typeface="Calibri" pitchFamily="34" charset="-122"/>
                 <a:cs typeface="Calibri" pitchFamily="34" charset="-120"/>
               </a:rPr>
-              <a:t>RCom &amp; Suzlon </a:t>
+              <a:t>Unitech </a:t>
             </a:r>
             <a:pPr indent="0" marL="0">
               <a:lnSpc>
@@ -4798,7 +4665,7 @@
                 <a:ea typeface="Calibri" pitchFamily="34" charset="-122"/>
                 <a:cs typeface="Calibri" pitchFamily="34" charset="-120"/>
               </a:rPr>
-              <a:t>- Altman leads (Suzlon even recovers).  </a:t>
+              <a:t>(real estate), </a:t>
             </a:r>
             <a:pPr indent="0" marL="0">
               <a:lnSpc>
@@ -4815,7 +4682,7 @@
                 <a:ea typeface="Calibri" pitchFamily="34" charset="-122"/>
                 <a:cs typeface="Calibri" pitchFamily="34" charset="-120"/>
               </a:rPr>
-              <a:t>DHFL &amp; IL&amp;FS </a:t>
+              <a:t>Future Retail </a:t>
             </a:r>
             <a:pPr indent="0" marL="0">
               <a:lnSpc>
@@ -4832,7 +4699,7 @@
                 <a:ea typeface="Calibri" pitchFamily="34" charset="-122"/>
                 <a:cs typeface="Calibri" pitchFamily="34" charset="-120"/>
               </a:rPr>
-              <a:t>- NBFCs where Altman is blind; IL&amp;FS was rated AAA and only the signals led.  </a:t>
+              <a:t>(retail), </a:t>
             </a:r>
             <a:pPr indent="0" marL="0">
               <a:lnSpc>
@@ -4849,7 +4716,7 @@
                 <a:ea typeface="Calibri" pitchFamily="34" charset="-122"/>
                 <a:cs typeface="Calibri" pitchFamily="34" charset="-120"/>
               </a:rPr>
-              <a:t>Manpasand </a:t>
+              <a:t>Reliance Communications </a:t>
             </a:r>
             <a:pPr indent="0" marL="0">
               <a:lnSpc>
@@ -4866,7 +4733,75 @@
                 <a:ea typeface="Calibri" pitchFamily="34" charset="-122"/>
                 <a:cs typeface="Calibri" pitchFamily="34" charset="-120"/>
               </a:rPr>
-              <a:t>- an auditor exit, 12 months early.</a:t>
+              <a:t>(telecom), </a:t>
+            </a:r>
+            <a:pPr indent="0" marL="0">
+              <a:lnSpc>
+                <a:spcPct val="103000"/>
+              </a:lnSpc>
+              <a:buNone/>
+            </a:pPr>
+            <a:r>
+              <a:rPr lang="en-US" sz="1050" b="1" dirty="0">
+                <a:solidFill>
+                  <a:srgbClr val="FFFFFF"/>
+                </a:solidFill>
+                <a:latin typeface="Calibri" pitchFamily="34" charset="0"/>
+                <a:ea typeface="Calibri" pitchFamily="34" charset="-122"/>
+                <a:cs typeface="Calibri" pitchFamily="34" charset="-120"/>
+              </a:rPr>
+              <a:t>Jaiprakash Associates </a:t>
+            </a:r>
+            <a:pPr indent="0" marL="0">
+              <a:lnSpc>
+                <a:spcPct val="103000"/>
+              </a:lnSpc>
+              <a:buNone/>
+            </a:pPr>
+            <a:r>
+              <a:rPr lang="en-US" sz="1050" dirty="0">
+                <a:solidFill>
+                  <a:srgbClr val="94A3B8"/>
+                </a:solidFill>
+                <a:latin typeface="Calibri" pitchFamily="34" charset="0"/>
+                <a:ea typeface="Calibri" pitchFamily="34" charset="-122"/>
+                <a:cs typeface="Calibri" pitchFamily="34" charset="-120"/>
+              </a:rPr>
+              <a:t>(infrastructure), </a:t>
+            </a:r>
+            <a:pPr indent="0" marL="0">
+              <a:lnSpc>
+                <a:spcPct val="103000"/>
+              </a:lnSpc>
+              <a:buNone/>
+            </a:pPr>
+            <a:r>
+              <a:rPr lang="en-US" sz="1050" b="1" dirty="0">
+                <a:solidFill>
+                  <a:srgbClr val="FFFFFF"/>
+                </a:solidFill>
+                <a:latin typeface="Calibri" pitchFamily="34" charset="0"/>
+                <a:ea typeface="Calibri" pitchFamily="34" charset="-122"/>
+                <a:cs typeface="Calibri" pitchFamily="34" charset="-120"/>
+              </a:rPr>
+              <a:t>Suzlon </a:t>
+            </a:r>
+            <a:pPr indent="0" marL="0">
+              <a:lnSpc>
+                <a:spcPct val="103000"/>
+              </a:lnSpc>
+              <a:buNone/>
+            </a:pPr>
+            <a:r>
+              <a:rPr lang="en-US" sz="1050" dirty="0">
+                <a:solidFill>
+                  <a:srgbClr val="94A3B8"/>
+                </a:solidFill>
+                <a:latin typeface="Calibri" pitchFamily="34" charset="0"/>
+                <a:ea typeface="Calibri" pitchFamily="34" charset="-122"/>
+                <a:cs typeface="Calibri" pitchFamily="34" charset="-120"/>
+              </a:rPr>
+              <a:t>(renewables - a recovery). Real financials, real events.</a:t>
             </a:r>
             <a:endParaRPr lang="en-US" sz="1050" dirty="0"/>
           </a:p>
@@ -4874,42 +4809,59 @@
       </p:sp>
       <p:sp>
         <p:nvSpPr>
-          <p:cNvPr id="10" name="Shape 8"/>
+          <p:cNvPr id="10" name="Text 8"/>
+          <p:cNvSpPr/>
+          <p:nvPr/>
+        </p:nvSpPr>
+        <p:spPr>
+          <a:xfrm>
+            <a:off x="5349240" y="1664208"/>
+            <a:ext cx="6263640" cy="228600"/>
+          </a:xfrm>
+          <a:prstGeom prst="rect">
+            <a:avLst/>
+          </a:prstGeom>
+          <a:noFill/>
+          <a:ln/>
+        </p:spPr>
+        <p:txBody>
+          <a:bodyPr wrap="square" rtlCol="0" anchor="ctr"/>
+          <a:lstStyle/>
+          <a:p>
+            <a:pPr indent="0" marL="0">
+              <a:buNone/>
+            </a:pPr>
+            <a:r>
+              <a:rPr lang="en-US" sz="1100" dirty="0">
+                <a:solidFill>
+                  <a:srgbClr val="94A3B8"/>
+                </a:solidFill>
+                <a:latin typeface="Calibri" pitchFamily="34" charset="0"/>
+                <a:ea typeface="Calibri" pitchFamily="34" charset="-122"/>
+                <a:cs typeface="Calibri" pitchFamily="34" charset="-120"/>
+              </a:rPr>
+              <a:t>Example - Reliance Communications (telecom)</a:t>
+            </a:r>
+            <a:endParaRPr lang="en-US" sz="1100" dirty="0"/>
+          </a:p>
+        </p:txBody>
+      </p:sp>
+      <p:sp>
+        <p:nvSpPr>
+          <p:cNvPr id="11" name="Shape 9"/>
           <p:cNvSpPr/>
           <p:nvPr/>
         </p:nvSpPr>
         <p:spPr>
           <a:xfrm>
             <a:off x="5349240" y="1965960"/>
-            <a:ext cx="6263640" cy="243840"/>
+            <a:ext cx="6263640" cy="1207008"/>
           </a:xfrm>
           <a:prstGeom prst="rect">
             <a:avLst/>
           </a:prstGeom>
           <a:solidFill>
-            <a:srgbClr val="22C55E">
-              <a:alpha val="12000"/>
-            </a:srgbClr>
-          </a:solidFill>
-          <a:ln/>
-        </p:spPr>
-      </p:sp>
-      <p:sp>
-        <p:nvSpPr>
-          <p:cNvPr id="11" name="Shape 9"/>
-          <p:cNvSpPr/>
-          <p:nvPr/>
-        </p:nvSpPr>
-        <p:spPr>
-          <a:xfrm>
-            <a:off x="5349240" y="2209800"/>
-            <a:ext cx="6263640" cy="914400"/>
-          </a:xfrm>
-          <a:prstGeom prst="rect">
-            <a:avLst/>
-          </a:prstGeom>
-          <a:solidFill>
-            <a:srgbClr val="94A3B8">
+            <a:srgbClr val="EF4444">
               <a:alpha val="10000"/>
             </a:srgbClr>
           </a:solidFill>
@@ -4924,15 +4876,15 @@
         </p:nvSpPr>
         <p:spPr>
           <a:xfrm>
-            <a:off x="5349240" y="3124200"/>
-            <a:ext cx="6263640" cy="2865120"/>
+            <a:off x="5349240" y="4782312"/>
+            <a:ext cx="6263640" cy="1207008"/>
           </a:xfrm>
           <a:prstGeom prst="rect">
             <a:avLst/>
           </a:prstGeom>
           <a:solidFill>
-            <a:srgbClr val="EF4444">
-              <a:alpha val="16000"/>
+            <a:srgbClr val="22C55E">
+              <a:alpha val="10000"/>
             </a:srgbClr>
           </a:solidFill>
           <a:ln/>
@@ -4940,53 +4892,7 @@
       </p:sp>
       <p:sp>
         <p:nvSpPr>
-          <p:cNvPr id="13" name="Shape 11"/>
-          <p:cNvSpPr/>
-          <p:nvPr/>
-        </p:nvSpPr>
-        <p:spPr>
-          <a:xfrm>
-            <a:off x="5349240" y="2209800"/>
-            <a:ext cx="6263640" cy="914"/>
-          </a:xfrm>
-          <a:prstGeom prst="line">
-            <a:avLst/>
-          </a:prstGeom>
-          <a:noFill/>
-          <a:ln w="12700">
-            <a:solidFill>
-              <a:srgbClr val="22C55E"/>
-            </a:solidFill>
-            <a:prstDash val="solid"/>
-          </a:ln>
-        </p:spPr>
-      </p:sp>
-      <p:sp>
-        <p:nvSpPr>
-          <p:cNvPr id="14" name="Shape 12"/>
-          <p:cNvSpPr/>
-          <p:nvPr/>
-        </p:nvSpPr>
-        <p:spPr>
-          <a:xfrm>
-            <a:off x="5349240" y="3124200"/>
-            <a:ext cx="6263640" cy="914"/>
-          </a:xfrm>
-          <a:prstGeom prst="line">
-            <a:avLst/>
-          </a:prstGeom>
-          <a:noFill/>
-          <a:ln w="12700">
-            <a:solidFill>
-              <a:srgbClr val="EF4444"/>
-            </a:solidFill>
-            <a:prstDash val="solid"/>
-          </a:ln>
-        </p:spPr>
-      </p:sp>
-      <p:sp>
-        <p:nvSpPr>
-          <p:cNvPr id="15" name="Text 13"/>
+          <p:cNvPr id="13" name="Text 11"/>
           <p:cNvSpPr/>
           <p:nvPr/>
         </p:nvSpPr>
@@ -5005,19 +4911,58 @@
           <a:bodyPr wrap="square" rtlCol="0" anchor="ctr"/>
           <a:lstStyle/>
           <a:p>
-            <a:pPr algn="l" indent="0" marL="0">
+            <a:pPr indent="0" marL="0">
               <a:buNone/>
             </a:pPr>
             <a:r>
               <a:rPr lang="en-US" sz="1000" b="1" dirty="0">
                 <a:solidFill>
+                  <a:srgbClr val="EF4444"/>
+                </a:solidFill>
+                <a:latin typeface="Calibri" pitchFamily="34" charset="0"/>
+                <a:ea typeface="Calibri" pitchFamily="34" charset="-122"/>
+                <a:cs typeface="Calibri" pitchFamily="34" charset="-120"/>
+              </a:rPr>
+              <a:t>HIGH RISK</a:t>
+            </a:r>
+            <a:endParaRPr lang="en-US" sz="1000" dirty="0"/>
+          </a:p>
+        </p:txBody>
+      </p:sp>
+      <p:sp>
+        <p:nvSpPr>
+          <p:cNvPr id="14" name="Text 12"/>
+          <p:cNvSpPr/>
+          <p:nvPr/>
+        </p:nvSpPr>
+        <p:spPr>
+          <a:xfrm>
+            <a:off x="5458968" y="5733288"/>
+            <a:ext cx="1828800" cy="228600"/>
+          </a:xfrm>
+          <a:prstGeom prst="rect">
+            <a:avLst/>
+          </a:prstGeom>
+          <a:noFill/>
+          <a:ln/>
+        </p:spPr>
+        <p:txBody>
+          <a:bodyPr wrap="square" rtlCol="0" anchor="ctr"/>
+          <a:lstStyle/>
+          <a:p>
+            <a:pPr indent="0" marL="0">
+              <a:buNone/>
+            </a:pPr>
+            <a:r>
+              <a:rPr lang="en-US" sz="1000" b="1" dirty="0">
+                <a:solidFill>
                   <a:srgbClr val="22C55E"/>
                 </a:solidFill>
                 <a:latin typeface="Calibri" pitchFamily="34" charset="0"/>
                 <a:ea typeface="Calibri" pitchFamily="34" charset="-122"/>
                 <a:cs typeface="Calibri" pitchFamily="34" charset="-120"/>
               </a:rPr>
-              <a:t>SAFE  Z'' &gt; 2.6</a:t>
+              <a:t>HEALTHY</a:t>
             </a:r>
             <a:endParaRPr lang="en-US" sz="1000" dirty="0"/>
           </a:p>
@@ -5025,46 +4970,7 @@
       </p:sp>
       <p:sp>
         <p:nvSpPr>
-          <p:cNvPr id="16" name="Text 14"/>
-          <p:cNvSpPr/>
-          <p:nvPr/>
-        </p:nvSpPr>
-        <p:spPr>
-          <a:xfrm>
-            <a:off x="5458968" y="3179064"/>
-            <a:ext cx="1828800" cy="228600"/>
-          </a:xfrm>
-          <a:prstGeom prst="rect">
-            <a:avLst/>
-          </a:prstGeom>
-          <a:noFill/>
-          <a:ln/>
-        </p:spPr>
-        <p:txBody>
-          <a:bodyPr wrap="square" rtlCol="0" anchor="ctr"/>
-          <a:lstStyle/>
-          <a:p>
-            <a:pPr algn="l" indent="0" marL="0">
-              <a:buNone/>
-            </a:pPr>
-            <a:r>
-              <a:rPr lang="en-US" sz="1000" b="1" dirty="0">
-                <a:solidFill>
-                  <a:srgbClr val="EF4444"/>
-                </a:solidFill>
-                <a:latin typeface="Calibri" pitchFamily="34" charset="0"/>
-                <a:ea typeface="Calibri" pitchFamily="34" charset="-122"/>
-                <a:cs typeface="Calibri" pitchFamily="34" charset="-120"/>
-              </a:rPr>
-              <a:t>DISTRESS  Z'' &lt; 1.1</a:t>
-            </a:r>
-            <a:endParaRPr lang="en-US" sz="1000" dirty="0"/>
-          </a:p>
-        </p:txBody>
-      </p:sp>
-      <p:sp>
-        <p:nvSpPr>
-          <p:cNvPr id="17" name="Shape 15"/>
+          <p:cNvPr id="15" name="Shape 13"/>
           <p:cNvSpPr/>
           <p:nvPr/>
         </p:nvSpPr>
@@ -5087,7 +4993,7 @@
       </p:sp>
       <p:sp>
         <p:nvSpPr>
-          <p:cNvPr id="18" name="Shape 16"/>
+          <p:cNvPr id="16" name="Shape 14"/>
           <p:cNvSpPr/>
           <p:nvPr/>
         </p:nvSpPr>
@@ -5100,7 +5006,631 @@
             <a:avLst/>
           </a:prstGeom>
           <a:noFill/>
+          <a:ln w="15240">
+            <a:solidFill>
+              <a:srgbClr val="94A3B8"/>
+            </a:solidFill>
+            <a:prstDash val="solid"/>
+          </a:ln>
+        </p:spPr>
+      </p:sp>
+      <p:sp>
+        <p:nvSpPr>
+          <p:cNvPr id="17" name="Shape 15"/>
+          <p:cNvSpPr/>
+          <p:nvPr/>
+        </p:nvSpPr>
+        <p:spPr>
+          <a:xfrm>
+            <a:off x="11612880" y="2221992"/>
+            <a:ext cx="914" cy="128016"/>
+          </a:xfrm>
+          <a:prstGeom prst="line">
+            <a:avLst/>
+          </a:prstGeom>
+          <a:noFill/>
+          <a:ln w="15240">
+            <a:solidFill>
+              <a:srgbClr val="94A3B8"/>
+            </a:solidFill>
+            <a:prstDash val="solid"/>
+          </a:ln>
+        </p:spPr>
+      </p:sp>
+      <p:sp>
+        <p:nvSpPr>
+          <p:cNvPr id="18" name="Shape 16"/>
+          <p:cNvSpPr/>
+          <p:nvPr/>
+        </p:nvSpPr>
+        <p:spPr>
+          <a:xfrm>
+            <a:off x="11612880" y="2478024"/>
+            <a:ext cx="914" cy="128016"/>
+          </a:xfrm>
+          <a:prstGeom prst="line">
+            <a:avLst/>
+          </a:prstGeom>
+          <a:noFill/>
+          <a:ln w="15240">
+            <a:solidFill>
+              <a:srgbClr val="94A3B8"/>
+            </a:solidFill>
+            <a:prstDash val="solid"/>
+          </a:ln>
+        </p:spPr>
+      </p:sp>
+      <p:sp>
+        <p:nvSpPr>
+          <p:cNvPr id="19" name="Shape 17"/>
+          <p:cNvSpPr/>
+          <p:nvPr/>
+        </p:nvSpPr>
+        <p:spPr>
+          <a:xfrm>
+            <a:off x="11612880" y="2734056"/>
+            <a:ext cx="914" cy="128016"/>
+          </a:xfrm>
+          <a:prstGeom prst="line">
+            <a:avLst/>
+          </a:prstGeom>
+          <a:noFill/>
+          <a:ln w="15240">
+            <a:solidFill>
+              <a:srgbClr val="94A3B8"/>
+            </a:solidFill>
+            <a:prstDash val="solid"/>
+          </a:ln>
+        </p:spPr>
+      </p:sp>
+      <p:sp>
+        <p:nvSpPr>
+          <p:cNvPr id="20" name="Shape 18"/>
+          <p:cNvSpPr/>
+          <p:nvPr/>
+        </p:nvSpPr>
+        <p:spPr>
+          <a:xfrm>
+            <a:off x="11612880" y="2990088"/>
+            <a:ext cx="914" cy="128016"/>
+          </a:xfrm>
+          <a:prstGeom prst="line">
+            <a:avLst/>
+          </a:prstGeom>
+          <a:noFill/>
+          <a:ln w="15240">
+            <a:solidFill>
+              <a:srgbClr val="94A3B8"/>
+            </a:solidFill>
+            <a:prstDash val="solid"/>
+          </a:ln>
+        </p:spPr>
+      </p:sp>
+      <p:sp>
+        <p:nvSpPr>
+          <p:cNvPr id="21" name="Shape 19"/>
+          <p:cNvSpPr/>
+          <p:nvPr/>
+        </p:nvSpPr>
+        <p:spPr>
+          <a:xfrm>
+            <a:off x="11612880" y="3246120"/>
+            <a:ext cx="914" cy="128016"/>
+          </a:xfrm>
+          <a:prstGeom prst="line">
+            <a:avLst/>
+          </a:prstGeom>
+          <a:noFill/>
+          <a:ln w="15240">
+            <a:solidFill>
+              <a:srgbClr val="94A3B8"/>
+            </a:solidFill>
+            <a:prstDash val="solid"/>
+          </a:ln>
+        </p:spPr>
+      </p:sp>
+      <p:sp>
+        <p:nvSpPr>
+          <p:cNvPr id="22" name="Shape 20"/>
+          <p:cNvSpPr/>
+          <p:nvPr/>
+        </p:nvSpPr>
+        <p:spPr>
+          <a:xfrm>
+            <a:off x="11612880" y="3502152"/>
+            <a:ext cx="914" cy="128016"/>
+          </a:xfrm>
+          <a:prstGeom prst="line">
+            <a:avLst/>
+          </a:prstGeom>
+          <a:noFill/>
+          <a:ln w="15240">
+            <a:solidFill>
+              <a:srgbClr val="94A3B8"/>
+            </a:solidFill>
+            <a:prstDash val="solid"/>
+          </a:ln>
+        </p:spPr>
+      </p:sp>
+      <p:sp>
+        <p:nvSpPr>
+          <p:cNvPr id="23" name="Shape 21"/>
+          <p:cNvSpPr/>
+          <p:nvPr/>
+        </p:nvSpPr>
+        <p:spPr>
+          <a:xfrm>
+            <a:off x="11612880" y="3758184"/>
+            <a:ext cx="914" cy="128016"/>
+          </a:xfrm>
+          <a:prstGeom prst="line">
+            <a:avLst/>
+          </a:prstGeom>
+          <a:noFill/>
+          <a:ln w="15240">
+            <a:solidFill>
+              <a:srgbClr val="94A3B8"/>
+            </a:solidFill>
+            <a:prstDash val="solid"/>
+          </a:ln>
+        </p:spPr>
+      </p:sp>
+      <p:sp>
+        <p:nvSpPr>
+          <p:cNvPr id="24" name="Shape 22"/>
+          <p:cNvSpPr/>
+          <p:nvPr/>
+        </p:nvSpPr>
+        <p:spPr>
+          <a:xfrm>
+            <a:off x="11612880" y="4014216"/>
+            <a:ext cx="914" cy="128016"/>
+          </a:xfrm>
+          <a:prstGeom prst="line">
+            <a:avLst/>
+          </a:prstGeom>
+          <a:noFill/>
+          <a:ln w="15240">
+            <a:solidFill>
+              <a:srgbClr val="94A3B8"/>
+            </a:solidFill>
+            <a:prstDash val="solid"/>
+          </a:ln>
+        </p:spPr>
+      </p:sp>
+      <p:sp>
+        <p:nvSpPr>
+          <p:cNvPr id="25" name="Shape 23"/>
+          <p:cNvSpPr/>
+          <p:nvPr/>
+        </p:nvSpPr>
+        <p:spPr>
+          <a:xfrm>
+            <a:off x="11612880" y="4270248"/>
+            <a:ext cx="914" cy="128016"/>
+          </a:xfrm>
+          <a:prstGeom prst="line">
+            <a:avLst/>
+          </a:prstGeom>
+          <a:noFill/>
+          <a:ln w="15240">
+            <a:solidFill>
+              <a:srgbClr val="94A3B8"/>
+            </a:solidFill>
+            <a:prstDash val="solid"/>
+          </a:ln>
+        </p:spPr>
+      </p:sp>
+      <p:sp>
+        <p:nvSpPr>
+          <p:cNvPr id="26" name="Shape 24"/>
+          <p:cNvSpPr/>
+          <p:nvPr/>
+        </p:nvSpPr>
+        <p:spPr>
+          <a:xfrm>
+            <a:off x="11612880" y="4526280"/>
+            <a:ext cx="914" cy="128016"/>
+          </a:xfrm>
+          <a:prstGeom prst="line">
+            <a:avLst/>
+          </a:prstGeom>
+          <a:noFill/>
+          <a:ln w="15240">
+            <a:solidFill>
+              <a:srgbClr val="94A3B8"/>
+            </a:solidFill>
+            <a:prstDash val="solid"/>
+          </a:ln>
+        </p:spPr>
+      </p:sp>
+      <p:sp>
+        <p:nvSpPr>
+          <p:cNvPr id="27" name="Shape 25"/>
+          <p:cNvSpPr/>
+          <p:nvPr/>
+        </p:nvSpPr>
+        <p:spPr>
+          <a:xfrm>
+            <a:off x="11612880" y="4782312"/>
+            <a:ext cx="914" cy="128016"/>
+          </a:xfrm>
+          <a:prstGeom prst="line">
+            <a:avLst/>
+          </a:prstGeom>
+          <a:noFill/>
+          <a:ln w="15240">
+            <a:solidFill>
+              <a:srgbClr val="94A3B8"/>
+            </a:solidFill>
+            <a:prstDash val="solid"/>
+          </a:ln>
+        </p:spPr>
+      </p:sp>
+      <p:sp>
+        <p:nvSpPr>
+          <p:cNvPr id="28" name="Shape 26"/>
+          <p:cNvSpPr/>
+          <p:nvPr/>
+        </p:nvSpPr>
+        <p:spPr>
+          <a:xfrm>
+            <a:off x="11612880" y="5038344"/>
+            <a:ext cx="914" cy="128016"/>
+          </a:xfrm>
+          <a:prstGeom prst="line">
+            <a:avLst/>
+          </a:prstGeom>
+          <a:noFill/>
+          <a:ln w="15240">
+            <a:solidFill>
+              <a:srgbClr val="94A3B8"/>
+            </a:solidFill>
+            <a:prstDash val="solid"/>
+          </a:ln>
+        </p:spPr>
+      </p:sp>
+      <p:sp>
+        <p:nvSpPr>
+          <p:cNvPr id="29" name="Shape 27"/>
+          <p:cNvSpPr/>
+          <p:nvPr/>
+        </p:nvSpPr>
+        <p:spPr>
+          <a:xfrm>
+            <a:off x="11612880" y="5294376"/>
+            <a:ext cx="914" cy="128016"/>
+          </a:xfrm>
+          <a:prstGeom prst="line">
+            <a:avLst/>
+          </a:prstGeom>
+          <a:noFill/>
+          <a:ln w="15240">
+            <a:solidFill>
+              <a:srgbClr val="94A3B8"/>
+            </a:solidFill>
+            <a:prstDash val="solid"/>
+          </a:ln>
+        </p:spPr>
+      </p:sp>
+      <p:sp>
+        <p:nvSpPr>
+          <p:cNvPr id="30" name="Shape 28"/>
+          <p:cNvSpPr/>
+          <p:nvPr/>
+        </p:nvSpPr>
+        <p:spPr>
+          <a:xfrm>
+            <a:off x="11612880" y="5550408"/>
+            <a:ext cx="914" cy="128016"/>
+          </a:xfrm>
+          <a:prstGeom prst="line">
+            <a:avLst/>
+          </a:prstGeom>
+          <a:noFill/>
+          <a:ln w="15240">
+            <a:solidFill>
+              <a:srgbClr val="94A3B8"/>
+            </a:solidFill>
+            <a:prstDash val="solid"/>
+          </a:ln>
+        </p:spPr>
+      </p:sp>
+      <p:sp>
+        <p:nvSpPr>
+          <p:cNvPr id="31" name="Shape 29"/>
+          <p:cNvSpPr/>
+          <p:nvPr/>
+        </p:nvSpPr>
+        <p:spPr>
+          <a:xfrm>
+            <a:off x="11612880" y="5806440"/>
+            <a:ext cx="914" cy="128016"/>
+          </a:xfrm>
+          <a:prstGeom prst="line">
+            <a:avLst/>
+          </a:prstGeom>
+          <a:noFill/>
+          <a:ln w="15240">
+            <a:solidFill>
+              <a:srgbClr val="94A3B8"/>
+            </a:solidFill>
+            <a:prstDash val="solid"/>
+          </a:ln>
+        </p:spPr>
+      </p:sp>
+      <p:sp>
+        <p:nvSpPr>
+          <p:cNvPr id="32" name="Text 30"/>
+          <p:cNvSpPr/>
+          <p:nvPr/>
+        </p:nvSpPr>
+        <p:spPr>
+          <a:xfrm>
+            <a:off x="9875520" y="1920240"/>
+            <a:ext cx="1691640" cy="228600"/>
+          </a:xfrm>
+          <a:prstGeom prst="rect">
+            <a:avLst/>
+          </a:prstGeom>
+          <a:noFill/>
+          <a:ln/>
+        </p:spPr>
+        <p:txBody>
+          <a:bodyPr wrap="square" rtlCol="0" anchor="ctr"/>
+          <a:lstStyle/>
+          <a:p>
+            <a:pPr algn="r" indent="0" marL="0">
+              <a:buNone/>
+            </a:pPr>
+            <a:r>
+              <a:rPr lang="en-US" sz="1000" b="1" dirty="0">
+                <a:solidFill>
+                  <a:srgbClr val="94A3B8"/>
+                </a:solidFill>
+                <a:latin typeface="Calibri" pitchFamily="34" charset="0"/>
+                <a:ea typeface="Calibri" pitchFamily="34" charset="-122"/>
+                <a:cs typeface="Calibri" pitchFamily="34" charset="-120"/>
+              </a:rPr>
+              <a:t>INSOLVENCY 2019</a:t>
+            </a:r>
+            <a:endParaRPr lang="en-US" sz="1000" dirty="0"/>
+          </a:p>
+        </p:txBody>
+      </p:sp>
+      <p:sp>
+        <p:nvSpPr>
+          <p:cNvPr id="33" name="Shape 31"/>
+          <p:cNvSpPr/>
+          <p:nvPr/>
+        </p:nvSpPr>
+        <p:spPr>
+          <a:xfrm flipV="1">
+            <a:off x="5349240" y="3575304"/>
+            <a:ext cx="1565910" cy="1046074"/>
+          </a:xfrm>
+          <a:prstGeom prst="line">
+            <a:avLst/>
+          </a:prstGeom>
+          <a:noFill/>
+          <a:ln w="31750">
+            <a:solidFill>
+              <a:srgbClr val="5B9BD5"/>
+            </a:solidFill>
+            <a:prstDash val="solid"/>
+          </a:ln>
+        </p:spPr>
+      </p:sp>
+      <p:sp>
+        <p:nvSpPr>
+          <p:cNvPr id="34" name="Shape 32"/>
+          <p:cNvSpPr/>
+          <p:nvPr/>
+        </p:nvSpPr>
+        <p:spPr>
+          <a:xfrm flipV="1">
+            <a:off x="6915150" y="2971800"/>
+            <a:ext cx="1565910" cy="603504"/>
+          </a:xfrm>
+          <a:prstGeom prst="line">
+            <a:avLst/>
+          </a:prstGeom>
+          <a:noFill/>
+          <a:ln w="31750">
+            <a:solidFill>
+              <a:srgbClr val="5B9BD5"/>
+            </a:solidFill>
+            <a:prstDash val="solid"/>
+          </a:ln>
+        </p:spPr>
+      </p:sp>
+      <p:sp>
+        <p:nvSpPr>
+          <p:cNvPr id="35" name="Shape 33"/>
+          <p:cNvSpPr/>
+          <p:nvPr/>
+        </p:nvSpPr>
+        <p:spPr>
+          <a:xfrm flipV="1">
+            <a:off x="8481060" y="2167128"/>
+            <a:ext cx="1565910" cy="804672"/>
+          </a:xfrm>
+          <a:prstGeom prst="line">
+            <a:avLst/>
+          </a:prstGeom>
+          <a:noFill/>
+          <a:ln w="31750">
+            <a:solidFill>
+              <a:srgbClr val="5B9BD5"/>
+            </a:solidFill>
+            <a:prstDash val="solid"/>
+          </a:ln>
+        </p:spPr>
+      </p:sp>
+      <p:sp>
+        <p:nvSpPr>
+          <p:cNvPr id="36" name="Shape 34"/>
+          <p:cNvSpPr/>
+          <p:nvPr/>
+        </p:nvSpPr>
+        <p:spPr>
+          <a:xfrm flipV="1">
+            <a:off x="10046970" y="2126894"/>
+            <a:ext cx="1565910" cy="40234"/>
+          </a:xfrm>
+          <a:prstGeom prst="line">
+            <a:avLst/>
+          </a:prstGeom>
+          <a:noFill/>
+          <a:ln w="31750">
+            <a:solidFill>
+              <a:srgbClr val="5B9BD5"/>
+            </a:solidFill>
+            <a:prstDash val="solid"/>
+          </a:ln>
+        </p:spPr>
+      </p:sp>
+      <p:sp>
+        <p:nvSpPr>
+          <p:cNvPr id="37" name="Shape 35"/>
+          <p:cNvSpPr/>
+          <p:nvPr/>
+        </p:nvSpPr>
+        <p:spPr>
+          <a:xfrm>
+            <a:off x="5294376" y="4566514"/>
+            <a:ext cx="109728" cy="109728"/>
+          </a:xfrm>
+          <a:prstGeom prst="ellipse">
+            <a:avLst/>
+          </a:prstGeom>
+          <a:solidFill>
+            <a:srgbClr val="5B9BD5"/>
+          </a:solidFill>
           <a:ln w="19050">
+            <a:solidFill>
+              <a:srgbClr val="0A1628"/>
+            </a:solidFill>
+            <a:prstDash val="solid"/>
+          </a:ln>
+        </p:spPr>
+      </p:sp>
+      <p:sp>
+        <p:nvSpPr>
+          <p:cNvPr id="38" name="Shape 36"/>
+          <p:cNvSpPr/>
+          <p:nvPr/>
+        </p:nvSpPr>
+        <p:spPr>
+          <a:xfrm>
+            <a:off x="6860286" y="3520440"/>
+            <a:ext cx="109728" cy="109728"/>
+          </a:xfrm>
+          <a:prstGeom prst="ellipse">
+            <a:avLst/>
+          </a:prstGeom>
+          <a:solidFill>
+            <a:srgbClr val="5B9BD5"/>
+          </a:solidFill>
+          <a:ln w="19050">
+            <a:solidFill>
+              <a:srgbClr val="0A1628"/>
+            </a:solidFill>
+            <a:prstDash val="solid"/>
+          </a:ln>
+        </p:spPr>
+      </p:sp>
+      <p:sp>
+        <p:nvSpPr>
+          <p:cNvPr id="39" name="Shape 37"/>
+          <p:cNvSpPr/>
+          <p:nvPr/>
+        </p:nvSpPr>
+        <p:spPr>
+          <a:xfrm>
+            <a:off x="8426196" y="2916936"/>
+            <a:ext cx="109728" cy="109728"/>
+          </a:xfrm>
+          <a:prstGeom prst="ellipse">
+            <a:avLst/>
+          </a:prstGeom>
+          <a:solidFill>
+            <a:srgbClr val="5B9BD5"/>
+          </a:solidFill>
+          <a:ln w="19050">
+            <a:solidFill>
+              <a:srgbClr val="0A1628"/>
+            </a:solidFill>
+            <a:prstDash val="solid"/>
+          </a:ln>
+        </p:spPr>
+      </p:sp>
+      <p:sp>
+        <p:nvSpPr>
+          <p:cNvPr id="40" name="Shape 38"/>
+          <p:cNvSpPr/>
+          <p:nvPr/>
+        </p:nvSpPr>
+        <p:spPr>
+          <a:xfrm>
+            <a:off x="9992106" y="2112264"/>
+            <a:ext cx="109728" cy="109728"/>
+          </a:xfrm>
+          <a:prstGeom prst="ellipse">
+            <a:avLst/>
+          </a:prstGeom>
+          <a:solidFill>
+            <a:srgbClr val="5B9BD5"/>
+          </a:solidFill>
+          <a:ln w="19050">
+            <a:solidFill>
+              <a:srgbClr val="0A1628"/>
+            </a:solidFill>
+            <a:prstDash val="solid"/>
+          </a:ln>
+        </p:spPr>
+      </p:sp>
+      <p:sp>
+        <p:nvSpPr>
+          <p:cNvPr id="41" name="Shape 39"/>
+          <p:cNvSpPr/>
+          <p:nvPr/>
+        </p:nvSpPr>
+        <p:spPr>
+          <a:xfrm>
+            <a:off x="11558016" y="2072030"/>
+            <a:ext cx="109728" cy="109728"/>
+          </a:xfrm>
+          <a:prstGeom prst="ellipse">
+            <a:avLst/>
+          </a:prstGeom>
+          <a:solidFill>
+            <a:srgbClr val="5B9BD5"/>
+          </a:solidFill>
+          <a:ln w="19050">
+            <a:solidFill>
+              <a:srgbClr val="0A1628"/>
+            </a:solidFill>
+            <a:prstDash val="solid"/>
+          </a:ln>
+        </p:spPr>
+      </p:sp>
+      <p:sp>
+        <p:nvSpPr>
+          <p:cNvPr id="42" name="Shape 40"/>
+          <p:cNvSpPr/>
+          <p:nvPr/>
+        </p:nvSpPr>
+        <p:spPr>
+          <a:xfrm flipV="1">
+            <a:off x="5349240" y="3454603"/>
+            <a:ext cx="1565910" cy="925373"/>
+          </a:xfrm>
+          <a:prstGeom prst="line">
+            <a:avLst/>
+          </a:prstGeom>
+          <a:noFill/>
+          <a:ln w="44450">
             <a:solidFill>
               <a:srgbClr val="F59E0B"/>
             </a:solidFill>
@@ -5110,20 +5640,20 @@
       </p:sp>
       <p:sp>
         <p:nvSpPr>
-          <p:cNvPr id="19" name="Shape 17"/>
-          <p:cNvSpPr/>
-          <p:nvPr/>
-        </p:nvSpPr>
-        <p:spPr>
-          <a:xfrm>
-            <a:off x="11612880" y="2221992"/>
-            <a:ext cx="914" cy="128016"/>
+          <p:cNvPr id="43" name="Shape 41"/>
+          <p:cNvSpPr/>
+          <p:nvPr/>
+        </p:nvSpPr>
+        <p:spPr>
+          <a:xfrm flipV="1">
+            <a:off x="6915150" y="2609698"/>
+            <a:ext cx="1565910" cy="844906"/>
           </a:xfrm>
           <a:prstGeom prst="line">
             <a:avLst/>
           </a:prstGeom>
           <a:noFill/>
-          <a:ln w="19050">
+          <a:ln w="44450">
             <a:solidFill>
               <a:srgbClr val="F59E0B"/>
             </a:solidFill>
@@ -5133,20 +5663,20 @@
       </p:sp>
       <p:sp>
         <p:nvSpPr>
-          <p:cNvPr id="20" name="Shape 18"/>
-          <p:cNvSpPr/>
-          <p:nvPr/>
-        </p:nvSpPr>
-        <p:spPr>
-          <a:xfrm>
-            <a:off x="11612880" y="2478024"/>
-            <a:ext cx="914" cy="128016"/>
+          <p:cNvPr id="44" name="Shape 42"/>
+          <p:cNvSpPr/>
+          <p:nvPr/>
+        </p:nvSpPr>
+        <p:spPr>
+          <a:xfrm flipV="1">
+            <a:off x="8481060" y="2287829"/>
+            <a:ext cx="1565910" cy="321869"/>
           </a:xfrm>
           <a:prstGeom prst="line">
             <a:avLst/>
           </a:prstGeom>
           <a:noFill/>
-          <a:ln w="19050">
+          <a:ln w="44450">
             <a:solidFill>
               <a:srgbClr val="F59E0B"/>
             </a:solidFill>
@@ -5156,20 +5686,20 @@
       </p:sp>
       <p:sp>
         <p:nvSpPr>
-          <p:cNvPr id="21" name="Shape 19"/>
-          <p:cNvSpPr/>
-          <p:nvPr/>
-        </p:nvSpPr>
-        <p:spPr>
-          <a:xfrm>
-            <a:off x="11612880" y="2734056"/>
-            <a:ext cx="914" cy="128016"/>
+          <p:cNvPr id="45" name="Shape 43"/>
+          <p:cNvSpPr/>
+          <p:nvPr/>
+        </p:nvSpPr>
+        <p:spPr>
+          <a:xfrm flipV="1">
+            <a:off x="10046970" y="2126894"/>
+            <a:ext cx="1565910" cy="160934"/>
           </a:xfrm>
           <a:prstGeom prst="line">
             <a:avLst/>
           </a:prstGeom>
           <a:noFill/>
-          <a:ln w="19050">
+          <a:ln w="44450">
             <a:solidFill>
               <a:srgbClr val="F59E0B"/>
             </a:solidFill>
@@ -5179,421 +5709,14 @@
       </p:sp>
       <p:sp>
         <p:nvSpPr>
-          <p:cNvPr id="22" name="Shape 20"/>
-          <p:cNvSpPr/>
-          <p:nvPr/>
-        </p:nvSpPr>
-        <p:spPr>
-          <a:xfrm>
-            <a:off x="11612880" y="2990088"/>
-            <a:ext cx="914" cy="128016"/>
-          </a:xfrm>
-          <a:prstGeom prst="line">
-            <a:avLst/>
-          </a:prstGeom>
-          <a:noFill/>
-          <a:ln w="19050">
-            <a:solidFill>
-              <a:srgbClr val="F59E0B"/>
-            </a:solidFill>
-            <a:prstDash val="solid"/>
-          </a:ln>
-        </p:spPr>
-      </p:sp>
-      <p:sp>
-        <p:nvSpPr>
-          <p:cNvPr id="23" name="Shape 21"/>
-          <p:cNvSpPr/>
-          <p:nvPr/>
-        </p:nvSpPr>
-        <p:spPr>
-          <a:xfrm>
-            <a:off x="11612880" y="3246120"/>
-            <a:ext cx="914" cy="128016"/>
-          </a:xfrm>
-          <a:prstGeom prst="line">
-            <a:avLst/>
-          </a:prstGeom>
-          <a:noFill/>
-          <a:ln w="19050">
-            <a:solidFill>
-              <a:srgbClr val="F59E0B"/>
-            </a:solidFill>
-            <a:prstDash val="solid"/>
-          </a:ln>
-        </p:spPr>
-      </p:sp>
-      <p:sp>
-        <p:nvSpPr>
-          <p:cNvPr id="24" name="Shape 22"/>
-          <p:cNvSpPr/>
-          <p:nvPr/>
-        </p:nvSpPr>
-        <p:spPr>
-          <a:xfrm>
-            <a:off x="11612880" y="3502152"/>
-            <a:ext cx="914" cy="128016"/>
-          </a:xfrm>
-          <a:prstGeom prst="line">
-            <a:avLst/>
-          </a:prstGeom>
-          <a:noFill/>
-          <a:ln w="19050">
-            <a:solidFill>
-              <a:srgbClr val="F59E0B"/>
-            </a:solidFill>
-            <a:prstDash val="solid"/>
-          </a:ln>
-        </p:spPr>
-      </p:sp>
-      <p:sp>
-        <p:nvSpPr>
-          <p:cNvPr id="25" name="Shape 23"/>
-          <p:cNvSpPr/>
-          <p:nvPr/>
-        </p:nvSpPr>
-        <p:spPr>
-          <a:xfrm>
-            <a:off x="11612880" y="3758184"/>
-            <a:ext cx="914" cy="128016"/>
-          </a:xfrm>
-          <a:prstGeom prst="line">
-            <a:avLst/>
-          </a:prstGeom>
-          <a:noFill/>
-          <a:ln w="19050">
-            <a:solidFill>
-              <a:srgbClr val="F59E0B"/>
-            </a:solidFill>
-            <a:prstDash val="solid"/>
-          </a:ln>
-        </p:spPr>
-      </p:sp>
-      <p:sp>
-        <p:nvSpPr>
-          <p:cNvPr id="26" name="Shape 24"/>
-          <p:cNvSpPr/>
-          <p:nvPr/>
-        </p:nvSpPr>
-        <p:spPr>
-          <a:xfrm>
-            <a:off x="11612880" y="4014216"/>
-            <a:ext cx="914" cy="128016"/>
-          </a:xfrm>
-          <a:prstGeom prst="line">
-            <a:avLst/>
-          </a:prstGeom>
-          <a:noFill/>
-          <a:ln w="19050">
-            <a:solidFill>
-              <a:srgbClr val="F59E0B"/>
-            </a:solidFill>
-            <a:prstDash val="solid"/>
-          </a:ln>
-        </p:spPr>
-      </p:sp>
-      <p:sp>
-        <p:nvSpPr>
-          <p:cNvPr id="27" name="Shape 25"/>
-          <p:cNvSpPr/>
-          <p:nvPr/>
-        </p:nvSpPr>
-        <p:spPr>
-          <a:xfrm>
-            <a:off x="11612880" y="4270248"/>
-            <a:ext cx="914" cy="128016"/>
-          </a:xfrm>
-          <a:prstGeom prst="line">
-            <a:avLst/>
-          </a:prstGeom>
-          <a:noFill/>
-          <a:ln w="19050">
-            <a:solidFill>
-              <a:srgbClr val="F59E0B"/>
-            </a:solidFill>
-            <a:prstDash val="solid"/>
-          </a:ln>
-        </p:spPr>
-      </p:sp>
-      <p:sp>
-        <p:nvSpPr>
-          <p:cNvPr id="28" name="Shape 26"/>
-          <p:cNvSpPr/>
-          <p:nvPr/>
-        </p:nvSpPr>
-        <p:spPr>
-          <a:xfrm>
-            <a:off x="11612880" y="4526280"/>
-            <a:ext cx="914" cy="128016"/>
-          </a:xfrm>
-          <a:prstGeom prst="line">
-            <a:avLst/>
-          </a:prstGeom>
-          <a:noFill/>
-          <a:ln w="19050">
-            <a:solidFill>
-              <a:srgbClr val="F59E0B"/>
-            </a:solidFill>
-            <a:prstDash val="solid"/>
-          </a:ln>
-        </p:spPr>
-      </p:sp>
-      <p:sp>
-        <p:nvSpPr>
-          <p:cNvPr id="29" name="Shape 27"/>
-          <p:cNvSpPr/>
-          <p:nvPr/>
-        </p:nvSpPr>
-        <p:spPr>
-          <a:xfrm>
-            <a:off x="11612880" y="4782312"/>
-            <a:ext cx="914" cy="128016"/>
-          </a:xfrm>
-          <a:prstGeom prst="line">
-            <a:avLst/>
-          </a:prstGeom>
-          <a:noFill/>
-          <a:ln w="19050">
-            <a:solidFill>
-              <a:srgbClr val="F59E0B"/>
-            </a:solidFill>
-            <a:prstDash val="solid"/>
-          </a:ln>
-        </p:spPr>
-      </p:sp>
-      <p:sp>
-        <p:nvSpPr>
-          <p:cNvPr id="30" name="Shape 28"/>
-          <p:cNvSpPr/>
-          <p:nvPr/>
-        </p:nvSpPr>
-        <p:spPr>
-          <a:xfrm>
-            <a:off x="11612880" y="5038344"/>
-            <a:ext cx="914" cy="128016"/>
-          </a:xfrm>
-          <a:prstGeom prst="line">
-            <a:avLst/>
-          </a:prstGeom>
-          <a:noFill/>
-          <a:ln w="19050">
-            <a:solidFill>
-              <a:srgbClr val="F59E0B"/>
-            </a:solidFill>
-            <a:prstDash val="solid"/>
-          </a:ln>
-        </p:spPr>
-      </p:sp>
-      <p:sp>
-        <p:nvSpPr>
-          <p:cNvPr id="31" name="Shape 29"/>
-          <p:cNvSpPr/>
-          <p:nvPr/>
-        </p:nvSpPr>
-        <p:spPr>
-          <a:xfrm>
-            <a:off x="11612880" y="5294376"/>
-            <a:ext cx="914" cy="128016"/>
-          </a:xfrm>
-          <a:prstGeom prst="line">
-            <a:avLst/>
-          </a:prstGeom>
-          <a:noFill/>
-          <a:ln w="19050">
-            <a:solidFill>
-              <a:srgbClr val="F59E0B"/>
-            </a:solidFill>
-            <a:prstDash val="solid"/>
-          </a:ln>
-        </p:spPr>
-      </p:sp>
-      <p:sp>
-        <p:nvSpPr>
-          <p:cNvPr id="32" name="Shape 30"/>
-          <p:cNvSpPr/>
-          <p:nvPr/>
-        </p:nvSpPr>
-        <p:spPr>
-          <a:xfrm>
-            <a:off x="11612880" y="5550408"/>
-            <a:ext cx="914" cy="128016"/>
-          </a:xfrm>
-          <a:prstGeom prst="line">
-            <a:avLst/>
-          </a:prstGeom>
-          <a:noFill/>
-          <a:ln w="19050">
-            <a:solidFill>
-              <a:srgbClr val="F59E0B"/>
-            </a:solidFill>
-            <a:prstDash val="solid"/>
-          </a:ln>
-        </p:spPr>
-      </p:sp>
-      <p:sp>
-        <p:nvSpPr>
-          <p:cNvPr id="33" name="Shape 31"/>
-          <p:cNvSpPr/>
-          <p:nvPr/>
-        </p:nvSpPr>
-        <p:spPr>
-          <a:xfrm>
-            <a:off x="11612880" y="5806440"/>
-            <a:ext cx="914" cy="128016"/>
-          </a:xfrm>
-          <a:prstGeom prst="line">
-            <a:avLst/>
-          </a:prstGeom>
-          <a:noFill/>
-          <a:ln w="19050">
-            <a:solidFill>
-              <a:srgbClr val="F59E0B"/>
-            </a:solidFill>
-            <a:prstDash val="solid"/>
-          </a:ln>
-        </p:spPr>
-      </p:sp>
-      <p:sp>
-        <p:nvSpPr>
-          <p:cNvPr id="34" name="Text 32"/>
-          <p:cNvSpPr/>
-          <p:nvPr/>
-        </p:nvSpPr>
-        <p:spPr>
-          <a:xfrm>
-            <a:off x="9875520" y="1920240"/>
-            <a:ext cx="1691640" cy="228600"/>
-          </a:xfrm>
-          <a:prstGeom prst="rect">
-            <a:avLst/>
-          </a:prstGeom>
-          <a:noFill/>
-          <a:ln/>
-        </p:spPr>
-        <p:txBody>
-          <a:bodyPr wrap="square" rtlCol="0" anchor="ctr"/>
-          <a:lstStyle/>
-          <a:p>
-            <a:pPr algn="r" indent="0" marL="0">
-              <a:buNone/>
-            </a:pPr>
-            <a:r>
-              <a:rPr lang="en-US" sz="1000" b="1" dirty="0">
-                <a:solidFill>
-                  <a:srgbClr val="F59E0B"/>
-                </a:solidFill>
-                <a:latin typeface="Calibri" pitchFamily="34" charset="0"/>
-                <a:ea typeface="Calibri" pitchFamily="34" charset="-122"/>
-                <a:cs typeface="Calibri" pitchFamily="34" charset="-120"/>
-              </a:rPr>
-              <a:t>INSOLVENCY 2019</a:t>
-            </a:r>
-            <a:endParaRPr lang="en-US" sz="1000" dirty="0"/>
-          </a:p>
-        </p:txBody>
-      </p:sp>
-      <p:sp>
-        <p:nvSpPr>
-          <p:cNvPr id="35" name="Shape 33"/>
-          <p:cNvSpPr/>
-          <p:nvPr/>
-        </p:nvSpPr>
-        <p:spPr>
-          <a:xfrm>
-            <a:off x="5349240" y="2587752"/>
-            <a:ext cx="1565910" cy="883920"/>
-          </a:xfrm>
-          <a:prstGeom prst="line">
-            <a:avLst/>
-          </a:prstGeom>
-          <a:noFill/>
-          <a:ln w="38100">
-            <a:solidFill>
-              <a:srgbClr val="F59E0B"/>
-            </a:solidFill>
-            <a:prstDash val="solid"/>
-          </a:ln>
-        </p:spPr>
-      </p:sp>
-      <p:sp>
-        <p:nvSpPr>
-          <p:cNvPr id="36" name="Shape 34"/>
-          <p:cNvSpPr/>
-          <p:nvPr/>
-        </p:nvSpPr>
-        <p:spPr>
-          <a:xfrm>
-            <a:off x="6915150" y="3471672"/>
-            <a:ext cx="1565910" cy="548640"/>
-          </a:xfrm>
-          <a:prstGeom prst="line">
-            <a:avLst/>
-          </a:prstGeom>
-          <a:noFill/>
-          <a:ln w="38100">
-            <a:solidFill>
-              <a:srgbClr val="F59E0B"/>
-            </a:solidFill>
-            <a:prstDash val="solid"/>
-          </a:ln>
-        </p:spPr>
-      </p:sp>
-      <p:sp>
-        <p:nvSpPr>
-          <p:cNvPr id="37" name="Shape 35"/>
-          <p:cNvSpPr/>
-          <p:nvPr/>
-        </p:nvSpPr>
-        <p:spPr>
-          <a:xfrm>
-            <a:off x="8481060" y="4020312"/>
-            <a:ext cx="1565910" cy="1487424"/>
-          </a:xfrm>
-          <a:prstGeom prst="line">
-            <a:avLst/>
-          </a:prstGeom>
-          <a:noFill/>
-          <a:ln w="38100">
-            <a:solidFill>
-              <a:srgbClr val="F59E0B"/>
-            </a:solidFill>
-            <a:prstDash val="solid"/>
-          </a:ln>
-        </p:spPr>
-      </p:sp>
-      <p:sp>
-        <p:nvSpPr>
-          <p:cNvPr id="38" name="Shape 36"/>
-          <p:cNvSpPr/>
-          <p:nvPr/>
-        </p:nvSpPr>
-        <p:spPr>
-          <a:xfrm>
-            <a:off x="10046970" y="5507736"/>
-            <a:ext cx="1565910" cy="182880"/>
-          </a:xfrm>
-          <a:prstGeom prst="line">
-            <a:avLst/>
-          </a:prstGeom>
-          <a:noFill/>
-          <a:ln w="38100">
-            <a:solidFill>
-              <a:srgbClr val="F59E0B"/>
-            </a:solidFill>
-            <a:prstDash val="solid"/>
-          </a:ln>
-        </p:spPr>
-      </p:sp>
-      <p:sp>
-        <p:nvSpPr>
-          <p:cNvPr id="39" name="Shape 37"/>
-          <p:cNvSpPr/>
-          <p:nvPr/>
-        </p:nvSpPr>
-        <p:spPr>
-          <a:xfrm>
-            <a:off x="5280660" y="2519172"/>
-            <a:ext cx="137160" cy="137160"/>
+          <p:cNvPr id="46" name="Shape 44"/>
+          <p:cNvSpPr/>
+          <p:nvPr/>
+        </p:nvSpPr>
+        <p:spPr>
+          <a:xfrm>
+            <a:off x="5276088" y="4306824"/>
+            <a:ext cx="146304" cy="146304"/>
           </a:xfrm>
           <a:prstGeom prst="ellipse">
             <a:avLst/>
@@ -5611,39 +5734,14 @@
       </p:sp>
       <p:sp>
         <p:nvSpPr>
-          <p:cNvPr id="40" name="Shape 38"/>
-          <p:cNvSpPr/>
-          <p:nvPr/>
-        </p:nvSpPr>
-        <p:spPr>
-          <a:xfrm>
-            <a:off x="6814566" y="3371088"/>
-            <a:ext cx="201168" cy="201168"/>
-          </a:xfrm>
-          <a:prstGeom prst="ellipse">
-            <a:avLst/>
-          </a:prstGeom>
-          <a:solidFill>
-            <a:srgbClr val="FFFFFF"/>
-          </a:solidFill>
-          <a:ln w="19050">
-            <a:solidFill>
-              <a:srgbClr val="F59E0B"/>
-            </a:solidFill>
-            <a:prstDash val="solid"/>
-          </a:ln>
-        </p:spPr>
-      </p:sp>
-      <p:sp>
-        <p:nvSpPr>
-          <p:cNvPr id="41" name="Shape 39"/>
-          <p:cNvSpPr/>
-          <p:nvPr/>
-        </p:nvSpPr>
-        <p:spPr>
-          <a:xfrm>
-            <a:off x="8412480" y="3951732"/>
-            <a:ext cx="137160" cy="137160"/>
+          <p:cNvPr id="47" name="Shape 45"/>
+          <p:cNvSpPr/>
+          <p:nvPr/>
+        </p:nvSpPr>
+        <p:spPr>
+          <a:xfrm>
+            <a:off x="6841998" y="3381451"/>
+            <a:ext cx="146304" cy="146304"/>
           </a:xfrm>
           <a:prstGeom prst="ellipse">
             <a:avLst/>
@@ -5661,14 +5759,14 @@
       </p:sp>
       <p:sp>
         <p:nvSpPr>
-          <p:cNvPr id="42" name="Shape 40"/>
-          <p:cNvSpPr/>
-          <p:nvPr/>
-        </p:nvSpPr>
-        <p:spPr>
-          <a:xfrm>
-            <a:off x="9978390" y="5439156"/>
-            <a:ext cx="137160" cy="137160"/>
+          <p:cNvPr id="48" name="Shape 46"/>
+          <p:cNvSpPr/>
+          <p:nvPr/>
+        </p:nvSpPr>
+        <p:spPr>
+          <a:xfrm>
+            <a:off x="8407908" y="2536546"/>
+            <a:ext cx="146304" cy="146304"/>
           </a:xfrm>
           <a:prstGeom prst="ellipse">
             <a:avLst/>
@@ -5686,14 +5784,14 @@
       </p:sp>
       <p:sp>
         <p:nvSpPr>
-          <p:cNvPr id="43" name="Shape 41"/>
-          <p:cNvSpPr/>
-          <p:nvPr/>
-        </p:nvSpPr>
-        <p:spPr>
-          <a:xfrm>
-            <a:off x="11544300" y="5622036"/>
-            <a:ext cx="137160" cy="137160"/>
+          <p:cNvPr id="49" name="Shape 47"/>
+          <p:cNvSpPr/>
+          <p:nvPr/>
+        </p:nvSpPr>
+        <p:spPr>
+          <a:xfrm>
+            <a:off x="9973818" y="2214677"/>
+            <a:ext cx="146304" cy="146304"/>
           </a:xfrm>
           <a:prstGeom prst="ellipse">
             <a:avLst/>
@@ -5711,258 +5809,24 @@
       </p:sp>
       <p:sp>
         <p:nvSpPr>
-          <p:cNvPr id="44" name="Text 42"/>
-          <p:cNvSpPr/>
-          <p:nvPr/>
-        </p:nvSpPr>
-        <p:spPr>
-          <a:xfrm>
-            <a:off x="4983480" y="6044184"/>
-            <a:ext cx="731520" cy="256032"/>
-          </a:xfrm>
-          <a:prstGeom prst="rect">
-            <a:avLst/>
-          </a:prstGeom>
-          <a:noFill/>
-          <a:ln/>
-        </p:spPr>
-        <p:txBody>
-          <a:bodyPr wrap="square" rtlCol="0" anchor="ctr"/>
-          <a:lstStyle/>
-          <a:p>
-            <a:pPr algn="ctr" indent="0" marL="0">
-              <a:buNone/>
-            </a:pPr>
-            <a:r>
-              <a:rPr lang="en-US" sz="1100" dirty="0">
-                <a:solidFill>
-                  <a:srgbClr val="94A3B8"/>
-                </a:solidFill>
-                <a:latin typeface="Calibri" pitchFamily="34" charset="0"/>
-                <a:ea typeface="Calibri" pitchFamily="34" charset="-122"/>
-                <a:cs typeface="Calibri" pitchFamily="34" charset="-120"/>
-              </a:rPr>
-              <a:t>FY15</a:t>
-            </a:r>
-            <a:endParaRPr lang="en-US" sz="1100" dirty="0"/>
-          </a:p>
-        </p:txBody>
-      </p:sp>
-      <p:sp>
-        <p:nvSpPr>
-          <p:cNvPr id="45" name="Text 43"/>
-          <p:cNvSpPr/>
-          <p:nvPr/>
-        </p:nvSpPr>
-        <p:spPr>
-          <a:xfrm>
-            <a:off x="6549390" y="6044184"/>
-            <a:ext cx="731520" cy="256032"/>
-          </a:xfrm>
-          <a:prstGeom prst="rect">
-            <a:avLst/>
-          </a:prstGeom>
-          <a:noFill/>
-          <a:ln/>
-        </p:spPr>
-        <p:txBody>
-          <a:bodyPr wrap="square" rtlCol="0" anchor="ctr"/>
-          <a:lstStyle/>
-          <a:p>
-            <a:pPr algn="ctr" indent="0" marL="0">
-              <a:buNone/>
-            </a:pPr>
-            <a:r>
-              <a:rPr lang="en-US" sz="1100" dirty="0">
-                <a:solidFill>
-                  <a:srgbClr val="94A3B8"/>
-                </a:solidFill>
-                <a:latin typeface="Calibri" pitchFamily="34" charset="0"/>
-                <a:ea typeface="Calibri" pitchFamily="34" charset="-122"/>
-                <a:cs typeface="Calibri" pitchFamily="34" charset="-120"/>
-              </a:rPr>
-              <a:t>FY16</a:t>
-            </a:r>
-            <a:endParaRPr lang="en-US" sz="1100" dirty="0"/>
-          </a:p>
-        </p:txBody>
-      </p:sp>
-      <p:sp>
-        <p:nvSpPr>
-          <p:cNvPr id="46" name="Text 44"/>
-          <p:cNvSpPr/>
-          <p:nvPr/>
-        </p:nvSpPr>
-        <p:spPr>
-          <a:xfrm>
-            <a:off x="8115300" y="6044184"/>
-            <a:ext cx="731520" cy="256032"/>
-          </a:xfrm>
-          <a:prstGeom prst="rect">
-            <a:avLst/>
-          </a:prstGeom>
-          <a:noFill/>
-          <a:ln/>
-        </p:spPr>
-        <p:txBody>
-          <a:bodyPr wrap="square" rtlCol="0" anchor="ctr"/>
-          <a:lstStyle/>
-          <a:p>
-            <a:pPr algn="ctr" indent="0" marL="0">
-              <a:buNone/>
-            </a:pPr>
-            <a:r>
-              <a:rPr lang="en-US" sz="1100" dirty="0">
-                <a:solidFill>
-                  <a:srgbClr val="94A3B8"/>
-                </a:solidFill>
-                <a:latin typeface="Calibri" pitchFamily="34" charset="0"/>
-                <a:ea typeface="Calibri" pitchFamily="34" charset="-122"/>
-                <a:cs typeface="Calibri" pitchFamily="34" charset="-120"/>
-              </a:rPr>
-              <a:t>FY17</a:t>
-            </a:r>
-            <a:endParaRPr lang="en-US" sz="1100" dirty="0"/>
-          </a:p>
-        </p:txBody>
-      </p:sp>
-      <p:sp>
-        <p:nvSpPr>
-          <p:cNvPr id="47" name="Text 45"/>
-          <p:cNvSpPr/>
-          <p:nvPr/>
-        </p:nvSpPr>
-        <p:spPr>
-          <a:xfrm>
-            <a:off x="9681210" y="6044184"/>
-            <a:ext cx="731520" cy="256032"/>
-          </a:xfrm>
-          <a:prstGeom prst="rect">
-            <a:avLst/>
-          </a:prstGeom>
-          <a:noFill/>
-          <a:ln/>
-        </p:spPr>
-        <p:txBody>
-          <a:bodyPr wrap="square" rtlCol="0" anchor="ctr"/>
-          <a:lstStyle/>
-          <a:p>
-            <a:pPr algn="ctr" indent="0" marL="0">
-              <a:buNone/>
-            </a:pPr>
-            <a:r>
-              <a:rPr lang="en-US" sz="1100" dirty="0">
-                <a:solidFill>
-                  <a:srgbClr val="94A3B8"/>
-                </a:solidFill>
-                <a:latin typeface="Calibri" pitchFamily="34" charset="0"/>
-                <a:ea typeface="Calibri" pitchFamily="34" charset="-122"/>
-                <a:cs typeface="Calibri" pitchFamily="34" charset="-120"/>
-              </a:rPr>
-              <a:t>FY18</a:t>
-            </a:r>
-            <a:endParaRPr lang="en-US" sz="1100" dirty="0"/>
-          </a:p>
-        </p:txBody>
-      </p:sp>
-      <p:sp>
-        <p:nvSpPr>
-          <p:cNvPr id="48" name="Text 46"/>
-          <p:cNvSpPr/>
-          <p:nvPr/>
-        </p:nvSpPr>
-        <p:spPr>
-          <a:xfrm>
-            <a:off x="11247120" y="6044184"/>
-            <a:ext cx="731520" cy="256032"/>
-          </a:xfrm>
-          <a:prstGeom prst="rect">
-            <a:avLst/>
-          </a:prstGeom>
-          <a:noFill/>
-          <a:ln/>
-        </p:spPr>
-        <p:txBody>
-          <a:bodyPr wrap="square" rtlCol="0" anchor="ctr"/>
-          <a:lstStyle/>
-          <a:p>
-            <a:pPr algn="ctr" indent="0" marL="0">
-              <a:buNone/>
-            </a:pPr>
-            <a:r>
-              <a:rPr lang="en-US" sz="1100" dirty="0">
-                <a:solidFill>
-                  <a:srgbClr val="94A3B8"/>
-                </a:solidFill>
-                <a:latin typeface="Calibri" pitchFamily="34" charset="0"/>
-                <a:ea typeface="Calibri" pitchFamily="34" charset="-122"/>
-                <a:cs typeface="Calibri" pitchFamily="34" charset="-120"/>
-              </a:rPr>
-              <a:t>FY19</a:t>
-            </a:r>
-            <a:endParaRPr lang="en-US" sz="1100" dirty="0"/>
-          </a:p>
-        </p:txBody>
-      </p:sp>
-      <p:sp>
-        <p:nvSpPr>
-          <p:cNvPr id="49" name="Text 47"/>
-          <p:cNvSpPr/>
-          <p:nvPr/>
-        </p:nvSpPr>
-        <p:spPr>
-          <a:xfrm>
-            <a:off x="6595110" y="3636264"/>
-            <a:ext cx="2011680" cy="274320"/>
-          </a:xfrm>
-          <a:prstGeom prst="rect">
-            <a:avLst/>
-          </a:prstGeom>
-          <a:noFill/>
-          <a:ln/>
-        </p:spPr>
-        <p:txBody>
-          <a:bodyPr wrap="square" rtlCol="0" anchor="ctr"/>
-          <a:lstStyle/>
-          <a:p>
-            <a:pPr indent="0" marL="0">
-              <a:buNone/>
-            </a:pPr>
-            <a:r>
-              <a:rPr lang="en-US" sz="1050" b="1" dirty="0">
-                <a:solidFill>
-                  <a:srgbClr val="FFFFFF"/>
-                </a:solidFill>
-                <a:latin typeface="Calibri" pitchFamily="34" charset="0"/>
-                <a:ea typeface="Calibri" pitchFamily="34" charset="-122"/>
-                <a:cs typeface="Calibri" pitchFamily="34" charset="-120"/>
-              </a:rPr>
-              <a:t>distress flagged FY16</a:t>
-            </a:r>
-            <a:endParaRPr lang="en-US" sz="1050" dirty="0"/>
-          </a:p>
-        </p:txBody>
-      </p:sp>
-      <p:sp>
-        <p:nvSpPr>
           <p:cNvPr id="50" name="Shape 48"/>
           <p:cNvSpPr/>
           <p:nvPr/>
         </p:nvSpPr>
         <p:spPr>
           <a:xfrm>
-            <a:off x="8412480" y="3951732"/>
-            <a:ext cx="137160" cy="137160"/>
+            <a:off x="11539728" y="2053742"/>
+            <a:ext cx="146304" cy="146304"/>
           </a:xfrm>
           <a:prstGeom prst="ellipse">
             <a:avLst/>
           </a:prstGeom>
           <a:solidFill>
-            <a:srgbClr val="F97316"/>
+            <a:srgbClr val="F59E0B"/>
           </a:solidFill>
           <a:ln w="19050">
             <a:solidFill>
-              <a:srgbClr val="FFFFFF"/>
+              <a:srgbClr val="0A1628"/>
             </a:solidFill>
             <a:prstDash val="solid"/>
           </a:ln>
@@ -5970,24 +5834,221 @@
       </p:sp>
       <p:sp>
         <p:nvSpPr>
-          <p:cNvPr id="51" name="Shape 49"/>
-          <p:cNvSpPr/>
-          <p:nvPr/>
-        </p:nvSpPr>
-        <p:spPr>
-          <a:xfrm>
-            <a:off x="9978390" y="5439156"/>
-            <a:ext cx="137160" cy="137160"/>
-          </a:xfrm>
-          <a:prstGeom prst="ellipse">
-            <a:avLst/>
+          <p:cNvPr id="51" name="Text 49"/>
+          <p:cNvSpPr/>
+          <p:nvPr/>
+        </p:nvSpPr>
+        <p:spPr>
+          <a:xfrm>
+            <a:off x="4983480" y="6044184"/>
+            <a:ext cx="731520" cy="256032"/>
+          </a:xfrm>
+          <a:prstGeom prst="rect">
+            <a:avLst/>
+          </a:prstGeom>
+          <a:noFill/>
+          <a:ln/>
+        </p:spPr>
+        <p:txBody>
+          <a:bodyPr wrap="square" rtlCol="0" anchor="ctr"/>
+          <a:lstStyle/>
+          <a:p>
+            <a:pPr algn="ctr" indent="0" marL="0">
+              <a:buNone/>
+            </a:pPr>
+            <a:r>
+              <a:rPr lang="en-US" sz="1100" dirty="0">
+                <a:solidFill>
+                  <a:srgbClr val="94A3B8"/>
+                </a:solidFill>
+                <a:latin typeface="Calibri" pitchFamily="34" charset="0"/>
+                <a:ea typeface="Calibri" pitchFamily="34" charset="-122"/>
+                <a:cs typeface="Calibri" pitchFamily="34" charset="-120"/>
+              </a:rPr>
+              <a:t>FY15</a:t>
+            </a:r>
+            <a:endParaRPr lang="en-US" sz="1100" dirty="0"/>
+          </a:p>
+        </p:txBody>
+      </p:sp>
+      <p:sp>
+        <p:nvSpPr>
+          <p:cNvPr id="52" name="Text 50"/>
+          <p:cNvSpPr/>
+          <p:nvPr/>
+        </p:nvSpPr>
+        <p:spPr>
+          <a:xfrm>
+            <a:off x="6549390" y="6044184"/>
+            <a:ext cx="731520" cy="256032"/>
+          </a:xfrm>
+          <a:prstGeom prst="rect">
+            <a:avLst/>
+          </a:prstGeom>
+          <a:noFill/>
+          <a:ln/>
+        </p:spPr>
+        <p:txBody>
+          <a:bodyPr wrap="square" rtlCol="0" anchor="ctr"/>
+          <a:lstStyle/>
+          <a:p>
+            <a:pPr algn="ctr" indent="0" marL="0">
+              <a:buNone/>
+            </a:pPr>
+            <a:r>
+              <a:rPr lang="en-US" sz="1100" dirty="0">
+                <a:solidFill>
+                  <a:srgbClr val="94A3B8"/>
+                </a:solidFill>
+                <a:latin typeface="Calibri" pitchFamily="34" charset="0"/>
+                <a:ea typeface="Calibri" pitchFamily="34" charset="-122"/>
+                <a:cs typeface="Calibri" pitchFamily="34" charset="-120"/>
+              </a:rPr>
+              <a:t>FY16</a:t>
+            </a:r>
+            <a:endParaRPr lang="en-US" sz="1100" dirty="0"/>
+          </a:p>
+        </p:txBody>
+      </p:sp>
+      <p:sp>
+        <p:nvSpPr>
+          <p:cNvPr id="53" name="Text 51"/>
+          <p:cNvSpPr/>
+          <p:nvPr/>
+        </p:nvSpPr>
+        <p:spPr>
+          <a:xfrm>
+            <a:off x="8115300" y="6044184"/>
+            <a:ext cx="731520" cy="256032"/>
+          </a:xfrm>
+          <a:prstGeom prst="rect">
+            <a:avLst/>
+          </a:prstGeom>
+          <a:noFill/>
+          <a:ln/>
+        </p:spPr>
+        <p:txBody>
+          <a:bodyPr wrap="square" rtlCol="0" anchor="ctr"/>
+          <a:lstStyle/>
+          <a:p>
+            <a:pPr algn="ctr" indent="0" marL="0">
+              <a:buNone/>
+            </a:pPr>
+            <a:r>
+              <a:rPr lang="en-US" sz="1100" dirty="0">
+                <a:solidFill>
+                  <a:srgbClr val="94A3B8"/>
+                </a:solidFill>
+                <a:latin typeface="Calibri" pitchFamily="34" charset="0"/>
+                <a:ea typeface="Calibri" pitchFamily="34" charset="-122"/>
+                <a:cs typeface="Calibri" pitchFamily="34" charset="-120"/>
+              </a:rPr>
+              <a:t>FY17</a:t>
+            </a:r>
+            <a:endParaRPr lang="en-US" sz="1100" dirty="0"/>
+          </a:p>
+        </p:txBody>
+      </p:sp>
+      <p:sp>
+        <p:nvSpPr>
+          <p:cNvPr id="54" name="Text 52"/>
+          <p:cNvSpPr/>
+          <p:nvPr/>
+        </p:nvSpPr>
+        <p:spPr>
+          <a:xfrm>
+            <a:off x="9681210" y="6044184"/>
+            <a:ext cx="731520" cy="256032"/>
+          </a:xfrm>
+          <a:prstGeom prst="rect">
+            <a:avLst/>
+          </a:prstGeom>
+          <a:noFill/>
+          <a:ln/>
+        </p:spPr>
+        <p:txBody>
+          <a:bodyPr wrap="square" rtlCol="0" anchor="ctr"/>
+          <a:lstStyle/>
+          <a:p>
+            <a:pPr algn="ctr" indent="0" marL="0">
+              <a:buNone/>
+            </a:pPr>
+            <a:r>
+              <a:rPr lang="en-US" sz="1100" dirty="0">
+                <a:solidFill>
+                  <a:srgbClr val="94A3B8"/>
+                </a:solidFill>
+                <a:latin typeface="Calibri" pitchFamily="34" charset="0"/>
+                <a:ea typeface="Calibri" pitchFamily="34" charset="-122"/>
+                <a:cs typeface="Calibri" pitchFamily="34" charset="-120"/>
+              </a:rPr>
+              <a:t>FY18</a:t>
+            </a:r>
+            <a:endParaRPr lang="en-US" sz="1100" dirty="0"/>
+          </a:p>
+        </p:txBody>
+      </p:sp>
+      <p:sp>
+        <p:nvSpPr>
+          <p:cNvPr id="55" name="Text 53"/>
+          <p:cNvSpPr/>
+          <p:nvPr/>
+        </p:nvSpPr>
+        <p:spPr>
+          <a:xfrm>
+            <a:off x="11247120" y="6044184"/>
+            <a:ext cx="731520" cy="256032"/>
+          </a:xfrm>
+          <a:prstGeom prst="rect">
+            <a:avLst/>
+          </a:prstGeom>
+          <a:noFill/>
+          <a:ln/>
+        </p:spPr>
+        <p:txBody>
+          <a:bodyPr wrap="square" rtlCol="0" anchor="ctr"/>
+          <a:lstStyle/>
+          <a:p>
+            <a:pPr algn="ctr" indent="0" marL="0">
+              <a:buNone/>
+            </a:pPr>
+            <a:r>
+              <a:rPr lang="en-US" sz="1100" dirty="0">
+                <a:solidFill>
+                  <a:srgbClr val="94A3B8"/>
+                </a:solidFill>
+                <a:latin typeface="Calibri" pitchFamily="34" charset="0"/>
+                <a:ea typeface="Calibri" pitchFamily="34" charset="-122"/>
+                <a:cs typeface="Calibri" pitchFamily="34" charset="-120"/>
+              </a:rPr>
+              <a:t>FY19</a:t>
+            </a:r>
+            <a:endParaRPr lang="en-US" sz="1100" dirty="0"/>
+          </a:p>
+        </p:txBody>
+      </p:sp>
+      <p:sp>
+        <p:nvSpPr>
+          <p:cNvPr id="56" name="Shape 54"/>
+          <p:cNvSpPr/>
+          <p:nvPr/>
+        </p:nvSpPr>
+        <p:spPr>
+          <a:xfrm>
+            <a:off x="9116568" y="1984248"/>
+            <a:ext cx="2468880" cy="804672"/>
+          </a:xfrm>
+          <a:prstGeom prst="roundRect">
+            <a:avLst>
+              <a:gd name="adj" fmla="val 6818"/>
+            </a:avLst>
           </a:prstGeom>
           <a:solidFill>
-            <a:srgbClr val="3B82F6"/>
+            <a:srgbClr val="0A1628"/>
           </a:solidFill>
-          <a:ln w="19050">
+          <a:ln w="12700">
             <a:solidFill>
-              <a:srgbClr val="FFFFFF"/>
+              <a:srgbClr val="1E3350"/>
             </a:solidFill>
             <a:prstDash val="solid"/>
           </a:ln>
@@ -5995,14 +6056,37 @@
       </p:sp>
       <p:sp>
         <p:nvSpPr>
-          <p:cNvPr id="52" name="Text 50"/>
-          <p:cNvSpPr/>
-          <p:nvPr/>
-        </p:nvSpPr>
-        <p:spPr>
-          <a:xfrm>
-            <a:off x="9738360" y="2057400"/>
-            <a:ext cx="1828800" cy="219456"/>
+          <p:cNvPr id="57" name="Shape 55"/>
+          <p:cNvSpPr/>
+          <p:nvPr/>
+        </p:nvSpPr>
+        <p:spPr>
+          <a:xfrm>
+            <a:off x="9281160" y="2240280"/>
+            <a:ext cx="365760" cy="914"/>
+          </a:xfrm>
+          <a:prstGeom prst="line">
+            <a:avLst/>
+          </a:prstGeom>
+          <a:noFill/>
+          <a:ln w="44450">
+            <a:solidFill>
+              <a:srgbClr val="F59E0B"/>
+            </a:solidFill>
+            <a:prstDash val="solid"/>
+          </a:ln>
+        </p:spPr>
+      </p:sp>
+      <p:sp>
+        <p:nvSpPr>
+          <p:cNvPr id="58" name="Text 56"/>
+          <p:cNvSpPr/>
+          <p:nvPr/>
+        </p:nvSpPr>
+        <p:spPr>
+          <a:xfrm>
+            <a:off x="9738360" y="2112264"/>
+            <a:ext cx="1828800" cy="237744"/>
           </a:xfrm>
           <a:prstGeom prst="rect">
             <a:avLst/>
@@ -6018,7 +6102,69 @@
               <a:buNone/>
             </a:pPr>
             <a:r>
-              <a:rPr lang="en-US" sz="900" b="1" spc="150" kern="0" dirty="0">
+              <a:rPr lang="en-US" sz="1000" dirty="0">
+                <a:solidFill>
+                  <a:srgbClr val="FFFFFF"/>
+                </a:solidFill>
+                <a:latin typeface="Calibri" pitchFamily="34" charset="0"/>
+                <a:ea typeface="Calibri" pitchFamily="34" charset="-122"/>
+                <a:cs typeface="Calibri" pitchFamily="34" charset="-120"/>
+              </a:rPr>
+              <a:t>ForesightAI (comprehensive)</a:t>
+            </a:r>
+            <a:endParaRPr lang="en-US" sz="1000" dirty="0"/>
+          </a:p>
+        </p:txBody>
+      </p:sp>
+      <p:sp>
+        <p:nvSpPr>
+          <p:cNvPr id="59" name="Shape 57"/>
+          <p:cNvSpPr/>
+          <p:nvPr/>
+        </p:nvSpPr>
+        <p:spPr>
+          <a:xfrm>
+            <a:off x="9281160" y="2569464"/>
+            <a:ext cx="365760" cy="914"/>
+          </a:xfrm>
+          <a:prstGeom prst="line">
+            <a:avLst/>
+          </a:prstGeom>
+          <a:noFill/>
+          <a:ln w="31750">
+            <a:solidFill>
+              <a:srgbClr val="5B9BD5"/>
+            </a:solidFill>
+            <a:prstDash val="solid"/>
+          </a:ln>
+        </p:spPr>
+      </p:sp>
+      <p:sp>
+        <p:nvSpPr>
+          <p:cNvPr id="60" name="Text 58"/>
+          <p:cNvSpPr/>
+          <p:nvPr/>
+        </p:nvSpPr>
+        <p:spPr>
+          <a:xfrm>
+            <a:off x="9738360" y="2441448"/>
+            <a:ext cx="1828800" cy="237744"/>
+          </a:xfrm>
+          <a:prstGeom prst="rect">
+            <a:avLst/>
+          </a:prstGeom>
+          <a:noFill/>
+          <a:ln/>
+        </p:spPr>
+        <p:txBody>
+          <a:bodyPr wrap="square" rtlCol="0" anchor="ctr"/>
+          <a:lstStyle/>
+          <a:p>
+            <a:pPr indent="0" marL="0">
+              <a:buNone/>
+            </a:pPr>
+            <a:r>
+              <a:rPr lang="en-US" sz="1000" dirty="0">
                 <a:solidFill>
                   <a:srgbClr val="94A3B8"/>
                 </a:solidFill>
@@ -6026,243 +6172,7 @@
                 <a:ea typeface="Calibri" pitchFamily="34" charset="-122"/>
                 <a:cs typeface="Calibri" pitchFamily="34" charset="-120"/>
               </a:rPr>
-              <a:t>SIGNALS MERGED</a:t>
-            </a:r>
-            <a:endParaRPr lang="en-US" sz="900" dirty="0"/>
-          </a:p>
-        </p:txBody>
-      </p:sp>
-      <p:sp>
-        <p:nvSpPr>
-          <p:cNvPr id="53" name="Shape 51"/>
-          <p:cNvSpPr/>
-          <p:nvPr/>
-        </p:nvSpPr>
-        <p:spPr>
-          <a:xfrm>
-            <a:off x="9761220" y="2354580"/>
-            <a:ext cx="100584" cy="100584"/>
-          </a:xfrm>
-          <a:prstGeom prst="ellipse">
-            <a:avLst/>
-          </a:prstGeom>
-          <a:solidFill>
-            <a:srgbClr val="F97316"/>
-          </a:solidFill>
-          <a:ln/>
-        </p:spPr>
-      </p:sp>
-      <p:sp>
-        <p:nvSpPr>
-          <p:cNvPr id="54" name="Text 52"/>
-          <p:cNvSpPr/>
-          <p:nvPr/>
-        </p:nvSpPr>
-        <p:spPr>
-          <a:xfrm>
-            <a:off x="9957816" y="2276856"/>
-            <a:ext cx="1645920" cy="237744"/>
-          </a:xfrm>
-          <a:prstGeom prst="rect">
-            <a:avLst/>
-          </a:prstGeom>
-          <a:noFill/>
-          <a:ln/>
-        </p:spPr>
-        <p:txBody>
-          <a:bodyPr wrap="square" rtlCol="0" anchor="ctr"/>
-          <a:lstStyle/>
-          <a:p>
-            <a:pPr indent="0" marL="0">
-              <a:buNone/>
-            </a:pPr>
-            <a:r>
-              <a:rPr lang="en-US" sz="1000" dirty="0">
-                <a:solidFill>
-                  <a:srgbClr val="FFFFFF"/>
-                </a:solidFill>
-                <a:latin typeface="Calibri" pitchFamily="34" charset="0"/>
-                <a:ea typeface="Calibri" pitchFamily="34" charset="-122"/>
-                <a:cs typeface="Calibri" pitchFamily="34" charset="-120"/>
-              </a:rPr>
-              <a:t>Credit rating</a:t>
-            </a:r>
-            <a:endParaRPr lang="en-US" sz="1000" dirty="0"/>
-          </a:p>
-        </p:txBody>
-      </p:sp>
-      <p:sp>
-        <p:nvSpPr>
-          <p:cNvPr id="55" name="Shape 53"/>
-          <p:cNvSpPr/>
-          <p:nvPr/>
-        </p:nvSpPr>
-        <p:spPr>
-          <a:xfrm>
-            <a:off x="9761220" y="2592324"/>
-            <a:ext cx="100584" cy="100584"/>
-          </a:xfrm>
-          <a:prstGeom prst="ellipse">
-            <a:avLst/>
-          </a:prstGeom>
-          <a:solidFill>
-            <a:srgbClr val="3B82F6"/>
-          </a:solidFill>
-          <a:ln/>
-        </p:spPr>
-      </p:sp>
-      <p:sp>
-        <p:nvSpPr>
-          <p:cNvPr id="56" name="Text 54"/>
-          <p:cNvSpPr/>
-          <p:nvPr/>
-        </p:nvSpPr>
-        <p:spPr>
-          <a:xfrm>
-            <a:off x="9957816" y="2514600"/>
-            <a:ext cx="1645920" cy="237744"/>
-          </a:xfrm>
-          <a:prstGeom prst="rect">
-            <a:avLst/>
-          </a:prstGeom>
-          <a:noFill/>
-          <a:ln/>
-        </p:spPr>
-        <p:txBody>
-          <a:bodyPr wrap="square" rtlCol="0" anchor="ctr"/>
-          <a:lstStyle/>
-          <a:p>
-            <a:pPr indent="0" marL="0">
-              <a:buNone/>
-            </a:pPr>
-            <a:r>
-              <a:rPr lang="en-US" sz="1000" dirty="0">
-                <a:solidFill>
-                  <a:srgbClr val="FFFFFF"/>
-                </a:solidFill>
-                <a:latin typeface="Calibri" pitchFamily="34" charset="0"/>
-                <a:ea typeface="Calibri" pitchFamily="34" charset="-122"/>
-                <a:cs typeface="Calibri" pitchFamily="34" charset="-120"/>
-              </a:rPr>
-              <a:t>Leadership</a:t>
-            </a:r>
-            <a:endParaRPr lang="en-US" sz="1000" dirty="0"/>
-          </a:p>
-        </p:txBody>
-      </p:sp>
-      <p:sp>
-        <p:nvSpPr>
-          <p:cNvPr id="57" name="Shape 55"/>
-          <p:cNvSpPr/>
-          <p:nvPr/>
-        </p:nvSpPr>
-        <p:spPr>
-          <a:xfrm>
-            <a:off x="9761220" y="2830068"/>
-            <a:ext cx="100584" cy="100584"/>
-          </a:xfrm>
-          <a:prstGeom prst="ellipse">
-            <a:avLst/>
-          </a:prstGeom>
-          <a:solidFill>
-            <a:srgbClr val="94A3B8"/>
-          </a:solidFill>
-          <a:ln/>
-        </p:spPr>
-      </p:sp>
-      <p:sp>
-        <p:nvSpPr>
-          <p:cNvPr id="58" name="Text 56"/>
-          <p:cNvSpPr/>
-          <p:nvPr/>
-        </p:nvSpPr>
-        <p:spPr>
-          <a:xfrm>
-            <a:off x="9957816" y="2752344"/>
-            <a:ext cx="1645920" cy="237744"/>
-          </a:xfrm>
-          <a:prstGeom prst="rect">
-            <a:avLst/>
-          </a:prstGeom>
-          <a:noFill/>
-          <a:ln/>
-        </p:spPr>
-        <p:txBody>
-          <a:bodyPr wrap="square" rtlCol="0" anchor="ctr"/>
-          <a:lstStyle/>
-          <a:p>
-            <a:pPr indent="0" marL="0">
-              <a:buNone/>
-            </a:pPr>
-            <a:r>
-              <a:rPr lang="en-US" sz="1000" dirty="0">
-                <a:solidFill>
-                  <a:srgbClr val="FFFFFF"/>
-                </a:solidFill>
-                <a:latin typeface="Calibri" pitchFamily="34" charset="0"/>
-                <a:ea typeface="Calibri" pitchFamily="34" charset="-122"/>
-                <a:cs typeface="Calibri" pitchFamily="34" charset="-120"/>
-              </a:rPr>
-              <a:t>News</a:t>
-            </a:r>
-            <a:endParaRPr lang="en-US" sz="1000" dirty="0"/>
-          </a:p>
-        </p:txBody>
-      </p:sp>
-      <p:sp>
-        <p:nvSpPr>
-          <p:cNvPr id="59" name="Shape 57"/>
-          <p:cNvSpPr/>
-          <p:nvPr/>
-        </p:nvSpPr>
-        <p:spPr>
-          <a:xfrm>
-            <a:off x="9761220" y="3067812"/>
-            <a:ext cx="100584" cy="100584"/>
-          </a:xfrm>
-          <a:prstGeom prst="ellipse">
-            <a:avLst/>
-          </a:prstGeom>
-          <a:solidFill>
-            <a:srgbClr val="A855F7"/>
-          </a:solidFill>
-          <a:ln/>
-        </p:spPr>
-      </p:sp>
-      <p:sp>
-        <p:nvSpPr>
-          <p:cNvPr id="60" name="Text 58"/>
-          <p:cNvSpPr/>
-          <p:nvPr/>
-        </p:nvSpPr>
-        <p:spPr>
-          <a:xfrm>
-            <a:off x="9957816" y="2990088"/>
-            <a:ext cx="1645920" cy="237744"/>
-          </a:xfrm>
-          <a:prstGeom prst="rect">
-            <a:avLst/>
-          </a:prstGeom>
-          <a:noFill/>
-          <a:ln/>
-        </p:spPr>
-        <p:txBody>
-          <a:bodyPr wrap="square" rtlCol="0" anchor="ctr"/>
-          <a:lstStyle/>
-          <a:p>
-            <a:pPr indent="0" marL="0">
-              <a:buNone/>
-            </a:pPr>
-            <a:r>
-              <a:rPr lang="en-US" sz="1000" dirty="0">
-                <a:solidFill>
-                  <a:srgbClr val="FFFFFF"/>
-                </a:solidFill>
-                <a:latin typeface="Calibri" pitchFamily="34" charset="0"/>
-                <a:ea typeface="Calibri" pitchFamily="34" charset="-122"/>
-                <a:cs typeface="Calibri" pitchFamily="34" charset="-120"/>
-              </a:rPr>
-              <a:t>Auditor</a:t>
+              <a:t>Altman (financial only)</a:t>
             </a:r>
             <a:endParaRPr lang="en-US" sz="1000" dirty="0"/>
           </a:p>
@@ -6496,7 +6406,7 @@
                 <a:ea typeface="Calibri" pitchFamily="34" charset="-122"/>
                 <a:cs typeface="Calibri" pitchFamily="34" charset="-120"/>
               </a:rPr>
-              <a:t>Live &amp; automated</a:t>
+              <a:t>Comprehensive</a:t>
             </a:r>
             <a:endParaRPr lang="en-US" sz="1550" dirty="0"/>
           </a:p>
@@ -6538,7 +6448,7 @@
                 <a:ea typeface="Calibri" pitchFamily="34" charset="-122"/>
                 <a:cs typeface="Calibri" pitchFamily="34" charset="-120"/>
               </a:rPr>
-              <a:t>Any company, on demand. No manual pull, no waiting on filings.</a:t>
+              <a:t>Six inputs - financials, ratings, leadership, news, hiring, sentiment - in one score.</a:t>
             </a:r>
             <a:endParaRPr lang="en-US" sz="1250" dirty="0"/>
           </a:p>
@@ -6648,7 +6558,7 @@
                 <a:ea typeface="Calibri" pitchFamily="34" charset="-122"/>
                 <a:cs typeface="Calibri" pitchFamily="34" charset="-120"/>
               </a:rPr>
-              <a:t>Comprehensive</a:t>
+              <a:t>Live &amp; automated</a:t>
             </a:r>
             <a:endParaRPr lang="en-US" sz="1550" dirty="0"/>
           </a:p>
@@ -6690,7 +6600,7 @@
                 <a:ea typeface="Calibri" pitchFamily="34" charset="-122"/>
                 <a:cs typeface="Calibri" pitchFamily="34" charset="-120"/>
               </a:rPr>
-              <a:t>Altman Z fused with credit ratings, leadership, news and hiring.</a:t>
+              <a:t>Any listed company, on demand. No manual pull, no waiting on filings.</a:t>
             </a:r>
             <a:endParaRPr lang="en-US" sz="1250" dirty="0"/>
           </a:p>
@@ -6842,7 +6752,7 @@
                 <a:ea typeface="Calibri" pitchFamily="34" charset="-122"/>
                 <a:cs typeface="Calibri" pitchFamily="34" charset="-120"/>
               </a:rPr>
-              <a:t>Every point traces to a real ratio or a real headline.</a:t>
+              <a:t>Every point traces to a real ratio, rating or headline.</a:t>
             </a:r>
             <a:endParaRPr lang="en-US" sz="1250" dirty="0"/>
           </a:p>
@@ -6952,7 +6862,7 @@
                 <a:ea typeface="Calibri" pitchFamily="34" charset="-122"/>
                 <a:cs typeface="Calibri" pitchFamily="34" charset="-120"/>
               </a:rPr>
-              <a:t>Validated on history</a:t>
+              <a:t>Proven on real cases</a:t>
             </a:r>
             <a:endParaRPr lang="en-US" sz="1550" dirty="0"/>
           </a:p>
@@ -6994,7 +6904,7 @@
                 <a:ea typeface="Calibri" pitchFamily="34" charset="-122"/>
                 <a:cs typeface="Calibri" pitchFamily="34" charset="-120"/>
               </a:rPr>
-              <a:t>Flags real bankruptcies years before the event.</a:t>
+              <a:t>Replayed across five real collapses, in five sectors.</a:t>
             </a:r>
             <a:endParaRPr lang="en-US" sz="1250" dirty="0"/>
           </a:p>

--- a/deck/ForesightAI.pptx
+++ b/deck/ForesightAI.pptx
@@ -313,6 +313,418 @@
 </file>
 
 <file path=ppt/charts/chart2.xml><?xml version="1.0" encoding="utf-8"?>
+<c:chartSpace xmlns:c="http://schemas.openxmlformats.org/drawingml/2006/chart" xmlns:a="http://schemas.openxmlformats.org/drawingml/2006/main" xmlns:r="http://schemas.openxmlformats.org/officeDocument/2006/relationships">
+  <c:date1904 val="0"/>
+  <c:roundedCorners val="1"/>
+  <c:chart>
+    <c:autoTitleDeleted val="1"/>
+    <c:plotArea>
+      <c:layout/>
+      <c:barChart>
+        <c:barDir val="col"/>
+        <c:grouping val="stacked"/>
+        <c:varyColors val="0"/>
+        <c:ser>
+          <c:idx val="0"/>
+          <c:order val="0"/>
+          <c:tx>
+            <c:strRef>
+              <c:f>Sheet1!$B$1</c:f>
+              <c:strCache>
+                <c:ptCount val="1"/>
+                <c:pt idx="0">
+                  <c:v>Altman (financial-only)</c:v>
+                </c:pt>
+              </c:strCache>
+            </c:strRef>
+          </c:tx>
+          <c:spPr>
+            <a:solidFill>
+              <a:srgbClr val="5B9BD5"/>
+            </a:solidFill>
+            <a:effectLst/>
+          </c:spPr>
+          <c:invertIfNegative val="0"/>
+          <c:dLbls>
+            <c:numFmt formatCode="#,##0" sourceLinked="0"/>
+            <c:txPr>
+              <a:bodyPr/>
+              <a:lstStyle/>
+              <a:p>
+                <a:pPr>
+                  <a:defRPr b="0" i="0" strike="noStrike" sz="1200" u="none">
+                    <a:solidFill>
+                      <a:srgbClr val="000000"/>
+                    </a:solidFill>
+                    <a:latin typeface="Arial"/>
+                  </a:defRPr>
+                </a:pPr>
+              </a:p>
+            </c:txPr>
+            <c:showLegendKey val="0"/>
+            <c:showVal val="0"/>
+            <c:showCatName val="0"/>
+            <c:showSerName val="0"/>
+            <c:showPercent val="0"/>
+            <c:showBubbleSize val="0"/>
+            <c:showLeaderLines val="0"/>
+          </c:dLbls>
+          <c:cat>
+            <c:multiLvlStrRef>
+              <c:f>Sheet1!$A$2:$A$10</c:f>
+              <c:multiLvlStrCache>
+                <c:ptCount val="9"/>
+                <c:lvl>
+                  <c:pt idx="0">
+                    <c:v>FY15</c:v>
+                  </c:pt>
+                  <c:pt idx="1">
+                    <c:v>FY16</c:v>
+                  </c:pt>
+                  <c:pt idx="2">
+                    <c:v>FY17</c:v>
+                  </c:pt>
+                  <c:pt idx="3">
+                    <c:v>FY18</c:v>
+                  </c:pt>
+                  <c:pt idx="4">
+                    <c:v>FY19</c:v>
+                  </c:pt>
+                  <c:pt idx="5">
+                    <c:v>FY20</c:v>
+                  </c:pt>
+                  <c:pt idx="6">
+                    <c:v>FY21</c:v>
+                  </c:pt>
+                  <c:pt idx="7">
+                    <c:v>FY22</c:v>
+                  </c:pt>
+                  <c:pt idx="8">
+                    <c:v>FY23</c:v>
+                  </c:pt>
+                </c:lvl>
+              </c:multiLvlStrCache>
+            </c:multiLvlStrRef>
+          </c:cat>
+          <c:val>
+            <c:numRef>
+              <c:f>Sheet1!$B$2:$B$10</c:f>
+              <c:numCache>
+                <c:formatCode>General</c:formatCode>
+                <c:ptCount val="9"/>
+                <c:pt idx="0">
+                  <c:v>13</c:v>
+                </c:pt>
+                <c:pt idx="1">
+                  <c:v>20</c:v>
+                </c:pt>
+                <c:pt idx="2">
+                  <c:v>21</c:v>
+                </c:pt>
+                <c:pt idx="3">
+                  <c:v>29</c:v>
+                </c:pt>
+                <c:pt idx="4">
+                  <c:v>34</c:v>
+                </c:pt>
+                <c:pt idx="5">
+                  <c:v>49</c:v>
+                </c:pt>
+                <c:pt idx="6">
+                  <c:v>63</c:v>
+                </c:pt>
+                <c:pt idx="7">
+                  <c:v>69</c:v>
+                </c:pt>
+                <c:pt idx="8">
+                  <c:v>85</c:v>
+                </c:pt>
+              </c:numCache>
+            </c:numRef>
+          </c:val>
+        </c:ser>
+        <c:ser>
+          <c:idx val="1"/>
+          <c:order val="1"/>
+          <c:tx>
+            <c:strRef>
+              <c:f>Sheet1!$C$1</c:f>
+              <c:strCache>
+                <c:ptCount val="1"/>
+                <c:pt idx="0">
+                  <c:v>Added risk: market signals</c:v>
+                </c:pt>
+              </c:strCache>
+            </c:strRef>
+          </c:tx>
+          <c:spPr>
+            <a:solidFill>
+              <a:srgbClr val="F59E0B"/>
+            </a:solidFill>
+            <a:effectLst/>
+          </c:spPr>
+          <c:invertIfNegative val="0"/>
+          <c:dLbls>
+            <c:numFmt formatCode="#,##0" sourceLinked="0"/>
+            <c:txPr>
+              <a:bodyPr/>
+              <a:lstStyle/>
+              <a:p>
+                <a:pPr>
+                  <a:defRPr b="0" i="0" strike="noStrike" sz="1200" u="none">
+                    <a:solidFill>
+                      <a:srgbClr val="000000"/>
+                    </a:solidFill>
+                    <a:latin typeface="Arial"/>
+                  </a:defRPr>
+                </a:pPr>
+              </a:p>
+            </c:txPr>
+            <c:showLegendKey val="0"/>
+            <c:showVal val="0"/>
+            <c:showCatName val="0"/>
+            <c:showSerName val="0"/>
+            <c:showPercent val="0"/>
+            <c:showBubbleSize val="0"/>
+            <c:showLeaderLines val="0"/>
+          </c:dLbls>
+          <c:cat>
+            <c:multiLvlStrRef>
+              <c:f>Sheet1!$A$2:$A$10</c:f>
+              <c:multiLvlStrCache>
+                <c:ptCount val="9"/>
+                <c:lvl>
+                  <c:pt idx="0">
+                    <c:v>FY15</c:v>
+                  </c:pt>
+                  <c:pt idx="1">
+                    <c:v>FY16</c:v>
+                  </c:pt>
+                  <c:pt idx="2">
+                    <c:v>FY17</c:v>
+                  </c:pt>
+                  <c:pt idx="3">
+                    <c:v>FY18</c:v>
+                  </c:pt>
+                  <c:pt idx="4">
+                    <c:v>FY19</c:v>
+                  </c:pt>
+                  <c:pt idx="5">
+                    <c:v>FY20</c:v>
+                  </c:pt>
+                  <c:pt idx="6">
+                    <c:v>FY21</c:v>
+                  </c:pt>
+                  <c:pt idx="7">
+                    <c:v>FY22</c:v>
+                  </c:pt>
+                  <c:pt idx="8">
+                    <c:v>FY23</c:v>
+                  </c:pt>
+                </c:lvl>
+              </c:multiLvlStrCache>
+            </c:multiLvlStrRef>
+          </c:cat>
+          <c:val>
+            <c:numRef>
+              <c:f>Sheet1!$C$2:$C$10</c:f>
+              <c:numCache>
+                <c:formatCode>General</c:formatCode>
+                <c:ptCount val="9"/>
+                <c:pt idx="0">
+                  <c:v>15</c:v>
+                </c:pt>
+                <c:pt idx="1">
+                  <c:v>28</c:v>
+                </c:pt>
+                <c:pt idx="2">
+                  <c:v>37</c:v>
+                </c:pt>
+                <c:pt idx="3">
+                  <c:v>45</c:v>
+                </c:pt>
+                <c:pt idx="4">
+                  <c:v>43</c:v>
+                </c:pt>
+                <c:pt idx="5">
+                  <c:v>34</c:v>
+                </c:pt>
+                <c:pt idx="6">
+                  <c:v>23</c:v>
+                </c:pt>
+                <c:pt idx="7">
+                  <c:v>19</c:v>
+                </c:pt>
+                <c:pt idx="8">
+                  <c:v>5</c:v>
+                </c:pt>
+              </c:numCache>
+            </c:numRef>
+          </c:val>
+        </c:ser>
+        <c:dLbls>
+          <c:numFmt formatCode="#,##0" sourceLinked="0"/>
+          <c:txPr>
+            <a:bodyPr/>
+            <a:lstStyle/>
+            <a:p>
+              <a:pPr>
+                <a:defRPr b="0" i="0" strike="noStrike" sz="1200" u="none">
+                  <a:solidFill>
+                    <a:srgbClr val="000000"/>
+                  </a:solidFill>
+                  <a:latin typeface="Arial"/>
+                </a:defRPr>
+              </a:pPr>
+            </a:p>
+          </c:txPr>
+          <c:showLegendKey val="0"/>
+          <c:showVal val="0"/>
+          <c:showCatName val="0"/>
+          <c:showSerName val="0"/>
+          <c:showPercent val="0"/>
+          <c:showBubbleSize val="0"/>
+          <c:showLeaderLines val="0"/>
+        </c:dLbls>
+        <c:gapWidth val="45"/>
+        <c:overlap val="100"/>
+        <c:axId val="2094734554"/>
+        <c:axId val="2094734552"/>
+        <c:axId val="2094734556"/>
+      </c:barChart>
+      <c:catAx>
+        <c:axId val="2094734554"/>
+        <c:scaling>
+          <c:orientation val="minMax"/>
+        </c:scaling>
+        <c:delete val="0"/>
+        <c:axPos val="b"/>
+        <c:numFmt formatCode="General" sourceLinked="1"/>
+        <c:majorTickMark val="out"/>
+        <c:minorTickMark val="none"/>
+        <c:tickLblPos val="low"/>
+        <c:spPr>
+          <a:ln w="12700" cap="flat">
+            <a:noFill/>
+            <a:prstDash val="solid"/>
+            <a:round/>
+          </a:ln>
+        </c:spPr>
+        <c:txPr>
+          <a:bodyPr/>
+          <a:lstStyle/>
+          <a:p>
+            <a:pPr>
+              <a:defRPr sz="1000" b="0" i="0" u="none" strike="noStrike">
+                <a:solidFill>
+                  <a:srgbClr val="94A3B8"/>
+                </a:solidFill>
+                <a:latin typeface="Arial"/>
+              </a:defRPr>
+            </a:pPr>
+            <a:endParaRPr lang="en-US"/>
+          </a:p>
+        </c:txPr>
+        <c:crossAx val="2094734552"/>
+        <c:crosses val="autoZero"/>
+        <c:auto val="1"/>
+        <c:lblAlgn val="ctr"/>
+        <c:noMultiLvlLbl val="1"/>
+      </c:catAx>
+      <c:valAx>
+        <c:axId val="2094734552"/>
+        <c:scaling>
+          <c:orientation val="minMax"/>
+          <c:max val="100"/>
+          <c:min val="0"/>
+        </c:scaling>
+        <c:delete val="0"/>
+        <c:axPos val="l"/>
+        <c:majorGridlines>
+          <c:spPr>
+            <a:ln w="6350" cap="flat">
+              <a:solidFill>
+                <a:srgbClr val="1E3350"/>
+              </a:solidFill>
+              <a:prstDash val="solid"/>
+              <a:round/>
+            </a:ln>
+          </c:spPr>
+        </c:majorGridlines>
+        <c:numFmt formatCode="General" sourceLinked="0"/>
+        <c:majorTickMark val="out"/>
+        <c:minorTickMark val="none"/>
+        <c:tickLblPos val="nextTo"/>
+        <c:spPr>
+          <a:ln w="12700" cap="flat">
+            <a:noFill/>
+            <a:prstDash val="solid"/>
+            <a:round/>
+          </a:ln>
+        </c:spPr>
+        <c:txPr>
+          <a:bodyPr/>
+          <a:lstStyle/>
+          <a:p>
+            <a:pPr>
+              <a:defRPr sz="900" b="0" i="0" u="none" strike="noStrike">
+                <a:solidFill>
+                  <a:srgbClr val="94A3B8"/>
+                </a:solidFill>
+                <a:latin typeface="Arial"/>
+              </a:defRPr>
+            </a:pPr>
+            <a:endParaRPr lang="en-US"/>
+          </a:p>
+        </c:txPr>
+        <c:crossAx val="2094734554"/>
+        <c:crosses val="autoZero"/>
+        <c:crossBetween val="between"/>
+        <c:majorUnit val="25"/>
+      </c:valAx>
+      <c:spPr>
+        <a:noFill/>
+        <a:ln>
+          <a:noFill/>
+        </a:ln>
+        <a:effectLst/>
+      </c:spPr>
+    </c:plotArea>
+    <c:legend>
+      <c:legendPos val="t"/>
+      <c:overlay val="0"/>
+      <c:txPr>
+        <a:bodyPr/>
+        <a:lstStyle/>
+        <a:p>
+          <a:pPr>
+            <a:defRPr sz="1100">
+              <a:solidFill>
+                <a:srgbClr val="FFFFFF"/>
+              </a:solidFill>
+            </a:defRPr>
+          </a:pPr>
+          <a:endParaRPr lang="en-US"/>
+        </a:p>
+      </c:txPr>
+    </c:legend>
+    <c:plotVisOnly val="1"/>
+    <c:dispBlanksAs val="span"/>
+  </c:chart>
+  <c:spPr>
+    <a:noFill/>
+    <a:ln>
+      <a:noFill/>
+    </a:ln>
+    <a:effectLst/>
+  </c:spPr>
+  <c:externalData r:id="rId1">
+    <c:autoUpdate val="0"/>
+  </c:externalData>
+</c:chartSpace>
+</file>
+
+<file path=ppt/charts/chart3.xml><?xml version="1.0" encoding="utf-8"?>
 <c:chartSpace xmlns:c="http://schemas.openxmlformats.org/drawingml/2006/chart" xmlns:a="http://schemas.openxmlformats.org/drawingml/2006/main" xmlns:r="http://schemas.openxmlformats.org/officeDocument/2006/relationships">
   <c:date1904 val="0"/>
   <c:roundedCorners val="1"/>
@@ -1809,7 +2221,9 @@
       </p:sp>
       <p:sp>
         <p:nvSpPr>
-          <p:cNvPr id="5" name="Shape 3"/>
+          <p:cNvPr id="5" name="Shape 3">
+            <a:hlinkClick r:id="rId1" tooltip="Open the live Foresight AI dashboard"/>
+          </p:cNvPr>
           <p:cNvSpPr/>
           <p:nvPr/>
         </p:nvSpPr>
@@ -1836,7 +2250,9 @@
       </p:sp>
       <p:sp>
         <p:nvSpPr>
-          <p:cNvPr id="6" name="Text 4"/>
+          <p:cNvPr id="6" name="Text 4">
+            <a:hlinkClick r:id="rId1" tooltip="Open the live Foresight AI dashboard"/>
+          </p:cNvPr>
           <p:cNvSpPr/>
           <p:nvPr/>
         </p:nvSpPr>
@@ -1859,13 +2275,20 @@
               <a:buNone/>
             </a:pPr>
             <a:r>
-              <a:rPr lang="en-US" sz="1300" dirty="0">
+              <a:rPr lang="en-US" sz="1300" u="sng" dirty="0">
                 <a:solidFill>
                   <a:srgbClr val="94A3B8"/>
                 </a:solidFill>
                 <a:latin typeface="Calibri" pitchFamily="34" charset="0"/>
                 <a:ea typeface="Calibri" pitchFamily="34" charset="-122"/>
                 <a:cs typeface="Calibri" pitchFamily="34" charset="-120"/>
+                <a:hlinkClick r:id="rId1" invalidUrl="" action="" tgtFrame="" tooltip="Open the live Foresight AI dashboard" history="1" highlightClick="0" endSnd="0">
+                  <a:extLst>
+                    <a:ext uri="{A12FA001-AC4F-418D-AE19-62706E023703}">
+                      <ahyp:hlinkClr xmlns:ahyp="http://schemas.microsoft.com/office/drawing/2018/hyperlinkcolor" val="tx"/>
+                    </a:ext>
+                  </a:extLst>
+                </a:hlinkClick>
               </a:rPr>
               <a:t>Live demo   </a:t>
             </a:r>
@@ -1873,13 +2296,20 @@
               <a:buNone/>
             </a:pPr>
             <a:r>
-              <a:rPr lang="en-US" sz="1500" b="1" dirty="0">
+              <a:rPr lang="en-US" sz="1500" b="1" u="sng" dirty="0">
                 <a:solidFill>
                   <a:srgbClr val="F59E0B"/>
                 </a:solidFill>
                 <a:latin typeface="Calibri" pitchFamily="34" charset="0"/>
                 <a:ea typeface="Calibri" pitchFamily="34" charset="-122"/>
                 <a:cs typeface="Calibri" pitchFamily="34" charset="-120"/>
+                <a:hlinkClick r:id="rId1" invalidUrl="" action="" tgtFrame="" tooltip="Open the live Foresight AI dashboard" history="1" highlightClick="0" endSnd="0">
+                  <a:extLst>
+                    <a:ext uri="{A12FA001-AC4F-418D-AE19-62706E023703}">
+                      <ahyp:hlinkClr xmlns:ahyp="http://schemas.microsoft.com/office/drawing/2018/hyperlinkcolor" val="tx"/>
+                    </a:ext>
+                  </a:extLst>
+                </a:hlinkClick>
               </a:rPr>
               <a:t>foresightai.streamlit.app</a:t>
             </a:r>
@@ -1963,7 +2393,7 @@
         </p:xfrm>
         <a:graphic xmlns:a="http://schemas.openxmlformats.org/drawingml/2006/main">
           <a:graphicData uri="http://schemas.openxmlformats.org/drawingml/2006/chart">
-            <c:chart xmlns:c="http://schemas.openxmlformats.org/drawingml/2006/chart" r:id="rId1"/>
+            <c:chart xmlns:c="http://schemas.openxmlformats.org/drawingml/2006/chart" r:id="rId2"/>
           </a:graphicData>
         </a:graphic>
       </p:graphicFrame>
@@ -4815,7 +5245,7 @@
         </p:nvSpPr>
         <p:spPr>
           <a:xfrm>
-            <a:off x="5349240" y="1664208"/>
+            <a:off x="5349240" y="1755648"/>
             <a:ext cx="6263640" cy="228600"/>
           </a:xfrm>
           <a:prstGeom prst="rect">
@@ -4840,66 +5270,38 @@
                 <a:ea typeface="Calibri" pitchFamily="34" charset="-122"/>
                 <a:cs typeface="Calibri" pitchFamily="34" charset="-120"/>
               </a:rPr>
-              <a:t>Example - Reliance Communications (telecom)</a:t>
+              <a:t>Example - Unitech (real estate): Altman read Safe for years</a:t>
             </a:r>
             <a:endParaRPr lang="en-US" sz="1100" dirty="0"/>
           </a:p>
         </p:txBody>
       </p:sp>
-      <p:sp>
-        <p:nvSpPr>
-          <p:cNvPr id="11" name="Shape 9"/>
-          <p:cNvSpPr/>
-          <p:nvPr/>
-        </p:nvSpPr>
-        <p:spPr>
-          <a:xfrm>
-            <a:off x="5349240" y="1965960"/>
-            <a:ext cx="6263640" cy="1207008"/>
-          </a:xfrm>
-          <a:prstGeom prst="rect">
-            <a:avLst/>
-          </a:prstGeom>
-          <a:solidFill>
-            <a:srgbClr val="EF4444">
-              <a:alpha val="10000"/>
-            </a:srgbClr>
-          </a:solidFill>
-          <a:ln/>
-        </p:spPr>
-      </p:sp>
-      <p:sp>
-        <p:nvSpPr>
-          <p:cNvPr id="12" name="Shape 10"/>
-          <p:cNvSpPr/>
-          <p:nvPr/>
-        </p:nvSpPr>
-        <p:spPr>
-          <a:xfrm>
-            <a:off x="5349240" y="4782312"/>
-            <a:ext cx="6263640" cy="1207008"/>
-          </a:xfrm>
-          <a:prstGeom prst="rect">
-            <a:avLst/>
-          </a:prstGeom>
-          <a:solidFill>
-            <a:srgbClr val="22C55E">
-              <a:alpha val="10000"/>
-            </a:srgbClr>
-          </a:solidFill>
-          <a:ln/>
-        </p:spPr>
-      </p:sp>
-      <p:sp>
-        <p:nvSpPr>
-          <p:cNvPr id="13" name="Text 11"/>
-          <p:cNvSpPr/>
-          <p:nvPr/>
-        </p:nvSpPr>
-        <p:spPr>
-          <a:xfrm>
-            <a:off x="5458968" y="1984248"/>
-            <a:ext cx="1828800" cy="228600"/>
+      <p:graphicFrame>
+        <p:nvGraphicFramePr>
+          <p:cNvPr id="11" name="Chart 0" descr=""/>
+          <p:cNvGraphicFramePr/>
+          <p:nvPr/>
+        </p:nvGraphicFramePr>
+        <p:xfrm>
+          <a:off x="5349240" y="2194560"/>
+          <a:ext cx="6263640" cy="3611880"/>
+        </p:xfrm>
+        <a:graphic xmlns:a="http://schemas.openxmlformats.org/drawingml/2006/main">
+          <a:graphicData uri="http://schemas.openxmlformats.org/drawingml/2006/chart">
+            <c:chart xmlns:c="http://schemas.openxmlformats.org/drawingml/2006/chart" r:id="rId1"/>
+          </a:graphicData>
+        </a:graphic>
+      </p:graphicFrame>
+      <p:sp>
+        <p:nvSpPr>
+          <p:cNvPr id="12" name="Text 9"/>
+          <p:cNvSpPr/>
+          <p:nvPr/>
+        </p:nvSpPr>
+        <p:spPr>
+          <a:xfrm>
+            <a:off x="5349240" y="5861304"/>
+            <a:ext cx="6263640" cy="274320"/>
           </a:xfrm>
           <a:prstGeom prst="rect">
             <a:avLst/>
@@ -4915,476 +5317,7 @@
               <a:buNone/>
             </a:pPr>
             <a:r>
-              <a:rPr lang="en-US" sz="1000" b="1" dirty="0">
-                <a:solidFill>
-                  <a:srgbClr val="EF4444"/>
-                </a:solidFill>
-                <a:latin typeface="Calibri" pitchFamily="34" charset="0"/>
-                <a:ea typeface="Calibri" pitchFamily="34" charset="-122"/>
-                <a:cs typeface="Calibri" pitchFamily="34" charset="-120"/>
-              </a:rPr>
-              <a:t>HIGH RISK</a:t>
-            </a:r>
-            <a:endParaRPr lang="en-US" sz="1000" dirty="0"/>
-          </a:p>
-        </p:txBody>
-      </p:sp>
-      <p:sp>
-        <p:nvSpPr>
-          <p:cNvPr id="14" name="Text 12"/>
-          <p:cNvSpPr/>
-          <p:nvPr/>
-        </p:nvSpPr>
-        <p:spPr>
-          <a:xfrm>
-            <a:off x="5458968" y="5733288"/>
-            <a:ext cx="1828800" cy="228600"/>
-          </a:xfrm>
-          <a:prstGeom prst="rect">
-            <a:avLst/>
-          </a:prstGeom>
-          <a:noFill/>
-          <a:ln/>
-        </p:spPr>
-        <p:txBody>
-          <a:bodyPr wrap="square" rtlCol="0" anchor="ctr"/>
-          <a:lstStyle/>
-          <a:p>
-            <a:pPr indent="0" marL="0">
-              <a:buNone/>
-            </a:pPr>
-            <a:r>
-              <a:rPr lang="en-US" sz="1000" b="1" dirty="0">
-                <a:solidFill>
-                  <a:srgbClr val="22C55E"/>
-                </a:solidFill>
-                <a:latin typeface="Calibri" pitchFamily="34" charset="0"/>
-                <a:ea typeface="Calibri" pitchFamily="34" charset="-122"/>
-                <a:cs typeface="Calibri" pitchFamily="34" charset="-120"/>
-              </a:rPr>
-              <a:t>HEALTHY</a:t>
-            </a:r>
-            <a:endParaRPr lang="en-US" sz="1000" dirty="0"/>
-          </a:p>
-        </p:txBody>
-      </p:sp>
-      <p:sp>
-        <p:nvSpPr>
-          <p:cNvPr id="15" name="Shape 13"/>
-          <p:cNvSpPr/>
-          <p:nvPr/>
-        </p:nvSpPr>
-        <p:spPr>
-          <a:xfrm>
-            <a:off x="5349240" y="5989320"/>
-            <a:ext cx="6263640" cy="914"/>
-          </a:xfrm>
-          <a:prstGeom prst="line">
-            <a:avLst/>
-          </a:prstGeom>
-          <a:noFill/>
-          <a:ln w="12700">
-            <a:solidFill>
-              <a:srgbClr val="1E3350"/>
-            </a:solidFill>
-            <a:prstDash val="solid"/>
-          </a:ln>
-        </p:spPr>
-      </p:sp>
-      <p:sp>
-        <p:nvSpPr>
-          <p:cNvPr id="16" name="Shape 14"/>
-          <p:cNvSpPr/>
-          <p:nvPr/>
-        </p:nvSpPr>
-        <p:spPr>
-          <a:xfrm>
-            <a:off x="11612880" y="1965960"/>
-            <a:ext cx="914" cy="128016"/>
-          </a:xfrm>
-          <a:prstGeom prst="line">
-            <a:avLst/>
-          </a:prstGeom>
-          <a:noFill/>
-          <a:ln w="15240">
-            <a:solidFill>
-              <a:srgbClr val="94A3B8"/>
-            </a:solidFill>
-            <a:prstDash val="solid"/>
-          </a:ln>
-        </p:spPr>
-      </p:sp>
-      <p:sp>
-        <p:nvSpPr>
-          <p:cNvPr id="17" name="Shape 15"/>
-          <p:cNvSpPr/>
-          <p:nvPr/>
-        </p:nvSpPr>
-        <p:spPr>
-          <a:xfrm>
-            <a:off x="11612880" y="2221992"/>
-            <a:ext cx="914" cy="128016"/>
-          </a:xfrm>
-          <a:prstGeom prst="line">
-            <a:avLst/>
-          </a:prstGeom>
-          <a:noFill/>
-          <a:ln w="15240">
-            <a:solidFill>
-              <a:srgbClr val="94A3B8"/>
-            </a:solidFill>
-            <a:prstDash val="solid"/>
-          </a:ln>
-        </p:spPr>
-      </p:sp>
-      <p:sp>
-        <p:nvSpPr>
-          <p:cNvPr id="18" name="Shape 16"/>
-          <p:cNvSpPr/>
-          <p:nvPr/>
-        </p:nvSpPr>
-        <p:spPr>
-          <a:xfrm>
-            <a:off x="11612880" y="2478024"/>
-            <a:ext cx="914" cy="128016"/>
-          </a:xfrm>
-          <a:prstGeom prst="line">
-            <a:avLst/>
-          </a:prstGeom>
-          <a:noFill/>
-          <a:ln w="15240">
-            <a:solidFill>
-              <a:srgbClr val="94A3B8"/>
-            </a:solidFill>
-            <a:prstDash val="solid"/>
-          </a:ln>
-        </p:spPr>
-      </p:sp>
-      <p:sp>
-        <p:nvSpPr>
-          <p:cNvPr id="19" name="Shape 17"/>
-          <p:cNvSpPr/>
-          <p:nvPr/>
-        </p:nvSpPr>
-        <p:spPr>
-          <a:xfrm>
-            <a:off x="11612880" y="2734056"/>
-            <a:ext cx="914" cy="128016"/>
-          </a:xfrm>
-          <a:prstGeom prst="line">
-            <a:avLst/>
-          </a:prstGeom>
-          <a:noFill/>
-          <a:ln w="15240">
-            <a:solidFill>
-              <a:srgbClr val="94A3B8"/>
-            </a:solidFill>
-            <a:prstDash val="solid"/>
-          </a:ln>
-        </p:spPr>
-      </p:sp>
-      <p:sp>
-        <p:nvSpPr>
-          <p:cNvPr id="20" name="Shape 18"/>
-          <p:cNvSpPr/>
-          <p:nvPr/>
-        </p:nvSpPr>
-        <p:spPr>
-          <a:xfrm>
-            <a:off x="11612880" y="2990088"/>
-            <a:ext cx="914" cy="128016"/>
-          </a:xfrm>
-          <a:prstGeom prst="line">
-            <a:avLst/>
-          </a:prstGeom>
-          <a:noFill/>
-          <a:ln w="15240">
-            <a:solidFill>
-              <a:srgbClr val="94A3B8"/>
-            </a:solidFill>
-            <a:prstDash val="solid"/>
-          </a:ln>
-        </p:spPr>
-      </p:sp>
-      <p:sp>
-        <p:nvSpPr>
-          <p:cNvPr id="21" name="Shape 19"/>
-          <p:cNvSpPr/>
-          <p:nvPr/>
-        </p:nvSpPr>
-        <p:spPr>
-          <a:xfrm>
-            <a:off x="11612880" y="3246120"/>
-            <a:ext cx="914" cy="128016"/>
-          </a:xfrm>
-          <a:prstGeom prst="line">
-            <a:avLst/>
-          </a:prstGeom>
-          <a:noFill/>
-          <a:ln w="15240">
-            <a:solidFill>
-              <a:srgbClr val="94A3B8"/>
-            </a:solidFill>
-            <a:prstDash val="solid"/>
-          </a:ln>
-        </p:spPr>
-      </p:sp>
-      <p:sp>
-        <p:nvSpPr>
-          <p:cNvPr id="22" name="Shape 20"/>
-          <p:cNvSpPr/>
-          <p:nvPr/>
-        </p:nvSpPr>
-        <p:spPr>
-          <a:xfrm>
-            <a:off x="11612880" y="3502152"/>
-            <a:ext cx="914" cy="128016"/>
-          </a:xfrm>
-          <a:prstGeom prst="line">
-            <a:avLst/>
-          </a:prstGeom>
-          <a:noFill/>
-          <a:ln w="15240">
-            <a:solidFill>
-              <a:srgbClr val="94A3B8"/>
-            </a:solidFill>
-            <a:prstDash val="solid"/>
-          </a:ln>
-        </p:spPr>
-      </p:sp>
-      <p:sp>
-        <p:nvSpPr>
-          <p:cNvPr id="23" name="Shape 21"/>
-          <p:cNvSpPr/>
-          <p:nvPr/>
-        </p:nvSpPr>
-        <p:spPr>
-          <a:xfrm>
-            <a:off x="11612880" y="3758184"/>
-            <a:ext cx="914" cy="128016"/>
-          </a:xfrm>
-          <a:prstGeom prst="line">
-            <a:avLst/>
-          </a:prstGeom>
-          <a:noFill/>
-          <a:ln w="15240">
-            <a:solidFill>
-              <a:srgbClr val="94A3B8"/>
-            </a:solidFill>
-            <a:prstDash val="solid"/>
-          </a:ln>
-        </p:spPr>
-      </p:sp>
-      <p:sp>
-        <p:nvSpPr>
-          <p:cNvPr id="24" name="Shape 22"/>
-          <p:cNvSpPr/>
-          <p:nvPr/>
-        </p:nvSpPr>
-        <p:spPr>
-          <a:xfrm>
-            <a:off x="11612880" y="4014216"/>
-            <a:ext cx="914" cy="128016"/>
-          </a:xfrm>
-          <a:prstGeom prst="line">
-            <a:avLst/>
-          </a:prstGeom>
-          <a:noFill/>
-          <a:ln w="15240">
-            <a:solidFill>
-              <a:srgbClr val="94A3B8"/>
-            </a:solidFill>
-            <a:prstDash val="solid"/>
-          </a:ln>
-        </p:spPr>
-      </p:sp>
-      <p:sp>
-        <p:nvSpPr>
-          <p:cNvPr id="25" name="Shape 23"/>
-          <p:cNvSpPr/>
-          <p:nvPr/>
-        </p:nvSpPr>
-        <p:spPr>
-          <a:xfrm>
-            <a:off x="11612880" y="4270248"/>
-            <a:ext cx="914" cy="128016"/>
-          </a:xfrm>
-          <a:prstGeom prst="line">
-            <a:avLst/>
-          </a:prstGeom>
-          <a:noFill/>
-          <a:ln w="15240">
-            <a:solidFill>
-              <a:srgbClr val="94A3B8"/>
-            </a:solidFill>
-            <a:prstDash val="solid"/>
-          </a:ln>
-        </p:spPr>
-      </p:sp>
-      <p:sp>
-        <p:nvSpPr>
-          <p:cNvPr id="26" name="Shape 24"/>
-          <p:cNvSpPr/>
-          <p:nvPr/>
-        </p:nvSpPr>
-        <p:spPr>
-          <a:xfrm>
-            <a:off x="11612880" y="4526280"/>
-            <a:ext cx="914" cy="128016"/>
-          </a:xfrm>
-          <a:prstGeom prst="line">
-            <a:avLst/>
-          </a:prstGeom>
-          <a:noFill/>
-          <a:ln w="15240">
-            <a:solidFill>
-              <a:srgbClr val="94A3B8"/>
-            </a:solidFill>
-            <a:prstDash val="solid"/>
-          </a:ln>
-        </p:spPr>
-      </p:sp>
-      <p:sp>
-        <p:nvSpPr>
-          <p:cNvPr id="27" name="Shape 25"/>
-          <p:cNvSpPr/>
-          <p:nvPr/>
-        </p:nvSpPr>
-        <p:spPr>
-          <a:xfrm>
-            <a:off x="11612880" y="4782312"/>
-            <a:ext cx="914" cy="128016"/>
-          </a:xfrm>
-          <a:prstGeom prst="line">
-            <a:avLst/>
-          </a:prstGeom>
-          <a:noFill/>
-          <a:ln w="15240">
-            <a:solidFill>
-              <a:srgbClr val="94A3B8"/>
-            </a:solidFill>
-            <a:prstDash val="solid"/>
-          </a:ln>
-        </p:spPr>
-      </p:sp>
-      <p:sp>
-        <p:nvSpPr>
-          <p:cNvPr id="28" name="Shape 26"/>
-          <p:cNvSpPr/>
-          <p:nvPr/>
-        </p:nvSpPr>
-        <p:spPr>
-          <a:xfrm>
-            <a:off x="11612880" y="5038344"/>
-            <a:ext cx="914" cy="128016"/>
-          </a:xfrm>
-          <a:prstGeom prst="line">
-            <a:avLst/>
-          </a:prstGeom>
-          <a:noFill/>
-          <a:ln w="15240">
-            <a:solidFill>
-              <a:srgbClr val="94A3B8"/>
-            </a:solidFill>
-            <a:prstDash val="solid"/>
-          </a:ln>
-        </p:spPr>
-      </p:sp>
-      <p:sp>
-        <p:nvSpPr>
-          <p:cNvPr id="29" name="Shape 27"/>
-          <p:cNvSpPr/>
-          <p:nvPr/>
-        </p:nvSpPr>
-        <p:spPr>
-          <a:xfrm>
-            <a:off x="11612880" y="5294376"/>
-            <a:ext cx="914" cy="128016"/>
-          </a:xfrm>
-          <a:prstGeom prst="line">
-            <a:avLst/>
-          </a:prstGeom>
-          <a:noFill/>
-          <a:ln w="15240">
-            <a:solidFill>
-              <a:srgbClr val="94A3B8"/>
-            </a:solidFill>
-            <a:prstDash val="solid"/>
-          </a:ln>
-        </p:spPr>
-      </p:sp>
-      <p:sp>
-        <p:nvSpPr>
-          <p:cNvPr id="30" name="Shape 28"/>
-          <p:cNvSpPr/>
-          <p:nvPr/>
-        </p:nvSpPr>
-        <p:spPr>
-          <a:xfrm>
-            <a:off x="11612880" y="5550408"/>
-            <a:ext cx="914" cy="128016"/>
-          </a:xfrm>
-          <a:prstGeom prst="line">
-            <a:avLst/>
-          </a:prstGeom>
-          <a:noFill/>
-          <a:ln w="15240">
-            <a:solidFill>
-              <a:srgbClr val="94A3B8"/>
-            </a:solidFill>
-            <a:prstDash val="solid"/>
-          </a:ln>
-        </p:spPr>
-      </p:sp>
-      <p:sp>
-        <p:nvSpPr>
-          <p:cNvPr id="31" name="Shape 29"/>
-          <p:cNvSpPr/>
-          <p:nvPr/>
-        </p:nvSpPr>
-        <p:spPr>
-          <a:xfrm>
-            <a:off x="11612880" y="5806440"/>
-            <a:ext cx="914" cy="128016"/>
-          </a:xfrm>
-          <a:prstGeom prst="line">
-            <a:avLst/>
-          </a:prstGeom>
-          <a:noFill/>
-          <a:ln w="15240">
-            <a:solidFill>
-              <a:srgbClr val="94A3B8"/>
-            </a:solidFill>
-            <a:prstDash val="solid"/>
-          </a:ln>
-        </p:spPr>
-      </p:sp>
-      <p:sp>
-        <p:nvSpPr>
-          <p:cNvPr id="32" name="Text 30"/>
-          <p:cNvSpPr/>
-          <p:nvPr/>
-        </p:nvSpPr>
-        <p:spPr>
-          <a:xfrm>
-            <a:off x="9875520" y="1920240"/>
-            <a:ext cx="1691640" cy="228600"/>
-          </a:xfrm>
-          <a:prstGeom prst="rect">
-            <a:avLst/>
-          </a:prstGeom>
-          <a:noFill/>
-          <a:ln/>
-        </p:spPr>
-        <p:txBody>
-          <a:bodyPr wrap="square" rtlCol="0" anchor="ctr"/>
-          <a:lstStyle/>
-          <a:p>
-            <a:pPr algn="r" indent="0" marL="0">
-              <a:buNone/>
-            </a:pPr>
-            <a:r>
-              <a:rPr lang="en-US" sz="1000" b="1" dirty="0">
+              <a:rPr lang="en-US" sz="1050" i="1" dirty="0">
                 <a:solidFill>
                   <a:srgbClr val="94A3B8"/>
                 </a:solidFill>
@@ -5392,789 +5325,9 @@
                 <a:ea typeface="Calibri" pitchFamily="34" charset="-122"/>
                 <a:cs typeface="Calibri" pitchFamily="34" charset="-120"/>
               </a:rPr>
-              <a:t>INSOLVENCY 2019</a:t>
-            </a:r>
-            <a:endParaRPr lang="en-US" sz="1000" dirty="0"/>
-          </a:p>
-        </p:txBody>
-      </p:sp>
-      <p:sp>
-        <p:nvSpPr>
-          <p:cNvPr id="33" name="Shape 31"/>
-          <p:cNvSpPr/>
-          <p:nvPr/>
-        </p:nvSpPr>
-        <p:spPr>
-          <a:xfrm flipV="1">
-            <a:off x="5349240" y="3575304"/>
-            <a:ext cx="1565910" cy="1046074"/>
-          </a:xfrm>
-          <a:prstGeom prst="line">
-            <a:avLst/>
-          </a:prstGeom>
-          <a:noFill/>
-          <a:ln w="31750">
-            <a:solidFill>
-              <a:srgbClr val="5B9BD5"/>
-            </a:solidFill>
-            <a:prstDash val="solid"/>
-          </a:ln>
-        </p:spPr>
-      </p:sp>
-      <p:sp>
-        <p:nvSpPr>
-          <p:cNvPr id="34" name="Shape 32"/>
-          <p:cNvSpPr/>
-          <p:nvPr/>
-        </p:nvSpPr>
-        <p:spPr>
-          <a:xfrm flipV="1">
-            <a:off x="6915150" y="2971800"/>
-            <a:ext cx="1565910" cy="603504"/>
-          </a:xfrm>
-          <a:prstGeom prst="line">
-            <a:avLst/>
-          </a:prstGeom>
-          <a:noFill/>
-          <a:ln w="31750">
-            <a:solidFill>
-              <a:srgbClr val="5B9BD5"/>
-            </a:solidFill>
-            <a:prstDash val="solid"/>
-          </a:ln>
-        </p:spPr>
-      </p:sp>
-      <p:sp>
-        <p:nvSpPr>
-          <p:cNvPr id="35" name="Shape 33"/>
-          <p:cNvSpPr/>
-          <p:nvPr/>
-        </p:nvSpPr>
-        <p:spPr>
-          <a:xfrm flipV="1">
-            <a:off x="8481060" y="2167128"/>
-            <a:ext cx="1565910" cy="804672"/>
-          </a:xfrm>
-          <a:prstGeom prst="line">
-            <a:avLst/>
-          </a:prstGeom>
-          <a:noFill/>
-          <a:ln w="31750">
-            <a:solidFill>
-              <a:srgbClr val="5B9BD5"/>
-            </a:solidFill>
-            <a:prstDash val="solid"/>
-          </a:ln>
-        </p:spPr>
-      </p:sp>
-      <p:sp>
-        <p:nvSpPr>
-          <p:cNvPr id="36" name="Shape 34"/>
-          <p:cNvSpPr/>
-          <p:nvPr/>
-        </p:nvSpPr>
-        <p:spPr>
-          <a:xfrm flipV="1">
-            <a:off x="10046970" y="2126894"/>
-            <a:ext cx="1565910" cy="40234"/>
-          </a:xfrm>
-          <a:prstGeom prst="line">
-            <a:avLst/>
-          </a:prstGeom>
-          <a:noFill/>
-          <a:ln w="31750">
-            <a:solidFill>
-              <a:srgbClr val="5B9BD5"/>
-            </a:solidFill>
-            <a:prstDash val="solid"/>
-          </a:ln>
-        </p:spPr>
-      </p:sp>
-      <p:sp>
-        <p:nvSpPr>
-          <p:cNvPr id="37" name="Shape 35"/>
-          <p:cNvSpPr/>
-          <p:nvPr/>
-        </p:nvSpPr>
-        <p:spPr>
-          <a:xfrm>
-            <a:off x="5294376" y="4566514"/>
-            <a:ext cx="109728" cy="109728"/>
-          </a:xfrm>
-          <a:prstGeom prst="ellipse">
-            <a:avLst/>
-          </a:prstGeom>
-          <a:solidFill>
-            <a:srgbClr val="5B9BD5"/>
-          </a:solidFill>
-          <a:ln w="19050">
-            <a:solidFill>
-              <a:srgbClr val="0A1628"/>
-            </a:solidFill>
-            <a:prstDash val="solid"/>
-          </a:ln>
-        </p:spPr>
-      </p:sp>
-      <p:sp>
-        <p:nvSpPr>
-          <p:cNvPr id="38" name="Shape 36"/>
-          <p:cNvSpPr/>
-          <p:nvPr/>
-        </p:nvSpPr>
-        <p:spPr>
-          <a:xfrm>
-            <a:off x="6860286" y="3520440"/>
-            <a:ext cx="109728" cy="109728"/>
-          </a:xfrm>
-          <a:prstGeom prst="ellipse">
-            <a:avLst/>
-          </a:prstGeom>
-          <a:solidFill>
-            <a:srgbClr val="5B9BD5"/>
-          </a:solidFill>
-          <a:ln w="19050">
-            <a:solidFill>
-              <a:srgbClr val="0A1628"/>
-            </a:solidFill>
-            <a:prstDash val="solid"/>
-          </a:ln>
-        </p:spPr>
-      </p:sp>
-      <p:sp>
-        <p:nvSpPr>
-          <p:cNvPr id="39" name="Shape 37"/>
-          <p:cNvSpPr/>
-          <p:nvPr/>
-        </p:nvSpPr>
-        <p:spPr>
-          <a:xfrm>
-            <a:off x="8426196" y="2916936"/>
-            <a:ext cx="109728" cy="109728"/>
-          </a:xfrm>
-          <a:prstGeom prst="ellipse">
-            <a:avLst/>
-          </a:prstGeom>
-          <a:solidFill>
-            <a:srgbClr val="5B9BD5"/>
-          </a:solidFill>
-          <a:ln w="19050">
-            <a:solidFill>
-              <a:srgbClr val="0A1628"/>
-            </a:solidFill>
-            <a:prstDash val="solid"/>
-          </a:ln>
-        </p:spPr>
-      </p:sp>
-      <p:sp>
-        <p:nvSpPr>
-          <p:cNvPr id="40" name="Shape 38"/>
-          <p:cNvSpPr/>
-          <p:nvPr/>
-        </p:nvSpPr>
-        <p:spPr>
-          <a:xfrm>
-            <a:off x="9992106" y="2112264"/>
-            <a:ext cx="109728" cy="109728"/>
-          </a:xfrm>
-          <a:prstGeom prst="ellipse">
-            <a:avLst/>
-          </a:prstGeom>
-          <a:solidFill>
-            <a:srgbClr val="5B9BD5"/>
-          </a:solidFill>
-          <a:ln w="19050">
-            <a:solidFill>
-              <a:srgbClr val="0A1628"/>
-            </a:solidFill>
-            <a:prstDash val="solid"/>
-          </a:ln>
-        </p:spPr>
-      </p:sp>
-      <p:sp>
-        <p:nvSpPr>
-          <p:cNvPr id="41" name="Shape 39"/>
-          <p:cNvSpPr/>
-          <p:nvPr/>
-        </p:nvSpPr>
-        <p:spPr>
-          <a:xfrm>
-            <a:off x="11558016" y="2072030"/>
-            <a:ext cx="109728" cy="109728"/>
-          </a:xfrm>
-          <a:prstGeom prst="ellipse">
-            <a:avLst/>
-          </a:prstGeom>
-          <a:solidFill>
-            <a:srgbClr val="5B9BD5"/>
-          </a:solidFill>
-          <a:ln w="19050">
-            <a:solidFill>
-              <a:srgbClr val="0A1628"/>
-            </a:solidFill>
-            <a:prstDash val="solid"/>
-          </a:ln>
-        </p:spPr>
-      </p:sp>
-      <p:sp>
-        <p:nvSpPr>
-          <p:cNvPr id="42" name="Shape 40"/>
-          <p:cNvSpPr/>
-          <p:nvPr/>
-        </p:nvSpPr>
-        <p:spPr>
-          <a:xfrm flipV="1">
-            <a:off x="5349240" y="3454603"/>
-            <a:ext cx="1565910" cy="925373"/>
-          </a:xfrm>
-          <a:prstGeom prst="line">
-            <a:avLst/>
-          </a:prstGeom>
-          <a:noFill/>
-          <a:ln w="44450">
-            <a:solidFill>
-              <a:srgbClr val="F59E0B"/>
-            </a:solidFill>
-            <a:prstDash val="solid"/>
-          </a:ln>
-        </p:spPr>
-      </p:sp>
-      <p:sp>
-        <p:nvSpPr>
-          <p:cNvPr id="43" name="Shape 41"/>
-          <p:cNvSpPr/>
-          <p:nvPr/>
-        </p:nvSpPr>
-        <p:spPr>
-          <a:xfrm flipV="1">
-            <a:off x="6915150" y="2609698"/>
-            <a:ext cx="1565910" cy="844906"/>
-          </a:xfrm>
-          <a:prstGeom prst="line">
-            <a:avLst/>
-          </a:prstGeom>
-          <a:noFill/>
-          <a:ln w="44450">
-            <a:solidFill>
-              <a:srgbClr val="F59E0B"/>
-            </a:solidFill>
-            <a:prstDash val="solid"/>
-          </a:ln>
-        </p:spPr>
-      </p:sp>
-      <p:sp>
-        <p:nvSpPr>
-          <p:cNvPr id="44" name="Shape 42"/>
-          <p:cNvSpPr/>
-          <p:nvPr/>
-        </p:nvSpPr>
-        <p:spPr>
-          <a:xfrm flipV="1">
-            <a:off x="8481060" y="2287829"/>
-            <a:ext cx="1565910" cy="321869"/>
-          </a:xfrm>
-          <a:prstGeom prst="line">
-            <a:avLst/>
-          </a:prstGeom>
-          <a:noFill/>
-          <a:ln w="44450">
-            <a:solidFill>
-              <a:srgbClr val="F59E0B"/>
-            </a:solidFill>
-            <a:prstDash val="solid"/>
-          </a:ln>
-        </p:spPr>
-      </p:sp>
-      <p:sp>
-        <p:nvSpPr>
-          <p:cNvPr id="45" name="Shape 43"/>
-          <p:cNvSpPr/>
-          <p:nvPr/>
-        </p:nvSpPr>
-        <p:spPr>
-          <a:xfrm flipV="1">
-            <a:off x="10046970" y="2126894"/>
-            <a:ext cx="1565910" cy="160934"/>
-          </a:xfrm>
-          <a:prstGeom prst="line">
-            <a:avLst/>
-          </a:prstGeom>
-          <a:noFill/>
-          <a:ln w="44450">
-            <a:solidFill>
-              <a:srgbClr val="F59E0B"/>
-            </a:solidFill>
-            <a:prstDash val="solid"/>
-          </a:ln>
-        </p:spPr>
-      </p:sp>
-      <p:sp>
-        <p:nvSpPr>
-          <p:cNvPr id="46" name="Shape 44"/>
-          <p:cNvSpPr/>
-          <p:nvPr/>
-        </p:nvSpPr>
-        <p:spPr>
-          <a:xfrm>
-            <a:off x="5276088" y="4306824"/>
-            <a:ext cx="146304" cy="146304"/>
-          </a:xfrm>
-          <a:prstGeom prst="ellipse">
-            <a:avLst/>
-          </a:prstGeom>
-          <a:solidFill>
-            <a:srgbClr val="F59E0B"/>
-          </a:solidFill>
-          <a:ln w="19050">
-            <a:solidFill>
-              <a:srgbClr val="0A1628"/>
-            </a:solidFill>
-            <a:prstDash val="solid"/>
-          </a:ln>
-        </p:spPr>
-      </p:sp>
-      <p:sp>
-        <p:nvSpPr>
-          <p:cNvPr id="47" name="Shape 45"/>
-          <p:cNvSpPr/>
-          <p:nvPr/>
-        </p:nvSpPr>
-        <p:spPr>
-          <a:xfrm>
-            <a:off x="6841998" y="3381451"/>
-            <a:ext cx="146304" cy="146304"/>
-          </a:xfrm>
-          <a:prstGeom prst="ellipse">
-            <a:avLst/>
-          </a:prstGeom>
-          <a:solidFill>
-            <a:srgbClr val="F59E0B"/>
-          </a:solidFill>
-          <a:ln w="19050">
-            <a:solidFill>
-              <a:srgbClr val="0A1628"/>
-            </a:solidFill>
-            <a:prstDash val="solid"/>
-          </a:ln>
-        </p:spPr>
-      </p:sp>
-      <p:sp>
-        <p:nvSpPr>
-          <p:cNvPr id="48" name="Shape 46"/>
-          <p:cNvSpPr/>
-          <p:nvPr/>
-        </p:nvSpPr>
-        <p:spPr>
-          <a:xfrm>
-            <a:off x="8407908" y="2536546"/>
-            <a:ext cx="146304" cy="146304"/>
-          </a:xfrm>
-          <a:prstGeom prst="ellipse">
-            <a:avLst/>
-          </a:prstGeom>
-          <a:solidFill>
-            <a:srgbClr val="F59E0B"/>
-          </a:solidFill>
-          <a:ln w="19050">
-            <a:solidFill>
-              <a:srgbClr val="0A1628"/>
-            </a:solidFill>
-            <a:prstDash val="solid"/>
-          </a:ln>
-        </p:spPr>
-      </p:sp>
-      <p:sp>
-        <p:nvSpPr>
-          <p:cNvPr id="49" name="Shape 47"/>
-          <p:cNvSpPr/>
-          <p:nvPr/>
-        </p:nvSpPr>
-        <p:spPr>
-          <a:xfrm>
-            <a:off x="9973818" y="2214677"/>
-            <a:ext cx="146304" cy="146304"/>
-          </a:xfrm>
-          <a:prstGeom prst="ellipse">
-            <a:avLst/>
-          </a:prstGeom>
-          <a:solidFill>
-            <a:srgbClr val="F59E0B"/>
-          </a:solidFill>
-          <a:ln w="19050">
-            <a:solidFill>
-              <a:srgbClr val="0A1628"/>
-            </a:solidFill>
-            <a:prstDash val="solid"/>
-          </a:ln>
-        </p:spPr>
-      </p:sp>
-      <p:sp>
-        <p:nvSpPr>
-          <p:cNvPr id="50" name="Shape 48"/>
-          <p:cNvSpPr/>
-          <p:nvPr/>
-        </p:nvSpPr>
-        <p:spPr>
-          <a:xfrm>
-            <a:off x="11539728" y="2053742"/>
-            <a:ext cx="146304" cy="146304"/>
-          </a:xfrm>
-          <a:prstGeom prst="ellipse">
-            <a:avLst/>
-          </a:prstGeom>
-          <a:solidFill>
-            <a:srgbClr val="F59E0B"/>
-          </a:solidFill>
-          <a:ln w="19050">
-            <a:solidFill>
-              <a:srgbClr val="0A1628"/>
-            </a:solidFill>
-            <a:prstDash val="solid"/>
-          </a:ln>
-        </p:spPr>
-      </p:sp>
-      <p:sp>
-        <p:nvSpPr>
-          <p:cNvPr id="51" name="Text 49"/>
-          <p:cNvSpPr/>
-          <p:nvPr/>
-        </p:nvSpPr>
-        <p:spPr>
-          <a:xfrm>
-            <a:off x="4983480" y="6044184"/>
-            <a:ext cx="731520" cy="256032"/>
-          </a:xfrm>
-          <a:prstGeom prst="rect">
-            <a:avLst/>
-          </a:prstGeom>
-          <a:noFill/>
-          <a:ln/>
-        </p:spPr>
-        <p:txBody>
-          <a:bodyPr wrap="square" rtlCol="0" anchor="ctr"/>
-          <a:lstStyle/>
-          <a:p>
-            <a:pPr algn="ctr" indent="0" marL="0">
-              <a:buNone/>
-            </a:pPr>
-            <a:r>
-              <a:rPr lang="en-US" sz="1100" dirty="0">
-                <a:solidFill>
-                  <a:srgbClr val="94A3B8"/>
-                </a:solidFill>
-                <a:latin typeface="Calibri" pitchFamily="34" charset="0"/>
-                <a:ea typeface="Calibri" pitchFamily="34" charset="-122"/>
-                <a:cs typeface="Calibri" pitchFamily="34" charset="-120"/>
-              </a:rPr>
-              <a:t>FY15</a:t>
-            </a:r>
-            <a:endParaRPr lang="en-US" sz="1100" dirty="0"/>
-          </a:p>
-        </p:txBody>
-      </p:sp>
-      <p:sp>
-        <p:nvSpPr>
-          <p:cNvPr id="52" name="Text 50"/>
-          <p:cNvSpPr/>
-          <p:nvPr/>
-        </p:nvSpPr>
-        <p:spPr>
-          <a:xfrm>
-            <a:off x="6549390" y="6044184"/>
-            <a:ext cx="731520" cy="256032"/>
-          </a:xfrm>
-          <a:prstGeom prst="rect">
-            <a:avLst/>
-          </a:prstGeom>
-          <a:noFill/>
-          <a:ln/>
-        </p:spPr>
-        <p:txBody>
-          <a:bodyPr wrap="square" rtlCol="0" anchor="ctr"/>
-          <a:lstStyle/>
-          <a:p>
-            <a:pPr algn="ctr" indent="0" marL="0">
-              <a:buNone/>
-            </a:pPr>
-            <a:r>
-              <a:rPr lang="en-US" sz="1100" dirty="0">
-                <a:solidFill>
-                  <a:srgbClr val="94A3B8"/>
-                </a:solidFill>
-                <a:latin typeface="Calibri" pitchFamily="34" charset="0"/>
-                <a:ea typeface="Calibri" pitchFamily="34" charset="-122"/>
-                <a:cs typeface="Calibri" pitchFamily="34" charset="-120"/>
-              </a:rPr>
-              <a:t>FY16</a:t>
-            </a:r>
-            <a:endParaRPr lang="en-US" sz="1100" dirty="0"/>
-          </a:p>
-        </p:txBody>
-      </p:sp>
-      <p:sp>
-        <p:nvSpPr>
-          <p:cNvPr id="53" name="Text 51"/>
-          <p:cNvSpPr/>
-          <p:nvPr/>
-        </p:nvSpPr>
-        <p:spPr>
-          <a:xfrm>
-            <a:off x="8115300" y="6044184"/>
-            <a:ext cx="731520" cy="256032"/>
-          </a:xfrm>
-          <a:prstGeom prst="rect">
-            <a:avLst/>
-          </a:prstGeom>
-          <a:noFill/>
-          <a:ln/>
-        </p:spPr>
-        <p:txBody>
-          <a:bodyPr wrap="square" rtlCol="0" anchor="ctr"/>
-          <a:lstStyle/>
-          <a:p>
-            <a:pPr algn="ctr" indent="0" marL="0">
-              <a:buNone/>
-            </a:pPr>
-            <a:r>
-              <a:rPr lang="en-US" sz="1100" dirty="0">
-                <a:solidFill>
-                  <a:srgbClr val="94A3B8"/>
-                </a:solidFill>
-                <a:latin typeface="Calibri" pitchFamily="34" charset="0"/>
-                <a:ea typeface="Calibri" pitchFamily="34" charset="-122"/>
-                <a:cs typeface="Calibri" pitchFamily="34" charset="-120"/>
-              </a:rPr>
-              <a:t>FY17</a:t>
-            </a:r>
-            <a:endParaRPr lang="en-US" sz="1100" dirty="0"/>
-          </a:p>
-        </p:txBody>
-      </p:sp>
-      <p:sp>
-        <p:nvSpPr>
-          <p:cNvPr id="54" name="Text 52"/>
-          <p:cNvSpPr/>
-          <p:nvPr/>
-        </p:nvSpPr>
-        <p:spPr>
-          <a:xfrm>
-            <a:off x="9681210" y="6044184"/>
-            <a:ext cx="731520" cy="256032"/>
-          </a:xfrm>
-          <a:prstGeom prst="rect">
-            <a:avLst/>
-          </a:prstGeom>
-          <a:noFill/>
-          <a:ln/>
-        </p:spPr>
-        <p:txBody>
-          <a:bodyPr wrap="square" rtlCol="0" anchor="ctr"/>
-          <a:lstStyle/>
-          <a:p>
-            <a:pPr algn="ctr" indent="0" marL="0">
-              <a:buNone/>
-            </a:pPr>
-            <a:r>
-              <a:rPr lang="en-US" sz="1100" dirty="0">
-                <a:solidFill>
-                  <a:srgbClr val="94A3B8"/>
-                </a:solidFill>
-                <a:latin typeface="Calibri" pitchFamily="34" charset="0"/>
-                <a:ea typeface="Calibri" pitchFamily="34" charset="-122"/>
-                <a:cs typeface="Calibri" pitchFamily="34" charset="-120"/>
-              </a:rPr>
-              <a:t>FY18</a:t>
-            </a:r>
-            <a:endParaRPr lang="en-US" sz="1100" dirty="0"/>
-          </a:p>
-        </p:txBody>
-      </p:sp>
-      <p:sp>
-        <p:nvSpPr>
-          <p:cNvPr id="55" name="Text 53"/>
-          <p:cNvSpPr/>
-          <p:nvPr/>
-        </p:nvSpPr>
-        <p:spPr>
-          <a:xfrm>
-            <a:off x="11247120" y="6044184"/>
-            <a:ext cx="731520" cy="256032"/>
-          </a:xfrm>
-          <a:prstGeom prst="rect">
-            <a:avLst/>
-          </a:prstGeom>
-          <a:noFill/>
-          <a:ln/>
-        </p:spPr>
-        <p:txBody>
-          <a:bodyPr wrap="square" rtlCol="0" anchor="ctr"/>
-          <a:lstStyle/>
-          <a:p>
-            <a:pPr algn="ctr" indent="0" marL="0">
-              <a:buNone/>
-            </a:pPr>
-            <a:r>
-              <a:rPr lang="en-US" sz="1100" dirty="0">
-                <a:solidFill>
-                  <a:srgbClr val="94A3B8"/>
-                </a:solidFill>
-                <a:latin typeface="Calibri" pitchFamily="34" charset="0"/>
-                <a:ea typeface="Calibri" pitchFamily="34" charset="-122"/>
-                <a:cs typeface="Calibri" pitchFamily="34" charset="-120"/>
-              </a:rPr>
-              <a:t>FY19</a:t>
-            </a:r>
-            <a:endParaRPr lang="en-US" sz="1100" dirty="0"/>
-          </a:p>
-        </p:txBody>
-      </p:sp>
-      <p:sp>
-        <p:nvSpPr>
-          <p:cNvPr id="56" name="Shape 54"/>
-          <p:cNvSpPr/>
-          <p:nvPr/>
-        </p:nvSpPr>
-        <p:spPr>
-          <a:xfrm>
-            <a:off x="9116568" y="1984248"/>
-            <a:ext cx="2468880" cy="804672"/>
-          </a:xfrm>
-          <a:prstGeom prst="roundRect">
-            <a:avLst>
-              <a:gd name="adj" fmla="val 6818"/>
-            </a:avLst>
-          </a:prstGeom>
-          <a:solidFill>
-            <a:srgbClr val="0A1628"/>
-          </a:solidFill>
-          <a:ln w="12700">
-            <a:solidFill>
-              <a:srgbClr val="1E3350"/>
-            </a:solidFill>
-            <a:prstDash val="solid"/>
-          </a:ln>
-        </p:spPr>
-      </p:sp>
-      <p:sp>
-        <p:nvSpPr>
-          <p:cNvPr id="57" name="Shape 55"/>
-          <p:cNvSpPr/>
-          <p:nvPr/>
-        </p:nvSpPr>
-        <p:spPr>
-          <a:xfrm>
-            <a:off x="9281160" y="2240280"/>
-            <a:ext cx="365760" cy="914"/>
-          </a:xfrm>
-          <a:prstGeom prst="line">
-            <a:avLst/>
-          </a:prstGeom>
-          <a:noFill/>
-          <a:ln w="44450">
-            <a:solidFill>
-              <a:srgbClr val="F59E0B"/>
-            </a:solidFill>
-            <a:prstDash val="solid"/>
-          </a:ln>
-        </p:spPr>
-      </p:sp>
-      <p:sp>
-        <p:nvSpPr>
-          <p:cNvPr id="58" name="Text 56"/>
-          <p:cNvSpPr/>
-          <p:nvPr/>
-        </p:nvSpPr>
-        <p:spPr>
-          <a:xfrm>
-            <a:off x="9738360" y="2112264"/>
-            <a:ext cx="1828800" cy="237744"/>
-          </a:xfrm>
-          <a:prstGeom prst="rect">
-            <a:avLst/>
-          </a:prstGeom>
-          <a:noFill/>
-          <a:ln/>
-        </p:spPr>
-        <p:txBody>
-          <a:bodyPr wrap="square" rtlCol="0" anchor="ctr"/>
-          <a:lstStyle/>
-          <a:p>
-            <a:pPr indent="0" marL="0">
-              <a:buNone/>
-            </a:pPr>
-            <a:r>
-              <a:rPr lang="en-US" sz="1000" dirty="0">
-                <a:solidFill>
-                  <a:srgbClr val="FFFFFF"/>
-                </a:solidFill>
-                <a:latin typeface="Calibri" pitchFamily="34" charset="0"/>
-                <a:ea typeface="Calibri" pitchFamily="34" charset="-122"/>
-                <a:cs typeface="Calibri" pitchFamily="34" charset="-120"/>
-              </a:rPr>
-              <a:t>ForesightAI (comprehensive)</a:t>
-            </a:r>
-            <a:endParaRPr lang="en-US" sz="1000" dirty="0"/>
-          </a:p>
-        </p:txBody>
-      </p:sp>
-      <p:sp>
-        <p:nvSpPr>
-          <p:cNvPr id="59" name="Shape 57"/>
-          <p:cNvSpPr/>
-          <p:nvPr/>
-        </p:nvSpPr>
-        <p:spPr>
-          <a:xfrm>
-            <a:off x="9281160" y="2569464"/>
-            <a:ext cx="365760" cy="914"/>
-          </a:xfrm>
-          <a:prstGeom prst="line">
-            <a:avLst/>
-          </a:prstGeom>
-          <a:noFill/>
-          <a:ln w="31750">
-            <a:solidFill>
-              <a:srgbClr val="5B9BD5"/>
-            </a:solidFill>
-            <a:prstDash val="solid"/>
-          </a:ln>
-        </p:spPr>
-      </p:sp>
-      <p:sp>
-        <p:nvSpPr>
-          <p:cNvPr id="60" name="Text 58"/>
-          <p:cNvSpPr/>
-          <p:nvPr/>
-        </p:nvSpPr>
-        <p:spPr>
-          <a:xfrm>
-            <a:off x="9738360" y="2441448"/>
-            <a:ext cx="1828800" cy="237744"/>
-          </a:xfrm>
-          <a:prstGeom prst="rect">
-            <a:avLst/>
-          </a:prstGeom>
-          <a:noFill/>
-          <a:ln/>
-        </p:spPr>
-        <p:txBody>
-          <a:bodyPr wrap="square" rtlCol="0" anchor="ctr"/>
-          <a:lstStyle/>
-          <a:p>
-            <a:pPr indent="0" marL="0">
-              <a:buNone/>
-            </a:pPr>
-            <a:r>
-              <a:rPr lang="en-US" sz="1000" dirty="0">
-                <a:solidFill>
-                  <a:srgbClr val="94A3B8"/>
-                </a:solidFill>
-                <a:latin typeface="Calibri" pitchFamily="34" charset="0"/>
-                <a:ea typeface="Calibri" pitchFamily="34" charset="-122"/>
-                <a:cs typeface="Calibri" pitchFamily="34" charset="-120"/>
-              </a:rPr>
-              <a:t>Altman (financial only)</a:t>
-            </a:r>
-            <a:endParaRPr lang="en-US" sz="1000" dirty="0"/>
+              <a:t>The amber block is the risk Altman alone misses - only the comprehensive score shows it.</a:t>
+            </a:r>
+            <a:endParaRPr lang="en-US" sz="1050" dirty="0"/>
           </a:p>
         </p:txBody>
       </p:sp>
@@ -6912,7 +6065,9 @@
       </p:sp>
       <p:sp>
         <p:nvSpPr>
-          <p:cNvPr id="24" name="Shape 18"/>
+          <p:cNvPr id="24" name="Shape 18">
+            <a:hlinkClick r:id="rId5" tooltip="Open the live Foresight AI dashboard"/>
+          </p:cNvPr>
           <p:cNvSpPr/>
           <p:nvPr/>
         </p:nvSpPr>
@@ -6934,7 +6089,9 @@
       </p:sp>
       <p:sp>
         <p:nvSpPr>
-          <p:cNvPr id="25" name="Text 19"/>
+          <p:cNvPr id="25" name="Text 19">
+            <a:hlinkClick r:id="rId5" tooltip="Open the live Foresight AI dashboard"/>
+          </p:cNvPr>
           <p:cNvSpPr/>
           <p:nvPr/>
         </p:nvSpPr>
@@ -6957,31 +6114,45 @@
               <a:buNone/>
             </a:pPr>
             <a:r>
-              <a:rPr lang="en-US" sz="1800" b="1" dirty="0">
+              <a:rPr lang="en-US" sz="1700" b="1" u="sng" dirty="0">
                 <a:solidFill>
                   <a:srgbClr val="0A1628"/>
                 </a:solidFill>
                 <a:latin typeface="Calibri" pitchFamily="34" charset="0"/>
                 <a:ea typeface="Calibri" pitchFamily="34" charset="-122"/>
                 <a:cs typeface="Calibri" pitchFamily="34" charset="-120"/>
-              </a:rPr>
-              <a:t>Try it live   </a:t>
+                <a:hlinkClick r:id="rId5" invalidUrl="" action="" tgtFrame="" tooltip="Open the live Foresight AI dashboard" history="1" highlightClick="0" endSnd="0">
+                  <a:extLst>
+                    <a:ext uri="{A12FA001-AC4F-418D-AE19-62706E023703}">
+                      <ahyp:hlinkClr xmlns:ahyp="http://schemas.microsoft.com/office/drawing/2018/hyperlinkcolor" val="tx"/>
+                    </a:ext>
+                  </a:extLst>
+                </a:hlinkClick>
+              </a:rPr>
+              <a:t>Open the live dashboard   </a:t>
             </a:r>
             <a:pPr algn="ctr" indent="0" marL="0">
               <a:buNone/>
             </a:pPr>
             <a:r>
-              <a:rPr lang="en-US" sz="2000" b="1" dirty="0">
+              <a:rPr lang="en-US" sz="1900" b="1" u="sng" dirty="0">
                 <a:solidFill>
                   <a:srgbClr val="0A1628"/>
                 </a:solidFill>
                 <a:latin typeface="Calibri" pitchFamily="34" charset="0"/>
                 <a:ea typeface="Calibri" pitchFamily="34" charset="-122"/>
                 <a:cs typeface="Calibri" pitchFamily="34" charset="-120"/>
+                <a:hlinkClick r:id="rId5" invalidUrl="" action="" tgtFrame="" tooltip="Open the live Foresight AI dashboard" history="1" highlightClick="0" endSnd="0">
+                  <a:extLst>
+                    <a:ext uri="{A12FA001-AC4F-418D-AE19-62706E023703}">
+                      <ahyp:hlinkClr xmlns:ahyp="http://schemas.microsoft.com/office/drawing/2018/hyperlinkcolor" val="tx"/>
+                    </a:ext>
+                  </a:extLst>
+                </a:hlinkClick>
               </a:rPr>
               <a:t>foresightai.streamlit.app</a:t>
             </a:r>
-            <a:endParaRPr lang="en-US" sz="1800" dirty="0"/>
+            <a:endParaRPr lang="en-US" sz="1700" dirty="0"/>
           </a:p>
         </p:txBody>
       </p:sp>
@@ -7024,13 +6195,20 @@
               <a:buNone/>
             </a:pPr>
             <a:r>
-              <a:rPr lang="en-US" sz="1300" b="1" dirty="0">
+              <a:rPr lang="en-US" sz="1300" b="1" u="sng" dirty="0">
                 <a:solidFill>
                   <a:srgbClr val="FFFFFF"/>
                 </a:solidFill>
                 <a:latin typeface="Calibri" pitchFamily="34" charset="0"/>
                 <a:ea typeface="Calibri" pitchFamily="34" charset="-122"/>
                 <a:cs typeface="Calibri" pitchFamily="34" charset="-120"/>
+                <a:hlinkClick r:id="rId6" invalidUrl="" action="" tgtFrame="" tooltip="View the code on GitHub" history="1" highlightClick="0" endSnd="0">
+                  <a:extLst>
+                    <a:ext uri="{A12FA001-AC4F-418D-AE19-62706E023703}">
+                      <ahyp:hlinkClr xmlns:ahyp="http://schemas.microsoft.com/office/drawing/2018/hyperlinkcolor" val="tx"/>
+                    </a:ext>
+                  </a:extLst>
+                </a:hlinkClick>
               </a:rPr>
               <a:t>github.com/hiralsarkar/ForesightAI</a:t>
             </a:r>
@@ -7282,7 +6460,7 @@
         </p:xfrm>
         <a:graphic xmlns:a="http://schemas.openxmlformats.org/drawingml/2006/main">
           <a:graphicData uri="http://schemas.openxmlformats.org/drawingml/2006/chart">
-            <c:chart xmlns:c="http://schemas.openxmlformats.org/drawingml/2006/chart" r:id="rId5"/>
+            <c:chart xmlns:c="http://schemas.openxmlformats.org/drawingml/2006/chart" r:id="rId7"/>
           </a:graphicData>
         </a:graphic>
       </p:graphicFrame>

--- a/deck/ForesightAI.pptx
+++ b/deck/ForesightAI.pptx
@@ -4,6 +4,9 @@
   <p:sldMasterIdLst>
     <p:sldMasterId id="2147483648" r:id="rId1"/>
   </p:sldMasterIdLst>
+  <p:notesMasterIdLst>
+    <p:notesMasterId r:id="rId7"/>
+  </p:notesMasterIdLst>
   <p:sldIdLst>
     <p:sldId id="256" r:id="rId2"/>
     <p:sldId id="257" r:id="rId3"/>
@@ -11,11 +14,8 @@
     <p:sldId id="259" r:id="rId5"/>
     <p:sldId id="260" r:id="rId6"/>
   </p:sldIdLst>
-  <p:notesMasterIdLst>
-    <p:notesMasterId r:id="rId7"/>
-  </p:notesMasterIdLst>
-  <p:sldSz cx="12191695" cy="6858000"/>
-  <p:notesSz cx="6858000" cy="12191695"/>
+  <p:sldSz cx="12192000" cy="6858000"/>
+  <p:notesSz cx="6858000" cy="12192000"/>
   <p:defaultTextStyle>
     <a:lvl1pPr marL="0" algn="l" defTabSz="914400" rtl="0" eaLnBrk="1" latinLnBrk="0" hangingPunct="1">
       <a:defRPr sz="1800" kern="1200">
@@ -108,13 +108,20 @@
       </a:defRPr>
     </a:lvl9pPr>
   </p:defaultTextStyle>
+  <p:extLst>
+    <p:ext uri="{EFAFB233-063F-42B5-8137-9DF3F51BA10A}">
+      <p15:sldGuideLst xmlns:p15="http://schemas.microsoft.com/office/powerpoint/2012/main"/>
+    </p:ext>
+  </p:extLst>
 </p:presentation>
 </file>
 
 <file path=ppt/charts/chart1.xml><?xml version="1.0" encoding="utf-8"?>
-<c:chartSpace xmlns:c="http://schemas.openxmlformats.org/drawingml/2006/chart" xmlns:a="http://schemas.openxmlformats.org/drawingml/2006/main" xmlns:r="http://schemas.openxmlformats.org/officeDocument/2006/relationships">
+<c:chartSpace xmlns:c="http://schemas.openxmlformats.org/drawingml/2006/chart" xmlns:a="http://schemas.openxmlformats.org/drawingml/2006/main" xmlns:r="http://schemas.openxmlformats.org/officeDocument/2006/relationships" xmlns:c16r2="http://schemas.microsoft.com/office/drawing/2015/06/chart">
   <c:date1904 val="0"/>
+  <c:lang val="en-US"/>
   <c:roundedCorners val="1"/>
+  <c:style val="2"/>
   <c:chart>
     <c:autoTitleDeleted val="1"/>
     <c:plotArea>
@@ -164,6 +171,11 @@
               </a:ln>
               <a:effectLst/>
             </c:spPr>
+            <c:extLst>
+              <c:ext xmlns:c16="http://schemas.microsoft.com/office/drawing/2014/chart" uri="{C3380CC4-5D6E-409C-BE32-E72D297353CC}">
+                <c16:uniqueId val="{00000001-D1CE-47F4-A59C-17DCD59A40B0}"/>
+              </c:ext>
+            </c:extLst>
           </c:dPt>
           <c:dPt>
             <c:idx val="1"/>
@@ -181,81 +193,12 @@
               </a:ln>
               <a:effectLst/>
             </c:spPr>
+            <c:extLst>
+              <c:ext xmlns:c16="http://schemas.microsoft.com/office/drawing/2014/chart" uri="{C3380CC4-5D6E-409C-BE32-E72D297353CC}">
+                <c16:uniqueId val="{00000003-D1CE-47F4-A59C-17DCD59A40B0}"/>
+              </c:ext>
+            </c:extLst>
           </c:dPt>
-          <c:dLbls>
-            <c:dLbl>
-              <c:idx val="0"/>
-              <c:numFmt formatCode="General" sourceLinked="0"/>
-              <c:spPr/>
-              <c:txPr>
-                <a:bodyPr/>
-                <a:lstStyle/>
-                <a:p>
-                  <a:pPr>
-                    <a:defRPr sz="1200" b="0" i="0" u="none" strike="noStrike">
-                      <a:solidFill>
-                        <a:srgbClr val="000000"/>
-                      </a:solidFill>
-                      <a:latin typeface="Arial"/>
-                    </a:defRPr>
-                  </a:pPr>
-                </a:p>
-              </c:txPr>
-              <c:showLegendKey val="0"/>
-              <c:showVal val="0"/>
-              <c:showCatName val="0"/>
-              <c:showSerName val="0"/>
-              <c:showPercent val="0"/>
-              <c:showBubbleSize val="0"/>
-            </c:dLbl>
-            <c:dLbl>
-              <c:idx val="1"/>
-              <c:numFmt formatCode="General" sourceLinked="0"/>
-              <c:spPr/>
-              <c:txPr>
-                <a:bodyPr/>
-                <a:lstStyle/>
-                <a:p>
-                  <a:pPr>
-                    <a:defRPr sz="1200" b="0" i="0" u="none" strike="noStrike">
-                      <a:solidFill>
-                        <a:srgbClr val="000000"/>
-                      </a:solidFill>
-                      <a:latin typeface="Arial"/>
-                    </a:defRPr>
-                  </a:pPr>
-                </a:p>
-              </c:txPr>
-              <c:showLegendKey val="0"/>
-              <c:showVal val="0"/>
-              <c:showCatName val="0"/>
-              <c:showSerName val="0"/>
-              <c:showPercent val="0"/>
-              <c:showBubbleSize val="0"/>
-            </c:dLbl>
-            <c:numFmt formatCode="General" sourceLinked="0"/>
-            <c:txPr>
-              <a:bodyPr/>
-              <a:lstStyle/>
-              <a:p>
-                <a:pPr>
-                  <a:defRPr sz="1800" b="0" i="0" u="none" strike="noStrike">
-                    <a:solidFill>
-                      <a:srgbClr val="000000"/>
-                    </a:solidFill>
-                    <a:latin typeface="Arial"/>
-                  </a:defRPr>
-                </a:pPr>
-              </a:p>
-            </c:txPr>
-            <c:showLegendKey val="0"/>
-            <c:showVal val="0"/>
-            <c:showCatName val="1"/>
-            <c:showSerName val="0"/>
-            <c:showPercent val="1"/>
-            <c:showBubbleSize val="0"/>
-            <c:showLeaderLines val="0"/>
-          </c:dLbls>
           <c:cat>
             <c:strRef>
               <c:f>Sheet1!$A$2:$A$3</c:f>
@@ -274,6 +217,7 @@
             <c:numRef>
               <c:f>Sheet1!$B$2:$B$3</c:f>
               <c:numCache>
+                <c:formatCode>General</c:formatCode>
                 <c:ptCount val="2"/>
                 <c:pt idx="0">
                   <c:v>58</c:v>
@@ -284,7 +228,21 @@
               </c:numCache>
             </c:numRef>
           </c:val>
+          <c:extLst>
+            <c:ext xmlns:c16="http://schemas.microsoft.com/office/drawing/2014/chart" uri="{C3380CC4-5D6E-409C-BE32-E72D297353CC}">
+              <c16:uniqueId val="{00000004-D1CE-47F4-A59C-17DCD59A40B0}"/>
+            </c:ext>
+          </c:extLst>
         </c:ser>
+        <c:dLbls>
+          <c:showLegendKey val="0"/>
+          <c:showVal val="0"/>
+          <c:showCatName val="0"/>
+          <c:showSerName val="0"/>
+          <c:showPercent val="0"/>
+          <c:showBubbleSize val="0"/>
+          <c:showLeaderLines val="0"/>
+        </c:dLbls>
         <c:firstSliceAng val="0"/>
         <c:holeSize val="74"/>
       </c:doughnutChart>
@@ -298,6 +256,7 @@
     </c:plotArea>
     <c:plotVisOnly val="1"/>
     <c:dispBlanksAs val="span"/>
+    <c:showDLblsOverMax val="1"/>
   </c:chart>
   <c:spPr>
     <a:noFill/>
@@ -313,9 +272,11 @@
 </file>
 
 <file path=ppt/charts/chart2.xml><?xml version="1.0" encoding="utf-8"?>
-<c:chartSpace xmlns:c="http://schemas.openxmlformats.org/drawingml/2006/chart" xmlns:a="http://schemas.openxmlformats.org/drawingml/2006/main" xmlns:r="http://schemas.openxmlformats.org/officeDocument/2006/relationships">
+<c:chartSpace xmlns:c="http://schemas.openxmlformats.org/drawingml/2006/chart" xmlns:a="http://schemas.openxmlformats.org/drawingml/2006/main" xmlns:r="http://schemas.openxmlformats.org/officeDocument/2006/relationships" xmlns:c16r2="http://schemas.microsoft.com/office/drawing/2015/06/chart">
   <c:date1904 val="0"/>
+  <c:lang val="en-US"/>
   <c:roundedCorners val="1"/>
+  <c:style val="2"/>
   <c:chart>
     <c:autoTitleDeleted val="1"/>
     <c:plotArea>
@@ -345,66 +306,40 @@
             <a:effectLst/>
           </c:spPr>
           <c:invertIfNegative val="0"/>
-          <c:dLbls>
-            <c:numFmt formatCode="#,##0" sourceLinked="0"/>
-            <c:txPr>
-              <a:bodyPr/>
-              <a:lstStyle/>
-              <a:p>
-                <a:pPr>
-                  <a:defRPr b="0" i="0" strike="noStrike" sz="1200" u="none">
-                    <a:solidFill>
-                      <a:srgbClr val="000000"/>
-                    </a:solidFill>
-                    <a:latin typeface="Arial"/>
-                  </a:defRPr>
-                </a:pPr>
-              </a:p>
-            </c:txPr>
-            <c:showLegendKey val="0"/>
-            <c:showVal val="0"/>
-            <c:showCatName val="0"/>
-            <c:showSerName val="0"/>
-            <c:showPercent val="0"/>
-            <c:showBubbleSize val="0"/>
-            <c:showLeaderLines val="0"/>
-          </c:dLbls>
           <c:cat>
-            <c:multiLvlStrRef>
+            <c:strRef>
               <c:f>Sheet1!$A$2:$A$10</c:f>
-              <c:multiLvlStrCache>
+              <c:strCache>
                 <c:ptCount val="9"/>
-                <c:lvl>
-                  <c:pt idx="0">
-                    <c:v>FY15</c:v>
-                  </c:pt>
-                  <c:pt idx="1">
-                    <c:v>FY16</c:v>
-                  </c:pt>
-                  <c:pt idx="2">
-                    <c:v>FY17</c:v>
-                  </c:pt>
-                  <c:pt idx="3">
-                    <c:v>FY18</c:v>
-                  </c:pt>
-                  <c:pt idx="4">
-                    <c:v>FY19</c:v>
-                  </c:pt>
-                  <c:pt idx="5">
-                    <c:v>FY20</c:v>
-                  </c:pt>
-                  <c:pt idx="6">
-                    <c:v>FY21</c:v>
-                  </c:pt>
-                  <c:pt idx="7">
-                    <c:v>FY22</c:v>
-                  </c:pt>
-                  <c:pt idx="8">
-                    <c:v>FY23</c:v>
-                  </c:pt>
-                </c:lvl>
-              </c:multiLvlStrCache>
-            </c:multiLvlStrRef>
+                <c:pt idx="0">
+                  <c:v>FY15</c:v>
+                </c:pt>
+                <c:pt idx="1">
+                  <c:v>FY16</c:v>
+                </c:pt>
+                <c:pt idx="2">
+                  <c:v>FY17</c:v>
+                </c:pt>
+                <c:pt idx="3">
+                  <c:v>FY18</c:v>
+                </c:pt>
+                <c:pt idx="4">
+                  <c:v>FY19</c:v>
+                </c:pt>
+                <c:pt idx="5">
+                  <c:v>FY20</c:v>
+                </c:pt>
+                <c:pt idx="6">
+                  <c:v>FY21</c:v>
+                </c:pt>
+                <c:pt idx="7">
+                  <c:v>FY22</c:v>
+                </c:pt>
+                <c:pt idx="8">
+                  <c:v>FY23</c:v>
+                </c:pt>
+              </c:strCache>
+            </c:strRef>
           </c:cat>
           <c:val>
             <c:numRef>
@@ -442,6 +377,11 @@
               </c:numCache>
             </c:numRef>
           </c:val>
+          <c:extLst>
+            <c:ext xmlns:c16="http://schemas.microsoft.com/office/drawing/2014/chart" uri="{C3380CC4-5D6E-409C-BE32-E72D297353CC}">
+              <c16:uniqueId val="{00000000-6D01-4D2F-96DC-1B2F4918DE4A}"/>
+            </c:ext>
+          </c:extLst>
         </c:ser>
         <c:ser>
           <c:idx val="1"/>
@@ -464,66 +404,40 @@
             <a:effectLst/>
           </c:spPr>
           <c:invertIfNegative val="0"/>
-          <c:dLbls>
-            <c:numFmt formatCode="#,##0" sourceLinked="0"/>
-            <c:txPr>
-              <a:bodyPr/>
-              <a:lstStyle/>
-              <a:p>
-                <a:pPr>
-                  <a:defRPr b="0" i="0" strike="noStrike" sz="1200" u="none">
-                    <a:solidFill>
-                      <a:srgbClr val="000000"/>
-                    </a:solidFill>
-                    <a:latin typeface="Arial"/>
-                  </a:defRPr>
-                </a:pPr>
-              </a:p>
-            </c:txPr>
-            <c:showLegendKey val="0"/>
-            <c:showVal val="0"/>
-            <c:showCatName val="0"/>
-            <c:showSerName val="0"/>
-            <c:showPercent val="0"/>
-            <c:showBubbleSize val="0"/>
-            <c:showLeaderLines val="0"/>
-          </c:dLbls>
           <c:cat>
-            <c:multiLvlStrRef>
+            <c:strRef>
               <c:f>Sheet1!$A$2:$A$10</c:f>
-              <c:multiLvlStrCache>
+              <c:strCache>
                 <c:ptCount val="9"/>
-                <c:lvl>
-                  <c:pt idx="0">
-                    <c:v>FY15</c:v>
-                  </c:pt>
-                  <c:pt idx="1">
-                    <c:v>FY16</c:v>
-                  </c:pt>
-                  <c:pt idx="2">
-                    <c:v>FY17</c:v>
-                  </c:pt>
-                  <c:pt idx="3">
-                    <c:v>FY18</c:v>
-                  </c:pt>
-                  <c:pt idx="4">
-                    <c:v>FY19</c:v>
-                  </c:pt>
-                  <c:pt idx="5">
-                    <c:v>FY20</c:v>
-                  </c:pt>
-                  <c:pt idx="6">
-                    <c:v>FY21</c:v>
-                  </c:pt>
-                  <c:pt idx="7">
-                    <c:v>FY22</c:v>
-                  </c:pt>
-                  <c:pt idx="8">
-                    <c:v>FY23</c:v>
-                  </c:pt>
-                </c:lvl>
-              </c:multiLvlStrCache>
-            </c:multiLvlStrRef>
+                <c:pt idx="0">
+                  <c:v>FY15</c:v>
+                </c:pt>
+                <c:pt idx="1">
+                  <c:v>FY16</c:v>
+                </c:pt>
+                <c:pt idx="2">
+                  <c:v>FY17</c:v>
+                </c:pt>
+                <c:pt idx="3">
+                  <c:v>FY18</c:v>
+                </c:pt>
+                <c:pt idx="4">
+                  <c:v>FY19</c:v>
+                </c:pt>
+                <c:pt idx="5">
+                  <c:v>FY20</c:v>
+                </c:pt>
+                <c:pt idx="6">
+                  <c:v>FY21</c:v>
+                </c:pt>
+                <c:pt idx="7">
+                  <c:v>FY22</c:v>
+                </c:pt>
+                <c:pt idx="8">
+                  <c:v>FY23</c:v>
+                </c:pt>
+              </c:strCache>
+            </c:strRef>
           </c:cat>
           <c:val>
             <c:numRef>
@@ -561,36 +475,24 @@
               </c:numCache>
             </c:numRef>
           </c:val>
+          <c:extLst>
+            <c:ext xmlns:c16="http://schemas.microsoft.com/office/drawing/2014/chart" uri="{C3380CC4-5D6E-409C-BE32-E72D297353CC}">
+              <c16:uniqueId val="{00000001-6D01-4D2F-96DC-1B2F4918DE4A}"/>
+            </c:ext>
+          </c:extLst>
         </c:ser>
         <c:dLbls>
-          <c:numFmt formatCode="#,##0" sourceLinked="0"/>
-          <c:txPr>
-            <a:bodyPr/>
-            <a:lstStyle/>
-            <a:p>
-              <a:pPr>
-                <a:defRPr b="0" i="0" strike="noStrike" sz="1200" u="none">
-                  <a:solidFill>
-                    <a:srgbClr val="000000"/>
-                  </a:solidFill>
-                  <a:latin typeface="Arial"/>
-                </a:defRPr>
-              </a:pPr>
-            </a:p>
-          </c:txPr>
           <c:showLegendKey val="0"/>
           <c:showVal val="0"/>
           <c:showCatName val="0"/>
           <c:showSerName val="0"/>
           <c:showPercent val="0"/>
           <c:showBubbleSize val="0"/>
-          <c:showLeaderLines val="0"/>
         </c:dLbls>
         <c:gapWidth val="45"/>
         <c:overlap val="100"/>
         <c:axId val="2094734554"/>
         <c:axId val="2094734552"/>
-        <c:axId val="2094734556"/>
       </c:barChart>
       <c:catAx>
         <c:axId val="2094734554"/>
@@ -629,6 +531,7 @@
         <c:crosses val="autoZero"/>
         <c:auto val="1"/>
         <c:lblAlgn val="ctr"/>
+        <c:lblOffset val="100"/>
         <c:noMultiLvlLbl val="1"/>
       </c:catAx>
       <c:valAx>
@@ -710,6 +613,7 @@
     </c:legend>
     <c:plotVisOnly val="1"/>
     <c:dispBlanksAs val="span"/>
+    <c:showDLblsOverMax val="1"/>
   </c:chart>
   <c:spPr>
     <a:noFill/>
@@ -725,9 +629,11 @@
 </file>
 
 <file path=ppt/charts/chart3.xml><?xml version="1.0" encoding="utf-8"?>
-<c:chartSpace xmlns:c="http://schemas.openxmlformats.org/drawingml/2006/chart" xmlns:a="http://schemas.openxmlformats.org/drawingml/2006/main" xmlns:r="http://schemas.openxmlformats.org/officeDocument/2006/relationships">
+<c:chartSpace xmlns:c="http://schemas.openxmlformats.org/drawingml/2006/chart" xmlns:a="http://schemas.openxmlformats.org/drawingml/2006/main" xmlns:r="http://schemas.openxmlformats.org/officeDocument/2006/relationships" xmlns:c16r2="http://schemas.microsoft.com/office/drawing/2015/06/chart">
   <c:date1904 val="0"/>
+  <c:lang val="en-US"/>
   <c:roundedCorners val="1"/>
+  <c:style val="2"/>
   <c:chart>
     <c:autoTitleDeleted val="1"/>
     <c:plotArea>
@@ -777,6 +683,11 @@
               </a:ln>
               <a:effectLst/>
             </c:spPr>
+            <c:extLst>
+              <c:ext xmlns:c16="http://schemas.microsoft.com/office/drawing/2014/chart" uri="{C3380CC4-5D6E-409C-BE32-E72D297353CC}">
+                <c16:uniqueId val="{00000001-7329-49C7-9E0C-634D159C3487}"/>
+              </c:ext>
+            </c:extLst>
           </c:dPt>
           <c:dPt>
             <c:idx val="1"/>
@@ -794,81 +705,12 @@
               </a:ln>
               <a:effectLst/>
             </c:spPr>
+            <c:extLst>
+              <c:ext xmlns:c16="http://schemas.microsoft.com/office/drawing/2014/chart" uri="{C3380CC4-5D6E-409C-BE32-E72D297353CC}">
+                <c16:uniqueId val="{00000003-7329-49C7-9E0C-634D159C3487}"/>
+              </c:ext>
+            </c:extLst>
           </c:dPt>
-          <c:dLbls>
-            <c:dLbl>
-              <c:idx val="0"/>
-              <c:numFmt formatCode="General" sourceLinked="0"/>
-              <c:spPr/>
-              <c:txPr>
-                <a:bodyPr/>
-                <a:lstStyle/>
-                <a:p>
-                  <a:pPr>
-                    <a:defRPr sz="1200" b="0" i="0" u="none" strike="noStrike">
-                      <a:solidFill>
-                        <a:srgbClr val="000000"/>
-                      </a:solidFill>
-                      <a:latin typeface="Arial"/>
-                    </a:defRPr>
-                  </a:pPr>
-                </a:p>
-              </c:txPr>
-              <c:showLegendKey val="0"/>
-              <c:showVal val="0"/>
-              <c:showCatName val="0"/>
-              <c:showSerName val="0"/>
-              <c:showPercent val="0"/>
-              <c:showBubbleSize val="0"/>
-            </c:dLbl>
-            <c:dLbl>
-              <c:idx val="1"/>
-              <c:numFmt formatCode="General" sourceLinked="0"/>
-              <c:spPr/>
-              <c:txPr>
-                <a:bodyPr/>
-                <a:lstStyle/>
-                <a:p>
-                  <a:pPr>
-                    <a:defRPr sz="1200" b="0" i="0" u="none" strike="noStrike">
-                      <a:solidFill>
-                        <a:srgbClr val="000000"/>
-                      </a:solidFill>
-                      <a:latin typeface="Arial"/>
-                    </a:defRPr>
-                  </a:pPr>
-                </a:p>
-              </c:txPr>
-              <c:showLegendKey val="0"/>
-              <c:showVal val="0"/>
-              <c:showCatName val="0"/>
-              <c:showSerName val="0"/>
-              <c:showPercent val="0"/>
-              <c:showBubbleSize val="0"/>
-            </c:dLbl>
-            <c:numFmt formatCode="General" sourceLinked="0"/>
-            <c:txPr>
-              <a:bodyPr/>
-              <a:lstStyle/>
-              <a:p>
-                <a:pPr>
-                  <a:defRPr sz="1800" b="0" i="0" u="none" strike="noStrike">
-                    <a:solidFill>
-                      <a:srgbClr val="000000"/>
-                    </a:solidFill>
-                    <a:latin typeface="Arial"/>
-                  </a:defRPr>
-                </a:pPr>
-              </a:p>
-            </c:txPr>
-            <c:showLegendKey val="0"/>
-            <c:showVal val="0"/>
-            <c:showCatName val="1"/>
-            <c:showSerName val="0"/>
-            <c:showPercent val="1"/>
-            <c:showBubbleSize val="0"/>
-            <c:showLeaderLines val="0"/>
-          </c:dLbls>
           <c:cat>
             <c:strRef>
               <c:f>Sheet1!$A$2:$A$3</c:f>
@@ -887,6 +729,7 @@
             <c:numRef>
               <c:f>Sheet1!$B$2:$B$3</c:f>
               <c:numCache>
+                <c:formatCode>General</c:formatCode>
                 <c:ptCount val="2"/>
                 <c:pt idx="0">
                   <c:v>58</c:v>
@@ -897,7 +740,21 @@
               </c:numCache>
             </c:numRef>
           </c:val>
+          <c:extLst>
+            <c:ext xmlns:c16="http://schemas.microsoft.com/office/drawing/2014/chart" uri="{C3380CC4-5D6E-409C-BE32-E72D297353CC}">
+              <c16:uniqueId val="{00000004-7329-49C7-9E0C-634D159C3487}"/>
+            </c:ext>
+          </c:extLst>
         </c:ser>
+        <c:dLbls>
+          <c:showLegendKey val="0"/>
+          <c:showVal val="0"/>
+          <c:showCatName val="0"/>
+          <c:showSerName val="0"/>
+          <c:showPercent val="0"/>
+          <c:showBubbleSize val="0"/>
+          <c:showLeaderLines val="0"/>
+        </c:dLbls>
         <c:firstSliceAng val="0"/>
         <c:holeSize val="74"/>
       </c:doughnutChart>
@@ -911,6 +768,7 @@
     </c:plotArea>
     <c:plotVisOnly val="1"/>
     <c:dispBlanksAs val="span"/>
+    <c:showDLblsOverMax val="1"/>
   </c:chart>
   <c:spPr>
     <a:noFill/>
@@ -947,234 +805,10 @@
           <a:chExt cx="0" cy="0"/>
         </a:xfrm>
       </p:grpSpPr>
-      <p:sp>
-        <p:nvSpPr>
-          <p:cNvPr id="2" name="Header Placeholder 1"/>
-          <p:cNvSpPr>
-            <a:spLocks noGrp="1"/>
-          </p:cNvSpPr>
-          <p:nvPr>
-            <p:ph type="hdr" sz="quarter"/>
-          </p:nvPr>
-        </p:nvSpPr>
-        <p:spPr>
-          <a:xfrm>
-            <a:off x="0" y="0"/>
-            <a:ext cx="2971800" cy="458788"/>
-          </a:xfrm>
-          <a:prstGeom prst="rect">
-            <a:avLst/>
-          </a:prstGeom>
-        </p:spPr>
-        <p:txBody>
-          <a:bodyPr vert="horz" lIns="91440" tIns="45720" rIns="91440" bIns="45720" rtlCol="0"/>
-          <a:lstStyle>
-            <a:lvl1pPr algn="l">
-              <a:defRPr sz="1200"/>
-            </a:lvl1pPr>
-          </a:lstStyle>
-          <a:p>
-            <a:endParaRPr lang="en-US"/>
-          </a:p>
-        </p:txBody>
-      </p:sp>
-      <p:sp>
-        <p:nvSpPr>
-          <p:cNvPr id="3" name="Date Placeholder 2"/>
-          <p:cNvSpPr>
-            <a:spLocks noGrp="1"/>
-          </p:cNvSpPr>
-          <p:nvPr>
-            <p:ph type="dt" idx="1"/>
-          </p:nvPr>
-        </p:nvSpPr>
-        <p:spPr>
-          <a:xfrm>
-            <a:off x="3884613" y="0"/>
-            <a:ext cx="2971800" cy="458788"/>
-          </a:xfrm>
-          <a:prstGeom prst="rect">
-            <a:avLst/>
-          </a:prstGeom>
-        </p:spPr>
-        <p:txBody>
-          <a:bodyPr vert="horz" lIns="91440" tIns="45720" rIns="91440" bIns="45720" rtlCol="0"/>
-          <a:lstStyle>
-            <a:lvl1pPr algn="r">
-              <a:defRPr sz="1200"/>
-            </a:lvl1pPr>
-          </a:lstStyle>
-          <a:p>
-            <a:fld id="{5282F153-3F37-0F45-9E97-73ACFA13230C}" type="datetimeFigureOut">
-              <a:rPr lang="en-US"/>
-              <a:t>7/23/19</a:t>
-            </a:fld>
-            <a:endParaRPr lang="en-US"/>
-          </a:p>
-        </p:txBody>
-      </p:sp>
-      <p:sp>
-        <p:nvSpPr>
-          <p:cNvPr id="4" name="Slide Image Placeholder 3"/>
-          <p:cNvSpPr>
-            <a:spLocks noGrp="1" noRot="1" noChangeAspect="1"/>
-          </p:cNvSpPr>
-          <p:nvPr>
-            <p:ph type="sldImg" idx="2"/>
-          </p:nvPr>
-        </p:nvSpPr>
-        <p:spPr>
-          <a:xfrm>
-            <a:off x="685800" y="1143000"/>
-            <a:ext cx="5486400" cy="3086100"/>
-          </a:xfrm>
-          <a:prstGeom prst="rect">
-            <a:avLst/>
-          </a:prstGeom>
-          <a:noFill/>
-          <a:ln w="12700">
-            <a:solidFill>
-              <a:prstClr val="black"/>
-            </a:solidFill>
-          </a:ln>
-        </p:spPr>
-        <p:txBody>
-          <a:bodyPr vert="horz" lIns="91440" tIns="45720" rIns="91440" bIns="45720" rtlCol="0" anchor="ctr"/>
-          <a:lstStyle/>
-          <a:p>
-            <a:endParaRPr lang="en-US"/>
-          </a:p>
-        </p:txBody>
-      </p:sp>
-      <p:sp>
-        <p:nvSpPr>
-          <p:cNvPr id="5" name="Notes Placeholder 4"/>
-          <p:cNvSpPr>
-            <a:spLocks noGrp="1"/>
-          </p:cNvSpPr>
-          <p:nvPr>
-            <p:ph type="body" sz="quarter" idx="3"/>
-          </p:nvPr>
-        </p:nvSpPr>
-        <p:spPr>
-          <a:xfrm>
-            <a:off x="685800" y="4400550"/>
-            <a:ext cx="5486400" cy="3600450"/>
-          </a:xfrm>
-          <a:prstGeom prst="rect">
-            <a:avLst/>
-          </a:prstGeom>
-        </p:spPr>
-        <p:txBody>
-          <a:bodyPr vert="horz" lIns="91440" tIns="45720" rIns="91440" bIns="45720" rtlCol="0"/>
-          <a:lstStyle/>
-          <a:p>
-            <a:pPr lvl="0"/>
-            <a:r>
-              <a:rPr lang="en-US"/>
-              <a:t>Click to edit Master text styles</a:t>
-            </a:r>
-          </a:p>
-          <a:p>
-            <a:pPr lvl="1"/>
-            <a:r>
-              <a:rPr lang="en-US"/>
-              <a:t>Second level</a:t>
-            </a:r>
-          </a:p>
-          <a:p>
-            <a:pPr lvl="2"/>
-            <a:r>
-              <a:rPr lang="en-US"/>
-              <a:t>Third level</a:t>
-            </a:r>
-          </a:p>
-          <a:p>
-            <a:pPr lvl="3"/>
-            <a:r>
-              <a:rPr lang="en-US"/>
-              <a:t>Fourth level</a:t>
-            </a:r>
-          </a:p>
-          <a:p>
-            <a:pPr lvl="4"/>
-            <a:r>
-              <a:rPr lang="en-US"/>
-              <a:t>Fifth level</a:t>
-            </a:r>
-          </a:p>
-        </p:txBody>
-      </p:sp>
-      <p:sp>
-        <p:nvSpPr>
-          <p:cNvPr id="6" name="Footer Placeholder 5"/>
-          <p:cNvSpPr>
-            <a:spLocks noGrp="1"/>
-          </p:cNvSpPr>
-          <p:nvPr>
-            <p:ph type="ftr" sz="quarter" idx="4"/>
-          </p:nvPr>
-        </p:nvSpPr>
-        <p:spPr>
-          <a:xfrm>
-            <a:off x="0" y="8685213"/>
-            <a:ext cx="2971800" cy="458787"/>
-          </a:xfrm>
-          <a:prstGeom prst="rect">
-            <a:avLst/>
-          </a:prstGeom>
-        </p:spPr>
-        <p:txBody>
-          <a:bodyPr vert="horz" lIns="91440" tIns="45720" rIns="91440" bIns="45720" rtlCol="0" anchor="b"/>
-          <a:lstStyle>
-            <a:lvl1pPr algn="l">
-              <a:defRPr sz="1200"/>
-            </a:lvl1pPr>
-          </a:lstStyle>
-          <a:p>
-            <a:endParaRPr lang="en-US"/>
-          </a:p>
-        </p:txBody>
-      </p:sp>
-      <p:sp>
-        <p:nvSpPr>
-          <p:cNvPr id="7" name="Slide Number Placeholder 6"/>
-          <p:cNvSpPr>
-            <a:spLocks noGrp="1"/>
-          </p:cNvSpPr>
-          <p:nvPr>
-            <p:ph type="sldNum" sz="quarter" idx="5"/>
-          </p:nvPr>
-        </p:nvSpPr>
-        <p:spPr>
-          <a:xfrm>
-            <a:off x="3884613" y="8685213"/>
-            <a:ext cx="2971800" cy="458787"/>
-          </a:xfrm>
-          <a:prstGeom prst="rect">
-            <a:avLst/>
-          </a:prstGeom>
-        </p:spPr>
-        <p:txBody>
-          <a:bodyPr vert="horz" lIns="91440" tIns="45720" rIns="91440" bIns="45720" rtlCol="0" anchor="b"/>
-          <a:lstStyle>
-            <a:lvl1pPr algn="r">
-              <a:defRPr sz="1200"/>
-            </a:lvl1pPr>
-          </a:lstStyle>
-          <a:p>
-            <a:fld id="{CE5E9CC1-C706-0F49-92D6-E571CC5EEA8F}" type="slidenum">
-              <a:rPr lang="en-US"/>
-              <a:t>‹#›</a:t>
-            </a:fld>
-            <a:endParaRPr lang="en-US"/>
-          </a:p>
-        </p:txBody>
-      </p:sp>
     </p:spTree>
     <p:extLst>
       <p:ext uri="{BB962C8B-B14F-4D97-AF65-F5344CB8AC3E}">
-        <p14:creationId xmlns:p14="http://schemas.microsoft.com/office/powerpoint/2010/main" val="1024086991"/>
+        <p14:creationId xmlns:p14="http://schemas.microsoft.com/office/powerpoint/2010/main" val="1283528057"/>
       </p:ext>
     </p:extLst>
   </p:cSld>
@@ -1318,10 +952,6 @@
           <a:bodyPr/>
           <a:lstStyle/>
           <a:p>
-            <a:r>
-              <a:rPr lang="en-US" dirty="0"/>
-              <a:t/>
-            </a:r>
             <a:endParaRPr lang="en-US" dirty="0"/>
           </a:p>
         </p:txBody>
@@ -1406,10 +1036,6 @@
           <a:bodyPr/>
           <a:lstStyle/>
           <a:p>
-            <a:r>
-              <a:rPr lang="en-US" dirty="0"/>
-              <a:t/>
-            </a:r>
             <a:endParaRPr lang="en-US" dirty="0"/>
           </a:p>
         </p:txBody>
@@ -1494,10 +1120,6 @@
           <a:bodyPr/>
           <a:lstStyle/>
           <a:p>
-            <a:r>
-              <a:rPr lang="en-US" dirty="0"/>
-              <a:t/>
-            </a:r>
             <a:endParaRPr lang="en-US" dirty="0"/>
           </a:p>
         </p:txBody>
@@ -1582,10 +1204,6 @@
           <a:bodyPr/>
           <a:lstStyle/>
           <a:p>
-            <a:r>
-              <a:rPr lang="en-US" dirty="0"/>
-              <a:t/>
-            </a:r>
             <a:endParaRPr lang="en-US" dirty="0"/>
           </a:p>
         </p:txBody>
@@ -1670,10 +1288,6 @@
           <a:bodyPr/>
           <a:lstStyle/>
           <a:p>
-            <a:r>
-              <a:rPr lang="en-US" dirty="0"/>
-              <a:t/>
-            </a:r>
             <a:endParaRPr lang="en-US" dirty="0"/>
           </a:p>
         </p:txBody>
@@ -1747,6 +1361,11 @@
 <file path=ppt/slideMasters/slideMaster1.xml><?xml version="1.0" encoding="utf-8"?>
 <p:sldMaster xmlns:a="http://schemas.openxmlformats.org/drawingml/2006/main" xmlns:r="http://schemas.openxmlformats.org/officeDocument/2006/relationships" xmlns:p="http://schemas.openxmlformats.org/presentationml/2006/main">
   <p:cSld>
+    <p:bg>
+      <p:bgRef idx="1001">
+        <a:schemeClr val="bg1"/>
+      </p:bgRef>
+    </p:bg>
     <p:spTree>
       <p:nvGrpSpPr>
         <p:cNvPr id="1" name=""/>
@@ -2029,6 +1648,7 @@
         <a:solidFill>
           <a:srgbClr val="0A1628"/>
         </a:solidFill>
+        <a:effectLst/>
       </p:bgPr>
     </p:bg>
     <p:spTree>
@@ -2066,11 +1686,11 @@
           <a:bodyPr wrap="square" rtlCol="0" anchor="ctr"/>
           <a:lstStyle/>
           <a:p>
-            <a:pPr indent="0" marL="0">
+            <a:pPr marL="0" indent="0">
               <a:buNone/>
             </a:pPr>
             <a:r>
-              <a:rPr lang="en-US" sz="1300" b="1" spc="400" kern="0" dirty="0">
+              <a:rPr lang="en-US" sz="1300" b="1" kern="0" spc="400" dirty="0">
                 <a:solidFill>
                   <a:srgbClr val="F59E0B"/>
                 </a:solidFill>
@@ -2078,7 +1698,7 @@
                 <a:ea typeface="Calibri" pitchFamily="34" charset="-122"/>
                 <a:cs typeface="Calibri" pitchFamily="34" charset="-120"/>
               </a:rPr>
-              <a:t>LIVE CORPORATE RISK ENGINE</a:t>
+              <a:t>LIVE CORPORATE RISK INTELLIGENCE SYSTEM</a:t>
             </a:r>
             <a:endParaRPr lang="en-US" sz="1300" dirty="0"/>
           </a:p>
@@ -2105,7 +1725,7 @@
           <a:bodyPr wrap="square" rtlCol="0" anchor="ctr"/>
           <a:lstStyle/>
           <a:p>
-            <a:pPr indent="0" marL="0">
+            <a:pPr marL="0" indent="0">
               <a:buNone/>
             </a:pPr>
             <a:r>
@@ -2119,9 +1739,6 @@
               </a:rPr>
               <a:t>Foresight </a:t>
             </a:r>
-            <a:pPr indent="0" marL="0">
-              <a:buNone/>
-            </a:pPr>
             <a:r>
               <a:rPr lang="en-US" sz="6600" b="1" dirty="0">
                 <a:solidFill>
@@ -2145,8 +1762,8 @@
         </p:nvSpPr>
         <p:spPr>
           <a:xfrm>
-            <a:off x="822960" y="2788920"/>
-            <a:ext cx="7223760" cy="1097280"/>
+            <a:off x="822960" y="2788919"/>
+            <a:ext cx="7863840" cy="1198039"/>
           </a:xfrm>
           <a:prstGeom prst="rect">
             <a:avLst/>
@@ -2158,12 +1775,22 @@
           <a:bodyPr wrap="square" rtlCol="0" anchor="ctr"/>
           <a:lstStyle/>
           <a:p>
-            <a:pPr indent="0" marL="0">
+            <a:pPr>
               <a:lnSpc>
                 <a:spcPct val="112000"/>
               </a:lnSpc>
-              <a:buNone/>
-            </a:pPr>
+            </a:pPr>
+            <a:r>
+              <a:rPr lang="en-US" dirty="0">
+                <a:solidFill>
+                  <a:srgbClr val="94A3B8"/>
+                </a:solidFill>
+                <a:latin typeface="Calibri" pitchFamily="34" charset="0"/>
+                <a:ea typeface="Calibri" pitchFamily="34" charset="-122"/>
+                <a:cs typeface="Calibri" pitchFamily="34" charset="-120"/>
+              </a:rPr>
+              <a:t>O</a:t>
+            </a:r>
             <a:r>
               <a:rPr lang="en-US" sz="1800" dirty="0">
                 <a:solidFill>
@@ -2173,63 +1800,82 @@
                 <a:ea typeface="Calibri" pitchFamily="34" charset="-122"/>
                 <a:cs typeface="Calibri" pitchFamily="34" charset="-120"/>
               </a:rPr>
-              <a:t>Point it at any listed Indian company. Get one explainable 0-100 score</a:t>
+              <a:t>ne explainable 0-100 score</a:t>
+            </a:r>
+            <a:r>
+              <a:rPr lang="en-US" dirty="0"/>
+              <a:t> </a:t>
+            </a:r>
+            <a:r>
+              <a:rPr lang="en-US" sz="1800" dirty="0">
+                <a:solidFill>
+                  <a:srgbClr val="94A3B8"/>
+                </a:solidFill>
+                <a:latin typeface="Calibri" pitchFamily="34" charset="0"/>
+                <a:ea typeface="Calibri" pitchFamily="34" charset="-122"/>
+                <a:cs typeface="Calibri" pitchFamily="34" charset="-120"/>
+              </a:rPr>
+              <a:t>that fuses the </a:t>
+            </a:r>
+            <a:r>
+              <a:rPr lang="en-US" sz="1800" b="1" dirty="0">
+                <a:solidFill>
+                  <a:srgbClr val="94A3B8"/>
+                </a:solidFill>
+                <a:latin typeface="Calibri" pitchFamily="34" charset="0"/>
+                <a:ea typeface="Calibri" pitchFamily="34" charset="-122"/>
+                <a:cs typeface="Calibri" pitchFamily="34" charset="-120"/>
+              </a:rPr>
+              <a:t>Altman Z-Score </a:t>
+            </a:r>
+            <a:r>
+              <a:rPr lang="en-US" sz="1800" dirty="0">
+                <a:solidFill>
+                  <a:srgbClr val="94A3B8"/>
+                </a:solidFill>
+                <a:latin typeface="Calibri" pitchFamily="34" charset="0"/>
+                <a:ea typeface="Calibri" pitchFamily="34" charset="-122"/>
+                <a:cs typeface="Calibri" pitchFamily="34" charset="-120"/>
+              </a:rPr>
+              <a:t>(Company Financial Analysis) with the </a:t>
+            </a:r>
+            <a:r>
+              <a:rPr lang="en-US" sz="1800" b="1" dirty="0">
+                <a:solidFill>
+                  <a:srgbClr val="94A3B8"/>
+                </a:solidFill>
+                <a:latin typeface="Calibri" pitchFamily="34" charset="0"/>
+                <a:ea typeface="Calibri" pitchFamily="34" charset="-122"/>
+                <a:cs typeface="Calibri" pitchFamily="34" charset="-120"/>
+              </a:rPr>
+              <a:t>Market signals </a:t>
+            </a:r>
+            <a:r>
+              <a:rPr lang="en-US" dirty="0">
+                <a:solidFill>
+                  <a:srgbClr val="94A3B8"/>
+                </a:solidFill>
+                <a:latin typeface="Calibri" pitchFamily="34" charset="0"/>
+                <a:ea typeface="Calibri" pitchFamily="34" charset="-122"/>
+                <a:cs typeface="Calibri" pitchFamily="34" charset="-120"/>
+              </a:rPr>
+              <a:t>(credit ratings, leadership, news, hiring and employee sentiment) Live, giving you a Comprehensive Understanding in one go.</a:t>
             </a:r>
             <a:endParaRPr lang="en-US" sz="1800" dirty="0"/>
           </a:p>
-          <a:p>
-            <a:pPr indent="0" marL="0">
-              <a:lnSpc>
-                <a:spcPct val="112000"/>
-              </a:lnSpc>
-              <a:buNone/>
-            </a:pPr>
-            <a:r>
-              <a:rPr lang="en-US" sz="1800" dirty="0">
-                <a:solidFill>
-                  <a:srgbClr val="94A3B8"/>
-                </a:solidFill>
-                <a:latin typeface="Calibri" pitchFamily="34" charset="0"/>
-                <a:ea typeface="Calibri" pitchFamily="34" charset="-122"/>
-                <a:cs typeface="Calibri" pitchFamily="34" charset="-120"/>
-              </a:rPr>
-              <a:t>that fuses the Altman Z-Score with the market signals others read separately:</a:t>
-            </a:r>
-            <a:endParaRPr lang="en-US" sz="1800" dirty="0"/>
-          </a:p>
-          <a:p>
-            <a:pPr indent="0" marL="0">
-              <a:lnSpc>
-                <a:spcPct val="112000"/>
-              </a:lnSpc>
-              <a:buNone/>
-            </a:pPr>
-            <a:r>
-              <a:rPr lang="en-US" sz="1800" dirty="0">
-                <a:solidFill>
-                  <a:srgbClr val="94A3B8"/>
-                </a:solidFill>
-                <a:latin typeface="Calibri" pitchFamily="34" charset="0"/>
-                <a:ea typeface="Calibri" pitchFamily="34" charset="-122"/>
-                <a:cs typeface="Calibri" pitchFamily="34" charset="-120"/>
-              </a:rPr>
-              <a:t>credit ratings, leadership, news, hiring and employee sentiment.</a:t>
-            </a:r>
-            <a:endParaRPr lang="en-US" sz="1800" dirty="0"/>
-          </a:p>
         </p:txBody>
       </p:sp>
       <p:sp>
         <p:nvSpPr>
           <p:cNvPr id="5" name="Shape 3">
-            <a:hlinkClick r:id="rId1" tooltip="Open the live Foresight AI dashboard"/>
+            <a:hlinkClick r:id="rId3" tooltip="Open the live Foresight AI dashboard"/>
           </p:cNvPr>
           <p:cNvSpPr/>
           <p:nvPr/>
         </p:nvSpPr>
         <p:spPr>
           <a:xfrm>
-            <a:off x="822960" y="3977640"/>
+            <a:off x="822960" y="4132913"/>
             <a:ext cx="4160520" cy="566928"/>
           </a:xfrm>
           <a:prstGeom prst="roundRect">
@@ -2251,14 +1897,14 @@
       <p:sp>
         <p:nvSpPr>
           <p:cNvPr id="6" name="Text 4">
-            <a:hlinkClick r:id="rId1" tooltip="Open the live Foresight AI dashboard"/>
+            <a:hlinkClick r:id="rId3" tooltip="Open the live Foresight AI dashboard"/>
           </p:cNvPr>
           <p:cNvSpPr/>
           <p:nvPr/>
         </p:nvSpPr>
         <p:spPr>
           <a:xfrm>
-            <a:off x="822960" y="3977640"/>
+            <a:off x="822960" y="4141537"/>
             <a:ext cx="4160520" cy="566928"/>
           </a:xfrm>
           <a:prstGeom prst="rect">
@@ -2271,7 +1917,7 @@
           <a:bodyPr wrap="square" rtlCol="0" anchor="ctr"/>
           <a:lstStyle/>
           <a:p>
-            <a:pPr algn="ctr" indent="0" marL="0">
+            <a:pPr marL="0" indent="0" algn="ctr">
               <a:buNone/>
             </a:pPr>
             <a:r>
@@ -2282,7 +1928,7 @@
                 <a:latin typeface="Calibri" pitchFamily="34" charset="0"/>
                 <a:ea typeface="Calibri" pitchFamily="34" charset="-122"/>
                 <a:cs typeface="Calibri" pitchFamily="34" charset="-120"/>
-                <a:hlinkClick r:id="rId1" invalidUrl="" action="" tgtFrame="" tooltip="Open the live Foresight AI dashboard" history="1" highlightClick="0" endSnd="0">
+                <a:hlinkClick r:id="rId3" tooltip="Open the live Foresight AI dashboard">
                   <a:extLst>
                     <a:ext uri="{A12FA001-AC4F-418D-AE19-62706E023703}">
                       <ahyp:hlinkClr xmlns:ahyp="http://schemas.microsoft.com/office/drawing/2018/hyperlinkcolor" val="tx"/>
@@ -2292,9 +1938,6 @@
               </a:rPr>
               <a:t>Live demo   </a:t>
             </a:r>
-            <a:pPr algn="ctr" indent="0" marL="0">
-              <a:buNone/>
-            </a:pPr>
             <a:r>
               <a:rPr lang="en-US" sz="1500" b="1" u="sng" dirty="0">
                 <a:solidFill>
@@ -2303,7 +1946,7 @@
                 <a:latin typeface="Calibri" pitchFamily="34" charset="0"/>
                 <a:ea typeface="Calibri" pitchFamily="34" charset="-122"/>
                 <a:cs typeface="Calibri" pitchFamily="34" charset="-120"/>
-                <a:hlinkClick r:id="rId1" invalidUrl="" action="" tgtFrame="" tooltip="Open the live Foresight AI dashboard" history="1" highlightClick="0" endSnd="0">
+                <a:hlinkClick r:id="rId3" tooltip="Open the live Foresight AI dashboard">
                   <a:extLst>
                     <a:ext uri="{A12FA001-AC4F-418D-AE19-62706E023703}">
                       <ahyp:hlinkClr xmlns:ahyp="http://schemas.microsoft.com/office/drawing/2018/hyperlinkcolor" val="tx"/>
@@ -2338,7 +1981,7 @@
           <a:bodyPr wrap="square" rtlCol="0" anchor="ctr"/>
           <a:lstStyle/>
           <a:p>
-            <a:pPr indent="0" marL="0">
+            <a:pPr marL="0" indent="0">
               <a:buNone/>
             </a:pPr>
             <a:r>
@@ -2383,7 +2026,7 @@
       </p:sp>
       <p:graphicFrame>
         <p:nvGraphicFramePr>
-          <p:cNvPr id="9" name="Chart 0" descr=""/>
+          <p:cNvPr id="9" name="Chart 0"/>
           <p:cNvGraphicFramePr/>
           <p:nvPr/>
         </p:nvGraphicFramePr>
@@ -2391,9 +2034,9 @@
           <a:off x="9006840" y="1828800"/>
           <a:ext cx="2651760" cy="2651760"/>
         </p:xfrm>
-        <a:graphic xmlns:a="http://schemas.openxmlformats.org/drawingml/2006/main">
+        <a:graphic>
           <a:graphicData uri="http://schemas.openxmlformats.org/drawingml/2006/chart">
-            <c:chart xmlns:c="http://schemas.openxmlformats.org/drawingml/2006/chart" r:id="rId2"/>
+            <c:chart xmlns:c="http://schemas.openxmlformats.org/drawingml/2006/chart" xmlns:r="http://schemas.openxmlformats.org/officeDocument/2006/relationships" r:id="rId4"/>
           </a:graphicData>
         </a:graphic>
       </p:graphicFrame>
@@ -2418,7 +2061,7 @@
           <a:bodyPr wrap="square" rtlCol="0" anchor="ctr"/>
           <a:lstStyle/>
           <a:p>
-            <a:pPr algn="ctr" indent="0" marL="0">
+            <a:pPr marL="0" indent="0" algn="ctr">
               <a:buNone/>
             </a:pPr>
             <a:r>
@@ -2457,11 +2100,11 @@
           <a:bodyPr wrap="square" rtlCol="0" anchor="ctr"/>
           <a:lstStyle/>
           <a:p>
-            <a:pPr algn="ctr" indent="0" marL="0">
+            <a:pPr marL="0" indent="0" algn="ctr">
               <a:buNone/>
             </a:pPr>
             <a:r>
-              <a:rPr lang="en-US" sz="1200" spc="200" kern="0" dirty="0">
+              <a:rPr lang="en-US" sz="1200" kern="0" spc="200" dirty="0">
                 <a:solidFill>
                   <a:srgbClr val="94A3B8"/>
                 </a:solidFill>
@@ -2483,7 +2126,7 @@
         </p:nvSpPr>
         <p:spPr>
           <a:xfrm>
-            <a:off x="9006840" y="1810512"/>
+            <a:off x="9006840" y="1620734"/>
             <a:ext cx="2651760" cy="274320"/>
           </a:xfrm>
           <a:prstGeom prst="rect">
@@ -2496,11 +2139,11 @@
           <a:bodyPr wrap="square" rtlCol="0" anchor="ctr"/>
           <a:lstStyle/>
           <a:p>
-            <a:pPr algn="ctr" indent="0" marL="0">
+            <a:pPr marL="0" indent="0" algn="ctr">
               <a:buNone/>
             </a:pPr>
             <a:r>
-              <a:rPr lang="en-US" sz="1200" b="1" spc="300" kern="0" dirty="0">
+              <a:rPr lang="en-US" sz="1200" b="1" kern="0" spc="300" dirty="0">
                 <a:solidFill>
                   <a:srgbClr val="F59E0B"/>
                 </a:solidFill>
@@ -2535,7 +2178,7 @@
           <a:bodyPr wrap="square" rtlCol="0" anchor="ctr"/>
           <a:lstStyle/>
           <a:p>
-            <a:pPr algn="ctr" indent="0" marL="0">
+            <a:pPr marL="0" indent="0" algn="ctr">
               <a:buNone/>
             </a:pPr>
             <a:r>
@@ -2569,6 +2212,7 @@
         <a:solidFill>
           <a:srgbClr val="0A1628"/>
         </a:solidFill>
+        <a:effectLst/>
       </p:bgPr>
     </p:bg>
     <p:spTree>
@@ -2606,7 +2250,7 @@
           <a:bodyPr wrap="square" rtlCol="0" anchor="ctr"/>
           <a:lstStyle/>
           <a:p>
-            <a:pPr indent="0" marL="0">
+            <a:pPr marL="0" indent="0">
               <a:buNone/>
             </a:pPr>
             <a:r>
@@ -2620,9 +2264,6 @@
               </a:rPr>
               <a:t>The warning signs are </a:t>
             </a:r>
-            <a:pPr indent="0" marL="0">
-              <a:buNone/>
-            </a:pPr>
             <a:r>
               <a:rPr lang="en-US" sz="3300" b="1" dirty="0">
                 <a:solidFill>
@@ -2634,9 +2275,6 @@
               </a:rPr>
               <a:t>public</a:t>
             </a:r>
-            <a:pPr indent="0" marL="0">
-              <a:buNone/>
-            </a:pPr>
             <a:r>
               <a:rPr lang="en-US" sz="3300" b="1" dirty="0">
                 <a:solidFill>
@@ -2673,7 +2311,7 @@
           <a:bodyPr wrap="square" rtlCol="0" anchor="ctr"/>
           <a:lstStyle/>
           <a:p>
-            <a:pPr indent="0" marL="0">
+            <a:pPr marL="0" indent="0">
               <a:buNone/>
             </a:pPr>
             <a:r>
@@ -2740,14 +2378,14 @@
       </p:sp>
       <p:pic>
         <p:nvPicPr>
-          <p:cNvPr id="6" name="Image 0" descr="preencoded.png">    </p:cNvPr>
+          <p:cNvPr id="6" name="Image 0" descr="preencoded.png"/>
           <p:cNvPicPr>
             <a:picLocks noChangeAspect="1"/>
           </p:cNvPicPr>
           <p:nvPr/>
         </p:nvPicPr>
         <p:blipFill>
-          <a:blip r:embed="rId1"/>
+          <a:blip r:embed="rId3"/>
           <a:stretch>
             <a:fillRect/>
           </a:stretch>
@@ -2783,7 +2421,7 @@
           <a:bodyPr wrap="square" rtlCol="0" anchor="ctr"/>
           <a:lstStyle/>
           <a:p>
-            <a:pPr indent="0" marL="0">
+            <a:pPr marL="0" indent="0">
               <a:buNone/>
             </a:pPr>
             <a:r>
@@ -2822,7 +2460,7 @@
           <a:bodyPr wrap="square" rtlCol="0" anchor="ctr"/>
           <a:lstStyle/>
           <a:p>
-            <a:pPr indent="0" marL="0">
+            <a:pPr marL="0" indent="0">
               <a:lnSpc>
                 <a:spcPct val="105000"/>
               </a:lnSpc>
@@ -2892,14 +2530,14 @@
       </p:sp>
       <p:pic>
         <p:nvPicPr>
-          <p:cNvPr id="11" name="Image 1" descr="preencoded.png">    </p:cNvPr>
+          <p:cNvPr id="11" name="Image 1" descr="preencoded.png"/>
           <p:cNvPicPr>
             <a:picLocks noChangeAspect="1"/>
           </p:cNvPicPr>
           <p:nvPr/>
         </p:nvPicPr>
         <p:blipFill>
-          <a:blip r:embed="rId2"/>
+          <a:blip r:embed="rId4"/>
           <a:stretch>
             <a:fillRect/>
           </a:stretch>
@@ -2935,7 +2573,7 @@
           <a:bodyPr wrap="square" rtlCol="0" anchor="ctr"/>
           <a:lstStyle/>
           <a:p>
-            <a:pPr indent="0" marL="0">
+            <a:pPr marL="0" indent="0">
               <a:buNone/>
             </a:pPr>
             <a:r>
@@ -2974,7 +2612,7 @@
           <a:bodyPr wrap="square" rtlCol="0" anchor="ctr"/>
           <a:lstStyle/>
           <a:p>
-            <a:pPr indent="0" marL="0">
+            <a:pPr marL="0" indent="0">
               <a:lnSpc>
                 <a:spcPct val="105000"/>
               </a:lnSpc>
@@ -3044,14 +2682,14 @@
       </p:sp>
       <p:pic>
         <p:nvPicPr>
-          <p:cNvPr id="16" name="Image 2" descr="preencoded.png">    </p:cNvPr>
+          <p:cNvPr id="16" name="Image 2" descr="preencoded.png"/>
           <p:cNvPicPr>
             <a:picLocks noChangeAspect="1"/>
           </p:cNvPicPr>
           <p:nvPr/>
         </p:nvPicPr>
         <p:blipFill>
-          <a:blip r:embed="rId3"/>
+          <a:blip r:embed="rId5"/>
           <a:stretch>
             <a:fillRect/>
           </a:stretch>
@@ -3087,7 +2725,7 @@
           <a:bodyPr wrap="square" rtlCol="0" anchor="ctr"/>
           <a:lstStyle/>
           <a:p>
-            <a:pPr indent="0" marL="0">
+            <a:pPr marL="0" indent="0">
               <a:buNone/>
             </a:pPr>
             <a:r>
@@ -3126,7 +2764,7 @@
           <a:bodyPr wrap="square" rtlCol="0" anchor="ctr"/>
           <a:lstStyle/>
           <a:p>
-            <a:pPr indent="0" marL="0">
+            <a:pPr marL="0" indent="0">
               <a:lnSpc>
                 <a:spcPct val="105000"/>
               </a:lnSpc>
@@ -3195,11 +2833,11 @@
           <a:bodyPr wrap="square" rtlCol="0" anchor="ctr"/>
           <a:lstStyle/>
           <a:p>
-            <a:pPr indent="0" marL="0">
+            <a:pPr marL="0" indent="0">
               <a:buNone/>
             </a:pPr>
             <a:r>
-              <a:rPr lang="en-US" sz="1150" b="1" spc="300" kern="0" dirty="0">
+              <a:rPr lang="en-US" sz="1150" b="1" kern="0" spc="300" dirty="0">
                 <a:solidFill>
                   <a:srgbClr val="F59E0B"/>
                 </a:solidFill>
@@ -3234,7 +2872,7 @@
           <a:bodyPr wrap="square" rtlCol="0" anchor="ctr"/>
           <a:lstStyle/>
           <a:p>
-            <a:pPr indent="0" marL="0">
+            <a:pPr marL="0" indent="0">
               <a:buNone/>
             </a:pPr>
             <a:r>
@@ -3260,7 +2898,7 @@
         </p:nvSpPr>
         <p:spPr>
           <a:xfrm>
-            <a:off x="7360920" y="3035808"/>
+            <a:off x="7999268" y="3156572"/>
             <a:ext cx="1280160" cy="1005840"/>
           </a:xfrm>
           <a:prstGeom prst="rect">
@@ -3273,7 +2911,7 @@
           <a:bodyPr wrap="square" rtlCol="0" anchor="ctr"/>
           <a:lstStyle/>
           <a:p>
-            <a:pPr algn="l" indent="0" marL="0">
+            <a:pPr marL="0" indent="0" algn="l">
               <a:buNone/>
             </a:pPr>
             <a:r>
@@ -3312,7 +2950,7 @@
           <a:bodyPr wrap="square" rtlCol="0" anchor="ctr"/>
           <a:lstStyle/>
           <a:p>
-            <a:pPr indent="0" marL="0">
+            <a:pPr marL="0" indent="0">
               <a:lnSpc>
                 <a:spcPct val="102000"/>
               </a:lnSpc>
@@ -3329,16 +2967,30 @@
               </a:rPr>
               <a:t>signals</a:t>
             </a:r>
-            <a:pPr indent="0" marL="0">
+            <a:endParaRPr lang="en-US" sz="2000" dirty="0"/>
+          </a:p>
+          <a:p>
+            <a:pPr marL="0" indent="0">
               <a:lnSpc>
                 <a:spcPct val="102000"/>
               </a:lnSpc>
               <a:buNone/>
             </a:pPr>
+            <a:r>
+              <a:rPr lang="en-US" sz="1400" dirty="0">
+                <a:solidFill>
+                  <a:srgbClr val="94A3B8"/>
+                </a:solidFill>
+                <a:latin typeface="Calibri" pitchFamily="34" charset="0"/>
+                <a:ea typeface="Calibri" pitchFamily="34" charset="-122"/>
+                <a:cs typeface="Calibri" pitchFamily="34" charset="-120"/>
+              </a:rPr>
+              <a:t>fused into one</a:t>
+            </a:r>
             <a:endParaRPr lang="en-US" sz="2000" dirty="0"/>
           </a:p>
           <a:p>
-            <a:pPr indent="0" marL="0">
+            <a:pPr marL="0" indent="0">
               <a:lnSpc>
                 <a:spcPct val="102000"/>
               </a:lnSpc>
@@ -3353,30 +3005,10 @@
                 <a:ea typeface="Calibri" pitchFamily="34" charset="-122"/>
                 <a:cs typeface="Calibri" pitchFamily="34" charset="-120"/>
               </a:rPr>
-              <a:t>fused into one</a:t>
+              <a:t>0-100 score</a:t>
             </a:r>
             <a:endParaRPr lang="en-US" sz="2000" dirty="0"/>
           </a:p>
-          <a:p>
-            <a:pPr indent="0" marL="0">
-              <a:lnSpc>
-                <a:spcPct val="102000"/>
-              </a:lnSpc>
-              <a:buNone/>
-            </a:pPr>
-            <a:r>
-              <a:rPr lang="en-US" sz="1400" dirty="0">
-                <a:solidFill>
-                  <a:srgbClr val="94A3B8"/>
-                </a:solidFill>
-                <a:latin typeface="Calibri" pitchFamily="34" charset="0"/>
-                <a:ea typeface="Calibri" pitchFamily="34" charset="-122"/>
-                <a:cs typeface="Calibri" pitchFamily="34" charset="-120"/>
-              </a:rPr>
-              <a:t>0-100 read</a:t>
-            </a:r>
-            <a:endParaRPr lang="en-US" sz="2000" dirty="0"/>
-          </a:p>
         </p:txBody>
       </p:sp>
       <p:sp>
@@ -3387,7 +3019,7 @@
         </p:nvSpPr>
         <p:spPr>
           <a:xfrm>
-            <a:off x="7406640" y="4526280"/>
+            <a:off x="7406640" y="4431391"/>
             <a:ext cx="3703320" cy="640080"/>
           </a:xfrm>
           <a:prstGeom prst="rect">
@@ -3400,7 +3032,7 @@
           <a:bodyPr wrap="square" rtlCol="0" anchor="ctr"/>
           <a:lstStyle/>
           <a:p>
-            <a:pPr indent="0" marL="0">
+            <a:pPr marL="0" indent="0" algn="ctr">
               <a:lnSpc>
                 <a:spcPct val="110000"/>
               </a:lnSpc>
@@ -3415,7 +3047,28 @@
                 <a:ea typeface="Calibri" pitchFamily="34" charset="-122"/>
                 <a:cs typeface="Calibri" pitchFamily="34" charset="-120"/>
               </a:rPr>
-              <a:t>Financials  .  credit ratings  .  leadership  .  news  .  hiring  .  employee sentiment</a:t>
+              <a:t>Financials  .  Credit ratings  .  Leadership  .  </a:t>
+            </a:r>
+            <a:br>
+              <a:rPr lang="en-US" sz="1250" dirty="0">
+                <a:solidFill>
+                  <a:srgbClr val="FFFFFF"/>
+                </a:solidFill>
+                <a:latin typeface="Calibri" pitchFamily="34" charset="0"/>
+                <a:ea typeface="Calibri" pitchFamily="34" charset="-122"/>
+                <a:cs typeface="Calibri" pitchFamily="34" charset="-120"/>
+              </a:rPr>
+            </a:br>
+            <a:r>
+              <a:rPr lang="en-US" sz="1250" dirty="0">
+                <a:solidFill>
+                  <a:srgbClr val="FFFFFF"/>
+                </a:solidFill>
+                <a:latin typeface="Calibri" pitchFamily="34" charset="0"/>
+                <a:ea typeface="Calibri" pitchFamily="34" charset="-122"/>
+                <a:cs typeface="Calibri" pitchFamily="34" charset="-120"/>
+              </a:rPr>
+              <a:t>News  .  Hiring  .  Employee sentiment</a:t>
             </a:r>
             <a:endParaRPr lang="en-US" sz="1250" dirty="0"/>
           </a:p>
@@ -3429,7 +3082,7 @@
         </p:nvSpPr>
         <p:spPr>
           <a:xfrm>
-            <a:off x="7406640" y="5440680"/>
+            <a:off x="7406640" y="5345794"/>
             <a:ext cx="3703320" cy="365760"/>
           </a:xfrm>
           <a:prstGeom prst="rect">
@@ -3442,7 +3095,7 @@
           <a:bodyPr wrap="square" rtlCol="0" anchor="ctr"/>
           <a:lstStyle/>
           <a:p>
-            <a:pPr indent="0" marL="0">
+            <a:pPr marL="0" indent="0">
               <a:buNone/>
             </a:pPr>
             <a:r>
@@ -3476,6 +3129,7 @@
         <a:solidFill>
           <a:srgbClr val="0A1628"/>
         </a:solidFill>
+        <a:effectLst/>
       </p:bgPr>
     </p:bg>
     <p:spTree>
@@ -3513,7 +3167,7 @@
           <a:bodyPr wrap="square" rtlCol="0" anchor="ctr"/>
           <a:lstStyle/>
           <a:p>
-            <a:pPr indent="0" marL="0">
+            <a:pPr marL="0" indent="0">
               <a:buNone/>
             </a:pPr>
             <a:r>
@@ -3527,9 +3181,6 @@
               </a:rPr>
               <a:t>One live pipeline, </a:t>
             </a:r>
-            <a:pPr indent="0" marL="0">
-              <a:buNone/>
-            </a:pPr>
             <a:r>
               <a:rPr lang="en-US" sz="3300" b="1" dirty="0">
                 <a:solidFill>
@@ -3566,7 +3217,7 @@
           <a:bodyPr wrap="square" rtlCol="0" anchor="ctr"/>
           <a:lstStyle/>
           <a:p>
-            <a:pPr indent="0" marL="0">
+            <a:pPr marL="0" indent="0">
               <a:buNone/>
             </a:pPr>
             <a:r>
@@ -3633,14 +3284,14 @@
       </p:sp>
       <p:pic>
         <p:nvPicPr>
-          <p:cNvPr id="6" name="Image 0" descr="preencoded.png">    </p:cNvPr>
+          <p:cNvPr id="6" name="Image 0" descr="preencoded.png"/>
           <p:cNvPicPr>
             <a:picLocks noChangeAspect="1"/>
           </p:cNvPicPr>
           <p:nvPr/>
         </p:nvPicPr>
         <p:blipFill>
-          <a:blip r:embed="rId1"/>
+          <a:blip r:embed="rId3"/>
           <a:stretch>
             <a:fillRect/>
           </a:stretch>
@@ -3676,7 +3327,7 @@
           <a:bodyPr wrap="square" rtlCol="0" anchor="ctr"/>
           <a:lstStyle/>
           <a:p>
-            <a:pPr indent="0" marL="0">
+            <a:pPr marL="0" indent="0">
               <a:buNone/>
             </a:pPr>
             <a:r>
@@ -3715,7 +3366,7 @@
           <a:bodyPr wrap="square" rtlCol="0" anchor="ctr"/>
           <a:lstStyle/>
           <a:p>
-            <a:pPr algn="ctr" indent="0" marL="0">
+            <a:pPr marL="0" indent="0" algn="ctr">
               <a:buNone/>
             </a:pPr>
             <a:r>
@@ -3754,7 +3405,7 @@
           <a:bodyPr wrap="square" rtlCol="0" anchor="ctr"/>
           <a:lstStyle/>
           <a:p>
-            <a:pPr algn="ctr" indent="0" marL="0">
+            <a:pPr marL="0" indent="0" algn="ctr">
               <a:lnSpc>
                 <a:spcPct val="103000"/>
               </a:lnSpc>
@@ -3777,14 +3428,14 @@
       </p:sp>
       <p:pic>
         <p:nvPicPr>
-          <p:cNvPr id="10" name="Image 1" descr="preencoded.png">    </p:cNvPr>
+          <p:cNvPr id="10" name="Image 1" descr="preencoded.png"/>
           <p:cNvPicPr>
             <a:picLocks noChangeAspect="1"/>
           </p:cNvPicPr>
           <p:nvPr/>
         </p:nvPicPr>
         <p:blipFill>
-          <a:blip r:embed="rId2"/>
+          <a:blip r:embed="rId4"/>
           <a:stretch>
             <a:fillRect/>
           </a:stretch>
@@ -3848,14 +3499,14 @@
       </p:sp>
       <p:pic>
         <p:nvPicPr>
-          <p:cNvPr id="13" name="Image 2" descr="preencoded.png">    </p:cNvPr>
+          <p:cNvPr id="13" name="Image 2" descr="preencoded.png"/>
           <p:cNvPicPr>
             <a:picLocks noChangeAspect="1"/>
           </p:cNvPicPr>
           <p:nvPr/>
         </p:nvPicPr>
         <p:blipFill>
-          <a:blip r:embed="rId3"/>
+          <a:blip r:embed="rId5"/>
           <a:stretch>
             <a:fillRect/>
           </a:stretch>
@@ -3891,7 +3542,7 @@
           <a:bodyPr wrap="square" rtlCol="0" anchor="ctr"/>
           <a:lstStyle/>
           <a:p>
-            <a:pPr indent="0" marL="0">
+            <a:pPr marL="0" indent="0">
               <a:buNone/>
             </a:pPr>
             <a:r>
@@ -3930,7 +3581,7 @@
           <a:bodyPr wrap="square" rtlCol="0" anchor="ctr"/>
           <a:lstStyle/>
           <a:p>
-            <a:pPr algn="ctr" indent="0" marL="0">
+            <a:pPr marL="0" indent="0" algn="ctr">
               <a:buNone/>
             </a:pPr>
             <a:r>
@@ -3969,7 +3620,7 @@
           <a:bodyPr wrap="square" rtlCol="0" anchor="ctr"/>
           <a:lstStyle/>
           <a:p>
-            <a:pPr algn="ctr" indent="0" marL="0">
+            <a:pPr marL="0" indent="0" algn="ctr">
               <a:lnSpc>
                 <a:spcPct val="103000"/>
               </a:lnSpc>
@@ -3992,7 +3643,7 @@
       </p:sp>
       <p:pic>
         <p:nvPicPr>
-          <p:cNvPr id="17" name="Image 3" descr="preencoded.png">    </p:cNvPr>
+          <p:cNvPr id="17" name="Image 3" descr="preencoded.png"/>
           <p:cNvPicPr>
             <a:picLocks noChangeAspect="1"/>
           </p:cNvPicPr>
@@ -4063,14 +3714,14 @@
       </p:sp>
       <p:pic>
         <p:nvPicPr>
-          <p:cNvPr id="20" name="Image 4" descr="preencoded.png">    </p:cNvPr>
+          <p:cNvPr id="20" name="Image 4" descr="preencoded.png"/>
           <p:cNvPicPr>
             <a:picLocks noChangeAspect="1"/>
           </p:cNvPicPr>
           <p:nvPr/>
         </p:nvPicPr>
         <p:blipFill>
-          <a:blip r:embed="rId5"/>
+          <a:blip r:embed="rId6"/>
           <a:stretch>
             <a:fillRect/>
           </a:stretch>
@@ -4106,7 +3757,7 @@
           <a:bodyPr wrap="square" rtlCol="0" anchor="ctr"/>
           <a:lstStyle/>
           <a:p>
-            <a:pPr indent="0" marL="0">
+            <a:pPr marL="0" indent="0">
               <a:buNone/>
             </a:pPr>
             <a:r>
@@ -4145,7 +3796,7 @@
           <a:bodyPr wrap="square" rtlCol="0" anchor="ctr"/>
           <a:lstStyle/>
           <a:p>
-            <a:pPr algn="ctr" indent="0" marL="0">
+            <a:pPr marL="0" indent="0" algn="ctr">
               <a:buNone/>
             </a:pPr>
             <a:r>
@@ -4184,7 +3835,7 @@
           <a:bodyPr wrap="square" rtlCol="0" anchor="ctr"/>
           <a:lstStyle/>
           <a:p>
-            <a:pPr algn="ctr" indent="0" marL="0">
+            <a:pPr marL="0" indent="0" algn="ctr">
               <a:lnSpc>
                 <a:spcPct val="103000"/>
               </a:lnSpc>
@@ -4207,14 +3858,14 @@
       </p:sp>
       <p:pic>
         <p:nvPicPr>
-          <p:cNvPr id="24" name="Image 5" descr="preencoded.png">    </p:cNvPr>
+          <p:cNvPr id="24" name="Image 5" descr="preencoded.png"/>
           <p:cNvPicPr>
             <a:picLocks noChangeAspect="1"/>
           </p:cNvPicPr>
           <p:nvPr/>
         </p:nvPicPr>
         <p:blipFill>
-          <a:blip r:embed="rId6"/>
+          <a:blip r:embed="rId4"/>
           <a:stretch>
             <a:fillRect/>
           </a:stretch>
@@ -4278,7 +3929,7 @@
       </p:sp>
       <p:pic>
         <p:nvPicPr>
-          <p:cNvPr id="27" name="Image 6" descr="preencoded.png">    </p:cNvPr>
+          <p:cNvPr id="27" name="Image 6" descr="preencoded.png"/>
           <p:cNvPicPr>
             <a:picLocks noChangeAspect="1"/>
           </p:cNvPicPr>
@@ -4321,7 +3972,7 @@
           <a:bodyPr wrap="square" rtlCol="0" anchor="ctr"/>
           <a:lstStyle/>
           <a:p>
-            <a:pPr indent="0" marL="0">
+            <a:pPr marL="0" indent="0">
               <a:buNone/>
             </a:pPr>
             <a:r>
@@ -4360,7 +4011,7 @@
           <a:bodyPr wrap="square" rtlCol="0" anchor="ctr"/>
           <a:lstStyle/>
           <a:p>
-            <a:pPr algn="ctr" indent="0" marL="0">
+            <a:pPr marL="0" indent="0" algn="ctr">
               <a:buNone/>
             </a:pPr>
             <a:r>
@@ -4399,7 +4050,7 @@
           <a:bodyPr wrap="square" rtlCol="0" anchor="ctr"/>
           <a:lstStyle/>
           <a:p>
-            <a:pPr algn="ctr" indent="0" marL="0">
+            <a:pPr marL="0" indent="0" algn="ctr">
               <a:lnSpc>
                 <a:spcPct val="103000"/>
               </a:lnSpc>
@@ -4455,7 +4106,7 @@
         </p:nvSpPr>
         <p:spPr>
           <a:xfrm>
-            <a:off x="868680" y="4910328"/>
+            <a:off x="868680" y="4841319"/>
             <a:ext cx="3657600" cy="274320"/>
           </a:xfrm>
           <a:prstGeom prst="rect">
@@ -4468,11 +4119,11 @@
           <a:bodyPr wrap="square" rtlCol="0" anchor="ctr"/>
           <a:lstStyle/>
           <a:p>
-            <a:pPr indent="0" marL="0">
+            <a:pPr marL="0" indent="0">
               <a:buNone/>
             </a:pPr>
             <a:r>
-              <a:rPr lang="en-US" sz="1100" b="1" spc="300" kern="0" dirty="0">
+              <a:rPr lang="en-US" sz="1100" b="1" kern="0" spc="300" dirty="0">
                 <a:solidFill>
                   <a:srgbClr val="F59E0B"/>
                 </a:solidFill>
@@ -4508,7 +4159,7 @@
       </p:sp>
       <p:pic>
         <p:nvPicPr>
-          <p:cNvPr id="34" name="Image 7" descr="preencoded.png">    </p:cNvPr>
+          <p:cNvPr id="34" name="Image 7" descr="preencoded.png"/>
           <p:cNvPicPr>
             <a:picLocks noChangeAspect="1"/>
           </p:cNvPicPr>
@@ -4538,7 +4189,7 @@
         </p:nvSpPr>
         <p:spPr>
           <a:xfrm>
-            <a:off x="1554480" y="5257800"/>
+            <a:off x="1554480" y="5188790"/>
             <a:ext cx="4572000" cy="777240"/>
           </a:xfrm>
           <a:prstGeom prst="rect">
@@ -4551,7 +4202,7 @@
           <a:bodyPr wrap="square" rtlCol="0" anchor="t"/>
           <a:lstStyle/>
           <a:p>
-            <a:pPr indent="0" marL="0">
+            <a:pPr marL="0" indent="0">
               <a:lnSpc>
                 <a:spcPct val="102000"/>
               </a:lnSpc>
@@ -4568,12 +4219,6 @@
               </a:rPr>
               <a:t>Financial leg</a:t>
             </a:r>
-            <a:pPr indent="0" marL="0">
-              <a:lnSpc>
-                <a:spcPct val="102000"/>
-              </a:lnSpc>
-              <a:buNone/>
-            </a:pPr>
             <a:r>
               <a:rPr lang="en-US" sz="1250" dirty="0">
                 <a:solidFill>
@@ -4634,7 +4279,7 @@
       </p:sp>
       <p:pic>
         <p:nvPicPr>
-          <p:cNvPr id="38" name="Image 8" descr="preencoded.png">    </p:cNvPr>
+          <p:cNvPr id="38" name="Image 8" descr="preencoded.png"/>
           <p:cNvPicPr>
             <a:picLocks noChangeAspect="1"/>
           </p:cNvPicPr>
@@ -4664,7 +4309,7 @@
         </p:nvSpPr>
         <p:spPr>
           <a:xfrm>
-            <a:off x="7406640" y="5239512"/>
+            <a:off x="7406640" y="5118743"/>
             <a:ext cx="4160520" cy="868680"/>
           </a:xfrm>
           <a:prstGeom prst="rect">
@@ -4677,7 +4322,7 @@
           <a:bodyPr wrap="square" rtlCol="0" anchor="t"/>
           <a:lstStyle/>
           <a:p>
-            <a:pPr indent="0" marL="0">
+            <a:pPr marL="0" indent="0">
               <a:lnSpc>
                 <a:spcPct val="100000"/>
               </a:lnSpc>
@@ -4694,12 +4339,6 @@
               </a:rPr>
               <a:t>Market leg</a:t>
             </a:r>
-            <a:pPr indent="0" marL="0">
-              <a:lnSpc>
-                <a:spcPct val="100000"/>
-              </a:lnSpc>
-              <a:buNone/>
-            </a:pPr>
             <a:r>
               <a:rPr lang="en-US" sz="1200" dirty="0">
                 <a:solidFill>
@@ -4731,6 +4370,7 @@
         <a:solidFill>
           <a:srgbClr val="0A1628"/>
         </a:solidFill>
+        <a:effectLst/>
       </p:bgPr>
     </p:bg>
     <p:spTree>
@@ -4768,7 +4408,7 @@
           <a:bodyPr wrap="square" rtlCol="0" anchor="ctr"/>
           <a:lstStyle/>
           <a:p>
-            <a:pPr indent="0" marL="0">
+            <a:pPr marL="0" indent="0">
               <a:buNone/>
             </a:pPr>
             <a:r>
@@ -4782,9 +4422,6 @@
               </a:rPr>
               <a:t>One </a:t>
             </a:r>
-            <a:pPr indent="0" marL="0">
-              <a:buNone/>
-            </a:pPr>
             <a:r>
               <a:rPr lang="en-US" sz="3300" b="1" dirty="0">
                 <a:solidFill>
@@ -4796,9 +4433,6 @@
               </a:rPr>
               <a:t>comprehensive</a:t>
             </a:r>
-            <a:pPr indent="0" marL="0">
-              <a:buNone/>
-            </a:pPr>
             <a:r>
               <a:rPr lang="en-US" sz="3300" b="1" dirty="0">
                 <a:solidFill>
@@ -4835,7 +4469,7 @@
           <a:bodyPr wrap="square" rtlCol="0" anchor="ctr"/>
           <a:lstStyle/>
           <a:p>
-            <a:pPr indent="0" marL="0">
+            <a:pPr marL="0" indent="0">
               <a:buNone/>
             </a:pPr>
             <a:r>
@@ -4874,7 +4508,7 @@
           <a:bodyPr wrap="square" rtlCol="0" anchor="ctr"/>
           <a:lstStyle/>
           <a:p>
-            <a:pPr indent="0" marL="0">
+            <a:pPr marL="0" indent="0">
               <a:buNone/>
             </a:pPr>
             <a:r>
@@ -4913,7 +4547,7 @@
           <a:bodyPr wrap="square" rtlCol="0" anchor="ctr"/>
           <a:lstStyle/>
           <a:p>
-            <a:pPr indent="0" marL="0">
+            <a:pPr marL="0" indent="0">
               <a:lnSpc>
                 <a:spcPct val="110000"/>
               </a:lnSpc>
@@ -4955,7 +4589,7 @@
           <a:bodyPr wrap="square" rtlCol="0" anchor="ctr"/>
           <a:lstStyle/>
           <a:p>
-            <a:pPr indent="0" marL="0">
+            <a:pPr marL="0" indent="0">
               <a:lnSpc>
                 <a:spcPct val="108000"/>
               </a:lnSpc>
@@ -4985,7 +4619,7 @@
         <p:spPr>
           <a:xfrm>
             <a:off x="777240" y="4553712"/>
-            <a:ext cx="3977640" cy="1554480"/>
+            <a:ext cx="3776472" cy="1976484"/>
           </a:xfrm>
           <a:prstGeom prst="roundRect">
             <a:avLst>
@@ -5011,8 +4645,8 @@
         </p:nvSpPr>
         <p:spPr>
           <a:xfrm>
-            <a:off x="987552" y="4663440"/>
-            <a:ext cx="3566160" cy="256032"/>
+            <a:off x="1004812" y="4672066"/>
+            <a:ext cx="2782192" cy="256032"/>
           </a:xfrm>
           <a:prstGeom prst="rect">
             <a:avLst/>
@@ -5024,11 +4658,11 @@
           <a:bodyPr wrap="square" rtlCol="0" anchor="ctr"/>
           <a:lstStyle/>
           <a:p>
-            <a:pPr indent="0" marL="0">
+            <a:pPr marL="0" indent="0">
               <a:buNone/>
             </a:pPr>
             <a:r>
-              <a:rPr lang="en-US" sz="1050" b="1" spc="200" kern="0" dirty="0">
+              <a:rPr lang="en-US" sz="1400" b="1" kern="0" spc="200" dirty="0">
                 <a:solidFill>
                   <a:srgbClr val="F59E0B"/>
                 </a:solidFill>
@@ -5038,7 +4672,7 @@
               </a:rPr>
               <a:t>FIVE CASES, FIVE SECTORS</a:t>
             </a:r>
-            <a:endParaRPr lang="en-US" sz="1050" dirty="0"/>
+            <a:endParaRPr lang="en-US" sz="1400" dirty="0"/>
           </a:p>
         </p:txBody>
       </p:sp>
@@ -5050,8 +4684,8 @@
         </p:nvSpPr>
         <p:spPr>
           <a:xfrm>
-            <a:off x="987552" y="4919472"/>
-            <a:ext cx="3566160" cy="1133856"/>
+            <a:off x="1013429" y="5040240"/>
+            <a:ext cx="3368789" cy="1231164"/>
           </a:xfrm>
           <a:prstGeom prst="rect">
             <a:avLst/>
@@ -5063,14 +4697,14 @@
           <a:bodyPr wrap="square" rtlCol="0" anchor="t"/>
           <a:lstStyle/>
           <a:p>
-            <a:pPr indent="0" marL="0">
+            <a:pPr marL="0" indent="0">
               <a:lnSpc>
                 <a:spcPct val="103000"/>
               </a:lnSpc>
               <a:buNone/>
             </a:pPr>
             <a:r>
-              <a:rPr lang="en-US" sz="1050" b="1" dirty="0">
+              <a:rPr lang="en-US" sz="1400" b="1" dirty="0">
                 <a:solidFill>
                   <a:srgbClr val="FFFFFF"/>
                 </a:solidFill>
@@ -5080,14 +4714,8 @@
               </a:rPr>
               <a:t>Unitech </a:t>
             </a:r>
-            <a:pPr indent="0" marL="0">
-              <a:lnSpc>
-                <a:spcPct val="103000"/>
-              </a:lnSpc>
-              <a:buNone/>
-            </a:pPr>
-            <a:r>
-              <a:rPr lang="en-US" sz="1050" dirty="0">
+            <a:r>
+              <a:rPr lang="en-US" sz="1400" dirty="0">
                 <a:solidFill>
                   <a:srgbClr val="94A3B8"/>
                 </a:solidFill>
@@ -5097,14 +4725,18 @@
               </a:rPr>
               <a:t>(real estate), </a:t>
             </a:r>
-            <a:pPr indent="0" marL="0">
-              <a:lnSpc>
-                <a:spcPct val="103000"/>
-              </a:lnSpc>
-              <a:buNone/>
-            </a:pPr>
-            <a:r>
-              <a:rPr lang="en-US" sz="1050" b="1" dirty="0">
+            <a:br>
+              <a:rPr lang="en-US" sz="1400" dirty="0">
+                <a:solidFill>
+                  <a:srgbClr val="94A3B8"/>
+                </a:solidFill>
+                <a:latin typeface="Calibri" pitchFamily="34" charset="0"/>
+                <a:ea typeface="Calibri" pitchFamily="34" charset="-122"/>
+                <a:cs typeface="Calibri" pitchFamily="34" charset="-120"/>
+              </a:rPr>
+            </a:br>
+            <a:r>
+              <a:rPr lang="en-US" sz="1400" b="1" dirty="0">
                 <a:solidFill>
                   <a:srgbClr val="FFFFFF"/>
                 </a:solidFill>
@@ -5114,14 +4746,8 @@
               </a:rPr>
               <a:t>Future Retail </a:t>
             </a:r>
-            <a:pPr indent="0" marL="0">
-              <a:lnSpc>
-                <a:spcPct val="103000"/>
-              </a:lnSpc>
-              <a:buNone/>
-            </a:pPr>
-            <a:r>
-              <a:rPr lang="en-US" sz="1050" dirty="0">
+            <a:r>
+              <a:rPr lang="en-US" sz="1400" dirty="0">
                 <a:solidFill>
                   <a:srgbClr val="94A3B8"/>
                 </a:solidFill>
@@ -5131,14 +4757,18 @@
               </a:rPr>
               <a:t>(retail), </a:t>
             </a:r>
-            <a:pPr indent="0" marL="0">
-              <a:lnSpc>
-                <a:spcPct val="103000"/>
-              </a:lnSpc>
-              <a:buNone/>
-            </a:pPr>
-            <a:r>
-              <a:rPr lang="en-US" sz="1050" b="1" dirty="0">
+            <a:br>
+              <a:rPr lang="en-US" sz="1400" dirty="0">
+                <a:solidFill>
+                  <a:srgbClr val="94A3B8"/>
+                </a:solidFill>
+                <a:latin typeface="Calibri" pitchFamily="34" charset="0"/>
+                <a:ea typeface="Calibri" pitchFamily="34" charset="-122"/>
+                <a:cs typeface="Calibri" pitchFamily="34" charset="-120"/>
+              </a:rPr>
+            </a:br>
+            <a:r>
+              <a:rPr lang="en-US" sz="1400" b="1" dirty="0">
                 <a:solidFill>
                   <a:srgbClr val="FFFFFF"/>
                 </a:solidFill>
@@ -5148,14 +4778,8 @@
               </a:rPr>
               <a:t>Reliance Communications </a:t>
             </a:r>
-            <a:pPr indent="0" marL="0">
-              <a:lnSpc>
-                <a:spcPct val="103000"/>
-              </a:lnSpc>
-              <a:buNone/>
-            </a:pPr>
-            <a:r>
-              <a:rPr lang="en-US" sz="1050" dirty="0">
+            <a:r>
+              <a:rPr lang="en-US" sz="1400" dirty="0">
                 <a:solidFill>
                   <a:srgbClr val="94A3B8"/>
                 </a:solidFill>
@@ -5165,14 +4789,18 @@
               </a:rPr>
               <a:t>(telecom), </a:t>
             </a:r>
-            <a:pPr indent="0" marL="0">
-              <a:lnSpc>
-                <a:spcPct val="103000"/>
-              </a:lnSpc>
-              <a:buNone/>
-            </a:pPr>
-            <a:r>
-              <a:rPr lang="en-US" sz="1050" b="1" dirty="0">
+            <a:br>
+              <a:rPr lang="en-US" sz="1400" dirty="0">
+                <a:solidFill>
+                  <a:srgbClr val="94A3B8"/>
+                </a:solidFill>
+                <a:latin typeface="Calibri" pitchFamily="34" charset="0"/>
+                <a:ea typeface="Calibri" pitchFamily="34" charset="-122"/>
+                <a:cs typeface="Calibri" pitchFamily="34" charset="-120"/>
+              </a:rPr>
+            </a:br>
+            <a:r>
+              <a:rPr lang="en-US" sz="1400" b="1" dirty="0">
                 <a:solidFill>
                   <a:srgbClr val="FFFFFF"/>
                 </a:solidFill>
@@ -5182,14 +4810,8 @@
               </a:rPr>
               <a:t>Jaiprakash Associates </a:t>
             </a:r>
-            <a:pPr indent="0" marL="0">
-              <a:lnSpc>
-                <a:spcPct val="103000"/>
-              </a:lnSpc>
-              <a:buNone/>
-            </a:pPr>
-            <a:r>
-              <a:rPr lang="en-US" sz="1050" dirty="0">
+            <a:r>
+              <a:rPr lang="en-US" sz="1400" dirty="0">
                 <a:solidFill>
                   <a:srgbClr val="94A3B8"/>
                 </a:solidFill>
@@ -5199,14 +4821,18 @@
               </a:rPr>
               <a:t>(infrastructure), </a:t>
             </a:r>
-            <a:pPr indent="0" marL="0">
-              <a:lnSpc>
-                <a:spcPct val="103000"/>
-              </a:lnSpc>
-              <a:buNone/>
-            </a:pPr>
-            <a:r>
-              <a:rPr lang="en-US" sz="1050" b="1" dirty="0">
+            <a:br>
+              <a:rPr lang="en-US" sz="1400" dirty="0">
+                <a:solidFill>
+                  <a:srgbClr val="94A3B8"/>
+                </a:solidFill>
+                <a:latin typeface="Calibri" pitchFamily="34" charset="0"/>
+                <a:ea typeface="Calibri" pitchFamily="34" charset="-122"/>
+                <a:cs typeface="Calibri" pitchFamily="34" charset="-120"/>
+              </a:rPr>
+            </a:br>
+            <a:r>
+              <a:rPr lang="en-US" sz="1400" b="1" dirty="0">
                 <a:solidFill>
                   <a:srgbClr val="FFFFFF"/>
                 </a:solidFill>
@@ -5216,14 +4842,8 @@
               </a:rPr>
               <a:t>Suzlon </a:t>
             </a:r>
-            <a:pPr indent="0" marL="0">
-              <a:lnSpc>
-                <a:spcPct val="103000"/>
-              </a:lnSpc>
-              <a:buNone/>
-            </a:pPr>
-            <a:r>
-              <a:rPr lang="en-US" sz="1050" dirty="0">
+            <a:r>
+              <a:rPr lang="en-US" sz="1400" dirty="0">
                 <a:solidFill>
                   <a:srgbClr val="94A3B8"/>
                 </a:solidFill>
@@ -5231,9 +4851,30 @@
                 <a:ea typeface="Calibri" pitchFamily="34" charset="-122"/>
                 <a:cs typeface="Calibri" pitchFamily="34" charset="-120"/>
               </a:rPr>
-              <a:t>(renewables - a recovery). Real financials, real events.</a:t>
-            </a:r>
-            <a:endParaRPr lang="en-US" sz="1050" dirty="0"/>
+              <a:t>(renewables - a recovery). </a:t>
+            </a:r>
+            <a:br>
+              <a:rPr lang="en-US" sz="1400" dirty="0">
+                <a:solidFill>
+                  <a:srgbClr val="94A3B8"/>
+                </a:solidFill>
+                <a:latin typeface="Calibri" pitchFamily="34" charset="0"/>
+                <a:ea typeface="Calibri" pitchFamily="34" charset="-122"/>
+                <a:cs typeface="Calibri" pitchFamily="34" charset="-120"/>
+              </a:rPr>
+            </a:br>
+            <a:r>
+              <a:rPr lang="en-US" sz="1400" dirty="0">
+                <a:solidFill>
+                  <a:srgbClr val="94A3B8"/>
+                </a:solidFill>
+                <a:latin typeface="Calibri" pitchFamily="34" charset="0"/>
+                <a:ea typeface="Calibri" pitchFamily="34" charset="-122"/>
+                <a:cs typeface="Calibri" pitchFamily="34" charset="-120"/>
+              </a:rPr>
+              <a:t>Real financials, real events.</a:t>
+            </a:r>
+            <a:endParaRPr lang="en-US" sz="1400" dirty="0"/>
           </a:p>
         </p:txBody>
       </p:sp>
@@ -5258,7 +4899,7 @@
           <a:bodyPr wrap="square" rtlCol="0" anchor="ctr"/>
           <a:lstStyle/>
           <a:p>
-            <a:pPr indent="0" marL="0">
+            <a:pPr marL="0" indent="0">
               <a:buNone/>
             </a:pPr>
             <a:r>
@@ -5278,7 +4919,7 @@
       </p:sp>
       <p:graphicFrame>
         <p:nvGraphicFramePr>
-          <p:cNvPr id="11" name="Chart 0" descr=""/>
+          <p:cNvPr id="11" name="Chart 0"/>
           <p:cNvGraphicFramePr/>
           <p:nvPr/>
         </p:nvGraphicFramePr>
@@ -5286,9 +4927,9 @@
           <a:off x="5349240" y="2194560"/>
           <a:ext cx="6263640" cy="3611880"/>
         </p:xfrm>
-        <a:graphic xmlns:a="http://schemas.openxmlformats.org/drawingml/2006/main">
+        <a:graphic>
           <a:graphicData uri="http://schemas.openxmlformats.org/drawingml/2006/chart">
-            <c:chart xmlns:c="http://schemas.openxmlformats.org/drawingml/2006/chart" r:id="rId1"/>
+            <c:chart xmlns:c="http://schemas.openxmlformats.org/drawingml/2006/chart" xmlns:r="http://schemas.openxmlformats.org/officeDocument/2006/relationships" r:id="rId3"/>
           </a:graphicData>
         </a:graphic>
       </p:graphicFrame>
@@ -5313,7 +4954,7 @@
           <a:bodyPr wrap="square" rtlCol="0" anchor="ctr"/>
           <a:lstStyle/>
           <a:p>
-            <a:pPr indent="0" marL="0">
+            <a:pPr marL="0" indent="0">
               <a:buNone/>
             </a:pPr>
             <a:r>
@@ -5347,6 +4988,7 @@
         <a:solidFill>
           <a:srgbClr val="0A1628"/>
         </a:solidFill>
+        <a:effectLst/>
       </p:bgPr>
     </p:bg>
     <p:spTree>
@@ -5384,7 +5026,7 @@
           <a:bodyPr wrap="square" rtlCol="0" anchor="ctr"/>
           <a:lstStyle/>
           <a:p>
-            <a:pPr indent="0" marL="0">
+            <a:pPr marL="0" indent="0">
               <a:buNone/>
             </a:pPr>
             <a:r>
@@ -5398,9 +5040,6 @@
               </a:rPr>
               <a:t>A live risk analyst for </a:t>
             </a:r>
-            <a:pPr indent="0" marL="0">
-              <a:buNone/>
-            </a:pPr>
             <a:r>
               <a:rPr lang="en-US" sz="3300" b="1" dirty="0">
                 <a:solidFill>
@@ -5437,7 +5076,7 @@
           <a:bodyPr wrap="square" rtlCol="0" anchor="ctr"/>
           <a:lstStyle/>
           <a:p>
-            <a:pPr indent="0" marL="0">
+            <a:pPr marL="0" indent="0">
               <a:buNone/>
             </a:pPr>
             <a:r>
@@ -5504,14 +5143,14 @@
       </p:sp>
       <p:pic>
         <p:nvPicPr>
-          <p:cNvPr id="6" name="Image 0" descr="preencoded.png">    </p:cNvPr>
+          <p:cNvPr id="6" name="Image 0" descr="preencoded.png"/>
           <p:cNvPicPr>
             <a:picLocks noChangeAspect="1"/>
           </p:cNvPicPr>
           <p:nvPr/>
         </p:nvPicPr>
         <p:blipFill>
-          <a:blip r:embed="rId1"/>
+          <a:blip r:embed="rId3"/>
           <a:stretch>
             <a:fillRect/>
           </a:stretch>
@@ -5547,7 +5186,7 @@
           <a:bodyPr wrap="square" rtlCol="0" anchor="ctr"/>
           <a:lstStyle/>
           <a:p>
-            <a:pPr indent="0" marL="0">
+            <a:pPr marL="0" indent="0">
               <a:buNone/>
             </a:pPr>
             <a:r>
@@ -5586,7 +5225,7 @@
           <a:bodyPr wrap="square" rtlCol="0" anchor="ctr"/>
           <a:lstStyle/>
           <a:p>
-            <a:pPr indent="0" marL="0">
+            <a:pPr marL="0" indent="0">
               <a:lnSpc>
                 <a:spcPct val="106000"/>
               </a:lnSpc>
@@ -5656,14 +5295,14 @@
       </p:sp>
       <p:pic>
         <p:nvPicPr>
-          <p:cNvPr id="11" name="Image 1" descr="preencoded.png">    </p:cNvPr>
+          <p:cNvPr id="11" name="Image 1" descr="preencoded.png"/>
           <p:cNvPicPr>
             <a:picLocks noChangeAspect="1"/>
           </p:cNvPicPr>
           <p:nvPr/>
         </p:nvPicPr>
         <p:blipFill>
-          <a:blip r:embed="rId2"/>
+          <a:blip r:embed="rId4"/>
           <a:stretch>
             <a:fillRect/>
           </a:stretch>
@@ -5699,7 +5338,7 @@
           <a:bodyPr wrap="square" rtlCol="0" anchor="ctr"/>
           <a:lstStyle/>
           <a:p>
-            <a:pPr indent="0" marL="0">
+            <a:pPr marL="0" indent="0">
               <a:buNone/>
             </a:pPr>
             <a:r>
@@ -5726,7 +5365,7 @@
         <p:spPr>
           <a:xfrm>
             <a:off x="3758184" y="3429000"/>
-            <a:ext cx="2139696" cy="822960"/>
+            <a:ext cx="2219922" cy="822960"/>
           </a:xfrm>
           <a:prstGeom prst="rect">
             <a:avLst/>
@@ -5738,7 +5377,7 @@
           <a:bodyPr wrap="square" rtlCol="0" anchor="ctr"/>
           <a:lstStyle/>
           <a:p>
-            <a:pPr indent="0" marL="0">
+            <a:pPr marL="0" indent="0">
               <a:lnSpc>
                 <a:spcPct val="106000"/>
               </a:lnSpc>
@@ -5753,7 +5392,7 @@
                 <a:ea typeface="Calibri" pitchFamily="34" charset="-122"/>
                 <a:cs typeface="Calibri" pitchFamily="34" charset="-120"/>
               </a:rPr>
-              <a:t>Any listed company, on demand. No manual pull, no waiting on filings.</a:t>
+              <a:t>Any listed company, on demand. No manual searching for every information.</a:t>
             </a:r>
             <a:endParaRPr lang="en-US" sz="1250" dirty="0"/>
           </a:p>
@@ -5808,14 +5447,14 @@
       </p:sp>
       <p:pic>
         <p:nvPicPr>
-          <p:cNvPr id="16" name="Image 2" descr="preencoded.png">    </p:cNvPr>
+          <p:cNvPr id="16" name="Image 2" descr="preencoded.png"/>
           <p:cNvPicPr>
             <a:picLocks noChangeAspect="1"/>
           </p:cNvPicPr>
           <p:nvPr/>
         </p:nvPicPr>
         <p:blipFill>
-          <a:blip r:embed="rId3"/>
+          <a:blip r:embed="rId5"/>
           <a:stretch>
             <a:fillRect/>
           </a:stretch>
@@ -5851,7 +5490,7 @@
           <a:bodyPr wrap="square" rtlCol="0" anchor="ctr"/>
           <a:lstStyle/>
           <a:p>
-            <a:pPr indent="0" marL="0">
+            <a:pPr marL="0" indent="0">
               <a:buNone/>
             </a:pPr>
             <a:r>
@@ -5890,7 +5529,7 @@
           <a:bodyPr wrap="square" rtlCol="0" anchor="ctr"/>
           <a:lstStyle/>
           <a:p>
-            <a:pPr indent="0" marL="0">
+            <a:pPr marL="0" indent="0">
               <a:lnSpc>
                 <a:spcPct val="106000"/>
               </a:lnSpc>
@@ -5960,14 +5599,14 @@
       </p:sp>
       <p:pic>
         <p:nvPicPr>
-          <p:cNvPr id="21" name="Image 3" descr="preencoded.png">    </p:cNvPr>
+          <p:cNvPr id="21" name="Image 3" descr="preencoded.png"/>
           <p:cNvPicPr>
             <a:picLocks noChangeAspect="1"/>
           </p:cNvPicPr>
           <p:nvPr/>
         </p:nvPicPr>
         <p:blipFill>
-          <a:blip r:embed="rId4"/>
+          <a:blip r:embed="rId6"/>
           <a:stretch>
             <a:fillRect/>
           </a:stretch>
@@ -6003,7 +5642,7 @@
           <a:bodyPr wrap="square" rtlCol="0" anchor="ctr"/>
           <a:lstStyle/>
           <a:p>
-            <a:pPr indent="0" marL="0">
+            <a:pPr marL="0" indent="0">
               <a:buNone/>
             </a:pPr>
             <a:r>
@@ -6042,7 +5681,7 @@
           <a:bodyPr wrap="square" rtlCol="0" anchor="ctr"/>
           <a:lstStyle/>
           <a:p>
-            <a:pPr indent="0" marL="0">
+            <a:pPr marL="0" indent="0">
               <a:lnSpc>
                 <a:spcPct val="106000"/>
               </a:lnSpc>
@@ -6066,7 +5705,7 @@
       <p:sp>
         <p:nvSpPr>
           <p:cNvPr id="24" name="Shape 18">
-            <a:hlinkClick r:id="rId5" tooltip="Open the live Foresight AI dashboard"/>
+            <a:hlinkClick r:id="rId7" tooltip="Open the live Foresight AI dashboard"/>
           </p:cNvPr>
           <p:cNvSpPr/>
           <p:nvPr/>
@@ -6090,7 +5729,7 @@
       <p:sp>
         <p:nvSpPr>
           <p:cNvPr id="25" name="Text 19">
-            <a:hlinkClick r:id="rId5" tooltip="Open the live Foresight AI dashboard"/>
+            <a:hlinkClick r:id="rId7" tooltip="Open the live Foresight AI dashboard"/>
           </p:cNvPr>
           <p:cNvSpPr/>
           <p:nvPr/>
@@ -6110,7 +5749,7 @@
           <a:bodyPr wrap="square" rtlCol="0" anchor="ctr"/>
           <a:lstStyle/>
           <a:p>
-            <a:pPr algn="ctr" indent="0" marL="0">
+            <a:pPr marL="0" indent="0" algn="ctr">
               <a:buNone/>
             </a:pPr>
             <a:r>
@@ -6121,7 +5760,7 @@
                 <a:latin typeface="Calibri" pitchFamily="34" charset="0"/>
                 <a:ea typeface="Calibri" pitchFamily="34" charset="-122"/>
                 <a:cs typeface="Calibri" pitchFamily="34" charset="-120"/>
-                <a:hlinkClick r:id="rId5" invalidUrl="" action="" tgtFrame="" tooltip="Open the live Foresight AI dashboard" history="1" highlightClick="0" endSnd="0">
+                <a:hlinkClick r:id="rId7" tooltip="Open the live Foresight AI dashboard">
                   <a:extLst>
                     <a:ext uri="{A12FA001-AC4F-418D-AE19-62706E023703}">
                       <ahyp:hlinkClr xmlns:ahyp="http://schemas.microsoft.com/office/drawing/2018/hyperlinkcolor" val="tx"/>
@@ -6129,11 +5768,8 @@
                   </a:extLst>
                 </a:hlinkClick>
               </a:rPr>
-              <a:t>Open the live dashboard   </a:t>
-            </a:r>
-            <a:pPr algn="ctr" indent="0" marL="0">
-              <a:buNone/>
-            </a:pPr>
+              <a:t>Open the live dashboard: </a:t>
+            </a:r>
             <a:r>
               <a:rPr lang="en-US" sz="1900" b="1" u="sng" dirty="0">
                 <a:solidFill>
@@ -6142,7 +5778,7 @@
                 <a:latin typeface="Calibri" pitchFamily="34" charset="0"/>
                 <a:ea typeface="Calibri" pitchFamily="34" charset="-122"/>
                 <a:cs typeface="Calibri" pitchFamily="34" charset="-120"/>
-                <a:hlinkClick r:id="rId5" invalidUrl="" action="" tgtFrame="" tooltip="Open the live Foresight AI dashboard" history="1" highlightClick="0" endSnd="0">
+                <a:hlinkClick r:id="rId7" tooltip="Open the live Foresight AI dashboard">
                   <a:extLst>
                     <a:ext uri="{A12FA001-AC4F-418D-AE19-62706E023703}">
                       <ahyp:hlinkClr xmlns:ahyp="http://schemas.microsoft.com/office/drawing/2018/hyperlinkcolor" val="tx"/>
@@ -6164,7 +5800,7 @@
         </p:nvSpPr>
         <p:spPr>
           <a:xfrm>
-            <a:off x="822960" y="6053328"/>
+            <a:off x="2505104" y="6217226"/>
             <a:ext cx="7315200" cy="320040"/>
           </a:xfrm>
           <a:prstGeom prst="rect">
@@ -6177,7 +5813,7 @@
           <a:bodyPr wrap="square" rtlCol="0" anchor="ctr"/>
           <a:lstStyle/>
           <a:p>
-            <a:pPr indent="0" marL="0">
+            <a:pPr marL="0" indent="0" algn="ctr">
               <a:buNone/>
             </a:pPr>
             <a:r>
@@ -6191,9 +5827,6 @@
               </a:rPr>
               <a:t>Source &amp; notebooks:  </a:t>
             </a:r>
-            <a:pPr indent="0" marL="0">
-              <a:buNone/>
-            </a:pPr>
             <a:r>
               <a:rPr lang="en-US" sz="1300" b="1" u="sng" dirty="0">
                 <a:solidFill>
@@ -6202,7 +5835,7 @@
                 <a:latin typeface="Calibri" pitchFamily="34" charset="0"/>
                 <a:ea typeface="Calibri" pitchFamily="34" charset="-122"/>
                 <a:cs typeface="Calibri" pitchFamily="34" charset="-120"/>
-                <a:hlinkClick r:id="rId6" invalidUrl="" action="" tgtFrame="" tooltip="View the code on GitHub" history="1" highlightClick="0" endSnd="0">
+                <a:hlinkClick r:id="rId8" tooltip="View the code on GitHub">
                   <a:extLst>
                     <a:ext uri="{A12FA001-AC4F-418D-AE19-62706E023703}">
                       <ahyp:hlinkClr xmlns:ahyp="http://schemas.microsoft.com/office/drawing/2018/hyperlinkcolor" val="tx"/>
@@ -6264,11 +5897,11 @@
           <a:bodyPr wrap="square" rtlCol="0" anchor="ctr"/>
           <a:lstStyle/>
           <a:p>
-            <a:pPr indent="0" marL="0">
+            <a:pPr marL="0" indent="0">
               <a:buNone/>
             </a:pPr>
             <a:r>
-              <a:rPr lang="en-US" sz="1050" b="1" spc="200" kern="0" dirty="0">
+              <a:rPr lang="en-US" sz="1050" b="1" kern="0" spc="200" dirty="0">
                 <a:solidFill>
                   <a:srgbClr val="F59E0B"/>
                 </a:solidFill>
@@ -6303,7 +5936,7 @@
           <a:bodyPr wrap="square" rtlCol="0" anchor="ctr"/>
           <a:lstStyle/>
           <a:p>
-            <a:pPr indent="0" marL="0">
+            <a:pPr marL="0" indent="0">
               <a:buNone/>
             </a:pPr>
             <a:r>
@@ -6386,7 +6019,7 @@
           <a:bodyPr wrap="square" rtlCol="0" anchor="ctr"/>
           <a:lstStyle/>
           <a:p>
-            <a:pPr indent="0" marL="0">
+            <a:pPr marL="0" indent="0">
               <a:buNone/>
             </a:pPr>
             <a:r>
@@ -6450,7 +6083,7 @@
       </p:sp>
       <p:graphicFrame>
         <p:nvGraphicFramePr>
-          <p:cNvPr id="35" name="Chart 0" descr=""/>
+          <p:cNvPr id="35" name="Chart 0"/>
           <p:cNvGraphicFramePr/>
           <p:nvPr/>
         </p:nvGraphicFramePr>
@@ -6458,9 +6091,9 @@
           <a:off x="10561320" y="5120640"/>
           <a:ext cx="731520" cy="731520"/>
         </p:xfrm>
-        <a:graphic xmlns:a="http://schemas.openxmlformats.org/drawingml/2006/main">
+        <a:graphic>
           <a:graphicData uri="http://schemas.openxmlformats.org/drawingml/2006/chart">
-            <c:chart xmlns:c="http://schemas.openxmlformats.org/drawingml/2006/chart" r:id="rId7"/>
+            <c:chart xmlns:c="http://schemas.openxmlformats.org/drawingml/2006/chart" xmlns:r="http://schemas.openxmlformats.org/officeDocument/2006/relationships" r:id="rId9"/>
           </a:graphicData>
         </a:graphic>
       </p:graphicFrame>
@@ -6485,7 +6118,7 @@
           <a:bodyPr wrap="square" rtlCol="0" anchor="ctr"/>
           <a:lstStyle/>
           <a:p>
-            <a:pPr algn="ctr" indent="0" marL="0">
+            <a:pPr marL="0" indent="0" algn="ctr">
               <a:buNone/>
             </a:pPr>
             <a:r>
@@ -6804,4 +6437,319 @@
     </a:ext>
   </a:extLst>
 </a:theme>
+</file>
+
+<file path=ppt/theme/theme2.xml><?xml version="1.0" encoding="utf-8"?>
+<a:theme xmlns:a="http://schemas.openxmlformats.org/drawingml/2006/main" name="Office Theme">
+  <a:themeElements>
+    <a:clrScheme name="Office">
+      <a:dk1>
+        <a:sysClr val="windowText" lastClr="000000"/>
+      </a:dk1>
+      <a:lt1>
+        <a:sysClr val="window" lastClr="FFFFFF"/>
+      </a:lt1>
+      <a:dk2>
+        <a:srgbClr val="0E2841"/>
+      </a:dk2>
+      <a:lt2>
+        <a:srgbClr val="E8E8E8"/>
+      </a:lt2>
+      <a:accent1>
+        <a:srgbClr val="156082"/>
+      </a:accent1>
+      <a:accent2>
+        <a:srgbClr val="E97132"/>
+      </a:accent2>
+      <a:accent3>
+        <a:srgbClr val="196B24"/>
+      </a:accent3>
+      <a:accent4>
+        <a:srgbClr val="0F9ED5"/>
+      </a:accent4>
+      <a:accent5>
+        <a:srgbClr val="A02B93"/>
+      </a:accent5>
+      <a:accent6>
+        <a:srgbClr val="4EA72E"/>
+      </a:accent6>
+      <a:hlink>
+        <a:srgbClr val="467886"/>
+      </a:hlink>
+      <a:folHlink>
+        <a:srgbClr val="96607D"/>
+      </a:folHlink>
+    </a:clrScheme>
+    <a:fontScheme name="Office">
+      <a:majorFont>
+        <a:latin typeface="Aptos Display" panose="02110004020202020204"/>
+        <a:ea typeface=""/>
+        <a:cs typeface=""/>
+        <a:font script="Jpan" typeface="游ゴシック Light"/>
+        <a:font script="Hang" typeface="맑은 고딕"/>
+        <a:font script="Hans" typeface="等线 Light"/>
+        <a:font script="Hant" typeface="新細明體"/>
+        <a:font script="Arab" typeface="Times New Roman"/>
+        <a:font script="Hebr" typeface="Times New Roman"/>
+        <a:font script="Thai" typeface="Angsana New"/>
+        <a:font script="Ethi" typeface="Nyala"/>
+        <a:font script="Beng" typeface="Vrinda"/>
+        <a:font script="Gujr" typeface="Shruti"/>
+        <a:font script="Khmr" typeface="MoolBoran"/>
+        <a:font script="Knda" typeface="Tunga"/>
+        <a:font script="Guru" typeface="Raavi"/>
+        <a:font script="Cans" typeface="Euphemia"/>
+        <a:font script="Cher" typeface="Plantagenet Cherokee"/>
+        <a:font script="Yiii" typeface="Microsoft Yi Baiti"/>
+        <a:font script="Tibt" typeface="Microsoft Himalaya"/>
+        <a:font script="Thaa" typeface="MV Boli"/>
+        <a:font script="Deva" typeface="Mangal"/>
+        <a:font script="Telu" typeface="Gautami"/>
+        <a:font script="Taml" typeface="Latha"/>
+        <a:font script="Syrc" typeface="Estrangelo Edessa"/>
+        <a:font script="Orya" typeface="Kalinga"/>
+        <a:font script="Mlym" typeface="Kartika"/>
+        <a:font script="Laoo" typeface="DokChampa"/>
+        <a:font script="Sinh" typeface="Iskoola Pota"/>
+        <a:font script="Mong" typeface="Mongolian Baiti"/>
+        <a:font script="Viet" typeface="Times New Roman"/>
+        <a:font script="Uigh" typeface="Microsoft Uighur"/>
+        <a:font script="Geor" typeface="Sylfaen"/>
+        <a:font script="Armn" typeface="Arial"/>
+        <a:font script="Bugi" typeface="Leelawadee UI"/>
+        <a:font script="Bopo" typeface="Microsoft JhengHei"/>
+        <a:font script="Java" typeface="Javanese Text"/>
+        <a:font script="Lisu" typeface="Segoe UI"/>
+        <a:font script="Mymr" typeface="Myanmar Text"/>
+        <a:font script="Nkoo" typeface="Ebrima"/>
+        <a:font script="Olck" typeface="Nirmala UI"/>
+        <a:font script="Osma" typeface="Ebrima"/>
+        <a:font script="Phag" typeface="Phagspa"/>
+        <a:font script="Syrn" typeface="Estrangelo Edessa"/>
+        <a:font script="Syrj" typeface="Estrangelo Edessa"/>
+        <a:font script="Syre" typeface="Estrangelo Edessa"/>
+        <a:font script="Sora" typeface="Nirmala UI"/>
+        <a:font script="Tale" typeface="Microsoft Tai Le"/>
+        <a:font script="Talu" typeface="Microsoft New Tai Lue"/>
+        <a:font script="Tfng" typeface="Ebrima"/>
+      </a:majorFont>
+      <a:minorFont>
+        <a:latin typeface="Aptos" panose="02110004020202020204"/>
+        <a:ea typeface=""/>
+        <a:cs typeface=""/>
+        <a:font script="Jpan" typeface="游ゴシック"/>
+        <a:font script="Hang" typeface="맑은 고딕"/>
+        <a:font script="Hans" typeface="等线"/>
+        <a:font script="Hant" typeface="新細明體"/>
+        <a:font script="Arab" typeface="Arial"/>
+        <a:font script="Hebr" typeface="Arial"/>
+        <a:font script="Thai" typeface="Cordia New"/>
+        <a:font script="Ethi" typeface="Nyala"/>
+        <a:font script="Beng" typeface="Vrinda"/>
+        <a:font script="Gujr" typeface="Shruti"/>
+        <a:font script="Khmr" typeface="DaunPenh"/>
+        <a:font script="Knda" typeface="Tunga"/>
+        <a:font script="Guru" typeface="Raavi"/>
+        <a:font script="Cans" typeface="Euphemia"/>
+        <a:font script="Cher" typeface="Plantagenet Cherokee"/>
+        <a:font script="Yiii" typeface="Microsoft Yi Baiti"/>
+        <a:font script="Tibt" typeface="Microsoft Himalaya"/>
+        <a:font script="Thaa" typeface="MV Boli"/>
+        <a:font script="Deva" typeface="Mangal"/>
+        <a:font script="Telu" typeface="Gautami"/>
+        <a:font script="Taml" typeface="Latha"/>
+        <a:font script="Syrc" typeface="Estrangelo Edessa"/>
+        <a:font script="Orya" typeface="Kalinga"/>
+        <a:font script="Mlym" typeface="Kartika"/>
+        <a:font script="Laoo" typeface="DokChampa"/>
+        <a:font script="Sinh" typeface="Iskoola Pota"/>
+        <a:font script="Mong" typeface="Mongolian Baiti"/>
+        <a:font script="Viet" typeface="Arial"/>
+        <a:font script="Uigh" typeface="Microsoft Uighur"/>
+        <a:font script="Geor" typeface="Sylfaen"/>
+        <a:font script="Armn" typeface="Arial"/>
+        <a:font script="Bugi" typeface="Leelawadee UI"/>
+        <a:font script="Bopo" typeface="Microsoft JhengHei"/>
+        <a:font script="Java" typeface="Javanese Text"/>
+        <a:font script="Lisu" typeface="Segoe UI"/>
+        <a:font script="Mymr" typeface="Myanmar Text"/>
+        <a:font script="Nkoo" typeface="Ebrima"/>
+        <a:font script="Olck" typeface="Nirmala UI"/>
+        <a:font script="Osma" typeface="Ebrima"/>
+        <a:font script="Phag" typeface="Phagspa"/>
+        <a:font script="Syrn" typeface="Estrangelo Edessa"/>
+        <a:font script="Syrj" typeface="Estrangelo Edessa"/>
+        <a:font script="Syre" typeface="Estrangelo Edessa"/>
+        <a:font script="Sora" typeface="Nirmala UI"/>
+        <a:font script="Tale" typeface="Microsoft Tai Le"/>
+        <a:font script="Talu" typeface="Microsoft New Tai Lue"/>
+        <a:font script="Tfng" typeface="Ebrima"/>
+      </a:minorFont>
+    </a:fontScheme>
+    <a:fmtScheme name="Office">
+      <a:fillStyleLst>
+        <a:solidFill>
+          <a:schemeClr val="phClr"/>
+        </a:solidFill>
+        <a:gradFill rotWithShape="1">
+          <a:gsLst>
+            <a:gs pos="0">
+              <a:schemeClr val="phClr">
+                <a:lumMod val="110000"/>
+                <a:satMod val="105000"/>
+                <a:tint val="67000"/>
+              </a:schemeClr>
+            </a:gs>
+            <a:gs pos="50000">
+              <a:schemeClr val="phClr">
+                <a:lumMod val="105000"/>
+                <a:satMod val="103000"/>
+                <a:tint val="73000"/>
+              </a:schemeClr>
+            </a:gs>
+            <a:gs pos="100000">
+              <a:schemeClr val="phClr">
+                <a:lumMod val="105000"/>
+                <a:satMod val="109000"/>
+                <a:tint val="81000"/>
+              </a:schemeClr>
+            </a:gs>
+          </a:gsLst>
+          <a:lin ang="5400000" scaled="0"/>
+        </a:gradFill>
+        <a:gradFill rotWithShape="1">
+          <a:gsLst>
+            <a:gs pos="0">
+              <a:schemeClr val="phClr">
+                <a:satMod val="103000"/>
+                <a:lumMod val="102000"/>
+                <a:tint val="94000"/>
+              </a:schemeClr>
+            </a:gs>
+            <a:gs pos="50000">
+              <a:schemeClr val="phClr">
+                <a:satMod val="110000"/>
+                <a:lumMod val="100000"/>
+                <a:shade val="100000"/>
+              </a:schemeClr>
+            </a:gs>
+            <a:gs pos="100000">
+              <a:schemeClr val="phClr">
+                <a:lumMod val="99000"/>
+                <a:satMod val="120000"/>
+                <a:shade val="78000"/>
+              </a:schemeClr>
+            </a:gs>
+          </a:gsLst>
+          <a:lin ang="5400000" scaled="0"/>
+        </a:gradFill>
+      </a:fillStyleLst>
+      <a:lnStyleLst>
+        <a:ln w="12700" cap="flat" cmpd="sng" algn="ctr">
+          <a:solidFill>
+            <a:schemeClr val="phClr"/>
+          </a:solidFill>
+          <a:prstDash val="solid"/>
+          <a:miter lim="800000"/>
+        </a:ln>
+        <a:ln w="19050" cap="flat" cmpd="sng" algn="ctr">
+          <a:solidFill>
+            <a:schemeClr val="phClr"/>
+          </a:solidFill>
+          <a:prstDash val="solid"/>
+          <a:miter lim="800000"/>
+        </a:ln>
+        <a:ln w="25400" cap="flat" cmpd="sng" algn="ctr">
+          <a:solidFill>
+            <a:schemeClr val="phClr"/>
+          </a:solidFill>
+          <a:prstDash val="solid"/>
+          <a:miter lim="800000"/>
+        </a:ln>
+      </a:lnStyleLst>
+      <a:effectStyleLst>
+        <a:effectStyle>
+          <a:effectLst/>
+        </a:effectStyle>
+        <a:effectStyle>
+          <a:effectLst/>
+        </a:effectStyle>
+        <a:effectStyle>
+          <a:effectLst>
+            <a:outerShdw blurRad="57150" dist="19050" dir="5400000" algn="ctr" rotWithShape="0">
+              <a:srgbClr val="000000">
+                <a:alpha val="63000"/>
+              </a:srgbClr>
+            </a:outerShdw>
+          </a:effectLst>
+        </a:effectStyle>
+      </a:effectStyleLst>
+      <a:bgFillStyleLst>
+        <a:solidFill>
+          <a:schemeClr val="phClr"/>
+        </a:solidFill>
+        <a:solidFill>
+          <a:schemeClr val="phClr">
+            <a:tint val="95000"/>
+            <a:satMod val="170000"/>
+          </a:schemeClr>
+        </a:solidFill>
+        <a:gradFill rotWithShape="1">
+          <a:gsLst>
+            <a:gs pos="0">
+              <a:schemeClr val="phClr">
+                <a:tint val="93000"/>
+                <a:satMod val="150000"/>
+                <a:shade val="98000"/>
+                <a:lumMod val="102000"/>
+              </a:schemeClr>
+            </a:gs>
+            <a:gs pos="50000">
+              <a:schemeClr val="phClr">
+                <a:tint val="98000"/>
+                <a:satMod val="130000"/>
+                <a:shade val="90000"/>
+                <a:lumMod val="103000"/>
+              </a:schemeClr>
+            </a:gs>
+            <a:gs pos="100000">
+              <a:schemeClr val="phClr">
+                <a:shade val="63000"/>
+                <a:satMod val="120000"/>
+              </a:schemeClr>
+            </a:gs>
+          </a:gsLst>
+          <a:lin ang="5400000" scaled="0"/>
+        </a:gradFill>
+      </a:bgFillStyleLst>
+    </a:fmtScheme>
+  </a:themeElements>
+  <a:objectDefaults>
+    <a:lnDef>
+      <a:spPr/>
+      <a:bodyPr/>
+      <a:lstStyle/>
+      <a:style>
+        <a:lnRef idx="2">
+          <a:schemeClr val="accent1"/>
+        </a:lnRef>
+        <a:fillRef idx="0">
+          <a:schemeClr val="accent1"/>
+        </a:fillRef>
+        <a:effectRef idx="1">
+          <a:schemeClr val="accent1"/>
+        </a:effectRef>
+        <a:fontRef idx="minor">
+          <a:schemeClr val="tx1"/>
+        </a:fontRef>
+      </a:style>
+    </a:lnDef>
+  </a:objectDefaults>
+  <a:extraClrSchemeLst/>
+  <a:extLst>
+    <a:ext uri="{05A4C25C-085E-4340-85A3-A5531E510DB2}">
+      <thm15:themeFamily xmlns:thm15="http://schemas.microsoft.com/office/thememl/2012/main" name="Office Theme" id="{2E142A2C-CD16-42D6-873A-C26D2A0506FA}" vid="{1BDDFF52-6CD6-40A5-AB3C-68EB2F1E4D0A}"/>
+    </a:ext>
+  </a:extLst>
+</a:theme>
 </file>
--- a/deck/ForesightAI.pptx
+++ b/deck/ForesightAI.pptx
@@ -4,18 +4,19 @@
   <p:sldMasterIdLst>
     <p:sldMasterId id="2147483648" r:id="rId1"/>
   </p:sldMasterIdLst>
-  <p:notesMasterIdLst>
-    <p:notesMasterId r:id="rId7"/>
-  </p:notesMasterIdLst>
   <p:sldIdLst>
     <p:sldId id="256" r:id="rId2"/>
     <p:sldId id="257" r:id="rId3"/>
     <p:sldId id="258" r:id="rId4"/>
     <p:sldId id="259" r:id="rId5"/>
     <p:sldId id="260" r:id="rId6"/>
+    <p:sldId id="261" r:id="rId7"/>
   </p:sldIdLst>
-  <p:sldSz cx="12192000" cy="6858000"/>
-  <p:notesSz cx="6858000" cy="12192000"/>
+  <p:notesMasterIdLst>
+    <p:notesMasterId r:id="rId8"/>
+  </p:notesMasterIdLst>
+  <p:sldSz cx="12191695" cy="6858000"/>
+  <p:notesSz cx="6858000" cy="12191695"/>
   <p:defaultTextStyle>
     <a:lvl1pPr marL="0" algn="l" defTabSz="914400" rtl="0" eaLnBrk="1" latinLnBrk="0" hangingPunct="1">
       <a:defRPr sz="1800" kern="1200">
@@ -108,20 +109,13 @@
       </a:defRPr>
     </a:lvl9pPr>
   </p:defaultTextStyle>
-  <p:extLst>
-    <p:ext uri="{EFAFB233-063F-42B5-8137-9DF3F51BA10A}">
-      <p15:sldGuideLst xmlns:p15="http://schemas.microsoft.com/office/powerpoint/2012/main"/>
-    </p:ext>
-  </p:extLst>
 </p:presentation>
 </file>
 
 <file path=ppt/charts/chart1.xml><?xml version="1.0" encoding="utf-8"?>
-<c:chartSpace xmlns:c="http://schemas.openxmlformats.org/drawingml/2006/chart" xmlns:a="http://schemas.openxmlformats.org/drawingml/2006/main" xmlns:r="http://schemas.openxmlformats.org/officeDocument/2006/relationships" xmlns:c16r2="http://schemas.microsoft.com/office/drawing/2015/06/chart">
+<c:chartSpace xmlns:c="http://schemas.openxmlformats.org/drawingml/2006/chart" xmlns:a="http://schemas.openxmlformats.org/drawingml/2006/main" xmlns:r="http://schemas.openxmlformats.org/officeDocument/2006/relationships">
   <c:date1904 val="0"/>
-  <c:lang val="en-US"/>
   <c:roundedCorners val="1"/>
-  <c:style val="2"/>
   <c:chart>
     <c:autoTitleDeleted val="1"/>
     <c:plotArea>
@@ -171,11 +165,6 @@
               </a:ln>
               <a:effectLst/>
             </c:spPr>
-            <c:extLst>
-              <c:ext xmlns:c16="http://schemas.microsoft.com/office/drawing/2014/chart" uri="{C3380CC4-5D6E-409C-BE32-E72D297353CC}">
-                <c16:uniqueId val="{00000001-D1CE-47F4-A59C-17DCD59A40B0}"/>
-              </c:ext>
-            </c:extLst>
           </c:dPt>
           <c:dPt>
             <c:idx val="1"/>
@@ -193,12 +182,81 @@
               </a:ln>
               <a:effectLst/>
             </c:spPr>
-            <c:extLst>
-              <c:ext xmlns:c16="http://schemas.microsoft.com/office/drawing/2014/chart" uri="{C3380CC4-5D6E-409C-BE32-E72D297353CC}">
-                <c16:uniqueId val="{00000003-D1CE-47F4-A59C-17DCD59A40B0}"/>
-              </c:ext>
-            </c:extLst>
           </c:dPt>
+          <c:dLbls>
+            <c:dLbl>
+              <c:idx val="0"/>
+              <c:numFmt formatCode="General" sourceLinked="0"/>
+              <c:spPr/>
+              <c:txPr>
+                <a:bodyPr/>
+                <a:lstStyle/>
+                <a:p>
+                  <a:pPr>
+                    <a:defRPr sz="1200" b="0" i="0" u="none" strike="noStrike">
+                      <a:solidFill>
+                        <a:srgbClr val="000000"/>
+                      </a:solidFill>
+                      <a:latin typeface="Arial"/>
+                    </a:defRPr>
+                  </a:pPr>
+                </a:p>
+              </c:txPr>
+              <c:showLegendKey val="0"/>
+              <c:showVal val="0"/>
+              <c:showCatName val="0"/>
+              <c:showSerName val="0"/>
+              <c:showPercent val="0"/>
+              <c:showBubbleSize val="0"/>
+            </c:dLbl>
+            <c:dLbl>
+              <c:idx val="1"/>
+              <c:numFmt formatCode="General" sourceLinked="0"/>
+              <c:spPr/>
+              <c:txPr>
+                <a:bodyPr/>
+                <a:lstStyle/>
+                <a:p>
+                  <a:pPr>
+                    <a:defRPr sz="1200" b="0" i="0" u="none" strike="noStrike">
+                      <a:solidFill>
+                        <a:srgbClr val="000000"/>
+                      </a:solidFill>
+                      <a:latin typeface="Arial"/>
+                    </a:defRPr>
+                  </a:pPr>
+                </a:p>
+              </c:txPr>
+              <c:showLegendKey val="0"/>
+              <c:showVal val="0"/>
+              <c:showCatName val="0"/>
+              <c:showSerName val="0"/>
+              <c:showPercent val="0"/>
+              <c:showBubbleSize val="0"/>
+            </c:dLbl>
+            <c:numFmt formatCode="General" sourceLinked="0"/>
+            <c:txPr>
+              <a:bodyPr/>
+              <a:lstStyle/>
+              <a:p>
+                <a:pPr>
+                  <a:defRPr sz="1800" b="0" i="0" u="none" strike="noStrike">
+                    <a:solidFill>
+                      <a:srgbClr val="000000"/>
+                    </a:solidFill>
+                    <a:latin typeface="Arial"/>
+                  </a:defRPr>
+                </a:pPr>
+              </a:p>
+            </c:txPr>
+            <c:showLegendKey val="0"/>
+            <c:showVal val="0"/>
+            <c:showCatName val="1"/>
+            <c:showSerName val="0"/>
+            <c:showPercent val="1"/>
+            <c:showBubbleSize val="0"/>
+            <c:showLeaderLines val="0"/>
+          </c:dLbls>
           <c:cat>
             <c:strRef>
               <c:f>Sheet1!$A$2:$A$3</c:f>
@@ -217,7 +275,6 @@
             <c:numRef>
               <c:f>Sheet1!$B$2:$B$3</c:f>
               <c:numCache>
-                <c:formatCode>General</c:formatCode>
                 <c:ptCount val="2"/>
                 <c:pt idx="0">
                   <c:v>58</c:v>
@@ -228,21 +285,7 @@
               </c:numCache>
             </c:numRef>
           </c:val>
-          <c:extLst>
-            <c:ext xmlns:c16="http://schemas.microsoft.com/office/drawing/2014/chart" uri="{C3380CC4-5D6E-409C-BE32-E72D297353CC}">
-              <c16:uniqueId val="{00000004-D1CE-47F4-A59C-17DCD59A40B0}"/>
-            </c:ext>
-          </c:extLst>
         </c:ser>
-        <c:dLbls>
-          <c:showLegendKey val="0"/>
-          <c:showVal val="0"/>
-          <c:showCatName val="0"/>
-          <c:showSerName val="0"/>
-          <c:showPercent val="0"/>
-          <c:showBubbleSize val="0"/>
-          <c:showLeaderLines val="0"/>
-        </c:dLbls>
         <c:firstSliceAng val="0"/>
         <c:holeSize val="74"/>
       </c:doughnutChart>
@@ -256,7 +299,6 @@
     </c:plotArea>
     <c:plotVisOnly val="1"/>
     <c:dispBlanksAs val="span"/>
-    <c:showDLblsOverMax val="1"/>
   </c:chart>
   <c:spPr>
     <a:noFill/>
@@ -272,11 +314,9 @@
 </file>
 
 <file path=ppt/charts/chart2.xml><?xml version="1.0" encoding="utf-8"?>
-<c:chartSpace xmlns:c="http://schemas.openxmlformats.org/drawingml/2006/chart" xmlns:a="http://schemas.openxmlformats.org/drawingml/2006/main" xmlns:r="http://schemas.openxmlformats.org/officeDocument/2006/relationships" xmlns:c16r2="http://schemas.microsoft.com/office/drawing/2015/06/chart">
+<c:chartSpace xmlns:c="http://schemas.openxmlformats.org/drawingml/2006/chart" xmlns:a="http://schemas.openxmlformats.org/drawingml/2006/main" xmlns:r="http://schemas.openxmlformats.org/officeDocument/2006/relationships">
   <c:date1904 val="0"/>
-  <c:lang val="en-US"/>
   <c:roundedCorners val="1"/>
-  <c:style val="2"/>
   <c:chart>
     <c:autoTitleDeleted val="1"/>
     <c:plotArea>
@@ -306,40 +346,66 @@
             <a:effectLst/>
           </c:spPr>
           <c:invertIfNegative val="0"/>
+          <c:dLbls>
+            <c:numFmt formatCode="#,##0" sourceLinked="0"/>
+            <c:txPr>
+              <a:bodyPr/>
+              <a:lstStyle/>
+              <a:p>
+                <a:pPr>
+                  <a:defRPr b="0" i="0" strike="noStrike" sz="1200" u="none">
+                    <a:solidFill>
+                      <a:srgbClr val="000000"/>
+                    </a:solidFill>
+                    <a:latin typeface="Arial"/>
+                  </a:defRPr>
+                </a:pPr>
+              </a:p>
+            </c:txPr>
+            <c:showLegendKey val="0"/>
+            <c:showVal val="0"/>
+            <c:showCatName val="0"/>
+            <c:showSerName val="0"/>
+            <c:showPercent val="0"/>
+            <c:showBubbleSize val="0"/>
+            <c:showLeaderLines val="0"/>
+          </c:dLbls>
           <c:cat>
-            <c:strRef>
+            <c:multiLvlStrRef>
               <c:f>Sheet1!$A$2:$A$10</c:f>
-              <c:strCache>
+              <c:multiLvlStrCache>
                 <c:ptCount val="9"/>
-                <c:pt idx="0">
-                  <c:v>FY15</c:v>
-                </c:pt>
-                <c:pt idx="1">
-                  <c:v>FY16</c:v>
-                </c:pt>
-                <c:pt idx="2">
-                  <c:v>FY17</c:v>
-                </c:pt>
-                <c:pt idx="3">
-                  <c:v>FY18</c:v>
-                </c:pt>
-                <c:pt idx="4">
-                  <c:v>FY19</c:v>
-                </c:pt>
-                <c:pt idx="5">
-                  <c:v>FY20</c:v>
-                </c:pt>
-                <c:pt idx="6">
-                  <c:v>FY21</c:v>
-                </c:pt>
-                <c:pt idx="7">
-                  <c:v>FY22</c:v>
-                </c:pt>
-                <c:pt idx="8">
-                  <c:v>FY23</c:v>
-                </c:pt>
-              </c:strCache>
-            </c:strRef>
+                <c:lvl>
+                  <c:pt idx="0">
+                    <c:v>FY15</c:v>
+                  </c:pt>
+                  <c:pt idx="1">
+                    <c:v>FY16</c:v>
+                  </c:pt>
+                  <c:pt idx="2">
+                    <c:v>FY17</c:v>
+                  </c:pt>
+                  <c:pt idx="3">
+                    <c:v>FY18</c:v>
+                  </c:pt>
+                  <c:pt idx="4">
+                    <c:v>FY19</c:v>
+                  </c:pt>
+                  <c:pt idx="5">
+                    <c:v>FY20</c:v>
+                  </c:pt>
+                  <c:pt idx="6">
+                    <c:v>FY21</c:v>
+                  </c:pt>
+                  <c:pt idx="7">
+                    <c:v>FY22</c:v>
+                  </c:pt>
+                  <c:pt idx="8">
+                    <c:v>FY23</c:v>
+                  </c:pt>
+                </c:lvl>
+              </c:multiLvlStrCache>
+            </c:multiLvlStrRef>
           </c:cat>
           <c:val>
             <c:numRef>
@@ -377,11 +443,6 @@
               </c:numCache>
             </c:numRef>
           </c:val>
-          <c:extLst>
-            <c:ext xmlns:c16="http://schemas.microsoft.com/office/drawing/2014/chart" uri="{C3380CC4-5D6E-409C-BE32-E72D297353CC}">
-              <c16:uniqueId val="{00000000-6D01-4D2F-96DC-1B2F4918DE4A}"/>
-            </c:ext>
-          </c:extLst>
         </c:ser>
         <c:ser>
           <c:idx val="1"/>
@@ -404,40 +465,66 @@
             <a:effectLst/>
           </c:spPr>
           <c:invertIfNegative val="0"/>
+          <c:dLbls>
+            <c:numFmt formatCode="#,##0" sourceLinked="0"/>
+            <c:txPr>
+              <a:bodyPr/>
+              <a:lstStyle/>
+              <a:p>
+                <a:pPr>
+                  <a:defRPr b="0" i="0" strike="noStrike" sz="1200" u="none">
+                    <a:solidFill>
+                      <a:srgbClr val="000000"/>
+                    </a:solidFill>
+                    <a:latin typeface="Arial"/>
+                  </a:defRPr>
+                </a:pPr>
+              </a:p>
+            </c:txPr>
+            <c:showLegendKey val="0"/>
+            <c:showVal val="0"/>
+            <c:showCatName val="0"/>
+            <c:showSerName val="0"/>
+            <c:showPercent val="0"/>
+            <c:showBubbleSize val="0"/>
+            <c:showLeaderLines val="0"/>
+          </c:dLbls>
           <c:cat>
-            <c:strRef>
+            <c:multiLvlStrRef>
               <c:f>Sheet1!$A$2:$A$10</c:f>
-              <c:strCache>
+              <c:multiLvlStrCache>
                 <c:ptCount val="9"/>
-                <c:pt idx="0">
-                  <c:v>FY15</c:v>
-                </c:pt>
-                <c:pt idx="1">
-                  <c:v>FY16</c:v>
-                </c:pt>
-                <c:pt idx="2">
-                  <c:v>FY17</c:v>
-                </c:pt>
-                <c:pt idx="3">
-                  <c:v>FY18</c:v>
-                </c:pt>
-                <c:pt idx="4">
-                  <c:v>FY19</c:v>
-                </c:pt>
-                <c:pt idx="5">
-                  <c:v>FY20</c:v>
-                </c:pt>
-                <c:pt idx="6">
-                  <c:v>FY21</c:v>
-                </c:pt>
-                <c:pt idx="7">
-                  <c:v>FY22</c:v>
-                </c:pt>
-                <c:pt idx="8">
-                  <c:v>FY23</c:v>
-                </c:pt>
-              </c:strCache>
-            </c:strRef>
+                <c:lvl>
+                  <c:pt idx="0">
+                    <c:v>FY15</c:v>
+                  </c:pt>
+                  <c:pt idx="1">
+                    <c:v>FY16</c:v>
+                  </c:pt>
+                  <c:pt idx="2">
+                    <c:v>FY17</c:v>
+                  </c:pt>
+                  <c:pt idx="3">
+                    <c:v>FY18</c:v>
+                  </c:pt>
+                  <c:pt idx="4">
+                    <c:v>FY19</c:v>
+                  </c:pt>
+                  <c:pt idx="5">
+                    <c:v>FY20</c:v>
+                  </c:pt>
+                  <c:pt idx="6">
+                    <c:v>FY21</c:v>
+                  </c:pt>
+                  <c:pt idx="7">
+                    <c:v>FY22</c:v>
+                  </c:pt>
+                  <c:pt idx="8">
+                    <c:v>FY23</c:v>
+                  </c:pt>
+                </c:lvl>
+              </c:multiLvlStrCache>
+            </c:multiLvlStrRef>
           </c:cat>
           <c:val>
             <c:numRef>
@@ -475,24 +562,36 @@
               </c:numCache>
             </c:numRef>
           </c:val>
-          <c:extLst>
-            <c:ext xmlns:c16="http://schemas.microsoft.com/office/drawing/2014/chart" uri="{C3380CC4-5D6E-409C-BE32-E72D297353CC}">
-              <c16:uniqueId val="{00000001-6D01-4D2F-96DC-1B2F4918DE4A}"/>
-            </c:ext>
-          </c:extLst>
         </c:ser>
         <c:dLbls>
+          <c:numFmt formatCode="#,##0" sourceLinked="0"/>
+          <c:txPr>
+            <a:bodyPr/>
+            <a:lstStyle/>
+            <a:p>
+              <a:pPr>
+                <a:defRPr b="0" i="0" strike="noStrike" sz="1200" u="none">
+                  <a:solidFill>
+                    <a:srgbClr val="000000"/>
+                  </a:solidFill>
+                  <a:latin typeface="Arial"/>
+                </a:defRPr>
+              </a:pPr>
+            </a:p>
+          </c:txPr>
           <c:showLegendKey val="0"/>
           <c:showVal val="0"/>
           <c:showCatName val="0"/>
           <c:showSerName val="0"/>
           <c:showPercent val="0"/>
           <c:showBubbleSize val="0"/>
+          <c:showLeaderLines val="0"/>
         </c:dLbls>
         <c:gapWidth val="45"/>
         <c:overlap val="100"/>
         <c:axId val="2094734554"/>
         <c:axId val="2094734552"/>
+        <c:axId val="2094734556"/>
       </c:barChart>
       <c:catAx>
         <c:axId val="2094734554"/>
@@ -531,7 +630,6 @@
         <c:crosses val="autoZero"/>
         <c:auto val="1"/>
         <c:lblAlgn val="ctr"/>
-        <c:lblOffset val="100"/>
         <c:noMultiLvlLbl val="1"/>
       </c:catAx>
       <c:valAx>
@@ -613,7 +711,6 @@
     </c:legend>
     <c:plotVisOnly val="1"/>
     <c:dispBlanksAs val="span"/>
-    <c:showDLblsOverMax val="1"/>
   </c:chart>
   <c:spPr>
     <a:noFill/>
@@ -629,11 +726,9 @@
 </file>
 
 <file path=ppt/charts/chart3.xml><?xml version="1.0" encoding="utf-8"?>
-<c:chartSpace xmlns:c="http://schemas.openxmlformats.org/drawingml/2006/chart" xmlns:a="http://schemas.openxmlformats.org/drawingml/2006/main" xmlns:r="http://schemas.openxmlformats.org/officeDocument/2006/relationships" xmlns:c16r2="http://schemas.microsoft.com/office/drawing/2015/06/chart">
+<c:chartSpace xmlns:c="http://schemas.openxmlformats.org/drawingml/2006/chart" xmlns:a="http://schemas.openxmlformats.org/drawingml/2006/main" xmlns:r="http://schemas.openxmlformats.org/officeDocument/2006/relationships">
   <c:date1904 val="0"/>
-  <c:lang val="en-US"/>
   <c:roundedCorners val="1"/>
-  <c:style val="2"/>
   <c:chart>
     <c:autoTitleDeleted val="1"/>
     <c:plotArea>
@@ -683,11 +778,6 @@
               </a:ln>
               <a:effectLst/>
             </c:spPr>
-            <c:extLst>
-              <c:ext xmlns:c16="http://schemas.microsoft.com/office/drawing/2014/chart" uri="{C3380CC4-5D6E-409C-BE32-E72D297353CC}">
-                <c16:uniqueId val="{00000001-7329-49C7-9E0C-634D159C3487}"/>
-              </c:ext>
-            </c:extLst>
           </c:dPt>
           <c:dPt>
             <c:idx val="1"/>
@@ -705,12 +795,81 @@
               </a:ln>
               <a:effectLst/>
             </c:spPr>
-            <c:extLst>
-              <c:ext xmlns:c16="http://schemas.microsoft.com/office/drawing/2014/chart" uri="{C3380CC4-5D6E-409C-BE32-E72D297353CC}">
-                <c16:uniqueId val="{00000003-7329-49C7-9E0C-634D159C3487}"/>
-              </c:ext>
-            </c:extLst>
           </c:dPt>
+          <c:dLbls>
+            <c:dLbl>
+              <c:idx val="0"/>
+              <c:numFmt formatCode="General" sourceLinked="0"/>
+              <c:spPr/>
+              <c:txPr>
+                <a:bodyPr/>
+                <a:lstStyle/>
+                <a:p>
+                  <a:pPr>
+                    <a:defRPr sz="1200" b="0" i="0" u="none" strike="noStrike">
+                      <a:solidFill>
+                        <a:srgbClr val="000000"/>
+                      </a:solidFill>
+                      <a:latin typeface="Arial"/>
+                    </a:defRPr>
+                  </a:pPr>
+                </a:p>
+              </c:txPr>
+              <c:showLegendKey val="0"/>
+              <c:showVal val="0"/>
+              <c:showCatName val="0"/>
+              <c:showSerName val="0"/>
+              <c:showPercent val="0"/>
+              <c:showBubbleSize val="0"/>
+            </c:dLbl>
+            <c:dLbl>
+              <c:idx val="1"/>
+              <c:numFmt formatCode="General" sourceLinked="0"/>
+              <c:spPr/>
+              <c:txPr>
+                <a:bodyPr/>
+                <a:lstStyle/>
+                <a:p>
+                  <a:pPr>
+                    <a:defRPr sz="1200" b="0" i="0" u="none" strike="noStrike">
+                      <a:solidFill>
+                        <a:srgbClr val="000000"/>
+                      </a:solidFill>
+                      <a:latin typeface="Arial"/>
+                    </a:defRPr>
+                  </a:pPr>
+                </a:p>
+              </c:txPr>
+              <c:showLegendKey val="0"/>
+              <c:showVal val="0"/>
+              <c:showCatName val="0"/>
+              <c:showSerName val="0"/>
+              <c:showPercent val="0"/>
+              <c:showBubbleSize val="0"/>
+            </c:dLbl>
+            <c:numFmt formatCode="General" sourceLinked="0"/>
+            <c:txPr>
+              <a:bodyPr/>
+              <a:lstStyle/>
+              <a:p>
+                <a:pPr>
+                  <a:defRPr sz="1800" b="0" i="0" u="none" strike="noStrike">
+                    <a:solidFill>
+                      <a:srgbClr val="000000"/>
+                    </a:solidFill>
+                    <a:latin typeface="Arial"/>
+                  </a:defRPr>
+                </a:pPr>
+              </a:p>
+            </c:txPr>
+            <c:showLegendKey val="0"/>
+            <c:showVal val="0"/>
+            <c:showCatName val="1"/>
+            <c:showSerName val="0"/>
+            <c:showPercent val="1"/>
+            <c:showBubbleSize val="0"/>
+            <c:showLeaderLines val="0"/>
+          </c:dLbls>
           <c:cat>
             <c:strRef>
               <c:f>Sheet1!$A$2:$A$3</c:f>
@@ -729,7 +888,6 @@
             <c:numRef>
               <c:f>Sheet1!$B$2:$B$3</c:f>
               <c:numCache>
-                <c:formatCode>General</c:formatCode>
                 <c:ptCount val="2"/>
                 <c:pt idx="0">
                   <c:v>58</c:v>
@@ -740,21 +898,7 @@
               </c:numCache>
             </c:numRef>
           </c:val>
-          <c:extLst>
-            <c:ext xmlns:c16="http://schemas.microsoft.com/office/drawing/2014/chart" uri="{C3380CC4-5D6E-409C-BE32-E72D297353CC}">
-              <c16:uniqueId val="{00000004-7329-49C7-9E0C-634D159C3487}"/>
-            </c:ext>
-          </c:extLst>
         </c:ser>
-        <c:dLbls>
-          <c:showLegendKey val="0"/>
-          <c:showVal val="0"/>
-          <c:showCatName val="0"/>
-          <c:showSerName val="0"/>
-          <c:showPercent val="0"/>
-          <c:showBubbleSize val="0"/>
-          <c:showLeaderLines val="0"/>
-        </c:dLbls>
         <c:firstSliceAng val="0"/>
         <c:holeSize val="74"/>
       </c:doughnutChart>
@@ -768,7 +912,6 @@
     </c:plotArea>
     <c:plotVisOnly val="1"/>
     <c:dispBlanksAs val="span"/>
-    <c:showDLblsOverMax val="1"/>
   </c:chart>
   <c:spPr>
     <a:noFill/>
@@ -805,10 +948,234 @@
           <a:chExt cx="0" cy="0"/>
         </a:xfrm>
       </p:grpSpPr>
+      <p:sp>
+        <p:nvSpPr>
+          <p:cNvPr id="2" name="Header Placeholder 1"/>
+          <p:cNvSpPr>
+            <a:spLocks noGrp="1"/>
+          </p:cNvSpPr>
+          <p:nvPr>
+            <p:ph type="hdr" sz="quarter"/>
+          </p:nvPr>
+        </p:nvSpPr>
+        <p:spPr>
+          <a:xfrm>
+            <a:off x="0" y="0"/>
+            <a:ext cx="2971800" cy="458788"/>
+          </a:xfrm>
+          <a:prstGeom prst="rect">
+            <a:avLst/>
+          </a:prstGeom>
+        </p:spPr>
+        <p:txBody>
+          <a:bodyPr vert="horz" lIns="91440" tIns="45720" rIns="91440" bIns="45720" rtlCol="0"/>
+          <a:lstStyle>
+            <a:lvl1pPr algn="l">
+              <a:defRPr sz="1200"/>
+            </a:lvl1pPr>
+          </a:lstStyle>
+          <a:p>
+            <a:endParaRPr lang="en-US"/>
+          </a:p>
+        </p:txBody>
+      </p:sp>
+      <p:sp>
+        <p:nvSpPr>
+          <p:cNvPr id="3" name="Date Placeholder 2"/>
+          <p:cNvSpPr>
+            <a:spLocks noGrp="1"/>
+          </p:cNvSpPr>
+          <p:nvPr>
+            <p:ph type="dt" idx="1"/>
+          </p:nvPr>
+        </p:nvSpPr>
+        <p:spPr>
+          <a:xfrm>
+            <a:off x="3884613" y="0"/>
+            <a:ext cx="2971800" cy="458788"/>
+          </a:xfrm>
+          <a:prstGeom prst="rect">
+            <a:avLst/>
+          </a:prstGeom>
+        </p:spPr>
+        <p:txBody>
+          <a:bodyPr vert="horz" lIns="91440" tIns="45720" rIns="91440" bIns="45720" rtlCol="0"/>
+          <a:lstStyle>
+            <a:lvl1pPr algn="r">
+              <a:defRPr sz="1200"/>
+            </a:lvl1pPr>
+          </a:lstStyle>
+          <a:p>
+            <a:fld id="{5282F153-3F37-0F45-9E97-73ACFA13230C}" type="datetimeFigureOut">
+              <a:rPr lang="en-US"/>
+              <a:t>7/23/19</a:t>
+            </a:fld>
+            <a:endParaRPr lang="en-US"/>
+          </a:p>
+        </p:txBody>
+      </p:sp>
+      <p:sp>
+        <p:nvSpPr>
+          <p:cNvPr id="4" name="Slide Image Placeholder 3"/>
+          <p:cNvSpPr>
+            <a:spLocks noGrp="1" noRot="1" noChangeAspect="1"/>
+          </p:cNvSpPr>
+          <p:nvPr>
+            <p:ph type="sldImg" idx="2"/>
+          </p:nvPr>
+        </p:nvSpPr>
+        <p:spPr>
+          <a:xfrm>
+            <a:off x="685800" y="1143000"/>
+            <a:ext cx="5486400" cy="3086100"/>
+          </a:xfrm>
+          <a:prstGeom prst="rect">
+            <a:avLst/>
+          </a:prstGeom>
+          <a:noFill/>
+          <a:ln w="12700">
+            <a:solidFill>
+              <a:prstClr val="black"/>
+            </a:solidFill>
+          </a:ln>
+        </p:spPr>
+        <p:txBody>
+          <a:bodyPr vert="horz" lIns="91440" tIns="45720" rIns="91440" bIns="45720" rtlCol="0" anchor="ctr"/>
+          <a:lstStyle/>
+          <a:p>
+            <a:endParaRPr lang="en-US"/>
+          </a:p>
+        </p:txBody>
+      </p:sp>
+      <p:sp>
+        <p:nvSpPr>
+          <p:cNvPr id="5" name="Notes Placeholder 4"/>
+          <p:cNvSpPr>
+            <a:spLocks noGrp="1"/>
+          </p:cNvSpPr>
+          <p:nvPr>
+            <p:ph type="body" sz="quarter" idx="3"/>
+          </p:nvPr>
+        </p:nvSpPr>
+        <p:spPr>
+          <a:xfrm>
+            <a:off x="685800" y="4400550"/>
+            <a:ext cx="5486400" cy="3600450"/>
+          </a:xfrm>
+          <a:prstGeom prst="rect">
+            <a:avLst/>
+          </a:prstGeom>
+        </p:spPr>
+        <p:txBody>
+          <a:bodyPr vert="horz" lIns="91440" tIns="45720" rIns="91440" bIns="45720" rtlCol="0"/>
+          <a:lstStyle/>
+          <a:p>
+            <a:pPr lvl="0"/>
+            <a:r>
+              <a:rPr lang="en-US"/>
+              <a:t>Click to edit Master text styles</a:t>
+            </a:r>
+          </a:p>
+          <a:p>
+            <a:pPr lvl="1"/>
+            <a:r>
+              <a:rPr lang="en-US"/>
+              <a:t>Second level</a:t>
+            </a:r>
+          </a:p>
+          <a:p>
+            <a:pPr lvl="2"/>
+            <a:r>
+              <a:rPr lang="en-US"/>
+              <a:t>Third level</a:t>
+            </a:r>
+          </a:p>
+          <a:p>
+            <a:pPr lvl="3"/>
+            <a:r>
+              <a:rPr lang="en-US"/>
+              <a:t>Fourth level</a:t>
+            </a:r>
+          </a:p>
+          <a:p>
+            <a:pPr lvl="4"/>
+            <a:r>
+              <a:rPr lang="en-US"/>
+              <a:t>Fifth level</a:t>
+            </a:r>
+          </a:p>
+        </p:txBody>
+      </p:sp>
+      <p:sp>
+        <p:nvSpPr>
+          <p:cNvPr id="6" name="Footer Placeholder 5"/>
+          <p:cNvSpPr>
+            <a:spLocks noGrp="1"/>
+          </p:cNvSpPr>
+          <p:nvPr>
+            <p:ph type="ftr" sz="quarter" idx="4"/>
+          </p:nvPr>
+        </p:nvSpPr>
+        <p:spPr>
+          <a:xfrm>
+            <a:off x="0" y="8685213"/>
+            <a:ext cx="2971800" cy="458787"/>
+          </a:xfrm>
+          <a:prstGeom prst="rect">
+            <a:avLst/>
+          </a:prstGeom>
+        </p:spPr>
+        <p:txBody>
+          <a:bodyPr vert="horz" lIns="91440" tIns="45720" rIns="91440" bIns="45720" rtlCol="0" anchor="b"/>
+          <a:lstStyle>
+            <a:lvl1pPr algn="l">
+              <a:defRPr sz="1200"/>
+            </a:lvl1pPr>
+          </a:lstStyle>
+          <a:p>
+            <a:endParaRPr lang="en-US"/>
+          </a:p>
+        </p:txBody>
+      </p:sp>
+      <p:sp>
+        <p:nvSpPr>
+          <p:cNvPr id="7" name="Slide Number Placeholder 6"/>
+          <p:cNvSpPr>
+            <a:spLocks noGrp="1"/>
+          </p:cNvSpPr>
+          <p:nvPr>
+            <p:ph type="sldNum" sz="quarter" idx="5"/>
+          </p:nvPr>
+        </p:nvSpPr>
+        <p:spPr>
+          <a:xfrm>
+            <a:off x="3884613" y="8685213"/>
+            <a:ext cx="2971800" cy="458787"/>
+          </a:xfrm>
+          <a:prstGeom prst="rect">
+            <a:avLst/>
+          </a:prstGeom>
+        </p:spPr>
+        <p:txBody>
+          <a:bodyPr vert="horz" lIns="91440" tIns="45720" rIns="91440" bIns="45720" rtlCol="0" anchor="b"/>
+          <a:lstStyle>
+            <a:lvl1pPr algn="r">
+              <a:defRPr sz="1200"/>
+            </a:lvl1pPr>
+          </a:lstStyle>
+          <a:p>
+            <a:fld id="{CE5E9CC1-C706-0F49-92D6-E571CC5EEA8F}" type="slidenum">
+              <a:rPr lang="en-US"/>
+              <a:t>‹#›</a:t>
+            </a:fld>
+            <a:endParaRPr lang="en-US"/>
+          </a:p>
+        </p:txBody>
+      </p:sp>
     </p:spTree>
     <p:extLst>
       <p:ext uri="{BB962C8B-B14F-4D97-AF65-F5344CB8AC3E}">
-        <p14:creationId xmlns:p14="http://schemas.microsoft.com/office/powerpoint/2010/main" val="1283528057"/>
+        <p14:creationId xmlns:p14="http://schemas.microsoft.com/office/powerpoint/2010/main" val="1024086991"/>
       </p:ext>
     </p:extLst>
   </p:cSld>
@@ -952,6 +1319,10 @@
           <a:bodyPr/>
           <a:lstStyle/>
           <a:p>
+            <a:r>
+              <a:rPr lang="en-US" dirty="0"/>
+              <a:t/>
+            </a:r>
             <a:endParaRPr lang="en-US" dirty="0"/>
           </a:p>
         </p:txBody>
@@ -1036,6 +1407,10 @@
           <a:bodyPr/>
           <a:lstStyle/>
           <a:p>
+            <a:r>
+              <a:rPr lang="en-US" dirty="0"/>
+              <a:t/>
+            </a:r>
             <a:endParaRPr lang="en-US" dirty="0"/>
           </a:p>
         </p:txBody>
@@ -1120,6 +1495,10 @@
           <a:bodyPr/>
           <a:lstStyle/>
           <a:p>
+            <a:r>
+              <a:rPr lang="en-US" dirty="0"/>
+              <a:t/>
+            </a:r>
             <a:endParaRPr lang="en-US" dirty="0"/>
           </a:p>
         </p:txBody>
@@ -1204,6 +1583,10 @@
           <a:bodyPr/>
           <a:lstStyle/>
           <a:p>
+            <a:r>
+              <a:rPr lang="en-US" dirty="0"/>
+              <a:t/>
+            </a:r>
             <a:endParaRPr lang="en-US" dirty="0"/>
           </a:p>
         </p:txBody>
@@ -1288,6 +1671,10 @@
           <a:bodyPr/>
           <a:lstStyle/>
           <a:p>
+            <a:r>
+              <a:rPr lang="en-US" dirty="0"/>
+              <a:t/>
+            </a:r>
             <a:endParaRPr lang="en-US" dirty="0"/>
           </a:p>
         </p:txBody>
@@ -1310,6 +1697,94 @@
             <a:fld id="{F7021451-1387-4CA6-816F-3879F97B5CBC}" type="slidenum">
               <a:rPr lang="en-US"/>
               <a:t>5</a:t>
+            </a:fld>
+            <a:endParaRPr lang="en-US"/>
+          </a:p>
+        </p:txBody>
+      </p:sp>
+    </p:spTree>
+    <p:extLst>
+      <p:ext uri="{BB962C8B-B14F-4D97-AF65-F5344CB8AC3E}">
+        <p14:creationId xmlns:p14="http://schemas.microsoft.com/office/powerpoint/2010/main" val="1024086991"/>
+      </p:ext>
+    </p:extLst>
+  </p:cSld>
+  <p:clrMapOvr>
+    <a:masterClrMapping/>
+  </p:clrMapOvr>
+</p:notes>
+</file>
+
+<file path=ppt/notesSlides/notesSlide6.xml><?xml version="1.0" encoding="utf-8"?>
+<p:notes xmlns:a="http://schemas.openxmlformats.org/drawingml/2006/main" xmlns:r="http://schemas.openxmlformats.org/officeDocument/2006/relationships" xmlns:p="http://schemas.openxmlformats.org/presentationml/2006/main">
+  <p:cSld>
+    <p:spTree>
+      <p:nvGrpSpPr>
+        <p:cNvPr id="1" name=""/>
+        <p:cNvGrpSpPr/>
+        <p:nvPr/>
+      </p:nvGrpSpPr>
+      <p:grpSpPr>
+        <a:xfrm>
+          <a:off x="0" y="0"/>
+          <a:ext cx="0" cy="0"/>
+          <a:chOff x="0" y="0"/>
+          <a:chExt cx="0" cy="0"/>
+        </a:xfrm>
+      </p:grpSpPr>
+      <p:sp>
+        <p:nvSpPr>
+          <p:cNvPr id="2" name="Slide Image Placeholder 1"/>
+          <p:cNvSpPr>
+            <a:spLocks noGrp="1" noRot="1" noChangeAspect="1"/>
+          </p:cNvSpPr>
+          <p:nvPr>
+            <p:ph type="sldImg"/>
+          </p:nvPr>
+        </p:nvSpPr>
+        <p:spPr/>
+      </p:sp>
+      <p:sp>
+        <p:nvSpPr>
+          <p:cNvPr id="3" name="Notes Placeholder 2"/>
+          <p:cNvSpPr>
+            <a:spLocks noGrp="1"/>
+          </p:cNvSpPr>
+          <p:nvPr>
+            <p:ph type="body" idx="1"/>
+          </p:nvPr>
+        </p:nvSpPr>
+        <p:spPr/>
+        <p:txBody>
+          <a:bodyPr/>
+          <a:lstStyle/>
+          <a:p>
+            <a:r>
+              <a:rPr lang="en-US" dirty="0"/>
+              <a:t/>
+            </a:r>
+            <a:endParaRPr lang="en-US" dirty="0"/>
+          </a:p>
+        </p:txBody>
+      </p:sp>
+      <p:sp>
+        <p:nvSpPr>
+          <p:cNvPr id="4" name="Slide Number Placeholder 3"/>
+          <p:cNvSpPr>
+            <a:spLocks noGrp="1"/>
+          </p:cNvSpPr>
+          <p:nvPr>
+            <p:ph type="sldNum" sz="quarter" idx="10"/>
+          </p:nvPr>
+        </p:nvSpPr>
+        <p:spPr/>
+        <p:txBody>
+          <a:bodyPr/>
+          <a:lstStyle/>
+          <a:p>
+            <a:fld id="{F7021451-1387-4CA6-816F-3879F97B5CBC}" type="slidenum">
+              <a:rPr lang="en-US"/>
+              <a:t>6</a:t>
             </a:fld>
             <a:endParaRPr lang="en-US"/>
           </a:p>
@@ -1361,11 +1836,6 @@
 <file path=ppt/slideMasters/slideMaster1.xml><?xml version="1.0" encoding="utf-8"?>
 <p:sldMaster xmlns:a="http://schemas.openxmlformats.org/drawingml/2006/main" xmlns:r="http://schemas.openxmlformats.org/officeDocument/2006/relationships" xmlns:p="http://schemas.openxmlformats.org/presentationml/2006/main">
   <p:cSld>
-    <p:bg>
-      <p:bgRef idx="1001">
-        <a:schemeClr val="bg1"/>
-      </p:bgRef>
-    </p:bg>
     <p:spTree>
       <p:nvGrpSpPr>
         <p:cNvPr id="1" name=""/>
@@ -1648,7 +2118,6 @@
         <a:solidFill>
           <a:srgbClr val="0A1628"/>
         </a:solidFill>
-        <a:effectLst/>
       </p:bgPr>
     </p:bg>
     <p:spTree>
@@ -1686,11 +2155,11 @@
           <a:bodyPr wrap="square" rtlCol="0" anchor="ctr"/>
           <a:lstStyle/>
           <a:p>
-            <a:pPr marL="0" indent="0">
-              <a:buNone/>
-            </a:pPr>
-            <a:r>
-              <a:rPr lang="en-US" sz="1300" b="1" kern="0" spc="400" dirty="0">
+            <a:pPr indent="0" marL="0">
+              <a:buNone/>
+            </a:pPr>
+            <a:r>
+              <a:rPr lang="en-US" sz="1300" b="1" spc="400" kern="0" dirty="0">
                 <a:solidFill>
                   <a:srgbClr val="F59E0B"/>
                 </a:solidFill>
@@ -1698,7 +2167,7 @@
                 <a:ea typeface="Calibri" pitchFamily="34" charset="-122"/>
                 <a:cs typeface="Calibri" pitchFamily="34" charset="-120"/>
               </a:rPr>
-              <a:t>LIVE CORPORATE RISK INTELLIGENCE SYSTEM</a:t>
+              <a:t>LIVE CORPORATE RISK ENGINE</a:t>
             </a:r>
             <a:endParaRPr lang="en-US" sz="1300" dirty="0"/>
           </a:p>
@@ -1725,7 +2194,7 @@
           <a:bodyPr wrap="square" rtlCol="0" anchor="ctr"/>
           <a:lstStyle/>
           <a:p>
-            <a:pPr marL="0" indent="0">
+            <a:pPr indent="0" marL="0">
               <a:buNone/>
             </a:pPr>
             <a:r>
@@ -1739,6 +2208,9 @@
               </a:rPr>
               <a:t>Foresight </a:t>
             </a:r>
+            <a:pPr indent="0" marL="0">
+              <a:buNone/>
+            </a:pPr>
             <a:r>
               <a:rPr lang="en-US" sz="6600" b="1" dirty="0">
                 <a:solidFill>
@@ -1762,8 +2234,8 @@
         </p:nvSpPr>
         <p:spPr>
           <a:xfrm>
-            <a:off x="822960" y="2788919"/>
-            <a:ext cx="7863840" cy="1198039"/>
+            <a:off x="822960" y="2788920"/>
+            <a:ext cx="7223760" cy="1097280"/>
           </a:xfrm>
           <a:prstGeom prst="rect">
             <a:avLst/>
@@ -1775,13 +2247,14 @@
           <a:bodyPr wrap="square" rtlCol="0" anchor="ctr"/>
           <a:lstStyle/>
           <a:p>
-            <a:pPr>
+            <a:pPr indent="0" marL="0">
               <a:lnSpc>
                 <a:spcPct val="112000"/>
               </a:lnSpc>
-            </a:pPr>
-            <a:r>
-              <a:rPr lang="en-US" dirty="0">
+              <a:buNone/>
+            </a:pPr>
+            <a:r>
+              <a:rPr lang="en-US" sz="1800" dirty="0">
                 <a:solidFill>
                   <a:srgbClr val="94A3B8"/>
                 </a:solidFill>
@@ -1789,8 +2262,17 @@
                 <a:ea typeface="Calibri" pitchFamily="34" charset="-122"/>
                 <a:cs typeface="Calibri" pitchFamily="34" charset="-120"/>
               </a:rPr>
-              <a:t>O</a:t>
-            </a:r>
+              <a:t>Point it at any listed Indian company. Get one explainable 0-100 score</a:t>
+            </a:r>
+            <a:endParaRPr lang="en-US" sz="1800" dirty="0"/>
+          </a:p>
+          <a:p>
+            <a:pPr indent="0" marL="0">
+              <a:lnSpc>
+                <a:spcPct val="112000"/>
+              </a:lnSpc>
+              <a:buNone/>
+            </a:pPr>
             <a:r>
               <a:rPr lang="en-US" sz="1800" dirty="0">
                 <a:solidFill>
@@ -1800,12 +2282,17 @@
                 <a:ea typeface="Calibri" pitchFamily="34" charset="-122"/>
                 <a:cs typeface="Calibri" pitchFamily="34" charset="-120"/>
               </a:rPr>
-              <a:t>ne explainable 0-100 score</a:t>
-            </a:r>
-            <a:r>
-              <a:rPr lang="en-US" dirty="0"/>
-              <a:t> </a:t>
-            </a:r>
+              <a:t>that fuses the Altman Z-Score with the market signals others read separately:</a:t>
+            </a:r>
+            <a:endParaRPr lang="en-US" sz="1800" dirty="0"/>
+          </a:p>
+          <a:p>
+            <a:pPr indent="0" marL="0">
+              <a:lnSpc>
+                <a:spcPct val="112000"/>
+              </a:lnSpc>
+              <a:buNone/>
+            </a:pPr>
             <a:r>
               <a:rPr lang="en-US" sz="1800" dirty="0">
                 <a:solidFill>
@@ -1815,51 +2302,7 @@
                 <a:ea typeface="Calibri" pitchFamily="34" charset="-122"/>
                 <a:cs typeface="Calibri" pitchFamily="34" charset="-120"/>
               </a:rPr>
-              <a:t>that fuses the </a:t>
-            </a:r>
-            <a:r>
-              <a:rPr lang="en-US" sz="1800" b="1" dirty="0">
-                <a:solidFill>
-                  <a:srgbClr val="94A3B8"/>
-                </a:solidFill>
-                <a:latin typeface="Calibri" pitchFamily="34" charset="0"/>
-                <a:ea typeface="Calibri" pitchFamily="34" charset="-122"/>
-                <a:cs typeface="Calibri" pitchFamily="34" charset="-120"/>
-              </a:rPr>
-              <a:t>Altman Z-Score </a:t>
-            </a:r>
-            <a:r>
-              <a:rPr lang="en-US" sz="1800" dirty="0">
-                <a:solidFill>
-                  <a:srgbClr val="94A3B8"/>
-                </a:solidFill>
-                <a:latin typeface="Calibri" pitchFamily="34" charset="0"/>
-                <a:ea typeface="Calibri" pitchFamily="34" charset="-122"/>
-                <a:cs typeface="Calibri" pitchFamily="34" charset="-120"/>
-              </a:rPr>
-              <a:t>(Company Financial Analysis) with the </a:t>
-            </a:r>
-            <a:r>
-              <a:rPr lang="en-US" sz="1800" b="1" dirty="0">
-                <a:solidFill>
-                  <a:srgbClr val="94A3B8"/>
-                </a:solidFill>
-                <a:latin typeface="Calibri" pitchFamily="34" charset="0"/>
-                <a:ea typeface="Calibri" pitchFamily="34" charset="-122"/>
-                <a:cs typeface="Calibri" pitchFamily="34" charset="-120"/>
-              </a:rPr>
-              <a:t>Market signals </a:t>
-            </a:r>
-            <a:r>
-              <a:rPr lang="en-US" dirty="0">
-                <a:solidFill>
-                  <a:srgbClr val="94A3B8"/>
-                </a:solidFill>
-                <a:latin typeface="Calibri" pitchFamily="34" charset="0"/>
-                <a:ea typeface="Calibri" pitchFamily="34" charset="-122"/>
-                <a:cs typeface="Calibri" pitchFamily="34" charset="-120"/>
-              </a:rPr>
-              <a:t>(credit ratings, leadership, news, hiring and employee sentiment) Live, giving you a Comprehensive Understanding in one go.</a:t>
+              <a:t>credit ratings, leadership, news, hiring and employee sentiment.</a:t>
             </a:r>
             <a:endParaRPr lang="en-US" sz="1800" dirty="0"/>
           </a:p>
@@ -1868,14 +2311,14 @@
       <p:sp>
         <p:nvSpPr>
           <p:cNvPr id="5" name="Shape 3">
-            <a:hlinkClick r:id="rId3" tooltip="Open the live Foresight AI dashboard"/>
+            <a:hlinkClick r:id="rId1" tooltip="Open the live Foresight AI dashboard"/>
           </p:cNvPr>
           <p:cNvSpPr/>
           <p:nvPr/>
         </p:nvSpPr>
         <p:spPr>
           <a:xfrm>
-            <a:off x="822960" y="4132913"/>
+            <a:off x="822960" y="3977640"/>
             <a:ext cx="4160520" cy="566928"/>
           </a:xfrm>
           <a:prstGeom prst="roundRect">
@@ -1897,14 +2340,14 @@
       <p:sp>
         <p:nvSpPr>
           <p:cNvPr id="6" name="Text 4">
-            <a:hlinkClick r:id="rId3" tooltip="Open the live Foresight AI dashboard"/>
+            <a:hlinkClick r:id="rId1" tooltip="Open the live Foresight AI dashboard"/>
           </p:cNvPr>
           <p:cNvSpPr/>
           <p:nvPr/>
         </p:nvSpPr>
         <p:spPr>
           <a:xfrm>
-            <a:off x="822960" y="4141537"/>
+            <a:off x="822960" y="3977640"/>
             <a:ext cx="4160520" cy="566928"/>
           </a:xfrm>
           <a:prstGeom prst="rect">
@@ -1917,7 +2360,7 @@
           <a:bodyPr wrap="square" rtlCol="0" anchor="ctr"/>
           <a:lstStyle/>
           <a:p>
-            <a:pPr marL="0" indent="0" algn="ctr">
+            <a:pPr algn="ctr" indent="0" marL="0">
               <a:buNone/>
             </a:pPr>
             <a:r>
@@ -1928,7 +2371,7 @@
                 <a:latin typeface="Calibri" pitchFamily="34" charset="0"/>
                 <a:ea typeface="Calibri" pitchFamily="34" charset="-122"/>
                 <a:cs typeface="Calibri" pitchFamily="34" charset="-120"/>
-                <a:hlinkClick r:id="rId3" tooltip="Open the live Foresight AI dashboard">
+                <a:hlinkClick r:id="rId1" invalidUrl="" action="" tgtFrame="" tooltip="Open the live Foresight AI dashboard" history="1" highlightClick="0" endSnd="0">
                   <a:extLst>
                     <a:ext uri="{A12FA001-AC4F-418D-AE19-62706E023703}">
                       <ahyp:hlinkClr xmlns:ahyp="http://schemas.microsoft.com/office/drawing/2018/hyperlinkcolor" val="tx"/>
@@ -1938,6 +2381,9 @@
               </a:rPr>
               <a:t>Live demo   </a:t>
             </a:r>
+            <a:pPr algn="ctr" indent="0" marL="0">
+              <a:buNone/>
+            </a:pPr>
             <a:r>
               <a:rPr lang="en-US" sz="1500" b="1" u="sng" dirty="0">
                 <a:solidFill>
@@ -1946,7 +2392,7 @@
                 <a:latin typeface="Calibri" pitchFamily="34" charset="0"/>
                 <a:ea typeface="Calibri" pitchFamily="34" charset="-122"/>
                 <a:cs typeface="Calibri" pitchFamily="34" charset="-120"/>
-                <a:hlinkClick r:id="rId3" tooltip="Open the live Foresight AI dashboard">
+                <a:hlinkClick r:id="rId1" invalidUrl="" action="" tgtFrame="" tooltip="Open the live Foresight AI dashboard" history="1" highlightClick="0" endSnd="0">
                   <a:extLst>
                     <a:ext uri="{A12FA001-AC4F-418D-AE19-62706E023703}">
                       <ahyp:hlinkClr xmlns:ahyp="http://schemas.microsoft.com/office/drawing/2018/hyperlinkcolor" val="tx"/>
@@ -1981,7 +2427,7 @@
           <a:bodyPr wrap="square" rtlCol="0" anchor="ctr"/>
           <a:lstStyle/>
           <a:p>
-            <a:pPr marL="0" indent="0">
+            <a:pPr indent="0" marL="0">
               <a:buNone/>
             </a:pPr>
             <a:r>
@@ -2026,7 +2472,7 @@
       </p:sp>
       <p:graphicFrame>
         <p:nvGraphicFramePr>
-          <p:cNvPr id="9" name="Chart 0"/>
+          <p:cNvPr id="9" name="Chart 0" descr=""/>
           <p:cNvGraphicFramePr/>
           <p:nvPr/>
         </p:nvGraphicFramePr>
@@ -2034,9 +2480,9 @@
           <a:off x="9006840" y="1828800"/>
           <a:ext cx="2651760" cy="2651760"/>
         </p:xfrm>
-        <a:graphic>
+        <a:graphic xmlns:a="http://schemas.openxmlformats.org/drawingml/2006/main">
           <a:graphicData uri="http://schemas.openxmlformats.org/drawingml/2006/chart">
-            <c:chart xmlns:c="http://schemas.openxmlformats.org/drawingml/2006/chart" xmlns:r="http://schemas.openxmlformats.org/officeDocument/2006/relationships" r:id="rId4"/>
+            <c:chart xmlns:c="http://schemas.openxmlformats.org/drawingml/2006/chart" r:id="rId2"/>
           </a:graphicData>
         </a:graphic>
       </p:graphicFrame>
@@ -2061,7 +2507,7 @@
           <a:bodyPr wrap="square" rtlCol="0" anchor="ctr"/>
           <a:lstStyle/>
           <a:p>
-            <a:pPr marL="0" indent="0" algn="ctr">
+            <a:pPr algn="ctr" indent="0" marL="0">
               <a:buNone/>
             </a:pPr>
             <a:r>
@@ -2100,11 +2546,11 @@
           <a:bodyPr wrap="square" rtlCol="0" anchor="ctr"/>
           <a:lstStyle/>
           <a:p>
-            <a:pPr marL="0" indent="0" algn="ctr">
-              <a:buNone/>
-            </a:pPr>
-            <a:r>
-              <a:rPr lang="en-US" sz="1200" kern="0" spc="200" dirty="0">
+            <a:pPr algn="ctr" indent="0" marL="0">
+              <a:buNone/>
+            </a:pPr>
+            <a:r>
+              <a:rPr lang="en-US" sz="1200" spc="200" kern="0" dirty="0">
                 <a:solidFill>
                   <a:srgbClr val="94A3B8"/>
                 </a:solidFill>
@@ -2126,7 +2572,7 @@
         </p:nvSpPr>
         <p:spPr>
           <a:xfrm>
-            <a:off x="9006840" y="1620734"/>
+            <a:off x="9006840" y="1810512"/>
             <a:ext cx="2651760" cy="274320"/>
           </a:xfrm>
           <a:prstGeom prst="rect">
@@ -2139,11 +2585,11 @@
           <a:bodyPr wrap="square" rtlCol="0" anchor="ctr"/>
           <a:lstStyle/>
           <a:p>
-            <a:pPr marL="0" indent="0" algn="ctr">
-              <a:buNone/>
-            </a:pPr>
-            <a:r>
-              <a:rPr lang="en-US" sz="1200" b="1" kern="0" spc="300" dirty="0">
+            <a:pPr algn="ctr" indent="0" marL="0">
+              <a:buNone/>
+            </a:pPr>
+            <a:r>
+              <a:rPr lang="en-US" sz="1200" b="1" spc="300" kern="0" dirty="0">
                 <a:solidFill>
                   <a:srgbClr val="F59E0B"/>
                 </a:solidFill>
@@ -2178,7 +2624,7 @@
           <a:bodyPr wrap="square" rtlCol="0" anchor="ctr"/>
           <a:lstStyle/>
           <a:p>
-            <a:pPr marL="0" indent="0" algn="ctr">
+            <a:pPr algn="ctr" indent="0" marL="0">
               <a:buNone/>
             </a:pPr>
             <a:r>
@@ -2212,7 +2658,6 @@
         <a:solidFill>
           <a:srgbClr val="0A1628"/>
         </a:solidFill>
-        <a:effectLst/>
       </p:bgPr>
     </p:bg>
     <p:spTree>
@@ -2250,7 +2695,7 @@
           <a:bodyPr wrap="square" rtlCol="0" anchor="ctr"/>
           <a:lstStyle/>
           <a:p>
-            <a:pPr marL="0" indent="0">
+            <a:pPr indent="0" marL="0">
               <a:buNone/>
             </a:pPr>
             <a:r>
@@ -2264,6 +2709,9 @@
               </a:rPr>
               <a:t>The warning signs are </a:t>
             </a:r>
+            <a:pPr indent="0" marL="0">
+              <a:buNone/>
+            </a:pPr>
             <a:r>
               <a:rPr lang="en-US" sz="3300" b="1" dirty="0">
                 <a:solidFill>
@@ -2275,6 +2723,9 @@
               </a:rPr>
               <a:t>public</a:t>
             </a:r>
+            <a:pPr indent="0" marL="0">
+              <a:buNone/>
+            </a:pPr>
             <a:r>
               <a:rPr lang="en-US" sz="3300" b="1" dirty="0">
                 <a:solidFill>
@@ -2311,7 +2762,7 @@
           <a:bodyPr wrap="square" rtlCol="0" anchor="ctr"/>
           <a:lstStyle/>
           <a:p>
-            <a:pPr marL="0" indent="0">
+            <a:pPr indent="0" marL="0">
               <a:buNone/>
             </a:pPr>
             <a:r>
@@ -2378,14 +2829,14 @@
       </p:sp>
       <p:pic>
         <p:nvPicPr>
-          <p:cNvPr id="6" name="Image 0" descr="preencoded.png"/>
+          <p:cNvPr id="6" name="Image 0" descr="preencoded.png">    </p:cNvPr>
           <p:cNvPicPr>
             <a:picLocks noChangeAspect="1"/>
           </p:cNvPicPr>
           <p:nvPr/>
         </p:nvPicPr>
         <p:blipFill>
-          <a:blip r:embed="rId3"/>
+          <a:blip r:embed="rId1"/>
           <a:stretch>
             <a:fillRect/>
           </a:stretch>
@@ -2421,7 +2872,7 @@
           <a:bodyPr wrap="square" rtlCol="0" anchor="ctr"/>
           <a:lstStyle/>
           <a:p>
-            <a:pPr marL="0" indent="0">
+            <a:pPr indent="0" marL="0">
               <a:buNone/>
             </a:pPr>
             <a:r>
@@ -2460,7 +2911,7 @@
           <a:bodyPr wrap="square" rtlCol="0" anchor="ctr"/>
           <a:lstStyle/>
           <a:p>
-            <a:pPr marL="0" indent="0">
+            <a:pPr indent="0" marL="0">
               <a:lnSpc>
                 <a:spcPct val="105000"/>
               </a:lnSpc>
@@ -2530,14 +2981,14 @@
       </p:sp>
       <p:pic>
         <p:nvPicPr>
-          <p:cNvPr id="11" name="Image 1" descr="preencoded.png"/>
+          <p:cNvPr id="11" name="Image 1" descr="preencoded.png">    </p:cNvPr>
           <p:cNvPicPr>
             <a:picLocks noChangeAspect="1"/>
           </p:cNvPicPr>
           <p:nvPr/>
         </p:nvPicPr>
         <p:blipFill>
-          <a:blip r:embed="rId4"/>
+          <a:blip r:embed="rId2"/>
           <a:stretch>
             <a:fillRect/>
           </a:stretch>
@@ -2573,7 +3024,7 @@
           <a:bodyPr wrap="square" rtlCol="0" anchor="ctr"/>
           <a:lstStyle/>
           <a:p>
-            <a:pPr marL="0" indent="0">
+            <a:pPr indent="0" marL="0">
               <a:buNone/>
             </a:pPr>
             <a:r>
@@ -2612,7 +3063,7 @@
           <a:bodyPr wrap="square" rtlCol="0" anchor="ctr"/>
           <a:lstStyle/>
           <a:p>
-            <a:pPr marL="0" indent="0">
+            <a:pPr indent="0" marL="0">
               <a:lnSpc>
                 <a:spcPct val="105000"/>
               </a:lnSpc>
@@ -2682,14 +3133,14 @@
       </p:sp>
       <p:pic>
         <p:nvPicPr>
-          <p:cNvPr id="16" name="Image 2" descr="preencoded.png"/>
+          <p:cNvPr id="16" name="Image 2" descr="preencoded.png">    </p:cNvPr>
           <p:cNvPicPr>
             <a:picLocks noChangeAspect="1"/>
           </p:cNvPicPr>
           <p:nvPr/>
         </p:nvPicPr>
         <p:blipFill>
-          <a:blip r:embed="rId5"/>
+          <a:blip r:embed="rId3"/>
           <a:stretch>
             <a:fillRect/>
           </a:stretch>
@@ -2725,7 +3176,7 @@
           <a:bodyPr wrap="square" rtlCol="0" anchor="ctr"/>
           <a:lstStyle/>
           <a:p>
-            <a:pPr marL="0" indent="0">
+            <a:pPr indent="0" marL="0">
               <a:buNone/>
             </a:pPr>
             <a:r>
@@ -2764,7 +3215,7 @@
           <a:bodyPr wrap="square" rtlCol="0" anchor="ctr"/>
           <a:lstStyle/>
           <a:p>
-            <a:pPr marL="0" indent="0">
+            <a:pPr indent="0" marL="0">
               <a:lnSpc>
                 <a:spcPct val="105000"/>
               </a:lnSpc>
@@ -2833,11 +3284,11 @@
           <a:bodyPr wrap="square" rtlCol="0" anchor="ctr"/>
           <a:lstStyle/>
           <a:p>
-            <a:pPr marL="0" indent="0">
-              <a:buNone/>
-            </a:pPr>
-            <a:r>
-              <a:rPr lang="en-US" sz="1150" b="1" kern="0" spc="300" dirty="0">
+            <a:pPr indent="0" marL="0">
+              <a:buNone/>
+            </a:pPr>
+            <a:r>
+              <a:rPr lang="en-US" sz="1150" b="1" spc="300" kern="0" dirty="0">
                 <a:solidFill>
                   <a:srgbClr val="F59E0B"/>
                 </a:solidFill>
@@ -2872,7 +3323,7 @@
           <a:bodyPr wrap="square" rtlCol="0" anchor="ctr"/>
           <a:lstStyle/>
           <a:p>
-            <a:pPr marL="0" indent="0">
+            <a:pPr indent="0" marL="0">
               <a:buNone/>
             </a:pPr>
             <a:r>
@@ -2898,7 +3349,7 @@
         </p:nvSpPr>
         <p:spPr>
           <a:xfrm>
-            <a:off x="7999268" y="3156572"/>
+            <a:off x="7360920" y="3035808"/>
             <a:ext cx="1280160" cy="1005840"/>
           </a:xfrm>
           <a:prstGeom prst="rect">
@@ -2911,7 +3362,7 @@
           <a:bodyPr wrap="square" rtlCol="0" anchor="ctr"/>
           <a:lstStyle/>
           <a:p>
-            <a:pPr marL="0" indent="0" algn="l">
+            <a:pPr algn="l" indent="0" marL="0">
               <a:buNone/>
             </a:pPr>
             <a:r>
@@ -2950,7 +3401,7 @@
           <a:bodyPr wrap="square" rtlCol="0" anchor="ctr"/>
           <a:lstStyle/>
           <a:p>
-            <a:pPr marL="0" indent="0">
+            <a:pPr indent="0" marL="0">
               <a:lnSpc>
                 <a:spcPct val="102000"/>
               </a:lnSpc>
@@ -2967,30 +3418,16 @@
               </a:rPr>
               <a:t>signals</a:t>
             </a:r>
-            <a:endParaRPr lang="en-US" sz="2000" dirty="0"/>
-          </a:p>
-          <a:p>
-            <a:pPr marL="0" indent="0">
+            <a:pPr indent="0" marL="0">
               <a:lnSpc>
                 <a:spcPct val="102000"/>
               </a:lnSpc>
               <a:buNone/>
             </a:pPr>
-            <a:r>
-              <a:rPr lang="en-US" sz="1400" dirty="0">
-                <a:solidFill>
-                  <a:srgbClr val="94A3B8"/>
-                </a:solidFill>
-                <a:latin typeface="Calibri" pitchFamily="34" charset="0"/>
-                <a:ea typeface="Calibri" pitchFamily="34" charset="-122"/>
-                <a:cs typeface="Calibri" pitchFamily="34" charset="-120"/>
-              </a:rPr>
-              <a:t>fused into one</a:t>
-            </a:r>
             <a:endParaRPr lang="en-US" sz="2000" dirty="0"/>
           </a:p>
           <a:p>
-            <a:pPr marL="0" indent="0">
+            <a:pPr indent="0" marL="0">
               <a:lnSpc>
                 <a:spcPct val="102000"/>
               </a:lnSpc>
@@ -3005,10 +3442,30 @@
                 <a:ea typeface="Calibri" pitchFamily="34" charset="-122"/>
                 <a:cs typeface="Calibri" pitchFamily="34" charset="-120"/>
               </a:rPr>
-              <a:t>0-100 score</a:t>
+              <a:t>fused into one</a:t>
             </a:r>
             <a:endParaRPr lang="en-US" sz="2000" dirty="0"/>
           </a:p>
+          <a:p>
+            <a:pPr indent="0" marL="0">
+              <a:lnSpc>
+                <a:spcPct val="102000"/>
+              </a:lnSpc>
+              <a:buNone/>
+            </a:pPr>
+            <a:r>
+              <a:rPr lang="en-US" sz="1400" dirty="0">
+                <a:solidFill>
+                  <a:srgbClr val="94A3B8"/>
+                </a:solidFill>
+                <a:latin typeface="Calibri" pitchFamily="34" charset="0"/>
+                <a:ea typeface="Calibri" pitchFamily="34" charset="-122"/>
+                <a:cs typeface="Calibri" pitchFamily="34" charset="-120"/>
+              </a:rPr>
+              <a:t>0-100 read</a:t>
+            </a:r>
+            <a:endParaRPr lang="en-US" sz="2000" dirty="0"/>
+          </a:p>
         </p:txBody>
       </p:sp>
       <p:sp>
@@ -3019,7 +3476,7 @@
         </p:nvSpPr>
         <p:spPr>
           <a:xfrm>
-            <a:off x="7406640" y="4431391"/>
+            <a:off x="7406640" y="4526280"/>
             <a:ext cx="3703320" cy="640080"/>
           </a:xfrm>
           <a:prstGeom prst="rect">
@@ -3032,7 +3489,7 @@
           <a:bodyPr wrap="square" rtlCol="0" anchor="ctr"/>
           <a:lstStyle/>
           <a:p>
-            <a:pPr marL="0" indent="0" algn="ctr">
+            <a:pPr indent="0" marL="0">
               <a:lnSpc>
                 <a:spcPct val="110000"/>
               </a:lnSpc>
@@ -3047,28 +3504,7 @@
                 <a:ea typeface="Calibri" pitchFamily="34" charset="-122"/>
                 <a:cs typeface="Calibri" pitchFamily="34" charset="-120"/>
               </a:rPr>
-              <a:t>Financials  .  Credit ratings  .  Leadership  .  </a:t>
-            </a:r>
-            <a:br>
-              <a:rPr lang="en-US" sz="1250" dirty="0">
-                <a:solidFill>
-                  <a:srgbClr val="FFFFFF"/>
-                </a:solidFill>
-                <a:latin typeface="Calibri" pitchFamily="34" charset="0"/>
-                <a:ea typeface="Calibri" pitchFamily="34" charset="-122"/>
-                <a:cs typeface="Calibri" pitchFamily="34" charset="-120"/>
-              </a:rPr>
-            </a:br>
-            <a:r>
-              <a:rPr lang="en-US" sz="1250" dirty="0">
-                <a:solidFill>
-                  <a:srgbClr val="FFFFFF"/>
-                </a:solidFill>
-                <a:latin typeface="Calibri" pitchFamily="34" charset="0"/>
-                <a:ea typeface="Calibri" pitchFamily="34" charset="-122"/>
-                <a:cs typeface="Calibri" pitchFamily="34" charset="-120"/>
-              </a:rPr>
-              <a:t>News  .  Hiring  .  Employee sentiment</a:t>
+              <a:t>Financials  .  credit ratings  .  leadership  .  news  .  hiring  .  employee sentiment</a:t>
             </a:r>
             <a:endParaRPr lang="en-US" sz="1250" dirty="0"/>
           </a:p>
@@ -3082,7 +3518,7 @@
         </p:nvSpPr>
         <p:spPr>
           <a:xfrm>
-            <a:off x="7406640" y="5345794"/>
+            <a:off x="7406640" y="5440680"/>
             <a:ext cx="3703320" cy="365760"/>
           </a:xfrm>
           <a:prstGeom prst="rect">
@@ -3095,7 +3531,7 @@
           <a:bodyPr wrap="square" rtlCol="0" anchor="ctr"/>
           <a:lstStyle/>
           <a:p>
-            <a:pPr marL="0" indent="0">
+            <a:pPr indent="0" marL="0">
               <a:buNone/>
             </a:pPr>
             <a:r>
@@ -3129,7 +3565,6 @@
         <a:solidFill>
           <a:srgbClr val="0A1628"/>
         </a:solidFill>
-        <a:effectLst/>
       </p:bgPr>
     </p:bg>
     <p:spTree>
@@ -3167,7 +3602,7 @@
           <a:bodyPr wrap="square" rtlCol="0" anchor="ctr"/>
           <a:lstStyle/>
           <a:p>
-            <a:pPr marL="0" indent="0">
+            <a:pPr indent="0" marL="0">
               <a:buNone/>
             </a:pPr>
             <a:r>
@@ -3181,6 +3616,9 @@
               </a:rPr>
               <a:t>One live pipeline, </a:t>
             </a:r>
+            <a:pPr indent="0" marL="0">
+              <a:buNone/>
+            </a:pPr>
             <a:r>
               <a:rPr lang="en-US" sz="3300" b="1" dirty="0">
                 <a:solidFill>
@@ -3217,7 +3655,7 @@
           <a:bodyPr wrap="square" rtlCol="0" anchor="ctr"/>
           <a:lstStyle/>
           <a:p>
-            <a:pPr marL="0" indent="0">
+            <a:pPr indent="0" marL="0">
               <a:buNone/>
             </a:pPr>
             <a:r>
@@ -3284,14 +3722,14 @@
       </p:sp>
       <p:pic>
         <p:nvPicPr>
-          <p:cNvPr id="6" name="Image 0" descr="preencoded.png"/>
+          <p:cNvPr id="6" name="Image 0" descr="preencoded.png">    </p:cNvPr>
           <p:cNvPicPr>
             <a:picLocks noChangeAspect="1"/>
           </p:cNvPicPr>
           <p:nvPr/>
         </p:nvPicPr>
         <p:blipFill>
-          <a:blip r:embed="rId3"/>
+          <a:blip r:embed="rId1"/>
           <a:stretch>
             <a:fillRect/>
           </a:stretch>
@@ -3327,7 +3765,7 @@
           <a:bodyPr wrap="square" rtlCol="0" anchor="ctr"/>
           <a:lstStyle/>
           <a:p>
-            <a:pPr marL="0" indent="0">
+            <a:pPr indent="0" marL="0">
               <a:buNone/>
             </a:pPr>
             <a:r>
@@ -3366,7 +3804,7 @@
           <a:bodyPr wrap="square" rtlCol="0" anchor="ctr"/>
           <a:lstStyle/>
           <a:p>
-            <a:pPr marL="0" indent="0" algn="ctr">
+            <a:pPr algn="ctr" indent="0" marL="0">
               <a:buNone/>
             </a:pPr>
             <a:r>
@@ -3405,7 +3843,7 @@
           <a:bodyPr wrap="square" rtlCol="0" anchor="ctr"/>
           <a:lstStyle/>
           <a:p>
-            <a:pPr marL="0" indent="0" algn="ctr">
+            <a:pPr algn="ctr" indent="0" marL="0">
               <a:lnSpc>
                 <a:spcPct val="103000"/>
               </a:lnSpc>
@@ -3428,14 +3866,14 @@
       </p:sp>
       <p:pic>
         <p:nvPicPr>
-          <p:cNvPr id="10" name="Image 1" descr="preencoded.png"/>
+          <p:cNvPr id="10" name="Image 1" descr="preencoded.png">    </p:cNvPr>
           <p:cNvPicPr>
             <a:picLocks noChangeAspect="1"/>
           </p:cNvPicPr>
           <p:nvPr/>
         </p:nvPicPr>
         <p:blipFill>
-          <a:blip r:embed="rId4"/>
+          <a:blip r:embed="rId2"/>
           <a:stretch>
             <a:fillRect/>
           </a:stretch>
@@ -3499,14 +3937,14 @@
       </p:sp>
       <p:pic>
         <p:nvPicPr>
-          <p:cNvPr id="13" name="Image 2" descr="preencoded.png"/>
+          <p:cNvPr id="13" name="Image 2" descr="preencoded.png">    </p:cNvPr>
           <p:cNvPicPr>
             <a:picLocks noChangeAspect="1"/>
           </p:cNvPicPr>
           <p:nvPr/>
         </p:nvPicPr>
         <p:blipFill>
-          <a:blip r:embed="rId5"/>
+          <a:blip r:embed="rId3"/>
           <a:stretch>
             <a:fillRect/>
           </a:stretch>
@@ -3542,7 +3980,7 @@
           <a:bodyPr wrap="square" rtlCol="0" anchor="ctr"/>
           <a:lstStyle/>
           <a:p>
-            <a:pPr marL="0" indent="0">
+            <a:pPr indent="0" marL="0">
               <a:buNone/>
             </a:pPr>
             <a:r>
@@ -3581,7 +4019,7 @@
           <a:bodyPr wrap="square" rtlCol="0" anchor="ctr"/>
           <a:lstStyle/>
           <a:p>
-            <a:pPr marL="0" indent="0" algn="ctr">
+            <a:pPr algn="ctr" indent="0" marL="0">
               <a:buNone/>
             </a:pPr>
             <a:r>
@@ -3620,7 +4058,7 @@
           <a:bodyPr wrap="square" rtlCol="0" anchor="ctr"/>
           <a:lstStyle/>
           <a:p>
-            <a:pPr marL="0" indent="0" algn="ctr">
+            <a:pPr algn="ctr" indent="0" marL="0">
               <a:lnSpc>
                 <a:spcPct val="103000"/>
               </a:lnSpc>
@@ -3643,7 +4081,7 @@
       </p:sp>
       <p:pic>
         <p:nvPicPr>
-          <p:cNvPr id="17" name="Image 3" descr="preencoded.png"/>
+          <p:cNvPr id="17" name="Image 3" descr="preencoded.png">    </p:cNvPr>
           <p:cNvPicPr>
             <a:picLocks noChangeAspect="1"/>
           </p:cNvPicPr>
@@ -3714,14 +4152,14 @@
       </p:sp>
       <p:pic>
         <p:nvPicPr>
-          <p:cNvPr id="20" name="Image 4" descr="preencoded.png"/>
+          <p:cNvPr id="20" name="Image 4" descr="preencoded.png">    </p:cNvPr>
           <p:cNvPicPr>
             <a:picLocks noChangeAspect="1"/>
           </p:cNvPicPr>
           <p:nvPr/>
         </p:nvPicPr>
         <p:blipFill>
-          <a:blip r:embed="rId6"/>
+          <a:blip r:embed="rId5"/>
           <a:stretch>
             <a:fillRect/>
           </a:stretch>
@@ -3757,7 +4195,7 @@
           <a:bodyPr wrap="square" rtlCol="0" anchor="ctr"/>
           <a:lstStyle/>
           <a:p>
-            <a:pPr marL="0" indent="0">
+            <a:pPr indent="0" marL="0">
               <a:buNone/>
             </a:pPr>
             <a:r>
@@ -3796,7 +4234,7 @@
           <a:bodyPr wrap="square" rtlCol="0" anchor="ctr"/>
           <a:lstStyle/>
           <a:p>
-            <a:pPr marL="0" indent="0" algn="ctr">
+            <a:pPr algn="ctr" indent="0" marL="0">
               <a:buNone/>
             </a:pPr>
             <a:r>
@@ -3835,7 +4273,7 @@
           <a:bodyPr wrap="square" rtlCol="0" anchor="ctr"/>
           <a:lstStyle/>
           <a:p>
-            <a:pPr marL="0" indent="0" algn="ctr">
+            <a:pPr algn="ctr" indent="0" marL="0">
               <a:lnSpc>
                 <a:spcPct val="103000"/>
               </a:lnSpc>
@@ -3858,14 +4296,14 @@
       </p:sp>
       <p:pic>
         <p:nvPicPr>
-          <p:cNvPr id="24" name="Image 5" descr="preencoded.png"/>
+          <p:cNvPr id="24" name="Image 5" descr="preencoded.png">    </p:cNvPr>
           <p:cNvPicPr>
             <a:picLocks noChangeAspect="1"/>
           </p:cNvPicPr>
           <p:nvPr/>
         </p:nvPicPr>
         <p:blipFill>
-          <a:blip r:embed="rId4"/>
+          <a:blip r:embed="rId6"/>
           <a:stretch>
             <a:fillRect/>
           </a:stretch>
@@ -3929,7 +4367,7 @@
       </p:sp>
       <p:pic>
         <p:nvPicPr>
-          <p:cNvPr id="27" name="Image 6" descr="preencoded.png"/>
+          <p:cNvPr id="27" name="Image 6" descr="preencoded.png">    </p:cNvPr>
           <p:cNvPicPr>
             <a:picLocks noChangeAspect="1"/>
           </p:cNvPicPr>
@@ -3972,7 +4410,7 @@
           <a:bodyPr wrap="square" rtlCol="0" anchor="ctr"/>
           <a:lstStyle/>
           <a:p>
-            <a:pPr marL="0" indent="0">
+            <a:pPr indent="0" marL="0">
               <a:buNone/>
             </a:pPr>
             <a:r>
@@ -4011,7 +4449,7 @@
           <a:bodyPr wrap="square" rtlCol="0" anchor="ctr"/>
           <a:lstStyle/>
           <a:p>
-            <a:pPr marL="0" indent="0" algn="ctr">
+            <a:pPr algn="ctr" indent="0" marL="0">
               <a:buNone/>
             </a:pPr>
             <a:r>
@@ -4050,7 +4488,7 @@
           <a:bodyPr wrap="square" rtlCol="0" anchor="ctr"/>
           <a:lstStyle/>
           <a:p>
-            <a:pPr marL="0" indent="0" algn="ctr">
+            <a:pPr algn="ctr" indent="0" marL="0">
               <a:lnSpc>
                 <a:spcPct val="103000"/>
               </a:lnSpc>
@@ -4106,7 +4544,7 @@
         </p:nvSpPr>
         <p:spPr>
           <a:xfrm>
-            <a:off x="868680" y="4841319"/>
+            <a:off x="868680" y="4910328"/>
             <a:ext cx="3657600" cy="274320"/>
           </a:xfrm>
           <a:prstGeom prst="rect">
@@ -4119,11 +4557,11 @@
           <a:bodyPr wrap="square" rtlCol="0" anchor="ctr"/>
           <a:lstStyle/>
           <a:p>
-            <a:pPr marL="0" indent="0">
-              <a:buNone/>
-            </a:pPr>
-            <a:r>
-              <a:rPr lang="en-US" sz="1100" b="1" kern="0" spc="300" dirty="0">
+            <a:pPr indent="0" marL="0">
+              <a:buNone/>
+            </a:pPr>
+            <a:r>
+              <a:rPr lang="en-US" sz="1100" b="1" spc="300" kern="0" dirty="0">
                 <a:solidFill>
                   <a:srgbClr val="F59E0B"/>
                 </a:solidFill>
@@ -4159,7 +4597,7 @@
       </p:sp>
       <p:pic>
         <p:nvPicPr>
-          <p:cNvPr id="34" name="Image 7" descr="preencoded.png"/>
+          <p:cNvPr id="34" name="Image 7" descr="preencoded.png">    </p:cNvPr>
           <p:cNvPicPr>
             <a:picLocks noChangeAspect="1"/>
           </p:cNvPicPr>
@@ -4189,7 +4627,7 @@
         </p:nvSpPr>
         <p:spPr>
           <a:xfrm>
-            <a:off x="1554480" y="5188790"/>
+            <a:off x="1554480" y="5257800"/>
             <a:ext cx="4572000" cy="777240"/>
           </a:xfrm>
           <a:prstGeom prst="rect">
@@ -4202,7 +4640,7 @@
           <a:bodyPr wrap="square" rtlCol="0" anchor="t"/>
           <a:lstStyle/>
           <a:p>
-            <a:pPr marL="0" indent="0">
+            <a:pPr indent="0" marL="0">
               <a:lnSpc>
                 <a:spcPct val="102000"/>
               </a:lnSpc>
@@ -4219,6 +4657,12 @@
               </a:rPr>
               <a:t>Financial leg</a:t>
             </a:r>
+            <a:pPr indent="0" marL="0">
+              <a:lnSpc>
+                <a:spcPct val="102000"/>
+              </a:lnSpc>
+              <a:buNone/>
+            </a:pPr>
             <a:r>
               <a:rPr lang="en-US" sz="1250" dirty="0">
                 <a:solidFill>
@@ -4279,7 +4723,7 @@
       </p:sp>
       <p:pic>
         <p:nvPicPr>
-          <p:cNvPr id="38" name="Image 8" descr="preencoded.png"/>
+          <p:cNvPr id="38" name="Image 8" descr="preencoded.png">    </p:cNvPr>
           <p:cNvPicPr>
             <a:picLocks noChangeAspect="1"/>
           </p:cNvPicPr>
@@ -4309,7 +4753,7 @@
         </p:nvSpPr>
         <p:spPr>
           <a:xfrm>
-            <a:off x="7406640" y="5118743"/>
+            <a:off x="7406640" y="5239512"/>
             <a:ext cx="4160520" cy="868680"/>
           </a:xfrm>
           <a:prstGeom prst="rect">
@@ -4322,7 +4766,7 @@
           <a:bodyPr wrap="square" rtlCol="0" anchor="t"/>
           <a:lstStyle/>
           <a:p>
-            <a:pPr marL="0" indent="0">
+            <a:pPr indent="0" marL="0">
               <a:lnSpc>
                 <a:spcPct val="100000"/>
               </a:lnSpc>
@@ -4339,6 +4783,12 @@
               </a:rPr>
               <a:t>Market leg</a:t>
             </a:r>
+            <a:pPr indent="0" marL="0">
+              <a:lnSpc>
+                <a:spcPct val="100000"/>
+              </a:lnSpc>
+              <a:buNone/>
+            </a:pPr>
             <a:r>
               <a:rPr lang="en-US" sz="1200" dirty="0">
                 <a:solidFill>
@@ -4370,7 +4820,6 @@
         <a:solidFill>
           <a:srgbClr val="0A1628"/>
         </a:solidFill>
-        <a:effectLst/>
       </p:bgPr>
     </p:bg>
     <p:spTree>
@@ -4408,7 +4857,7 @@
           <a:bodyPr wrap="square" rtlCol="0" anchor="ctr"/>
           <a:lstStyle/>
           <a:p>
-            <a:pPr marL="0" indent="0">
+            <a:pPr indent="0" marL="0">
               <a:buNone/>
             </a:pPr>
             <a:r>
@@ -4422,6 +4871,9 @@
               </a:rPr>
               <a:t>One </a:t>
             </a:r>
+            <a:pPr indent="0" marL="0">
+              <a:buNone/>
+            </a:pPr>
             <a:r>
               <a:rPr lang="en-US" sz="3300" b="1" dirty="0">
                 <a:solidFill>
@@ -4433,6 +4885,9 @@
               </a:rPr>
               <a:t>comprehensive</a:t>
             </a:r>
+            <a:pPr indent="0" marL="0">
+              <a:buNone/>
+            </a:pPr>
             <a:r>
               <a:rPr lang="en-US" sz="3300" b="1" dirty="0">
                 <a:solidFill>
@@ -4469,7 +4924,7 @@
           <a:bodyPr wrap="square" rtlCol="0" anchor="ctr"/>
           <a:lstStyle/>
           <a:p>
-            <a:pPr marL="0" indent="0">
+            <a:pPr indent="0" marL="0">
               <a:buNone/>
             </a:pPr>
             <a:r>
@@ -4508,7 +4963,7 @@
           <a:bodyPr wrap="square" rtlCol="0" anchor="ctr"/>
           <a:lstStyle/>
           <a:p>
-            <a:pPr marL="0" indent="0">
+            <a:pPr indent="0" marL="0">
               <a:buNone/>
             </a:pPr>
             <a:r>
@@ -4547,7 +5002,7 @@
           <a:bodyPr wrap="square" rtlCol="0" anchor="ctr"/>
           <a:lstStyle/>
           <a:p>
-            <a:pPr marL="0" indent="0">
+            <a:pPr indent="0" marL="0">
               <a:lnSpc>
                 <a:spcPct val="110000"/>
               </a:lnSpc>
@@ -4589,7 +5044,7 @@
           <a:bodyPr wrap="square" rtlCol="0" anchor="ctr"/>
           <a:lstStyle/>
           <a:p>
-            <a:pPr marL="0" indent="0">
+            <a:pPr indent="0" marL="0">
               <a:lnSpc>
                 <a:spcPct val="108000"/>
               </a:lnSpc>
@@ -4619,7 +5074,7 @@
         <p:spPr>
           <a:xfrm>
             <a:off x="777240" y="4553712"/>
-            <a:ext cx="3776472" cy="1976484"/>
+            <a:ext cx="3977640" cy="1554480"/>
           </a:xfrm>
           <a:prstGeom prst="roundRect">
             <a:avLst>
@@ -4645,8 +5100,8 @@
         </p:nvSpPr>
         <p:spPr>
           <a:xfrm>
-            <a:off x="1004812" y="4672066"/>
-            <a:ext cx="2782192" cy="256032"/>
+            <a:off x="987552" y="4663440"/>
+            <a:ext cx="3566160" cy="256032"/>
           </a:xfrm>
           <a:prstGeom prst="rect">
             <a:avLst/>
@@ -4658,11 +5113,11 @@
           <a:bodyPr wrap="square" rtlCol="0" anchor="ctr"/>
           <a:lstStyle/>
           <a:p>
-            <a:pPr marL="0" indent="0">
-              <a:buNone/>
-            </a:pPr>
-            <a:r>
-              <a:rPr lang="en-US" sz="1400" b="1" kern="0" spc="200" dirty="0">
+            <a:pPr indent="0" marL="0">
+              <a:buNone/>
+            </a:pPr>
+            <a:r>
+              <a:rPr lang="en-US" sz="1050" b="1" spc="200" kern="0" dirty="0">
                 <a:solidFill>
                   <a:srgbClr val="F59E0B"/>
                 </a:solidFill>
@@ -4672,7 +5127,7 @@
               </a:rPr>
               <a:t>FIVE CASES, FIVE SECTORS</a:t>
             </a:r>
-            <a:endParaRPr lang="en-US" sz="1400" dirty="0"/>
+            <a:endParaRPr lang="en-US" sz="1050" dirty="0"/>
           </a:p>
         </p:txBody>
       </p:sp>
@@ -4684,8 +5139,8 @@
         </p:nvSpPr>
         <p:spPr>
           <a:xfrm>
-            <a:off x="1013429" y="5040240"/>
-            <a:ext cx="3368789" cy="1231164"/>
+            <a:off x="987552" y="4919472"/>
+            <a:ext cx="3566160" cy="1133856"/>
           </a:xfrm>
           <a:prstGeom prst="rect">
             <a:avLst/>
@@ -4697,14 +5152,14 @@
           <a:bodyPr wrap="square" rtlCol="0" anchor="t"/>
           <a:lstStyle/>
           <a:p>
-            <a:pPr marL="0" indent="0">
+            <a:pPr indent="0" marL="0">
               <a:lnSpc>
                 <a:spcPct val="103000"/>
               </a:lnSpc>
               <a:buNone/>
             </a:pPr>
             <a:r>
-              <a:rPr lang="en-US" sz="1400" b="1" dirty="0">
+              <a:rPr lang="en-US" sz="1050" b="1" dirty="0">
                 <a:solidFill>
                   <a:srgbClr val="FFFFFF"/>
                 </a:solidFill>
@@ -4714,8 +5169,14 @@
               </a:rPr>
               <a:t>Unitech </a:t>
             </a:r>
-            <a:r>
-              <a:rPr lang="en-US" sz="1400" dirty="0">
+            <a:pPr indent="0" marL="0">
+              <a:lnSpc>
+                <a:spcPct val="103000"/>
+              </a:lnSpc>
+              <a:buNone/>
+            </a:pPr>
+            <a:r>
+              <a:rPr lang="en-US" sz="1050" dirty="0">
                 <a:solidFill>
                   <a:srgbClr val="94A3B8"/>
                 </a:solidFill>
@@ -4725,8 +5186,31 @@
               </a:rPr>
               <a:t>(real estate), </a:t>
             </a:r>
-            <a:br>
-              <a:rPr lang="en-US" sz="1400" dirty="0">
+            <a:pPr indent="0" marL="0">
+              <a:lnSpc>
+                <a:spcPct val="103000"/>
+              </a:lnSpc>
+              <a:buNone/>
+            </a:pPr>
+            <a:r>
+              <a:rPr lang="en-US" sz="1050" b="1" dirty="0">
+                <a:solidFill>
+                  <a:srgbClr val="FFFFFF"/>
+                </a:solidFill>
+                <a:latin typeface="Calibri" pitchFamily="34" charset="0"/>
+                <a:ea typeface="Calibri" pitchFamily="34" charset="-122"/>
+                <a:cs typeface="Calibri" pitchFamily="34" charset="-120"/>
+              </a:rPr>
+              <a:t>Future Retail </a:t>
+            </a:r>
+            <a:pPr indent="0" marL="0">
+              <a:lnSpc>
+                <a:spcPct val="103000"/>
+              </a:lnSpc>
+              <a:buNone/>
+            </a:pPr>
+            <a:r>
+              <a:rPr lang="en-US" sz="1050" dirty="0">
                 <a:solidFill>
                   <a:srgbClr val="94A3B8"/>
                 </a:solidFill>
@@ -4734,9 +5218,16 @@
                 <a:ea typeface="Calibri" pitchFamily="34" charset="-122"/>
                 <a:cs typeface="Calibri" pitchFamily="34" charset="-120"/>
               </a:rPr>
-            </a:br>
-            <a:r>
-              <a:rPr lang="en-US" sz="1400" b="1" dirty="0">
+              <a:t>(retail), </a:t>
+            </a:r>
+            <a:pPr indent="0" marL="0">
+              <a:lnSpc>
+                <a:spcPct val="103000"/>
+              </a:lnSpc>
+              <a:buNone/>
+            </a:pPr>
+            <a:r>
+              <a:rPr lang="en-US" sz="1050" b="1" dirty="0">
                 <a:solidFill>
                   <a:srgbClr val="FFFFFF"/>
                 </a:solidFill>
@@ -4744,10 +5235,16 @@
                 <a:ea typeface="Calibri" pitchFamily="34" charset="-122"/>
                 <a:cs typeface="Calibri" pitchFamily="34" charset="-120"/>
               </a:rPr>
-              <a:t>Future Retail </a:t>
-            </a:r>
-            <a:r>
-              <a:rPr lang="en-US" sz="1400" dirty="0">
+              <a:t>Reliance Communications </a:t>
+            </a:r>
+            <a:pPr indent="0" marL="0">
+              <a:lnSpc>
+                <a:spcPct val="103000"/>
+              </a:lnSpc>
+              <a:buNone/>
+            </a:pPr>
+            <a:r>
+              <a:rPr lang="en-US" sz="1050" dirty="0">
                 <a:solidFill>
                   <a:srgbClr val="94A3B8"/>
                 </a:solidFill>
@@ -4755,10 +5252,33 @@
                 <a:ea typeface="Calibri" pitchFamily="34" charset="-122"/>
                 <a:cs typeface="Calibri" pitchFamily="34" charset="-120"/>
               </a:rPr>
-              <a:t>(retail), </a:t>
-            </a:r>
-            <a:br>
-              <a:rPr lang="en-US" sz="1400" dirty="0">
+              <a:t>(telecom), </a:t>
+            </a:r>
+            <a:pPr indent="0" marL="0">
+              <a:lnSpc>
+                <a:spcPct val="103000"/>
+              </a:lnSpc>
+              <a:buNone/>
+            </a:pPr>
+            <a:r>
+              <a:rPr lang="en-US" sz="1050" b="1" dirty="0">
+                <a:solidFill>
+                  <a:srgbClr val="FFFFFF"/>
+                </a:solidFill>
+                <a:latin typeface="Calibri" pitchFamily="34" charset="0"/>
+                <a:ea typeface="Calibri" pitchFamily="34" charset="-122"/>
+                <a:cs typeface="Calibri" pitchFamily="34" charset="-120"/>
+              </a:rPr>
+              <a:t>Jaiprakash Associates </a:t>
+            </a:r>
+            <a:pPr indent="0" marL="0">
+              <a:lnSpc>
+                <a:spcPct val="103000"/>
+              </a:lnSpc>
+              <a:buNone/>
+            </a:pPr>
+            <a:r>
+              <a:rPr lang="en-US" sz="1050" dirty="0">
                 <a:solidFill>
                   <a:srgbClr val="94A3B8"/>
                 </a:solidFill>
@@ -4766,9 +5286,16 @@
                 <a:ea typeface="Calibri" pitchFamily="34" charset="-122"/>
                 <a:cs typeface="Calibri" pitchFamily="34" charset="-120"/>
               </a:rPr>
-            </a:br>
-            <a:r>
-              <a:rPr lang="en-US" sz="1400" b="1" dirty="0">
+              <a:t>(infrastructure), </a:t>
+            </a:r>
+            <a:pPr indent="0" marL="0">
+              <a:lnSpc>
+                <a:spcPct val="103000"/>
+              </a:lnSpc>
+              <a:buNone/>
+            </a:pPr>
+            <a:r>
+              <a:rPr lang="en-US" sz="1050" b="1" dirty="0">
                 <a:solidFill>
                   <a:srgbClr val="FFFFFF"/>
                 </a:solidFill>
@@ -4776,10 +5303,16 @@
                 <a:ea typeface="Calibri" pitchFamily="34" charset="-122"/>
                 <a:cs typeface="Calibri" pitchFamily="34" charset="-120"/>
               </a:rPr>
-              <a:t>Reliance Communications </a:t>
-            </a:r>
-            <a:r>
-              <a:rPr lang="en-US" sz="1400" dirty="0">
+              <a:t>Suzlon </a:t>
+            </a:r>
+            <a:pPr indent="0" marL="0">
+              <a:lnSpc>
+                <a:spcPct val="103000"/>
+              </a:lnSpc>
+              <a:buNone/>
+            </a:pPr>
+            <a:r>
+              <a:rPr lang="en-US" sz="1050" dirty="0">
                 <a:solidFill>
                   <a:srgbClr val="94A3B8"/>
                 </a:solidFill>
@@ -4787,94 +5320,9 @@
                 <a:ea typeface="Calibri" pitchFamily="34" charset="-122"/>
                 <a:cs typeface="Calibri" pitchFamily="34" charset="-120"/>
               </a:rPr>
-              <a:t>(telecom), </a:t>
-            </a:r>
-            <a:br>
-              <a:rPr lang="en-US" sz="1400" dirty="0">
-                <a:solidFill>
-                  <a:srgbClr val="94A3B8"/>
-                </a:solidFill>
-                <a:latin typeface="Calibri" pitchFamily="34" charset="0"/>
-                <a:ea typeface="Calibri" pitchFamily="34" charset="-122"/>
-                <a:cs typeface="Calibri" pitchFamily="34" charset="-120"/>
-              </a:rPr>
-            </a:br>
-            <a:r>
-              <a:rPr lang="en-US" sz="1400" b="1" dirty="0">
-                <a:solidFill>
-                  <a:srgbClr val="FFFFFF"/>
-                </a:solidFill>
-                <a:latin typeface="Calibri" pitchFamily="34" charset="0"/>
-                <a:ea typeface="Calibri" pitchFamily="34" charset="-122"/>
-                <a:cs typeface="Calibri" pitchFamily="34" charset="-120"/>
-              </a:rPr>
-              <a:t>Jaiprakash Associates </a:t>
-            </a:r>
-            <a:r>
-              <a:rPr lang="en-US" sz="1400" dirty="0">
-                <a:solidFill>
-                  <a:srgbClr val="94A3B8"/>
-                </a:solidFill>
-                <a:latin typeface="Calibri" pitchFamily="34" charset="0"/>
-                <a:ea typeface="Calibri" pitchFamily="34" charset="-122"/>
-                <a:cs typeface="Calibri" pitchFamily="34" charset="-120"/>
-              </a:rPr>
-              <a:t>(infrastructure), </a:t>
-            </a:r>
-            <a:br>
-              <a:rPr lang="en-US" sz="1400" dirty="0">
-                <a:solidFill>
-                  <a:srgbClr val="94A3B8"/>
-                </a:solidFill>
-                <a:latin typeface="Calibri" pitchFamily="34" charset="0"/>
-                <a:ea typeface="Calibri" pitchFamily="34" charset="-122"/>
-                <a:cs typeface="Calibri" pitchFamily="34" charset="-120"/>
-              </a:rPr>
-            </a:br>
-            <a:r>
-              <a:rPr lang="en-US" sz="1400" b="1" dirty="0">
-                <a:solidFill>
-                  <a:srgbClr val="FFFFFF"/>
-                </a:solidFill>
-                <a:latin typeface="Calibri" pitchFamily="34" charset="0"/>
-                <a:ea typeface="Calibri" pitchFamily="34" charset="-122"/>
-                <a:cs typeface="Calibri" pitchFamily="34" charset="-120"/>
-              </a:rPr>
-              <a:t>Suzlon </a:t>
-            </a:r>
-            <a:r>
-              <a:rPr lang="en-US" sz="1400" dirty="0">
-                <a:solidFill>
-                  <a:srgbClr val="94A3B8"/>
-                </a:solidFill>
-                <a:latin typeface="Calibri" pitchFamily="34" charset="0"/>
-                <a:ea typeface="Calibri" pitchFamily="34" charset="-122"/>
-                <a:cs typeface="Calibri" pitchFamily="34" charset="-120"/>
-              </a:rPr>
-              <a:t>(renewables - a recovery). </a:t>
-            </a:r>
-            <a:br>
-              <a:rPr lang="en-US" sz="1400" dirty="0">
-                <a:solidFill>
-                  <a:srgbClr val="94A3B8"/>
-                </a:solidFill>
-                <a:latin typeface="Calibri" pitchFamily="34" charset="0"/>
-                <a:ea typeface="Calibri" pitchFamily="34" charset="-122"/>
-                <a:cs typeface="Calibri" pitchFamily="34" charset="-120"/>
-              </a:rPr>
-            </a:br>
-            <a:r>
-              <a:rPr lang="en-US" sz="1400" dirty="0">
-                <a:solidFill>
-                  <a:srgbClr val="94A3B8"/>
-                </a:solidFill>
-                <a:latin typeface="Calibri" pitchFamily="34" charset="0"/>
-                <a:ea typeface="Calibri" pitchFamily="34" charset="-122"/>
-                <a:cs typeface="Calibri" pitchFamily="34" charset="-120"/>
-              </a:rPr>
-              <a:t>Real financials, real events.</a:t>
-            </a:r>
-            <a:endParaRPr lang="en-US" sz="1400" dirty="0"/>
+              <a:t>(renewables - a recovery). Real financials, real events.</a:t>
+            </a:r>
+            <a:endParaRPr lang="en-US" sz="1050" dirty="0"/>
           </a:p>
         </p:txBody>
       </p:sp>
@@ -4899,7 +5347,7 @@
           <a:bodyPr wrap="square" rtlCol="0" anchor="ctr"/>
           <a:lstStyle/>
           <a:p>
-            <a:pPr marL="0" indent="0">
+            <a:pPr indent="0" marL="0">
               <a:buNone/>
             </a:pPr>
             <a:r>
@@ -4919,7 +5367,7 @@
       </p:sp>
       <p:graphicFrame>
         <p:nvGraphicFramePr>
-          <p:cNvPr id="11" name="Chart 0"/>
+          <p:cNvPr id="11" name="Chart 0" descr=""/>
           <p:cNvGraphicFramePr/>
           <p:nvPr/>
         </p:nvGraphicFramePr>
@@ -4927,9 +5375,9 @@
           <a:off x="5349240" y="2194560"/>
           <a:ext cx="6263640" cy="3611880"/>
         </p:xfrm>
-        <a:graphic>
+        <a:graphic xmlns:a="http://schemas.openxmlformats.org/drawingml/2006/main">
           <a:graphicData uri="http://schemas.openxmlformats.org/drawingml/2006/chart">
-            <c:chart xmlns:c="http://schemas.openxmlformats.org/drawingml/2006/chart" xmlns:r="http://schemas.openxmlformats.org/officeDocument/2006/relationships" r:id="rId3"/>
+            <c:chart xmlns:c="http://schemas.openxmlformats.org/drawingml/2006/chart" r:id="rId1"/>
           </a:graphicData>
         </a:graphic>
       </p:graphicFrame>
@@ -4954,7 +5402,7 @@
           <a:bodyPr wrap="square" rtlCol="0" anchor="ctr"/>
           <a:lstStyle/>
           <a:p>
-            <a:pPr marL="0" indent="0">
+            <a:pPr indent="0" marL="0">
               <a:buNone/>
             </a:pPr>
             <a:r>
@@ -4988,7 +5436,6 @@
         <a:solidFill>
           <a:srgbClr val="0A1628"/>
         </a:solidFill>
-        <a:effectLst/>
       </p:bgPr>
     </p:bg>
     <p:spTree>
@@ -5013,8 +5460,8 @@
         </p:nvSpPr>
         <p:spPr>
           <a:xfrm>
-            <a:off x="777240" y="548640"/>
-            <a:ext cx="10698480" cy="685800"/>
+            <a:off x="777240" y="502920"/>
+            <a:ext cx="10698480" cy="640080"/>
           </a:xfrm>
           <a:prstGeom prst="rect">
             <a:avLst/>
@@ -5026,7 +5473,7 @@
           <a:bodyPr wrap="square" rtlCol="0" anchor="ctr"/>
           <a:lstStyle/>
           <a:p>
-            <a:pPr marL="0" indent="0">
+            <a:pPr indent="0" marL="0">
               <a:buNone/>
             </a:pPr>
             <a:r>
@@ -5038,8 +5485,11 @@
                 <a:ea typeface="Calibri" pitchFamily="34" charset="-122"/>
                 <a:cs typeface="Calibri" pitchFamily="34" charset="-120"/>
               </a:rPr>
-              <a:t>A live risk analyst for </a:t>
-            </a:r>
+              <a:t>What the numbers </a:t>
+            </a:r>
+            <a:pPr indent="0" marL="0">
+              <a:buNone/>
+            </a:pPr>
             <a:r>
               <a:rPr lang="en-US" sz="3300" b="1" dirty="0">
                 <a:solidFill>
@@ -5049,7 +5499,7 @@
                 <a:ea typeface="Calibri" pitchFamily="34" charset="-122"/>
                 <a:cs typeface="Calibri" pitchFamily="34" charset="-120"/>
               </a:rPr>
-              <a:t>every name in your book</a:t>
+              <a:t>actually say</a:t>
             </a:r>
             <a:endParaRPr lang="en-US" sz="3300" dirty="0"/>
           </a:p>
@@ -5063,8 +5513,8 @@
         </p:nvSpPr>
         <p:spPr>
           <a:xfrm>
-            <a:off x="795528" y="1316736"/>
-            <a:ext cx="10515600" cy="365760"/>
+            <a:off x="795528" y="1225296"/>
+            <a:ext cx="10607040" cy="365760"/>
           </a:xfrm>
           <a:prstGeom prst="rect">
             <a:avLst/>
@@ -5076,7 +5526,7 @@
           <a:bodyPr wrap="square" rtlCol="0" anchor="ctr"/>
           <a:lstStyle/>
           <a:p>
-            <a:pPr marL="0" indent="0">
+            <a:pPr indent="0" marL="0">
               <a:buNone/>
             </a:pPr>
             <a:r>
@@ -5088,7 +5538,7 @@
                 <a:ea typeface="Calibri" pitchFamily="34" charset="-122"/>
                 <a:cs typeface="Calibri" pitchFamily="34" charset="-120"/>
               </a:rPr>
-              <a:t>Faster credit reviews   .   earlier watch-list triage   .   one defensible number, on demand.</a:t>
+              <a:t>Four findings, each reproducible from the notebooks - a measurement, not a story.</a:t>
             </a:r>
             <a:endParaRPr lang="en-US" sz="1550" dirty="0"/>
           </a:p>
@@ -5102,12 +5552,203 @@
         </p:nvSpPr>
         <p:spPr>
           <a:xfrm>
-            <a:off x="777240" y="2057400"/>
-            <a:ext cx="2542032" cy="2331720"/>
+            <a:off x="777240" y="1874520"/>
+            <a:ext cx="5349240" cy="1874520"/>
           </a:xfrm>
           <a:prstGeom prst="roundRect">
             <a:avLst>
-              <a:gd name="adj" fmla="val 3529"/>
+              <a:gd name="adj" fmla="val 4390"/>
+            </a:avLst>
+          </a:prstGeom>
+          <a:solidFill>
+            <a:srgbClr val="152740"/>
+          </a:solidFill>
+          <a:ln w="12700">
+            <a:solidFill>
+              <a:srgbClr val="1E3350"/>
+            </a:solidFill>
+            <a:prstDash val="solid"/>
+          </a:ln>
+        </p:spPr>
+      </p:sp>
+      <p:sp>
+        <p:nvSpPr>
+          <p:cNvPr id="5" name="Shape 3"/>
+          <p:cNvSpPr/>
+          <p:nvPr/>
+        </p:nvSpPr>
+        <p:spPr>
+          <a:xfrm>
+            <a:off x="1033272" y="2130552"/>
+            <a:ext cx="566928" cy="566928"/>
+          </a:xfrm>
+          <a:prstGeom prst="ellipse">
+            <a:avLst/>
+          </a:prstGeom>
+          <a:solidFill>
+            <a:srgbClr val="F59E0B"/>
+          </a:solidFill>
+          <a:ln/>
+        </p:spPr>
+      </p:sp>
+      <p:pic>
+        <p:nvPicPr>
+          <p:cNvPr id="6" name="Image 0" descr="preencoded.png">    </p:cNvPr>
+          <p:cNvPicPr>
+            <a:picLocks noChangeAspect="1"/>
+          </p:cNvPicPr>
+          <p:nvPr/>
+        </p:nvPicPr>
+        <p:blipFill>
+          <a:blip r:embed="rId1"/>
+          <a:stretch>
+            <a:fillRect/>
+          </a:stretch>
+        </p:blipFill>
+        <p:spPr>
+          <a:xfrm>
+            <a:off x="1169335" y="2266615"/>
+            <a:ext cx="294803" cy="294803"/>
+          </a:xfrm>
+          <a:prstGeom prst="rect">
+            <a:avLst/>
+          </a:prstGeom>
+        </p:spPr>
+      </p:pic>
+      <p:sp>
+        <p:nvSpPr>
+          <p:cNvPr id="7" name="Text 4"/>
+          <p:cNvSpPr/>
+          <p:nvPr/>
+        </p:nvSpPr>
+        <p:spPr>
+          <a:xfrm>
+            <a:off x="1737360" y="2039112"/>
+            <a:ext cx="4206240" cy="566928"/>
+          </a:xfrm>
+          <a:prstGeom prst="rect">
+            <a:avLst/>
+          </a:prstGeom>
+          <a:noFill/>
+          <a:ln/>
+        </p:spPr>
+        <p:txBody>
+          <a:bodyPr wrap="square" rtlCol="0" anchor="ctr"/>
+          <a:lstStyle/>
+          <a:p>
+            <a:pPr indent="0" marL="0">
+              <a:buNone/>
+            </a:pPr>
+            <a:r>
+              <a:rPr lang="en-US" sz="3000" b="1" dirty="0">
+                <a:solidFill>
+                  <a:srgbClr val="F59E0B"/>
+                </a:solidFill>
+                <a:latin typeface="Calibri" pitchFamily="34" charset="0"/>
+                <a:ea typeface="Calibri" pitchFamily="34" charset="-122"/>
+                <a:cs typeface="Calibri" pitchFamily="34" charset="-120"/>
+              </a:rPr>
+              <a:t>8 / 9</a:t>
+            </a:r>
+            <a:endParaRPr lang="en-US" sz="3000" dirty="0"/>
+          </a:p>
+        </p:txBody>
+      </p:sp>
+      <p:sp>
+        <p:nvSpPr>
+          <p:cNvPr id="8" name="Text 5"/>
+          <p:cNvSpPr/>
+          <p:nvPr/>
+        </p:nvSpPr>
+        <p:spPr>
+          <a:xfrm>
+            <a:off x="1051560" y="2697480"/>
+            <a:ext cx="4800600" cy="274320"/>
+          </a:xfrm>
+          <a:prstGeom prst="rect">
+            <a:avLst/>
+          </a:prstGeom>
+          <a:noFill/>
+          <a:ln/>
+        </p:spPr>
+        <p:txBody>
+          <a:bodyPr wrap="square" rtlCol="0" anchor="ctr"/>
+          <a:lstStyle/>
+          <a:p>
+            <a:pPr indent="0" marL="0">
+              <a:buNone/>
+            </a:pPr>
+            <a:r>
+              <a:rPr lang="en-US" sz="1300" b="1" dirty="0">
+                <a:solidFill>
+                  <a:srgbClr val="FFFFFF"/>
+                </a:solidFill>
+                <a:latin typeface="Calibri" pitchFamily="34" charset="0"/>
+                <a:ea typeface="Calibri" pitchFamily="34" charset="-122"/>
+                <a:cs typeface="Calibri" pitchFamily="34" charset="-120"/>
+              </a:rPr>
+              <a:t>caught at zero false alarms</a:t>
+            </a:r>
+            <a:endParaRPr lang="en-US" sz="1300" dirty="0"/>
+          </a:p>
+        </p:txBody>
+      </p:sp>
+      <p:sp>
+        <p:nvSpPr>
+          <p:cNvPr id="9" name="Text 6"/>
+          <p:cNvSpPr/>
+          <p:nvPr/>
+        </p:nvSpPr>
+        <p:spPr>
+          <a:xfrm>
+            <a:off x="1051560" y="2971800"/>
+            <a:ext cx="4800600" cy="713232"/>
+          </a:xfrm>
+          <a:prstGeom prst="rect">
+            <a:avLst/>
+          </a:prstGeom>
+          <a:noFill/>
+          <a:ln/>
+        </p:spPr>
+        <p:txBody>
+          <a:bodyPr wrap="square" rtlCol="0" anchor="ctr"/>
+          <a:lstStyle/>
+          <a:p>
+            <a:pPr indent="0" marL="0">
+              <a:lnSpc>
+                <a:spcPct val="105000"/>
+              </a:lnSpc>
+              <a:buNone/>
+            </a:pPr>
+            <a:r>
+              <a:rPr lang="en-US" sz="1150" dirty="0">
+                <a:solidFill>
+                  <a:srgbClr val="94A3B8"/>
+                </a:solidFill>
+                <a:latin typeface="Calibri" pitchFamily="34" charset="0"/>
+                <a:ea typeface="Calibri" pitchFamily="34" charset="-122"/>
+                <a:cs typeface="Calibri" pitchFamily="34" charset="-120"/>
+              </a:rPr>
+              <a:t>Across 12 healthy blue-chips and 9 firms that failed, a threshold that flags NO healthy name still catches 8 of the 9 failures. Median distress probability 0.83 vs 0.13 (leave-one-out ROC-AUC 0.97).</a:t>
+            </a:r>
+            <a:endParaRPr lang="en-US" sz="1150" dirty="0"/>
+          </a:p>
+        </p:txBody>
+      </p:sp>
+      <p:sp>
+        <p:nvSpPr>
+          <p:cNvPr id="10" name="Shape 7"/>
+          <p:cNvSpPr/>
+          <p:nvPr/>
+        </p:nvSpPr>
+        <p:spPr>
+          <a:xfrm>
+            <a:off x="6812280" y="1874520"/>
+            <a:ext cx="5349240" cy="1874520"/>
+          </a:xfrm>
+          <a:prstGeom prst="roundRect">
+            <a:avLst>
+              <a:gd name="adj" fmla="val 4390"/>
             </a:avLst>
           </a:prstGeom>
           <a:solidFill>
@@ -5123,14 +5764,14 @@
       </p:sp>
       <p:sp>
         <p:nvSpPr>
-          <p:cNvPr id="5" name="Shape 3"/>
-          <p:cNvSpPr/>
-          <p:nvPr/>
-        </p:nvSpPr>
-        <p:spPr>
-          <a:xfrm>
-            <a:off x="1033272" y="2331720"/>
-            <a:ext cx="640080" cy="640080"/>
+          <p:cNvPr id="11" name="Shape 8"/>
+          <p:cNvSpPr/>
+          <p:nvPr/>
+        </p:nvSpPr>
+        <p:spPr>
+          <a:xfrm>
+            <a:off x="7068312" y="2130552"/>
+            <a:ext cx="566928" cy="566928"/>
           </a:xfrm>
           <a:prstGeom prst="ellipse">
             <a:avLst/>
@@ -5143,22 +5784,22 @@
       </p:sp>
       <p:pic>
         <p:nvPicPr>
-          <p:cNvPr id="6" name="Image 0" descr="preencoded.png"/>
+          <p:cNvPr id="12" name="Image 1" descr="preencoded.png">    </p:cNvPr>
           <p:cNvPicPr>
             <a:picLocks noChangeAspect="1"/>
           </p:cNvPicPr>
           <p:nvPr/>
         </p:nvPicPr>
         <p:blipFill>
-          <a:blip r:embed="rId3"/>
+          <a:blip r:embed="rId2"/>
           <a:stretch>
             <a:fillRect/>
           </a:stretch>
         </p:blipFill>
         <p:spPr>
           <a:xfrm>
-            <a:off x="1186891" y="2485339"/>
-            <a:ext cx="332842" cy="332842"/>
+            <a:off x="7204375" y="2266615"/>
+            <a:ext cx="294803" cy="294803"/>
           </a:xfrm>
           <a:prstGeom prst="rect">
             <a:avLst/>
@@ -5167,14 +5808,14 @@
       </p:pic>
       <p:sp>
         <p:nvSpPr>
-          <p:cNvPr id="7" name="Text 4"/>
-          <p:cNvSpPr/>
-          <p:nvPr/>
-        </p:nvSpPr>
-        <p:spPr>
-          <a:xfrm>
-            <a:off x="996696" y="3081528"/>
-            <a:ext cx="2139696" cy="365760"/>
+          <p:cNvPr id="13" name="Text 9"/>
+          <p:cNvSpPr/>
+          <p:nvPr/>
+        </p:nvSpPr>
+        <p:spPr>
+          <a:xfrm>
+            <a:off x="7772400" y="2039112"/>
+            <a:ext cx="4206240" cy="566928"/>
           </a:xfrm>
           <a:prstGeom prst="rect">
             <a:avLst/>
@@ -5186,11 +5827,50 @@
           <a:bodyPr wrap="square" rtlCol="0" anchor="ctr"/>
           <a:lstStyle/>
           <a:p>
-            <a:pPr marL="0" indent="0">
-              <a:buNone/>
-            </a:pPr>
-            <a:r>
-              <a:rPr lang="en-US" sz="1550" b="1" dirty="0">
+            <a:pPr indent="0" marL="0">
+              <a:buNone/>
+            </a:pPr>
+            <a:r>
+              <a:rPr lang="en-US" sz="3000" b="1" dirty="0">
+                <a:solidFill>
+                  <a:srgbClr val="F59E0B"/>
+                </a:solidFill>
+                <a:latin typeface="Calibri" pitchFamily="34" charset="0"/>
+                <a:ea typeface="Calibri" pitchFamily="34" charset="-122"/>
+                <a:cs typeface="Calibri" pitchFamily="34" charset="-120"/>
+              </a:rPr>
+              <a:t>27 months</a:t>
+            </a:r>
+            <a:endParaRPr lang="en-US" sz="3000" dirty="0"/>
+          </a:p>
+        </p:txBody>
+      </p:sp>
+      <p:sp>
+        <p:nvSpPr>
+          <p:cNvPr id="14" name="Text 10"/>
+          <p:cNvSpPr/>
+          <p:nvPr/>
+        </p:nvSpPr>
+        <p:spPr>
+          <a:xfrm>
+            <a:off x="7086600" y="2697480"/>
+            <a:ext cx="4800600" cy="274320"/>
+          </a:xfrm>
+          <a:prstGeom prst="rect">
+            <a:avLst/>
+          </a:prstGeom>
+          <a:noFill/>
+          <a:ln/>
+        </p:spPr>
+        <p:txBody>
+          <a:bodyPr wrap="square" rtlCol="0" anchor="ctr"/>
+          <a:lstStyle/>
+          <a:p>
+            <a:pPr indent="0" marL="0">
+              <a:buNone/>
+            </a:pPr>
+            <a:r>
+              <a:rPr lang="en-US" sz="1300" b="1" dirty="0">
                 <a:solidFill>
                   <a:srgbClr val="FFFFFF"/>
                 </a:solidFill>
@@ -5198,22 +5878,22 @@
                 <a:ea typeface="Calibri" pitchFamily="34" charset="-122"/>
                 <a:cs typeface="Calibri" pitchFamily="34" charset="-120"/>
               </a:rPr>
-              <a:t>Comprehensive</a:t>
-            </a:r>
-            <a:endParaRPr lang="en-US" sz="1550" dirty="0"/>
-          </a:p>
-        </p:txBody>
-      </p:sp>
-      <p:sp>
-        <p:nvSpPr>
-          <p:cNvPr id="8" name="Text 5"/>
-          <p:cNvSpPr/>
-          <p:nvPr/>
-        </p:nvSpPr>
-        <p:spPr>
-          <a:xfrm>
-            <a:off x="996696" y="3429000"/>
-            <a:ext cx="2139696" cy="822960"/>
+              <a:t>median early warning</a:t>
+            </a:r>
+            <a:endParaRPr lang="en-US" sz="1300" dirty="0"/>
+          </a:p>
+        </p:txBody>
+      </p:sp>
+      <p:sp>
+        <p:nvSpPr>
+          <p:cNvPr id="15" name="Text 11"/>
+          <p:cNvSpPr/>
+          <p:nvPr/>
+        </p:nvSpPr>
+        <p:spPr>
+          <a:xfrm>
+            <a:off x="7086600" y="2971800"/>
+            <a:ext cx="4800600" cy="713232"/>
           </a:xfrm>
           <a:prstGeom prst="rect">
             <a:avLst/>
@@ -5225,14 +5905,14 @@
           <a:bodyPr wrap="square" rtlCol="0" anchor="ctr"/>
           <a:lstStyle/>
           <a:p>
-            <a:pPr marL="0" indent="0">
+            <a:pPr indent="0" marL="0">
               <a:lnSpc>
-                <a:spcPct val="106000"/>
+                <a:spcPct val="105000"/>
               </a:lnSpc>
               <a:buNone/>
             </a:pPr>
             <a:r>
-              <a:rPr lang="en-US" sz="1250" dirty="0">
+              <a:rPr lang="en-US" sz="1150" dirty="0">
                 <a:solidFill>
                   <a:srgbClr val="94A3B8"/>
                 </a:solidFill>
@@ -5240,26 +5920,26 @@
                 <a:ea typeface="Calibri" pitchFamily="34" charset="-122"/>
                 <a:cs typeface="Calibri" pitchFamily="34" charset="-120"/>
               </a:rPr>
-              <a:t>Six inputs - financials, ratings, leadership, news, hiring, sentiment - in one score.</a:t>
-            </a:r>
-            <a:endParaRPr lang="en-US" sz="1250" dirty="0"/>
-          </a:p>
-        </p:txBody>
-      </p:sp>
-      <p:sp>
-        <p:nvSpPr>
-          <p:cNvPr id="9" name="Shape 6"/>
-          <p:cNvSpPr/>
-          <p:nvPr/>
-        </p:nvSpPr>
-        <p:spPr>
-          <a:xfrm>
-            <a:off x="3538728" y="2057400"/>
-            <a:ext cx="2542032" cy="2331720"/>
+              <a:t>The comprehensive score crosses into high risk a median 27 months before insolvency - 6 months earlier than Altman. Unitech: 26 months, where Altman never warned in time.</a:t>
+            </a:r>
+            <a:endParaRPr lang="en-US" sz="1150" dirty="0"/>
+          </a:p>
+        </p:txBody>
+      </p:sp>
+      <p:sp>
+        <p:nvSpPr>
+          <p:cNvPr id="16" name="Shape 12"/>
+          <p:cNvSpPr/>
+          <p:nvPr/>
+        </p:nvSpPr>
+        <p:spPr>
+          <a:xfrm>
+            <a:off x="777240" y="3959352"/>
+            <a:ext cx="5349240" cy="1874520"/>
           </a:xfrm>
           <a:prstGeom prst="roundRect">
             <a:avLst>
-              <a:gd name="adj" fmla="val 3529"/>
+              <a:gd name="adj" fmla="val 4390"/>
             </a:avLst>
           </a:prstGeom>
           <a:solidFill>
@@ -5275,14 +5955,14 @@
       </p:sp>
       <p:sp>
         <p:nvSpPr>
-          <p:cNvPr id="10" name="Shape 7"/>
-          <p:cNvSpPr/>
-          <p:nvPr/>
-        </p:nvSpPr>
-        <p:spPr>
-          <a:xfrm>
-            <a:off x="3794760" y="2331720"/>
-            <a:ext cx="640080" cy="640080"/>
+          <p:cNvPr id="17" name="Shape 13"/>
+          <p:cNvSpPr/>
+          <p:nvPr/>
+        </p:nvSpPr>
+        <p:spPr>
+          <a:xfrm>
+            <a:off x="1033272" y="4215384"/>
+            <a:ext cx="566928" cy="566928"/>
           </a:xfrm>
           <a:prstGeom prst="ellipse">
             <a:avLst/>
@@ -5295,22 +5975,22 @@
       </p:sp>
       <p:pic>
         <p:nvPicPr>
-          <p:cNvPr id="11" name="Image 1" descr="preencoded.png"/>
+          <p:cNvPr id="18" name="Image 2" descr="preencoded.png">    </p:cNvPr>
           <p:cNvPicPr>
             <a:picLocks noChangeAspect="1"/>
           </p:cNvPicPr>
           <p:nvPr/>
         </p:nvPicPr>
         <p:blipFill>
-          <a:blip r:embed="rId4"/>
+          <a:blip r:embed="rId3"/>
           <a:stretch>
             <a:fillRect/>
           </a:stretch>
         </p:blipFill>
         <p:spPr>
           <a:xfrm>
-            <a:off x="3948379" y="2485339"/>
-            <a:ext cx="332842" cy="332842"/>
+            <a:off x="1169335" y="4351447"/>
+            <a:ext cx="294803" cy="294803"/>
           </a:xfrm>
           <a:prstGeom prst="rect">
             <a:avLst/>
@@ -5319,14 +5999,14 @@
       </p:pic>
       <p:sp>
         <p:nvSpPr>
-          <p:cNvPr id="12" name="Text 8"/>
-          <p:cNvSpPr/>
-          <p:nvPr/>
-        </p:nvSpPr>
-        <p:spPr>
-          <a:xfrm>
-            <a:off x="3758184" y="3081528"/>
-            <a:ext cx="2139696" cy="365760"/>
+          <p:cNvPr id="19" name="Text 14"/>
+          <p:cNvSpPr/>
+          <p:nvPr/>
+        </p:nvSpPr>
+        <p:spPr>
+          <a:xfrm>
+            <a:off x="1737360" y="4123944"/>
+            <a:ext cx="4206240" cy="566928"/>
           </a:xfrm>
           <a:prstGeom prst="rect">
             <a:avLst/>
@@ -5338,11 +6018,50 @@
           <a:bodyPr wrap="square" rtlCol="0" anchor="ctr"/>
           <a:lstStyle/>
           <a:p>
-            <a:pPr marL="0" indent="0">
-              <a:buNone/>
-            </a:pPr>
-            <a:r>
-              <a:rPr lang="en-US" sz="1550" b="1" dirty="0">
+            <a:pPr indent="0" marL="0">
+              <a:buNone/>
+            </a:pPr>
+            <a:r>
+              <a:rPr lang="en-US" sz="3000" b="1" dirty="0">
+                <a:solidFill>
+                  <a:srgbClr val="F59E0B"/>
+                </a:solidFill>
+                <a:latin typeface="Calibri" pitchFamily="34" charset="0"/>
+                <a:ea typeface="Calibri" pitchFamily="34" charset="-122"/>
+                <a:cs typeface="Calibri" pitchFamily="34" charset="-120"/>
+              </a:rPr>
+              <a:t>76 -&gt; 78</a:t>
+            </a:r>
+            <a:endParaRPr lang="en-US" sz="3000" dirty="0"/>
+          </a:p>
+        </p:txBody>
+      </p:sp>
+      <p:sp>
+        <p:nvSpPr>
+          <p:cNvPr id="20" name="Text 15"/>
+          <p:cNvSpPr/>
+          <p:nvPr/>
+        </p:nvSpPr>
+        <p:spPr>
+          <a:xfrm>
+            <a:off x="1051560" y="4782312"/>
+            <a:ext cx="4800600" cy="274320"/>
+          </a:xfrm>
+          <a:prstGeom prst="rect">
+            <a:avLst/>
+          </a:prstGeom>
+          <a:noFill/>
+          <a:ln/>
+        </p:spPr>
+        <p:txBody>
+          <a:bodyPr wrap="square" rtlCol="0" anchor="ctr"/>
+          <a:lstStyle/>
+          <a:p>
+            <a:pPr indent="0" marL="0">
+              <a:buNone/>
+            </a:pPr>
+            <a:r>
+              <a:rPr lang="en-US" sz="1300" b="1" dirty="0">
                 <a:solidFill>
                   <a:srgbClr val="FFFFFF"/>
                 </a:solidFill>
@@ -5350,22 +6069,22 @@
                 <a:ea typeface="Calibri" pitchFamily="34" charset="-122"/>
                 <a:cs typeface="Calibri" pitchFamily="34" charset="-120"/>
               </a:rPr>
-              <a:t>Live &amp; automated</a:t>
-            </a:r>
-            <a:endParaRPr lang="en-US" sz="1550" dirty="0"/>
-          </a:p>
-        </p:txBody>
-      </p:sp>
-      <p:sp>
-        <p:nvSpPr>
-          <p:cNvPr id="13" name="Text 9"/>
-          <p:cNvSpPr/>
-          <p:nvPr/>
-        </p:nvSpPr>
-        <p:spPr>
-          <a:xfrm>
-            <a:off x="3758184" y="3429000"/>
-            <a:ext cx="2219922" cy="822960"/>
+              <a:t>the hard-event floor binds</a:t>
+            </a:r>
+            <a:endParaRPr lang="en-US" sz="1300" dirty="0"/>
+          </a:p>
+        </p:txBody>
+      </p:sp>
+      <p:sp>
+        <p:nvSpPr>
+          <p:cNvPr id="21" name="Text 16"/>
+          <p:cNvSpPr/>
+          <p:nvPr/>
+        </p:nvSpPr>
+        <p:spPr>
+          <a:xfrm>
+            <a:off x="1051560" y="5056632"/>
+            <a:ext cx="4800600" cy="713232"/>
           </a:xfrm>
           <a:prstGeom prst="rect">
             <a:avLst/>
@@ -5377,14 +6096,14 @@
           <a:bodyPr wrap="square" rtlCol="0" anchor="ctr"/>
           <a:lstStyle/>
           <a:p>
-            <a:pPr marL="0" indent="0">
+            <a:pPr indent="0" marL="0">
               <a:lnSpc>
-                <a:spcPct val="106000"/>
+                <a:spcPct val="105000"/>
               </a:lnSpc>
               <a:buNone/>
             </a:pPr>
             <a:r>
-              <a:rPr lang="en-US" sz="1250" dirty="0">
+              <a:rPr lang="en-US" sz="1150" dirty="0">
                 <a:solidFill>
                   <a:srgbClr val="94A3B8"/>
                 </a:solidFill>
@@ -5392,26 +6111,26 @@
                 <a:ea typeface="Calibri" pitchFamily="34" charset="-122"/>
                 <a:cs typeface="Calibri" pitchFamily="34" charset="-120"/>
               </a:rPr>
-              <a:t>Any listed company, on demand. No manual searching for every information.</a:t>
-            </a:r>
-            <a:endParaRPr lang="en-US" sz="1250" dirty="0"/>
-          </a:p>
-        </p:txBody>
-      </p:sp>
-      <p:sp>
-        <p:nvSpPr>
-          <p:cNvPr id="14" name="Shape 10"/>
-          <p:cNvSpPr/>
-          <p:nvPr/>
-        </p:nvSpPr>
-        <p:spPr>
-          <a:xfrm>
-            <a:off x="6300216" y="2057400"/>
-            <a:ext cx="2542032" cy="2331720"/>
+              <a:t>SpiceJet's verified auditor exit floors the signal pulse - a fact that softer, tone-based signals cannot average away. It stays inert on the healthy names.</a:t>
+            </a:r>
+            <a:endParaRPr lang="en-US" sz="1150" dirty="0"/>
+          </a:p>
+        </p:txBody>
+      </p:sp>
+      <p:sp>
+        <p:nvSpPr>
+          <p:cNvPr id="22" name="Shape 17"/>
+          <p:cNvSpPr/>
+          <p:nvPr/>
+        </p:nvSpPr>
+        <p:spPr>
+          <a:xfrm>
+            <a:off x="6812280" y="3959352"/>
+            <a:ext cx="5349240" cy="1874520"/>
           </a:xfrm>
           <a:prstGeom prst="roundRect">
             <a:avLst>
-              <a:gd name="adj" fmla="val 3529"/>
+              <a:gd name="adj" fmla="val 4390"/>
             </a:avLst>
           </a:prstGeom>
           <a:solidFill>
@@ -5427,14 +6146,14 @@
       </p:sp>
       <p:sp>
         <p:nvSpPr>
-          <p:cNvPr id="15" name="Shape 11"/>
-          <p:cNvSpPr/>
-          <p:nvPr/>
-        </p:nvSpPr>
-        <p:spPr>
-          <a:xfrm>
-            <a:off x="6556248" y="2331720"/>
-            <a:ext cx="640080" cy="640080"/>
+          <p:cNvPr id="23" name="Shape 18"/>
+          <p:cNvSpPr/>
+          <p:nvPr/>
+        </p:nvSpPr>
+        <p:spPr>
+          <a:xfrm>
+            <a:off x="7068312" y="4215384"/>
+            <a:ext cx="566928" cy="566928"/>
           </a:xfrm>
           <a:prstGeom prst="ellipse">
             <a:avLst/>
@@ -5447,22 +6166,22 @@
       </p:sp>
       <p:pic>
         <p:nvPicPr>
-          <p:cNvPr id="16" name="Image 2" descr="preencoded.png"/>
+          <p:cNvPr id="24" name="Image 3" descr="preencoded.png">    </p:cNvPr>
           <p:cNvPicPr>
             <a:picLocks noChangeAspect="1"/>
           </p:cNvPicPr>
           <p:nvPr/>
         </p:nvPicPr>
         <p:blipFill>
-          <a:blip r:embed="rId5"/>
+          <a:blip r:embed="rId4"/>
           <a:stretch>
             <a:fillRect/>
           </a:stretch>
         </p:blipFill>
         <p:spPr>
           <a:xfrm>
-            <a:off x="6709867" y="2485339"/>
-            <a:ext cx="332842" cy="332842"/>
+            <a:off x="7204375" y="4351447"/>
+            <a:ext cx="294803" cy="294803"/>
           </a:xfrm>
           <a:prstGeom prst="rect">
             <a:avLst/>
@@ -5471,14 +6190,14 @@
       </p:pic>
       <p:sp>
         <p:nvSpPr>
-          <p:cNvPr id="17" name="Text 12"/>
-          <p:cNvSpPr/>
-          <p:nvPr/>
-        </p:nvSpPr>
-        <p:spPr>
-          <a:xfrm>
-            <a:off x="6519672" y="3081528"/>
-            <a:ext cx="2139696" cy="365760"/>
+          <p:cNvPr id="25" name="Text 19"/>
+          <p:cNvSpPr/>
+          <p:nvPr/>
+        </p:nvSpPr>
+        <p:spPr>
+          <a:xfrm>
+            <a:off x="7772400" y="4123944"/>
+            <a:ext cx="4206240" cy="566928"/>
           </a:xfrm>
           <a:prstGeom prst="rect">
             <a:avLst/>
@@ -5490,11 +6209,50 @@
           <a:bodyPr wrap="square" rtlCol="0" anchor="ctr"/>
           <a:lstStyle/>
           <a:p>
-            <a:pPr marL="0" indent="0">
-              <a:buNone/>
-            </a:pPr>
-            <a:r>
-              <a:rPr lang="en-US" sz="1550" b="1" dirty="0">
+            <a:pPr indent="0" marL="0">
+              <a:buNone/>
+            </a:pPr>
+            <a:r>
+              <a:rPr lang="en-US" sz="1900" b="1" dirty="0">
+                <a:solidFill>
+                  <a:srgbClr val="F59E0B"/>
+                </a:solidFill>
+                <a:latin typeface="Calibri" pitchFamily="34" charset="0"/>
+                <a:ea typeface="Calibri" pitchFamily="34" charset="-122"/>
+                <a:cs typeface="Calibri" pitchFamily="34" charset="-120"/>
+              </a:rPr>
+              <a:t>50/50 = 60/40 = 70/30</a:t>
+            </a:r>
+            <a:endParaRPr lang="en-US" sz="1900" dirty="0"/>
+          </a:p>
+        </p:txBody>
+      </p:sp>
+      <p:sp>
+        <p:nvSpPr>
+          <p:cNvPr id="26" name="Text 20"/>
+          <p:cNvSpPr/>
+          <p:nvPr/>
+        </p:nvSpPr>
+        <p:spPr>
+          <a:xfrm>
+            <a:off x="7086600" y="4782312"/>
+            <a:ext cx="4800600" cy="274320"/>
+          </a:xfrm>
+          <a:prstGeom prst="rect">
+            <a:avLst/>
+          </a:prstGeom>
+          <a:noFill/>
+          <a:ln/>
+        </p:spPr>
+        <p:txBody>
+          <a:bodyPr wrap="square" rtlCol="0" anchor="ctr"/>
+          <a:lstStyle/>
+          <a:p>
+            <a:pPr indent="0" marL="0">
+              <a:buNone/>
+            </a:pPr>
+            <a:r>
+              <a:rPr lang="en-US" sz="1300" b="1" dirty="0">
                 <a:solidFill>
                   <a:srgbClr val="FFFFFF"/>
                 </a:solidFill>
@@ -5502,7 +6260,226 @@
                 <a:ea typeface="Calibri" pitchFamily="34" charset="-122"/>
                 <a:cs typeface="Calibri" pitchFamily="34" charset="-120"/>
               </a:rPr>
-              <a:t>Explainable</a:t>
+              <a:t>robust to its weights</a:t>
+            </a:r>
+            <a:endParaRPr lang="en-US" sz="1300" dirty="0"/>
+          </a:p>
+        </p:txBody>
+      </p:sp>
+      <p:sp>
+        <p:nvSpPr>
+          <p:cNvPr id="27" name="Text 21"/>
+          <p:cNvSpPr/>
+          <p:nvPr/>
+        </p:nvSpPr>
+        <p:spPr>
+          <a:xfrm>
+            <a:off x="7086600" y="5056632"/>
+            <a:ext cx="4800600" cy="713232"/>
+          </a:xfrm>
+          <a:prstGeom prst="rect">
+            <a:avLst/>
+          </a:prstGeom>
+          <a:noFill/>
+          <a:ln/>
+        </p:spPr>
+        <p:txBody>
+          <a:bodyPr wrap="square" rtlCol="0" anchor="ctr"/>
+          <a:lstStyle/>
+          <a:p>
+            <a:pPr indent="0" marL="0">
+              <a:lnSpc>
+                <a:spcPct val="105000"/>
+              </a:lnSpc>
+              <a:buNone/>
+            </a:pPr>
+            <a:r>
+              <a:rPr lang="en-US" sz="1150" dirty="0">
+                <a:solidFill>
+                  <a:srgbClr val="94A3B8"/>
+                </a:solidFill>
+                <a:latin typeface="Calibri" pitchFamily="34" charset="0"/>
+                <a:ea typeface="Calibri" pitchFamily="34" charset="-122"/>
+                <a:cs typeface="Calibri" pitchFamily="34" charset="-120"/>
+              </a:rPr>
+              <a:t>The worst-to-best risk ranking of the six tracked names is identical across all three blends - the signals drive the read, not the exact weighting.</a:t>
+            </a:r>
+            <a:endParaRPr lang="en-US" sz="1150" dirty="0"/>
+          </a:p>
+        </p:txBody>
+      </p:sp>
+      <p:sp>
+        <p:nvSpPr>
+          <p:cNvPr id="28" name="Text 22"/>
+          <p:cNvSpPr/>
+          <p:nvPr/>
+        </p:nvSpPr>
+        <p:spPr>
+          <a:xfrm>
+            <a:off x="795528" y="6080760"/>
+            <a:ext cx="10607040" cy="320040"/>
+          </a:xfrm>
+          <a:prstGeom prst="rect">
+            <a:avLst/>
+          </a:prstGeom>
+          <a:noFill/>
+          <a:ln/>
+        </p:spPr>
+        <p:txBody>
+          <a:bodyPr wrap="square" rtlCol="0" anchor="ctr"/>
+          <a:lstStyle/>
+          <a:p>
+            <a:pPr indent="0" marL="0">
+              <a:buNone/>
+            </a:pPr>
+            <a:r>
+              <a:rPr lang="en-US" sz="1200" b="1" dirty="0">
+                <a:solidFill>
+                  <a:srgbClr val="F59E0B"/>
+                </a:solidFill>
+                <a:latin typeface="Calibri" pitchFamily="34" charset="0"/>
+                <a:ea typeface="Calibri" pitchFamily="34" charset="-122"/>
+                <a:cs typeface="Calibri" pitchFamily="34" charset="-120"/>
+              </a:rPr>
+              <a:t>Reproducible:  </a:t>
+            </a:r>
+            <a:pPr indent="0" marL="0">
+              <a:buNone/>
+            </a:pPr>
+            <a:r>
+              <a:rPr lang="en-US" sz="1200" dirty="0">
+                <a:solidFill>
+                  <a:srgbClr val="94A3B8"/>
+                </a:solidFill>
+                <a:latin typeface="Calibri" pitchFamily="34" charset="0"/>
+                <a:ea typeface="Calibri" pitchFamily="34" charset="-122"/>
+                <a:cs typeface="Calibri" pitchFamily="34" charset="-120"/>
+              </a:rPr>
+              <a:t>notebooks/04_findings.ipynb  -  runs on the base requirements, no heavy ML deps.</a:t>
+            </a:r>
+            <a:endParaRPr lang="en-US" sz="1200" dirty="0"/>
+          </a:p>
+        </p:txBody>
+      </p:sp>
+    </p:spTree>
+  </p:cSld>
+  <p:clrMapOvr>
+    <a:masterClrMapping/>
+  </p:clrMapOvr>
+</p:sld>
+</file>
+
+<file path=ppt/slides/slide6.xml><?xml version="1.0" encoding="utf-8"?>
+<p:sld xmlns:a="http://schemas.openxmlformats.org/drawingml/2006/main" xmlns:r="http://schemas.openxmlformats.org/officeDocument/2006/relationships" xmlns:p="http://schemas.openxmlformats.org/presentationml/2006/main">
+  <p:cSld name="Slide 6">
+    <p:bg>
+      <p:bgPr>
+        <a:solidFill>
+          <a:srgbClr val="0A1628"/>
+        </a:solidFill>
+      </p:bgPr>
+    </p:bg>
+    <p:spTree>
+      <p:nvGrpSpPr>
+        <p:cNvPr id="1" name=""/>
+        <p:cNvGrpSpPr/>
+        <p:nvPr/>
+      </p:nvGrpSpPr>
+      <p:grpSpPr>
+        <a:xfrm>
+          <a:off x="0" y="0"/>
+          <a:ext cx="0" cy="0"/>
+          <a:chOff x="0" y="0"/>
+          <a:chExt cx="0" cy="0"/>
+        </a:xfrm>
+      </p:grpSpPr>
+      <p:sp>
+        <p:nvSpPr>
+          <p:cNvPr id="2" name="Text 0"/>
+          <p:cNvSpPr/>
+          <p:nvPr/>
+        </p:nvSpPr>
+        <p:spPr>
+          <a:xfrm>
+            <a:off x="777240" y="548640"/>
+            <a:ext cx="10698480" cy="685800"/>
+          </a:xfrm>
+          <a:prstGeom prst="rect">
+            <a:avLst/>
+          </a:prstGeom>
+          <a:noFill/>
+          <a:ln/>
+        </p:spPr>
+        <p:txBody>
+          <a:bodyPr wrap="square" rtlCol="0" anchor="ctr"/>
+          <a:lstStyle/>
+          <a:p>
+            <a:pPr indent="0" marL="0">
+              <a:buNone/>
+            </a:pPr>
+            <a:r>
+              <a:rPr lang="en-US" sz="3300" b="1" dirty="0">
+                <a:solidFill>
+                  <a:srgbClr val="FFFFFF"/>
+                </a:solidFill>
+                <a:latin typeface="Calibri" pitchFamily="34" charset="0"/>
+                <a:ea typeface="Calibri" pitchFamily="34" charset="-122"/>
+                <a:cs typeface="Calibri" pitchFamily="34" charset="-120"/>
+              </a:rPr>
+              <a:t>A live risk analyst for </a:t>
+            </a:r>
+            <a:pPr indent="0" marL="0">
+              <a:buNone/>
+            </a:pPr>
+            <a:r>
+              <a:rPr lang="en-US" sz="3300" b="1" dirty="0">
+                <a:solidFill>
+                  <a:srgbClr val="F59E0B"/>
+                </a:solidFill>
+                <a:latin typeface="Calibri" pitchFamily="34" charset="0"/>
+                <a:ea typeface="Calibri" pitchFamily="34" charset="-122"/>
+                <a:cs typeface="Calibri" pitchFamily="34" charset="-120"/>
+              </a:rPr>
+              <a:t>every name in your book</a:t>
+            </a:r>
+            <a:endParaRPr lang="en-US" sz="3300" dirty="0"/>
+          </a:p>
+        </p:txBody>
+      </p:sp>
+      <p:sp>
+        <p:nvSpPr>
+          <p:cNvPr id="3" name="Text 1"/>
+          <p:cNvSpPr/>
+          <p:nvPr/>
+        </p:nvSpPr>
+        <p:spPr>
+          <a:xfrm>
+            <a:off x="795528" y="1316736"/>
+            <a:ext cx="10515600" cy="365760"/>
+          </a:xfrm>
+          <a:prstGeom prst="rect">
+            <a:avLst/>
+          </a:prstGeom>
+          <a:noFill/>
+          <a:ln/>
+        </p:spPr>
+        <p:txBody>
+          <a:bodyPr wrap="square" rtlCol="0" anchor="ctr"/>
+          <a:lstStyle/>
+          <a:p>
+            <a:pPr indent="0" marL="0">
+              <a:buNone/>
+            </a:pPr>
+            <a:r>
+              <a:rPr lang="en-US" sz="1550" dirty="0">
+                <a:solidFill>
+                  <a:srgbClr val="94A3B8"/>
+                </a:solidFill>
+                <a:latin typeface="Calibri" pitchFamily="34" charset="0"/>
+                <a:ea typeface="Calibri" pitchFamily="34" charset="-122"/>
+                <a:cs typeface="Calibri" pitchFamily="34" charset="-120"/>
+              </a:rPr>
+              <a:t>Faster credit reviews   .   earlier watch-list triage   .   one defensible number, on demand.</a:t>
             </a:r>
             <a:endParaRPr lang="en-US" sz="1550" dirty="0"/>
           </a:p>
@@ -5510,55 +6487,13 @@
       </p:sp>
       <p:sp>
         <p:nvSpPr>
-          <p:cNvPr id="18" name="Text 13"/>
-          <p:cNvSpPr/>
-          <p:nvPr/>
-        </p:nvSpPr>
-        <p:spPr>
-          <a:xfrm>
-            <a:off x="6519672" y="3429000"/>
-            <a:ext cx="2139696" cy="822960"/>
-          </a:xfrm>
-          <a:prstGeom prst="rect">
-            <a:avLst/>
-          </a:prstGeom>
-          <a:noFill/>
-          <a:ln/>
-        </p:spPr>
-        <p:txBody>
-          <a:bodyPr wrap="square" rtlCol="0" anchor="ctr"/>
-          <a:lstStyle/>
-          <a:p>
-            <a:pPr marL="0" indent="0">
-              <a:lnSpc>
-                <a:spcPct val="106000"/>
-              </a:lnSpc>
-              <a:buNone/>
-            </a:pPr>
-            <a:r>
-              <a:rPr lang="en-US" sz="1250" dirty="0">
-                <a:solidFill>
-                  <a:srgbClr val="94A3B8"/>
-                </a:solidFill>
-                <a:latin typeface="Calibri" pitchFamily="34" charset="0"/>
-                <a:ea typeface="Calibri" pitchFamily="34" charset="-122"/>
-                <a:cs typeface="Calibri" pitchFamily="34" charset="-120"/>
-              </a:rPr>
-              <a:t>Every point traces to a real ratio, rating or headline.</a:t>
-            </a:r>
-            <a:endParaRPr lang="en-US" sz="1250" dirty="0"/>
-          </a:p>
-        </p:txBody>
-      </p:sp>
-      <p:sp>
-        <p:nvSpPr>
-          <p:cNvPr id="19" name="Shape 14"/>
-          <p:cNvSpPr/>
-          <p:nvPr/>
-        </p:nvSpPr>
-        <p:spPr>
-          <a:xfrm>
-            <a:off x="9061704" y="2057400"/>
+          <p:cNvPr id="4" name="Shape 2"/>
+          <p:cNvSpPr/>
+          <p:nvPr/>
+        </p:nvSpPr>
+        <p:spPr>
+          <a:xfrm>
+            <a:off x="777240" y="2057400"/>
             <a:ext cx="2542032" cy="2331720"/>
           </a:xfrm>
           <a:prstGeom prst="roundRect">
@@ -5579,13 +6514,13 @@
       </p:sp>
       <p:sp>
         <p:nvSpPr>
-          <p:cNvPr id="20" name="Shape 15"/>
-          <p:cNvSpPr/>
-          <p:nvPr/>
-        </p:nvSpPr>
-        <p:spPr>
-          <a:xfrm>
-            <a:off x="9317736" y="2331720"/>
+          <p:cNvPr id="5" name="Shape 3"/>
+          <p:cNvSpPr/>
+          <p:nvPr/>
+        </p:nvSpPr>
+        <p:spPr>
+          <a:xfrm>
+            <a:off x="1033272" y="2331720"/>
             <a:ext cx="640080" cy="640080"/>
           </a:xfrm>
           <a:prstGeom prst="ellipse">
@@ -5599,21 +6534,21 @@
       </p:sp>
       <p:pic>
         <p:nvPicPr>
-          <p:cNvPr id="21" name="Image 3" descr="preencoded.png"/>
+          <p:cNvPr id="6" name="Image 0" descr="preencoded.png">    </p:cNvPr>
           <p:cNvPicPr>
             <a:picLocks noChangeAspect="1"/>
           </p:cNvPicPr>
           <p:nvPr/>
         </p:nvPicPr>
         <p:blipFill>
-          <a:blip r:embed="rId6"/>
+          <a:blip r:embed="rId1"/>
           <a:stretch>
             <a:fillRect/>
           </a:stretch>
         </p:blipFill>
         <p:spPr>
           <a:xfrm>
-            <a:off x="9471355" y="2485339"/>
+            <a:off x="1186891" y="2485339"/>
             <a:ext cx="332842" cy="332842"/>
           </a:xfrm>
           <a:prstGeom prst="rect">
@@ -5623,13 +6558,13 @@
       </p:pic>
       <p:sp>
         <p:nvSpPr>
-          <p:cNvPr id="22" name="Text 16"/>
-          <p:cNvSpPr/>
-          <p:nvPr/>
-        </p:nvSpPr>
-        <p:spPr>
-          <a:xfrm>
-            <a:off x="9281160" y="3081528"/>
+          <p:cNvPr id="7" name="Text 4"/>
+          <p:cNvSpPr/>
+          <p:nvPr/>
+        </p:nvSpPr>
+        <p:spPr>
+          <a:xfrm>
+            <a:off x="996696" y="3081528"/>
             <a:ext cx="2139696" cy="365760"/>
           </a:xfrm>
           <a:prstGeom prst="rect">
@@ -5642,7 +6577,7 @@
           <a:bodyPr wrap="square" rtlCol="0" anchor="ctr"/>
           <a:lstStyle/>
           <a:p>
-            <a:pPr marL="0" indent="0">
+            <a:pPr indent="0" marL="0">
               <a:buNone/>
             </a:pPr>
             <a:r>
@@ -5654,7 +6589,7 @@
                 <a:ea typeface="Calibri" pitchFamily="34" charset="-122"/>
                 <a:cs typeface="Calibri" pitchFamily="34" charset="-120"/>
               </a:rPr>
-              <a:t>Proven on real cases</a:t>
+              <a:t>Comprehensive</a:t>
             </a:r>
             <a:endParaRPr lang="en-US" sz="1550" dirty="0"/>
           </a:p>
@@ -5662,13 +6597,13 @@
       </p:sp>
       <p:sp>
         <p:nvSpPr>
-          <p:cNvPr id="23" name="Text 17"/>
-          <p:cNvSpPr/>
-          <p:nvPr/>
-        </p:nvSpPr>
-        <p:spPr>
-          <a:xfrm>
-            <a:off x="9281160" y="3429000"/>
+          <p:cNvPr id="8" name="Text 5"/>
+          <p:cNvSpPr/>
+          <p:nvPr/>
+        </p:nvSpPr>
+        <p:spPr>
+          <a:xfrm>
+            <a:off x="996696" y="3429000"/>
             <a:ext cx="2139696" cy="822960"/>
           </a:xfrm>
           <a:prstGeom prst="rect">
@@ -5681,7 +6616,7 @@
           <a:bodyPr wrap="square" rtlCol="0" anchor="ctr"/>
           <a:lstStyle/>
           <a:p>
-            <a:pPr marL="0" indent="0">
+            <a:pPr indent="0" marL="0">
               <a:lnSpc>
                 <a:spcPct val="106000"/>
               </a:lnSpc>
@@ -5696,6 +6631,462 @@
                 <a:ea typeface="Calibri" pitchFamily="34" charset="-122"/>
                 <a:cs typeface="Calibri" pitchFamily="34" charset="-120"/>
               </a:rPr>
+              <a:t>Six inputs - financials, ratings, leadership, news, hiring, sentiment - in one score.</a:t>
+            </a:r>
+            <a:endParaRPr lang="en-US" sz="1250" dirty="0"/>
+          </a:p>
+        </p:txBody>
+      </p:sp>
+      <p:sp>
+        <p:nvSpPr>
+          <p:cNvPr id="9" name="Shape 6"/>
+          <p:cNvSpPr/>
+          <p:nvPr/>
+        </p:nvSpPr>
+        <p:spPr>
+          <a:xfrm>
+            <a:off x="3538728" y="2057400"/>
+            <a:ext cx="2542032" cy="2331720"/>
+          </a:xfrm>
+          <a:prstGeom prst="roundRect">
+            <a:avLst>
+              <a:gd name="adj" fmla="val 3529"/>
+            </a:avLst>
+          </a:prstGeom>
+          <a:solidFill>
+            <a:srgbClr val="0F1E33"/>
+          </a:solidFill>
+          <a:ln w="12700">
+            <a:solidFill>
+              <a:srgbClr val="1E3350"/>
+            </a:solidFill>
+            <a:prstDash val="solid"/>
+          </a:ln>
+        </p:spPr>
+      </p:sp>
+      <p:sp>
+        <p:nvSpPr>
+          <p:cNvPr id="10" name="Shape 7"/>
+          <p:cNvSpPr/>
+          <p:nvPr/>
+        </p:nvSpPr>
+        <p:spPr>
+          <a:xfrm>
+            <a:off x="3794760" y="2331720"/>
+            <a:ext cx="640080" cy="640080"/>
+          </a:xfrm>
+          <a:prstGeom prst="ellipse">
+            <a:avLst/>
+          </a:prstGeom>
+          <a:solidFill>
+            <a:srgbClr val="F59E0B"/>
+          </a:solidFill>
+          <a:ln/>
+        </p:spPr>
+      </p:sp>
+      <p:pic>
+        <p:nvPicPr>
+          <p:cNvPr id="11" name="Image 1" descr="preencoded.png">    </p:cNvPr>
+          <p:cNvPicPr>
+            <a:picLocks noChangeAspect="1"/>
+          </p:cNvPicPr>
+          <p:nvPr/>
+        </p:nvPicPr>
+        <p:blipFill>
+          <a:blip r:embed="rId2"/>
+          <a:stretch>
+            <a:fillRect/>
+          </a:stretch>
+        </p:blipFill>
+        <p:spPr>
+          <a:xfrm>
+            <a:off x="3948379" y="2485339"/>
+            <a:ext cx="332842" cy="332842"/>
+          </a:xfrm>
+          <a:prstGeom prst="rect">
+            <a:avLst/>
+          </a:prstGeom>
+        </p:spPr>
+      </p:pic>
+      <p:sp>
+        <p:nvSpPr>
+          <p:cNvPr id="12" name="Text 8"/>
+          <p:cNvSpPr/>
+          <p:nvPr/>
+        </p:nvSpPr>
+        <p:spPr>
+          <a:xfrm>
+            <a:off x="3758184" y="3081528"/>
+            <a:ext cx="2139696" cy="365760"/>
+          </a:xfrm>
+          <a:prstGeom prst="rect">
+            <a:avLst/>
+          </a:prstGeom>
+          <a:noFill/>
+          <a:ln/>
+        </p:spPr>
+        <p:txBody>
+          <a:bodyPr wrap="square" rtlCol="0" anchor="ctr"/>
+          <a:lstStyle/>
+          <a:p>
+            <a:pPr indent="0" marL="0">
+              <a:buNone/>
+            </a:pPr>
+            <a:r>
+              <a:rPr lang="en-US" sz="1550" b="1" dirty="0">
+                <a:solidFill>
+                  <a:srgbClr val="FFFFFF"/>
+                </a:solidFill>
+                <a:latin typeface="Calibri" pitchFamily="34" charset="0"/>
+                <a:ea typeface="Calibri" pitchFamily="34" charset="-122"/>
+                <a:cs typeface="Calibri" pitchFamily="34" charset="-120"/>
+              </a:rPr>
+              <a:t>Live &amp; automated</a:t>
+            </a:r>
+            <a:endParaRPr lang="en-US" sz="1550" dirty="0"/>
+          </a:p>
+        </p:txBody>
+      </p:sp>
+      <p:sp>
+        <p:nvSpPr>
+          <p:cNvPr id="13" name="Text 9"/>
+          <p:cNvSpPr/>
+          <p:nvPr/>
+        </p:nvSpPr>
+        <p:spPr>
+          <a:xfrm>
+            <a:off x="3758184" y="3429000"/>
+            <a:ext cx="2139696" cy="822960"/>
+          </a:xfrm>
+          <a:prstGeom prst="rect">
+            <a:avLst/>
+          </a:prstGeom>
+          <a:noFill/>
+          <a:ln/>
+        </p:spPr>
+        <p:txBody>
+          <a:bodyPr wrap="square" rtlCol="0" anchor="ctr"/>
+          <a:lstStyle/>
+          <a:p>
+            <a:pPr indent="0" marL="0">
+              <a:lnSpc>
+                <a:spcPct val="106000"/>
+              </a:lnSpc>
+              <a:buNone/>
+            </a:pPr>
+            <a:r>
+              <a:rPr lang="en-US" sz="1250" dirty="0">
+                <a:solidFill>
+                  <a:srgbClr val="94A3B8"/>
+                </a:solidFill>
+                <a:latin typeface="Calibri" pitchFamily="34" charset="0"/>
+                <a:ea typeface="Calibri" pitchFamily="34" charset="-122"/>
+                <a:cs typeface="Calibri" pitchFamily="34" charset="-120"/>
+              </a:rPr>
+              <a:t>Any listed company, on demand. No manual pull, no waiting on filings.</a:t>
+            </a:r>
+            <a:endParaRPr lang="en-US" sz="1250" dirty="0"/>
+          </a:p>
+        </p:txBody>
+      </p:sp>
+      <p:sp>
+        <p:nvSpPr>
+          <p:cNvPr id="14" name="Shape 10"/>
+          <p:cNvSpPr/>
+          <p:nvPr/>
+        </p:nvSpPr>
+        <p:spPr>
+          <a:xfrm>
+            <a:off x="6300216" y="2057400"/>
+            <a:ext cx="2542032" cy="2331720"/>
+          </a:xfrm>
+          <a:prstGeom prst="roundRect">
+            <a:avLst>
+              <a:gd name="adj" fmla="val 3529"/>
+            </a:avLst>
+          </a:prstGeom>
+          <a:solidFill>
+            <a:srgbClr val="0F1E33"/>
+          </a:solidFill>
+          <a:ln w="12700">
+            <a:solidFill>
+              <a:srgbClr val="1E3350"/>
+            </a:solidFill>
+            <a:prstDash val="solid"/>
+          </a:ln>
+        </p:spPr>
+      </p:sp>
+      <p:sp>
+        <p:nvSpPr>
+          <p:cNvPr id="15" name="Shape 11"/>
+          <p:cNvSpPr/>
+          <p:nvPr/>
+        </p:nvSpPr>
+        <p:spPr>
+          <a:xfrm>
+            <a:off x="6556248" y="2331720"/>
+            <a:ext cx="640080" cy="640080"/>
+          </a:xfrm>
+          <a:prstGeom prst="ellipse">
+            <a:avLst/>
+          </a:prstGeom>
+          <a:solidFill>
+            <a:srgbClr val="F59E0B"/>
+          </a:solidFill>
+          <a:ln/>
+        </p:spPr>
+      </p:sp>
+      <p:pic>
+        <p:nvPicPr>
+          <p:cNvPr id="16" name="Image 2" descr="preencoded.png">    </p:cNvPr>
+          <p:cNvPicPr>
+            <a:picLocks noChangeAspect="1"/>
+          </p:cNvPicPr>
+          <p:nvPr/>
+        </p:nvPicPr>
+        <p:blipFill>
+          <a:blip r:embed="rId3"/>
+          <a:stretch>
+            <a:fillRect/>
+          </a:stretch>
+        </p:blipFill>
+        <p:spPr>
+          <a:xfrm>
+            <a:off x="6709867" y="2485339"/>
+            <a:ext cx="332842" cy="332842"/>
+          </a:xfrm>
+          <a:prstGeom prst="rect">
+            <a:avLst/>
+          </a:prstGeom>
+        </p:spPr>
+      </p:pic>
+      <p:sp>
+        <p:nvSpPr>
+          <p:cNvPr id="17" name="Text 12"/>
+          <p:cNvSpPr/>
+          <p:nvPr/>
+        </p:nvSpPr>
+        <p:spPr>
+          <a:xfrm>
+            <a:off x="6519672" y="3081528"/>
+            <a:ext cx="2139696" cy="365760"/>
+          </a:xfrm>
+          <a:prstGeom prst="rect">
+            <a:avLst/>
+          </a:prstGeom>
+          <a:noFill/>
+          <a:ln/>
+        </p:spPr>
+        <p:txBody>
+          <a:bodyPr wrap="square" rtlCol="0" anchor="ctr"/>
+          <a:lstStyle/>
+          <a:p>
+            <a:pPr indent="0" marL="0">
+              <a:buNone/>
+            </a:pPr>
+            <a:r>
+              <a:rPr lang="en-US" sz="1550" b="1" dirty="0">
+                <a:solidFill>
+                  <a:srgbClr val="FFFFFF"/>
+                </a:solidFill>
+                <a:latin typeface="Calibri" pitchFamily="34" charset="0"/>
+                <a:ea typeface="Calibri" pitchFamily="34" charset="-122"/>
+                <a:cs typeface="Calibri" pitchFamily="34" charset="-120"/>
+              </a:rPr>
+              <a:t>Explainable</a:t>
+            </a:r>
+            <a:endParaRPr lang="en-US" sz="1550" dirty="0"/>
+          </a:p>
+        </p:txBody>
+      </p:sp>
+      <p:sp>
+        <p:nvSpPr>
+          <p:cNvPr id="18" name="Text 13"/>
+          <p:cNvSpPr/>
+          <p:nvPr/>
+        </p:nvSpPr>
+        <p:spPr>
+          <a:xfrm>
+            <a:off x="6519672" y="3429000"/>
+            <a:ext cx="2139696" cy="822960"/>
+          </a:xfrm>
+          <a:prstGeom prst="rect">
+            <a:avLst/>
+          </a:prstGeom>
+          <a:noFill/>
+          <a:ln/>
+        </p:spPr>
+        <p:txBody>
+          <a:bodyPr wrap="square" rtlCol="0" anchor="ctr"/>
+          <a:lstStyle/>
+          <a:p>
+            <a:pPr indent="0" marL="0">
+              <a:lnSpc>
+                <a:spcPct val="106000"/>
+              </a:lnSpc>
+              <a:buNone/>
+            </a:pPr>
+            <a:r>
+              <a:rPr lang="en-US" sz="1250" dirty="0">
+                <a:solidFill>
+                  <a:srgbClr val="94A3B8"/>
+                </a:solidFill>
+                <a:latin typeface="Calibri" pitchFamily="34" charset="0"/>
+                <a:ea typeface="Calibri" pitchFamily="34" charset="-122"/>
+                <a:cs typeface="Calibri" pitchFamily="34" charset="-120"/>
+              </a:rPr>
+              <a:t>Every point traces to a real ratio, rating or headline.</a:t>
+            </a:r>
+            <a:endParaRPr lang="en-US" sz="1250" dirty="0"/>
+          </a:p>
+        </p:txBody>
+      </p:sp>
+      <p:sp>
+        <p:nvSpPr>
+          <p:cNvPr id="19" name="Shape 14"/>
+          <p:cNvSpPr/>
+          <p:nvPr/>
+        </p:nvSpPr>
+        <p:spPr>
+          <a:xfrm>
+            <a:off x="9061704" y="2057400"/>
+            <a:ext cx="2542032" cy="2331720"/>
+          </a:xfrm>
+          <a:prstGeom prst="roundRect">
+            <a:avLst>
+              <a:gd name="adj" fmla="val 3529"/>
+            </a:avLst>
+          </a:prstGeom>
+          <a:solidFill>
+            <a:srgbClr val="0F1E33"/>
+          </a:solidFill>
+          <a:ln w="12700">
+            <a:solidFill>
+              <a:srgbClr val="1E3350"/>
+            </a:solidFill>
+            <a:prstDash val="solid"/>
+          </a:ln>
+        </p:spPr>
+      </p:sp>
+      <p:sp>
+        <p:nvSpPr>
+          <p:cNvPr id="20" name="Shape 15"/>
+          <p:cNvSpPr/>
+          <p:nvPr/>
+        </p:nvSpPr>
+        <p:spPr>
+          <a:xfrm>
+            <a:off x="9317736" y="2331720"/>
+            <a:ext cx="640080" cy="640080"/>
+          </a:xfrm>
+          <a:prstGeom prst="ellipse">
+            <a:avLst/>
+          </a:prstGeom>
+          <a:solidFill>
+            <a:srgbClr val="F59E0B"/>
+          </a:solidFill>
+          <a:ln/>
+        </p:spPr>
+      </p:sp>
+      <p:pic>
+        <p:nvPicPr>
+          <p:cNvPr id="21" name="Image 3" descr="preencoded.png">    </p:cNvPr>
+          <p:cNvPicPr>
+            <a:picLocks noChangeAspect="1"/>
+          </p:cNvPicPr>
+          <p:nvPr/>
+        </p:nvPicPr>
+        <p:blipFill>
+          <a:blip r:embed="rId4"/>
+          <a:stretch>
+            <a:fillRect/>
+          </a:stretch>
+        </p:blipFill>
+        <p:spPr>
+          <a:xfrm>
+            <a:off x="9471355" y="2485339"/>
+            <a:ext cx="332842" cy="332842"/>
+          </a:xfrm>
+          <a:prstGeom prst="rect">
+            <a:avLst/>
+          </a:prstGeom>
+        </p:spPr>
+      </p:pic>
+      <p:sp>
+        <p:nvSpPr>
+          <p:cNvPr id="22" name="Text 16"/>
+          <p:cNvSpPr/>
+          <p:nvPr/>
+        </p:nvSpPr>
+        <p:spPr>
+          <a:xfrm>
+            <a:off x="9281160" y="3081528"/>
+            <a:ext cx="2139696" cy="365760"/>
+          </a:xfrm>
+          <a:prstGeom prst="rect">
+            <a:avLst/>
+          </a:prstGeom>
+          <a:noFill/>
+          <a:ln/>
+        </p:spPr>
+        <p:txBody>
+          <a:bodyPr wrap="square" rtlCol="0" anchor="ctr"/>
+          <a:lstStyle/>
+          <a:p>
+            <a:pPr indent="0" marL="0">
+              <a:buNone/>
+            </a:pPr>
+            <a:r>
+              <a:rPr lang="en-US" sz="1550" b="1" dirty="0">
+                <a:solidFill>
+                  <a:srgbClr val="FFFFFF"/>
+                </a:solidFill>
+                <a:latin typeface="Calibri" pitchFamily="34" charset="0"/>
+                <a:ea typeface="Calibri" pitchFamily="34" charset="-122"/>
+                <a:cs typeface="Calibri" pitchFamily="34" charset="-120"/>
+              </a:rPr>
+              <a:t>Proven on real cases</a:t>
+            </a:r>
+            <a:endParaRPr lang="en-US" sz="1550" dirty="0"/>
+          </a:p>
+        </p:txBody>
+      </p:sp>
+      <p:sp>
+        <p:nvSpPr>
+          <p:cNvPr id="23" name="Text 17"/>
+          <p:cNvSpPr/>
+          <p:nvPr/>
+        </p:nvSpPr>
+        <p:spPr>
+          <a:xfrm>
+            <a:off x="9281160" y="3429000"/>
+            <a:ext cx="2139696" cy="822960"/>
+          </a:xfrm>
+          <a:prstGeom prst="rect">
+            <a:avLst/>
+          </a:prstGeom>
+          <a:noFill/>
+          <a:ln/>
+        </p:spPr>
+        <p:txBody>
+          <a:bodyPr wrap="square" rtlCol="0" anchor="ctr"/>
+          <a:lstStyle/>
+          <a:p>
+            <a:pPr indent="0" marL="0">
+              <a:lnSpc>
+                <a:spcPct val="106000"/>
+              </a:lnSpc>
+              <a:buNone/>
+            </a:pPr>
+            <a:r>
+              <a:rPr lang="en-US" sz="1250" dirty="0">
+                <a:solidFill>
+                  <a:srgbClr val="94A3B8"/>
+                </a:solidFill>
+                <a:latin typeface="Calibri" pitchFamily="34" charset="0"/>
+                <a:ea typeface="Calibri" pitchFamily="34" charset="-122"/>
+                <a:cs typeface="Calibri" pitchFamily="34" charset="-120"/>
+              </a:rPr>
               <a:t>Replayed across five real collapses, in five sectors.</a:t>
             </a:r>
             <a:endParaRPr lang="en-US" sz="1250" dirty="0"/>
@@ -5705,7 +7096,7 @@
       <p:sp>
         <p:nvSpPr>
           <p:cNvPr id="24" name="Shape 18">
-            <a:hlinkClick r:id="rId7" tooltip="Open the live Foresight AI dashboard"/>
+            <a:hlinkClick r:id="rId5" tooltip="Open the live Foresight AI dashboard"/>
           </p:cNvPr>
           <p:cNvSpPr/>
           <p:nvPr/>
@@ -5729,7 +7120,7 @@
       <p:sp>
         <p:nvSpPr>
           <p:cNvPr id="25" name="Text 19">
-            <a:hlinkClick r:id="rId7" tooltip="Open the live Foresight AI dashboard"/>
+            <a:hlinkClick r:id="rId5" tooltip="Open the live Foresight AI dashboard"/>
           </p:cNvPr>
           <p:cNvSpPr/>
           <p:nvPr/>
@@ -5749,7 +7140,7 @@
           <a:bodyPr wrap="square" rtlCol="0" anchor="ctr"/>
           <a:lstStyle/>
           <a:p>
-            <a:pPr marL="0" indent="0" algn="ctr">
+            <a:pPr algn="ctr" indent="0" marL="0">
               <a:buNone/>
             </a:pPr>
             <a:r>
@@ -5760,7 +7151,7 @@
                 <a:latin typeface="Calibri" pitchFamily="34" charset="0"/>
                 <a:ea typeface="Calibri" pitchFamily="34" charset="-122"/>
                 <a:cs typeface="Calibri" pitchFamily="34" charset="-120"/>
-                <a:hlinkClick r:id="rId7" tooltip="Open the live Foresight AI dashboard">
+                <a:hlinkClick r:id="rId5" invalidUrl="" action="" tgtFrame="" tooltip="Open the live Foresight AI dashboard" history="1" highlightClick="0" endSnd="0">
                   <a:extLst>
                     <a:ext uri="{A12FA001-AC4F-418D-AE19-62706E023703}">
                       <ahyp:hlinkClr xmlns:ahyp="http://schemas.microsoft.com/office/drawing/2018/hyperlinkcolor" val="tx"/>
@@ -5768,8 +7159,11 @@
                   </a:extLst>
                 </a:hlinkClick>
               </a:rPr>
-              <a:t>Open the live dashboard: </a:t>
-            </a:r>
+              <a:t>Open the live dashboard   </a:t>
+            </a:r>
+            <a:pPr algn="ctr" indent="0" marL="0">
+              <a:buNone/>
+            </a:pPr>
             <a:r>
               <a:rPr lang="en-US" sz="1900" b="1" u="sng" dirty="0">
                 <a:solidFill>
@@ -5778,7 +7172,7 @@
                 <a:latin typeface="Calibri" pitchFamily="34" charset="0"/>
                 <a:ea typeface="Calibri" pitchFamily="34" charset="-122"/>
                 <a:cs typeface="Calibri" pitchFamily="34" charset="-120"/>
-                <a:hlinkClick r:id="rId7" tooltip="Open the live Foresight AI dashboard">
+                <a:hlinkClick r:id="rId5" invalidUrl="" action="" tgtFrame="" tooltip="Open the live Foresight AI dashboard" history="1" highlightClick="0" endSnd="0">
                   <a:extLst>
                     <a:ext uri="{A12FA001-AC4F-418D-AE19-62706E023703}">
                       <ahyp:hlinkClr xmlns:ahyp="http://schemas.microsoft.com/office/drawing/2018/hyperlinkcolor" val="tx"/>
@@ -5800,7 +7194,7 @@
         </p:nvSpPr>
         <p:spPr>
           <a:xfrm>
-            <a:off x="2505104" y="6217226"/>
+            <a:off x="822960" y="6053328"/>
             <a:ext cx="7315200" cy="320040"/>
           </a:xfrm>
           <a:prstGeom prst="rect">
@@ -5813,7 +7207,7 @@
           <a:bodyPr wrap="square" rtlCol="0" anchor="ctr"/>
           <a:lstStyle/>
           <a:p>
-            <a:pPr marL="0" indent="0" algn="ctr">
+            <a:pPr indent="0" marL="0">
               <a:buNone/>
             </a:pPr>
             <a:r>
@@ -5827,6 +7221,9 @@
               </a:rPr>
               <a:t>Source &amp; notebooks:  </a:t>
             </a:r>
+            <a:pPr indent="0" marL="0">
+              <a:buNone/>
+            </a:pPr>
             <a:r>
               <a:rPr lang="en-US" sz="1300" b="1" u="sng" dirty="0">
                 <a:solidFill>
@@ -5835,7 +7232,7 @@
                 <a:latin typeface="Calibri" pitchFamily="34" charset="0"/>
                 <a:ea typeface="Calibri" pitchFamily="34" charset="-122"/>
                 <a:cs typeface="Calibri" pitchFamily="34" charset="-120"/>
-                <a:hlinkClick r:id="rId8" tooltip="View the code on GitHub">
+                <a:hlinkClick r:id="rId6" invalidUrl="" action="" tgtFrame="" tooltip="View the code on GitHub" history="1" highlightClick="0" endSnd="0">
                   <a:extLst>
                     <a:ext uri="{A12FA001-AC4F-418D-AE19-62706E023703}">
                       <ahyp:hlinkClr xmlns:ahyp="http://schemas.microsoft.com/office/drawing/2018/hyperlinkcolor" val="tx"/>
@@ -5897,11 +7294,11 @@
           <a:bodyPr wrap="square" rtlCol="0" anchor="ctr"/>
           <a:lstStyle/>
           <a:p>
-            <a:pPr marL="0" indent="0">
-              <a:buNone/>
-            </a:pPr>
-            <a:r>
-              <a:rPr lang="en-US" sz="1050" b="1" kern="0" spc="200" dirty="0">
+            <a:pPr indent="0" marL="0">
+              <a:buNone/>
+            </a:pPr>
+            <a:r>
+              <a:rPr lang="en-US" sz="1050" b="1" spc="200" kern="0" dirty="0">
                 <a:solidFill>
                   <a:srgbClr val="F59E0B"/>
                 </a:solidFill>
@@ -5936,7 +7333,7 @@
           <a:bodyPr wrap="square" rtlCol="0" anchor="ctr"/>
           <a:lstStyle/>
           <a:p>
-            <a:pPr marL="0" indent="0">
+            <a:pPr indent="0" marL="0">
               <a:buNone/>
             </a:pPr>
             <a:r>
@@ -6019,7 +7416,7 @@
           <a:bodyPr wrap="square" rtlCol="0" anchor="ctr"/>
           <a:lstStyle/>
           <a:p>
-            <a:pPr marL="0" indent="0">
+            <a:pPr indent="0" marL="0">
               <a:buNone/>
             </a:pPr>
             <a:r>
@@ -6083,7 +7480,7 @@
       </p:sp>
       <p:graphicFrame>
         <p:nvGraphicFramePr>
-          <p:cNvPr id="35" name="Chart 0"/>
+          <p:cNvPr id="35" name="Chart 0" descr=""/>
           <p:cNvGraphicFramePr/>
           <p:nvPr/>
         </p:nvGraphicFramePr>
@@ -6091,9 +7488,9 @@
           <a:off x="10561320" y="5120640"/>
           <a:ext cx="731520" cy="731520"/>
         </p:xfrm>
-        <a:graphic>
+        <a:graphic xmlns:a="http://schemas.openxmlformats.org/drawingml/2006/main">
           <a:graphicData uri="http://schemas.openxmlformats.org/drawingml/2006/chart">
-            <c:chart xmlns:c="http://schemas.openxmlformats.org/drawingml/2006/chart" xmlns:r="http://schemas.openxmlformats.org/officeDocument/2006/relationships" r:id="rId9"/>
+            <c:chart xmlns:c="http://schemas.openxmlformats.org/drawingml/2006/chart" r:id="rId7"/>
           </a:graphicData>
         </a:graphic>
       </p:graphicFrame>
@@ -6118,7 +7515,7 @@
           <a:bodyPr wrap="square" rtlCol="0" anchor="ctr"/>
           <a:lstStyle/>
           <a:p>
-            <a:pPr marL="0" indent="0" algn="ctr">
+            <a:pPr algn="ctr" indent="0" marL="0">
               <a:buNone/>
             </a:pPr>
             <a:r>
@@ -6437,319 +7834,4 @@
     </a:ext>
   </a:extLst>
 </a:theme>
-</file>
-
-<file path=ppt/theme/theme2.xml><?xml version="1.0" encoding="utf-8"?>
-<a:theme xmlns:a="http://schemas.openxmlformats.org/drawingml/2006/main" name="Office Theme">
-  <a:themeElements>
-    <a:clrScheme name="Office">
-      <a:dk1>
-        <a:sysClr val="windowText" lastClr="000000"/>
-      </a:dk1>
-      <a:lt1>
-        <a:sysClr val="window" lastClr="FFFFFF"/>
-      </a:lt1>
-      <a:dk2>
-        <a:srgbClr val="0E2841"/>
-      </a:dk2>
-      <a:lt2>
-        <a:srgbClr val="E8E8E8"/>
-      </a:lt2>
-      <a:accent1>
-        <a:srgbClr val="156082"/>
-      </a:accent1>
-      <a:accent2>
-        <a:srgbClr val="E97132"/>
-      </a:accent2>
-      <a:accent3>
-        <a:srgbClr val="196B24"/>
-      </a:accent3>
-      <a:accent4>
-        <a:srgbClr val="0F9ED5"/>
-      </a:accent4>
-      <a:accent5>
-        <a:srgbClr val="A02B93"/>
-      </a:accent5>
-      <a:accent6>
-        <a:srgbClr val="4EA72E"/>
-      </a:accent6>
-      <a:hlink>
-        <a:srgbClr val="467886"/>
-      </a:hlink>
-      <a:folHlink>
-        <a:srgbClr val="96607D"/>
-      </a:folHlink>
-    </a:clrScheme>
-    <a:fontScheme name="Office">
-      <a:majorFont>
-        <a:latin typeface="Aptos Display" panose="02110004020202020204"/>
-        <a:ea typeface=""/>
-        <a:cs typeface=""/>
-        <a:font script="Jpan" typeface="游ゴシック Light"/>
-        <a:font script="Hang" typeface="맑은 고딕"/>
-        <a:font script="Hans" typeface="等线 Light"/>
-        <a:font script="Hant" typeface="新細明體"/>
-        <a:font script="Arab" typeface="Times New Roman"/>
-        <a:font script="Hebr" typeface="Times New Roman"/>
-        <a:font script="Thai" typeface="Angsana New"/>
-        <a:font script="Ethi" typeface="Nyala"/>
-        <a:font script="Beng" typeface="Vrinda"/>
-        <a:font script="Gujr" typeface="Shruti"/>
-        <a:font script="Khmr" typeface="MoolBoran"/>
-        <a:font script="Knda" typeface="Tunga"/>
-        <a:font script="Guru" typeface="Raavi"/>
-        <a:font script="Cans" typeface="Euphemia"/>
-        <a:font script="Cher" typeface="Plantagenet Cherokee"/>
-        <a:font script="Yiii" typeface="Microsoft Yi Baiti"/>
-        <a:font script="Tibt" typeface="Microsoft Himalaya"/>
-        <a:font script="Thaa" typeface="MV Boli"/>
-        <a:font script="Deva" typeface="Mangal"/>
-        <a:font script="Telu" typeface="Gautami"/>
-        <a:font script="Taml" typeface="Latha"/>
-        <a:font script="Syrc" typeface="Estrangelo Edessa"/>
-        <a:font script="Orya" typeface="Kalinga"/>
-        <a:font script="Mlym" typeface="Kartika"/>
-        <a:font script="Laoo" typeface="DokChampa"/>
-        <a:font script="Sinh" typeface="Iskoola Pota"/>
-        <a:font script="Mong" typeface="Mongolian Baiti"/>
-        <a:font script="Viet" typeface="Times New Roman"/>
-        <a:font script="Uigh" typeface="Microsoft Uighur"/>
-        <a:font script="Geor" typeface="Sylfaen"/>
-        <a:font script="Armn" typeface="Arial"/>
-        <a:font script="Bugi" typeface="Leelawadee UI"/>
-        <a:font script="Bopo" typeface="Microsoft JhengHei"/>
-        <a:font script="Java" typeface="Javanese Text"/>
-        <a:font script="Lisu" typeface="Segoe UI"/>
-        <a:font script="Mymr" typeface="Myanmar Text"/>
-        <a:font script="Nkoo" typeface="Ebrima"/>
-        <a:font script="Olck" typeface="Nirmala UI"/>
-        <a:font script="Osma" typeface="Ebrima"/>
-        <a:font script="Phag" typeface="Phagspa"/>
-        <a:font script="Syrn" typeface="Estrangelo Edessa"/>
-        <a:font script="Syrj" typeface="Estrangelo Edessa"/>
-        <a:font script="Syre" typeface="Estrangelo Edessa"/>
-        <a:font script="Sora" typeface="Nirmala UI"/>
-        <a:font script="Tale" typeface="Microsoft Tai Le"/>
-        <a:font script="Talu" typeface="Microsoft New Tai Lue"/>
-        <a:font script="Tfng" typeface="Ebrima"/>
-      </a:majorFont>
-      <a:minorFont>
-        <a:latin typeface="Aptos" panose="02110004020202020204"/>
-        <a:ea typeface=""/>
-        <a:cs typeface=""/>
-        <a:font script="Jpan" typeface="游ゴシック"/>
-        <a:font script="Hang" typeface="맑은 고딕"/>
-        <a:font script="Hans" typeface="等线"/>
-        <a:font script="Hant" typeface="新細明體"/>
-        <a:font script="Arab" typeface="Arial"/>
-        <a:font script="Hebr" typeface="Arial"/>
-        <a:font script="Thai" typeface="Cordia New"/>
-        <a:font script="Ethi" typeface="Nyala"/>
-        <a:font script="Beng" typeface="Vrinda"/>
-        <a:font script="Gujr" typeface="Shruti"/>
-        <a:font script="Khmr" typeface="DaunPenh"/>
-        <a:font script="Knda" typeface="Tunga"/>
-        <a:font script="Guru" typeface="Raavi"/>
-        <a:font script="Cans" typeface="Euphemia"/>
-        <a:font script="Cher" typeface="Plantagenet Cherokee"/>
-        <a:font script="Yiii" typeface="Microsoft Yi Baiti"/>
-        <a:font script="Tibt" typeface="Microsoft Himalaya"/>
-        <a:font script="Thaa" typeface="MV Boli"/>
-        <a:font script="Deva" typeface="Mangal"/>
-        <a:font script="Telu" typeface="Gautami"/>
-        <a:font script="Taml" typeface="Latha"/>
-        <a:font script="Syrc" typeface="Estrangelo Edessa"/>
-        <a:font script="Orya" typeface="Kalinga"/>
-        <a:font script="Mlym" typeface="Kartika"/>
-        <a:font script="Laoo" typeface="DokChampa"/>
-        <a:font script="Sinh" typeface="Iskoola Pota"/>
-        <a:font script="Mong" typeface="Mongolian Baiti"/>
-        <a:font script="Viet" typeface="Arial"/>
-        <a:font script="Uigh" typeface="Microsoft Uighur"/>
-        <a:font script="Geor" typeface="Sylfaen"/>
-        <a:font script="Armn" typeface="Arial"/>
-        <a:font script="Bugi" typeface="Leelawadee UI"/>
-        <a:font script="Bopo" typeface="Microsoft JhengHei"/>
-        <a:font script="Java" typeface="Javanese Text"/>
-        <a:font script="Lisu" typeface="Segoe UI"/>
-        <a:font script="Mymr" typeface="Myanmar Text"/>
-        <a:font script="Nkoo" typeface="Ebrima"/>
-        <a:font script="Olck" typeface="Nirmala UI"/>
-        <a:font script="Osma" typeface="Ebrima"/>
-        <a:font script="Phag" typeface="Phagspa"/>
-        <a:font script="Syrn" typeface="Estrangelo Edessa"/>
-        <a:font script="Syrj" typeface="Estrangelo Edessa"/>
-        <a:font script="Syre" typeface="Estrangelo Edessa"/>
-        <a:font script="Sora" typeface="Nirmala UI"/>
-        <a:font script="Tale" typeface="Microsoft Tai Le"/>
-        <a:font script="Talu" typeface="Microsoft New Tai Lue"/>
-        <a:font script="Tfng" typeface="Ebrima"/>
-      </a:minorFont>
-    </a:fontScheme>
-    <a:fmtScheme name="Office">
-      <a:fillStyleLst>
-        <a:solidFill>
-          <a:schemeClr val="phClr"/>
-        </a:solidFill>
-        <a:gradFill rotWithShape="1">
-          <a:gsLst>
-            <a:gs pos="0">
-              <a:schemeClr val="phClr">
-                <a:lumMod val="110000"/>
-                <a:satMod val="105000"/>
-                <a:tint val="67000"/>
-              </a:schemeClr>
-            </a:gs>
-            <a:gs pos="50000">
-              <a:schemeClr val="phClr">
-                <a:lumMod val="105000"/>
-                <a:satMod val="103000"/>
-                <a:tint val="73000"/>
-              </a:schemeClr>
-            </a:gs>
-            <a:gs pos="100000">
-              <a:schemeClr val="phClr">
-                <a:lumMod val="105000"/>
-                <a:satMod val="109000"/>
-                <a:tint val="81000"/>
-              </a:schemeClr>
-            </a:gs>
-          </a:gsLst>
-          <a:lin ang="5400000" scaled="0"/>
-        </a:gradFill>
-        <a:gradFill rotWithShape="1">
-          <a:gsLst>
-            <a:gs pos="0">
-              <a:schemeClr val="phClr">
-                <a:satMod val="103000"/>
-                <a:lumMod val="102000"/>
-                <a:tint val="94000"/>
-              </a:schemeClr>
-            </a:gs>
-            <a:gs pos="50000">
-              <a:schemeClr val="phClr">
-                <a:satMod val="110000"/>
-                <a:lumMod val="100000"/>
-                <a:shade val="100000"/>
-              </a:schemeClr>
-            </a:gs>
-            <a:gs pos="100000">
-              <a:schemeClr val="phClr">
-                <a:lumMod val="99000"/>
-                <a:satMod val="120000"/>
-                <a:shade val="78000"/>
-              </a:schemeClr>
-            </a:gs>
-          </a:gsLst>
-          <a:lin ang="5400000" scaled="0"/>
-        </a:gradFill>
-      </a:fillStyleLst>
-      <a:lnStyleLst>
-        <a:ln w="12700" cap="flat" cmpd="sng" algn="ctr">
-          <a:solidFill>
-            <a:schemeClr val="phClr"/>
-          </a:solidFill>
-          <a:prstDash val="solid"/>
-          <a:miter lim="800000"/>
-        </a:ln>
-        <a:ln w="19050" cap="flat" cmpd="sng" algn="ctr">
-          <a:solidFill>
-            <a:schemeClr val="phClr"/>
-          </a:solidFill>
-          <a:prstDash val="solid"/>
-          <a:miter lim="800000"/>
-        </a:ln>
-        <a:ln w="25400" cap="flat" cmpd="sng" algn="ctr">
-          <a:solidFill>
-            <a:schemeClr val="phClr"/>
-          </a:solidFill>
-          <a:prstDash val="solid"/>
-          <a:miter lim="800000"/>
-        </a:ln>
-      </a:lnStyleLst>
-      <a:effectStyleLst>
-        <a:effectStyle>
-          <a:effectLst/>
-        </a:effectStyle>
-        <a:effectStyle>
-          <a:effectLst/>
-        </a:effectStyle>
-        <a:effectStyle>
-          <a:effectLst>
-            <a:outerShdw blurRad="57150" dist="19050" dir="5400000" algn="ctr" rotWithShape="0">
-              <a:srgbClr val="000000">
-                <a:alpha val="63000"/>
-              </a:srgbClr>
-            </a:outerShdw>
-          </a:effectLst>
-        </a:effectStyle>
-      </a:effectStyleLst>
-      <a:bgFillStyleLst>
-        <a:solidFill>
-          <a:schemeClr val="phClr"/>
-        </a:solidFill>
-        <a:solidFill>
-          <a:schemeClr val="phClr">
-            <a:tint val="95000"/>
-            <a:satMod val="170000"/>
-          </a:schemeClr>
-        </a:solidFill>
-        <a:gradFill rotWithShape="1">
-          <a:gsLst>
-            <a:gs pos="0">
-              <a:schemeClr val="phClr">
-                <a:tint val="93000"/>
-                <a:satMod val="150000"/>
-                <a:shade val="98000"/>
-                <a:lumMod val="102000"/>
-              </a:schemeClr>
-            </a:gs>
-            <a:gs pos="50000">
-              <a:schemeClr val="phClr">
-                <a:tint val="98000"/>
-                <a:satMod val="130000"/>
-                <a:shade val="90000"/>
-                <a:lumMod val="103000"/>
-              </a:schemeClr>
-            </a:gs>
-            <a:gs pos="100000">
-              <a:schemeClr val="phClr">
-                <a:shade val="63000"/>
-                <a:satMod val="120000"/>
-              </a:schemeClr>
-            </a:gs>
-          </a:gsLst>
-          <a:lin ang="5400000" scaled="0"/>
-        </a:gradFill>
-      </a:bgFillStyleLst>
-    </a:fmtScheme>
-  </a:themeElements>
-  <a:objectDefaults>
-    <a:lnDef>
-      <a:spPr/>
-      <a:bodyPr/>
-      <a:lstStyle/>
-      <a:style>
-        <a:lnRef idx="2">
-          <a:schemeClr val="accent1"/>
-        </a:lnRef>
-        <a:fillRef idx="0">
-          <a:schemeClr val="accent1"/>
-        </a:fillRef>
-        <a:effectRef idx="1">
-          <a:schemeClr val="accent1"/>
-        </a:effectRef>
-        <a:fontRef idx="minor">
-          <a:schemeClr val="tx1"/>
-        </a:fontRef>
-      </a:style>
-    </a:lnDef>
-  </a:objectDefaults>
-  <a:extraClrSchemeLst/>
-  <a:extLst>
-    <a:ext uri="{05A4C25C-085E-4340-85A3-A5531E510DB2}">
-      <thm15:themeFamily xmlns:thm15="http://schemas.microsoft.com/office/thememl/2012/main" name="Office Theme" id="{2E142A2C-CD16-42D6-873A-C26D2A0506FA}" vid="{1BDDFF52-6CD6-40A5-AB3C-68EB2F1E4D0A}"/>
-    </a:ext>
-  </a:extLst>
-</a:theme>
 </file>
--- a/deck/ForesightAI.pptx
+++ b/deck/ForesightAI.pptx
@@ -6302,7 +6302,7 @@
                 <a:ea typeface="Calibri" pitchFamily="34" charset="-122"/>
                 <a:cs typeface="Calibri" pitchFamily="34" charset="-120"/>
               </a:rPr>
-              <a:t>The worst-to-best risk ranking of the six tracked names is identical across all three blends - the signals drive the read, not the exact weighting.</a:t>
+              <a:t>The worst-to-best risk ranking of the six-company benchmark roster is identical across all three blends - the signals drive the read, not the exact weighting.</a:t>
             </a:r>
             <a:endParaRPr lang="en-US" sz="1150" dirty="0"/>
           </a:p>
